--- a/static/ppts/G6_Sci_T1_Full_Revision.pptx
+++ b/static/ppts/G6_Sci_T1_Full_Revision.pptx
@@ -1302,7 +1302,7 @@
     <p:bg>
       <p:bgPr>
         <a:solidFill>
-          <a:srgbClr val="1A7A6F"/>
+          <a:srgbClr val="1B2A4A"/>
         </a:solidFill>
       </p:bgPr>
     </p:bg>
@@ -1322,14 +1322,34 @@
       </p:grpSpPr>
       <p:sp>
         <p:nvSpPr>
-          <p:cNvPr id="2" name="Text 0"/>
+          <p:cNvPr id="2" name="Shape 0"/>
           <p:cNvSpPr/>
           <p:nvPr/>
         </p:nvSpPr>
         <p:spPr>
           <a:xfrm>
-            <a:off x="731520" y="1371600"/>
-            <a:ext cx="7680960" cy="1371600"/>
+            <a:off x="0" y="0"/>
+            <a:ext cx="109728" cy="5143500"/>
+          </a:xfrm>
+          <a:prstGeom prst="rect">
+            <a:avLst/>
+          </a:prstGeom>
+          <a:solidFill>
+            <a:srgbClr val="2A9D8F"/>
+          </a:solidFill>
+          <a:ln/>
+        </p:spPr>
+      </p:sp>
+      <p:sp>
+        <p:nvSpPr>
+          <p:cNvPr id="3" name="Text 1"/>
+          <p:cNvSpPr/>
+          <p:nvPr/>
+        </p:nvSpPr>
+        <p:spPr>
+          <a:xfrm>
+            <a:off x="731520" y="1280160"/>
+            <a:ext cx="7772400" cy="1371600"/>
           </a:xfrm>
           <a:prstGeom prst="rect">
             <a:avLst/>
@@ -1345,30 +1365,69 @@
               <a:buNone/>
             </a:pPr>
             <a:r>
-              <a:rPr lang="en-US" sz="4000" b="1" dirty="0">
+              <a:rPr lang="en-US" sz="3600" b="1" dirty="0">
                 <a:solidFill>
                   <a:srgbClr val="FFFFFF"/>
+                </a:solidFill>
+                <a:latin typeface="Georgia" pitchFamily="34" charset="0"/>
+                <a:ea typeface="Georgia" pitchFamily="34" charset="-122"/>
+                <a:cs typeface="Georgia" pitchFamily="34" charset="-120"/>
+              </a:rPr>
+              <a:t>Scientific Skills — Full Revision</a:t>
+            </a:r>
+            <a:endParaRPr lang="en-US" sz="3600" dirty="0"/>
+          </a:p>
+        </p:txBody>
+      </p:sp>
+      <p:sp>
+        <p:nvSpPr>
+          <p:cNvPr id="4" name="Text 2"/>
+          <p:cNvSpPr/>
+          <p:nvPr/>
+        </p:nvSpPr>
+        <p:spPr>
+          <a:xfrm>
+            <a:off x="731520" y="2743200"/>
+            <a:ext cx="7772400" cy="548640"/>
+          </a:xfrm>
+          <a:prstGeom prst="rect">
+            <a:avLst/>
+          </a:prstGeom>
+          <a:noFill/>
+          <a:ln/>
+        </p:spPr>
+        <p:txBody>
+          <a:bodyPr wrap="square" rtlCol="0" anchor="ctr"/>
+          <a:lstStyle/>
+          <a:p>
+            <a:pPr indent="0" marL="0">
+              <a:buNone/>
+            </a:pPr>
+            <a:r>
+              <a:rPr lang="en-US" sz="1600" dirty="0">
+                <a:solidFill>
+                  <a:srgbClr val="9B9690"/>
                 </a:solidFill>
                 <a:latin typeface="Calibri" pitchFamily="34" charset="0"/>
                 <a:ea typeface="Calibri" pitchFamily="34" charset="-122"/>
                 <a:cs typeface="Calibri" pitchFamily="34" charset="-120"/>
               </a:rPr>
-              <a:t>Scientific Skills — Full Revision</a:t>
-            </a:r>
-            <a:endParaRPr lang="en-US" sz="4000" dirty="0"/>
-          </a:p>
-        </p:txBody>
-      </p:sp>
-      <p:sp>
-        <p:nvSpPr>
-          <p:cNvPr id="3" name="Text 1"/>
+              <a:t>G6 Science · Term 1 Review</a:t>
+            </a:r>
+            <a:endParaRPr lang="en-US" sz="1600" dirty="0"/>
+          </a:p>
+        </p:txBody>
+      </p:sp>
+      <p:sp>
+        <p:nvSpPr>
+          <p:cNvPr id="5" name="Text 3"/>
           <p:cNvSpPr/>
           <p:nvPr/>
         </p:nvSpPr>
         <p:spPr>
           <a:xfrm>
-            <a:off x="731520" y="2926080"/>
-            <a:ext cx="7680960" cy="548640"/>
+            <a:off x="731520" y="4389120"/>
+            <a:ext cx="7772400" cy="457200"/>
           </a:xfrm>
           <a:prstGeom prst="rect">
             <a:avLst/>
@@ -1384,17 +1443,17 @@
               <a:buNone/>
             </a:pPr>
             <a:r>
-              <a:rPr lang="en-US" sz="1600" i="1" dirty="0">
-                <a:solidFill>
-                  <a:srgbClr val="FFFFFF"/>
+              <a:rPr lang="en-US" sz="1000" dirty="0">
+                <a:solidFill>
+                  <a:srgbClr val="6B6660"/>
                 </a:solidFill>
                 <a:latin typeface="Calibri" pitchFamily="34" charset="0"/>
                 <a:ea typeface="Calibri" pitchFamily="34" charset="-122"/>
                 <a:cs typeface="Calibri" pitchFamily="34" charset="-120"/>
               </a:rPr>
-              <a:t>Grade 6 Science · Mr Zocchi</a:t>
-            </a:r>
-            <a:endParaRPr lang="en-US" sz="1600" dirty="0"/>
+              <a:t>Mr Zocchi · mrzocchi.com</a:t>
+            </a:r>
+            <a:endParaRPr lang="en-US" sz="1000" dirty="0"/>
           </a:p>
         </p:txBody>
       </p:sp>
@@ -1409,6 +1468,13 @@
 <file path=ppt/slides/slide2.xml><?xml version="1.0" encoding="utf-8"?>
 <p:sld xmlns:a="http://schemas.openxmlformats.org/drawingml/2006/main" xmlns:r="http://schemas.openxmlformats.org/officeDocument/2006/relationships" xmlns:p="http://schemas.openxmlformats.org/presentationml/2006/main">
   <p:cSld name="Slide 2">
+    <p:bg>
+      <p:bgPr>
+        <a:solidFill>
+          <a:srgbClr val="FFFFFF"/>
+        </a:solidFill>
+      </p:bgPr>
+    </p:bg>
     <p:spTree>
       <p:nvGrpSpPr>
         <p:cNvPr id="1" name=""/>
@@ -1432,13 +1498,13 @@
         <p:spPr>
           <a:xfrm>
             <a:off x="0" y="0"/>
-            <a:ext cx="9144000" cy="548640"/>
-          </a:xfrm>
-          <a:prstGeom prst="rect">
-            <a:avLst/>
-          </a:prstGeom>
-          <a:solidFill>
-            <a:srgbClr val="1A7A6F"/>
+            <a:ext cx="9144000" cy="54864"/>
+          </a:xfrm>
+          <a:prstGeom prst="rect">
+            <a:avLst/>
+          </a:prstGeom>
+          <a:solidFill>
+            <a:srgbClr val="2A9D8F"/>
           </a:solidFill>
           <a:ln/>
         </p:spPr>
@@ -1451,8 +1517,8 @@
         </p:nvSpPr>
         <p:spPr>
           <a:xfrm>
-            <a:off x="457200" y="45720"/>
-            <a:ext cx="8229600" cy="457200"/>
+            <a:off x="548640" y="274320"/>
+            <a:ext cx="8046720" cy="640080"/>
           </a:xfrm>
           <a:prstGeom prst="rect">
             <a:avLst/>
@@ -1461,125 +1527,186 @@
           <a:ln/>
         </p:spPr>
         <p:txBody>
-          <a:bodyPr wrap="square" rtlCol="0" anchor="ctr"/>
+          <a:bodyPr wrap="square" lIns="0" tIns="0" rIns="0" bIns="0" rtlCol="0" anchor="ctr"/>
           <a:lstStyle/>
           <a:p>
             <a:pPr indent="0" marL="0">
               <a:buNone/>
             </a:pPr>
             <a:r>
-              <a:rPr lang="en-US" sz="1800" b="1" dirty="0">
-                <a:solidFill>
-                  <a:srgbClr val="FFFFFF"/>
+              <a:rPr lang="en-US" sz="2600" b="1" dirty="0">
+                <a:solidFill>
+                  <a:srgbClr val="1B2A4A"/>
+                </a:solidFill>
+                <a:latin typeface="Georgia" pitchFamily="34" charset="0"/>
+                <a:ea typeface="Georgia" pitchFamily="34" charset="-122"/>
+                <a:cs typeface="Georgia" pitchFamily="34" charset="-120"/>
+              </a:rPr>
+              <a:t>Lab Safety Review</a:t>
+            </a:r>
+            <a:endParaRPr lang="en-US" sz="2600" dirty="0"/>
+          </a:p>
+        </p:txBody>
+      </p:sp>
+      <p:sp>
+        <p:nvSpPr>
+          <p:cNvPr id="4" name="Text 2"/>
+          <p:cNvSpPr/>
+          <p:nvPr/>
+        </p:nvSpPr>
+        <p:spPr>
+          <a:xfrm>
+            <a:off x="548640" y="1097280"/>
+            <a:ext cx="8046720" cy="3474720"/>
+          </a:xfrm>
+          <a:prstGeom prst="rect">
+            <a:avLst/>
+          </a:prstGeom>
+          <a:noFill/>
+          <a:ln/>
+        </p:spPr>
+        <p:txBody>
+          <a:bodyPr wrap="square" rtlCol="0" anchor="t"/>
+          <a:lstStyle/>
+          <a:p>
+            <a:pPr marL="342900" indent="-342900">
+              <a:spcAft>
+                <a:spcPts val="800"/>
+              </a:spcAft>
+              <a:buSzPct val="100000"/>
+              <a:buChar char="•"/>
+            </a:pPr>
+            <a:r>
+              <a:rPr lang="en-US" sz="1500" dirty="0">
+                <a:solidFill>
+                  <a:srgbClr val="3D3A36"/>
                 </a:solidFill>
                 <a:latin typeface="Calibri" pitchFamily="34" charset="0"/>
                 <a:ea typeface="Calibri" pitchFamily="34" charset="-122"/>
                 <a:cs typeface="Calibri" pitchFamily="34" charset="-120"/>
               </a:rPr>
-              <a:t>Lab safety recap</a:t>
-            </a:r>
-            <a:endParaRPr lang="en-US" sz="1800" dirty="0"/>
-          </a:p>
-        </p:txBody>
-      </p:sp>
-      <p:sp>
-        <p:nvSpPr>
-          <p:cNvPr id="4" name="Text 2"/>
-          <p:cNvSpPr/>
-          <p:nvPr/>
-        </p:nvSpPr>
-        <p:spPr>
-          <a:xfrm>
-            <a:off x="731520" y="1097280"/>
-            <a:ext cx="7680960" cy="3200400"/>
-          </a:xfrm>
-          <a:prstGeom prst="rect">
-            <a:avLst/>
-          </a:prstGeom>
-          <a:noFill/>
-          <a:ln/>
-        </p:spPr>
-        <p:txBody>
-          <a:bodyPr wrap="square" rtlCol="0" anchor="ctr"/>
-          <a:lstStyle/>
-          <a:p>
-            <a:pPr indent="0" marL="0">
-              <a:buNone/>
-            </a:pPr>
-            <a:r>
-              <a:rPr lang="en-US" sz="1600" dirty="0">
-                <a:solidFill>
-                  <a:srgbClr val="363636"/>
+              <a:t>Always wear PPE (goggles, gloves, lab coat) when instructed</a:t>
+            </a:r>
+            <a:endParaRPr lang="en-US" sz="1500" dirty="0"/>
+          </a:p>
+          <a:p>
+            <a:pPr marL="342900" indent="-342900">
+              <a:spcAft>
+                <a:spcPts val="800"/>
+              </a:spcAft>
+              <a:buSzPct val="100000"/>
+              <a:buChar char="•"/>
+            </a:pPr>
+            <a:r>
+              <a:rPr lang="en-US" sz="1500" dirty="0">
+                <a:solidFill>
+                  <a:srgbClr val="3D3A36"/>
                 </a:solidFill>
                 <a:latin typeface="Calibri" pitchFamily="34" charset="0"/>
                 <a:ea typeface="Calibri" pitchFamily="34" charset="-122"/>
                 <a:cs typeface="Calibri" pitchFamily="34" charset="-120"/>
               </a:rPr>
-              <a:t>Content for: Lab safety recap</a:t>
-            </a:r>
-            <a:endParaRPr lang="en-US" sz="1600" dirty="0"/>
-          </a:p>
-          <a:p>
-            <a:pPr indent="0" marL="0">
-              <a:buNone/>
-            </a:pPr>
-            <a:endParaRPr lang="en-US" sz="1600" dirty="0"/>
-          </a:p>
-          <a:p>
-            <a:pPr indent="0" marL="0">
-              <a:buNone/>
-            </a:pPr>
-            <a:r>
-              <a:rPr lang="en-US" sz="1600" dirty="0">
-                <a:solidFill>
-                  <a:srgbClr val="363636"/>
+              <a:t>Know hazard symbols: flammable, corrosive, toxic, irritant</a:t>
+            </a:r>
+            <a:endParaRPr lang="en-US" sz="1500" dirty="0"/>
+          </a:p>
+          <a:p>
+            <a:pPr marL="342900" indent="-342900">
+              <a:spcAft>
+                <a:spcPts val="800"/>
+              </a:spcAft>
+              <a:buSzPct val="100000"/>
+              <a:buChar char="•"/>
+            </a:pPr>
+            <a:r>
+              <a:rPr lang="en-US" sz="1500" dirty="0">
+                <a:solidFill>
+                  <a:srgbClr val="3D3A36"/>
                 </a:solidFill>
                 <a:latin typeface="Calibri" pitchFamily="34" charset="0"/>
                 <a:ea typeface="Calibri" pitchFamily="34" charset="-122"/>
                 <a:cs typeface="Calibri" pitchFamily="34" charset="-120"/>
               </a:rPr>
-              <a:t>Key points will be covered in class.</a:t>
-            </a:r>
-            <a:endParaRPr lang="en-US" sz="1600" dirty="0"/>
-          </a:p>
-        </p:txBody>
-      </p:sp>
-      <p:sp>
-        <p:nvSpPr>
-          <p:cNvPr id="5" name="Text 3"/>
-          <p:cNvSpPr/>
-          <p:nvPr/>
-        </p:nvSpPr>
-        <p:spPr>
-          <a:xfrm>
-            <a:off x="7772400" y="4663440"/>
-            <a:ext cx="1097280" cy="365760"/>
-          </a:xfrm>
-          <a:prstGeom prst="rect">
-            <a:avLst/>
-          </a:prstGeom>
-          <a:noFill/>
-          <a:ln/>
-        </p:spPr>
-        <p:txBody>
-          <a:bodyPr wrap="square" rtlCol="0" anchor="ctr"/>
-          <a:lstStyle/>
-          <a:p>
-            <a:pPr algn="r" indent="0" marL="0">
-              <a:buNone/>
-            </a:pPr>
-            <a:r>
-              <a:rPr lang="en-US" sz="1000" dirty="0">
-                <a:solidFill>
-                  <a:srgbClr val="999999"/>
+              <a:t>Report ALL accidents immediately to your teacher</a:t>
+            </a:r>
+            <a:endParaRPr lang="en-US" sz="1500" dirty="0"/>
+          </a:p>
+          <a:p>
+            <a:pPr marL="342900" indent="-342900">
+              <a:spcAft>
+                <a:spcPts val="800"/>
+              </a:spcAft>
+              <a:buSzPct val="100000"/>
+              <a:buChar char="•"/>
+            </a:pPr>
+            <a:r>
+              <a:rPr lang="en-US" sz="1500" dirty="0">
+                <a:solidFill>
+                  <a:srgbClr val="3D3A36"/>
                 </a:solidFill>
                 <a:latin typeface="Calibri" pitchFamily="34" charset="0"/>
                 <a:ea typeface="Calibri" pitchFamily="34" charset="-122"/>
                 <a:cs typeface="Calibri" pitchFamily="34" charset="-120"/>
               </a:rPr>
-              <a:t>2 / 6</a:t>
-            </a:r>
-            <a:endParaRPr lang="en-US" sz="1000" dirty="0"/>
+              <a:t>Never eat, drink, or run in the lab</a:t>
+            </a:r>
+            <a:endParaRPr lang="en-US" sz="1500" dirty="0"/>
+          </a:p>
+        </p:txBody>
+      </p:sp>
+      <p:sp>
+        <p:nvSpPr>
+          <p:cNvPr id="5" name="Shape 3"/>
+          <p:cNvSpPr/>
+          <p:nvPr/>
+        </p:nvSpPr>
+        <p:spPr>
+          <a:xfrm>
+            <a:off x="548640" y="4754880"/>
+            <a:ext cx="8046720" cy="9144"/>
+          </a:xfrm>
+          <a:prstGeom prst="rect">
+            <a:avLst/>
+          </a:prstGeom>
+          <a:solidFill>
+            <a:srgbClr val="F3F1EE"/>
+          </a:solidFill>
+          <a:ln/>
+        </p:spPr>
+      </p:sp>
+      <p:sp>
+        <p:nvSpPr>
+          <p:cNvPr id="6" name="Text 4"/>
+          <p:cNvSpPr/>
+          <p:nvPr/>
+        </p:nvSpPr>
+        <p:spPr>
+          <a:xfrm>
+            <a:off x="548640" y="4800600"/>
+            <a:ext cx="3657600" cy="274320"/>
+          </a:xfrm>
+          <a:prstGeom prst="rect">
+            <a:avLst/>
+          </a:prstGeom>
+          <a:noFill/>
+          <a:ln/>
+        </p:spPr>
+        <p:txBody>
+          <a:bodyPr wrap="square" rtlCol="0" anchor="ctr"/>
+          <a:lstStyle/>
+          <a:p>
+            <a:pPr indent="0" marL="0">
+              <a:buNone/>
+            </a:pPr>
+            <a:r>
+              <a:rPr lang="en-US" sz="800" dirty="0">
+                <a:solidFill>
+                  <a:srgbClr val="9B9690"/>
+                </a:solidFill>
+              </a:rPr>
+              <a:t>mrzocchi.com</a:t>
+            </a:r>
+            <a:endParaRPr lang="en-US" sz="800" dirty="0"/>
           </a:p>
         </p:txBody>
       </p:sp>
@@ -1594,6 +1721,13 @@
 <file path=ppt/slides/slide3.xml><?xml version="1.0" encoding="utf-8"?>
 <p:sld xmlns:a="http://schemas.openxmlformats.org/drawingml/2006/main" xmlns:r="http://schemas.openxmlformats.org/officeDocument/2006/relationships" xmlns:p="http://schemas.openxmlformats.org/presentationml/2006/main">
   <p:cSld name="Slide 3">
+    <p:bg>
+      <p:bgPr>
+        <a:solidFill>
+          <a:srgbClr val="FFFFFF"/>
+        </a:solidFill>
+      </p:bgPr>
+    </p:bg>
     <p:spTree>
       <p:nvGrpSpPr>
         <p:cNvPr id="1" name=""/>
@@ -1617,13 +1751,13 @@
         <p:spPr>
           <a:xfrm>
             <a:off x="0" y="0"/>
-            <a:ext cx="9144000" cy="548640"/>
-          </a:xfrm>
-          <a:prstGeom prst="rect">
-            <a:avLst/>
-          </a:prstGeom>
-          <a:solidFill>
-            <a:srgbClr val="1A7A6F"/>
+            <a:ext cx="9144000" cy="54864"/>
+          </a:xfrm>
+          <a:prstGeom prst="rect">
+            <a:avLst/>
+          </a:prstGeom>
+          <a:solidFill>
+            <a:srgbClr val="2A9D8F"/>
           </a:solidFill>
           <a:ln/>
         </p:spPr>
@@ -1636,8 +1770,8 @@
         </p:nvSpPr>
         <p:spPr>
           <a:xfrm>
-            <a:off x="457200" y="45720"/>
-            <a:ext cx="8229600" cy="457200"/>
+            <a:off x="548640" y="274320"/>
+            <a:ext cx="8046720" cy="640080"/>
           </a:xfrm>
           <a:prstGeom prst="rect">
             <a:avLst/>
@@ -1646,125 +1780,186 @@
           <a:ln/>
         </p:spPr>
         <p:txBody>
-          <a:bodyPr wrap="square" rtlCol="0" anchor="ctr"/>
+          <a:bodyPr wrap="square" lIns="0" tIns="0" rIns="0" bIns="0" rtlCol="0" anchor="ctr"/>
           <a:lstStyle/>
           <a:p>
             <a:pPr indent="0" marL="0">
               <a:buNone/>
             </a:pPr>
             <a:r>
-              <a:rPr lang="en-US" sz="1800" b="1" dirty="0">
-                <a:solidFill>
-                  <a:srgbClr val="FFFFFF"/>
+              <a:rPr lang="en-US" sz="2600" b="1" dirty="0">
+                <a:solidFill>
+                  <a:srgbClr val="1B2A4A"/>
+                </a:solidFill>
+                <a:latin typeface="Georgia" pitchFamily="34" charset="0"/>
+                <a:ea typeface="Georgia" pitchFamily="34" charset="-122"/>
+                <a:cs typeface="Georgia" pitchFamily="34" charset="-120"/>
+              </a:rPr>
+              <a:t>The Scientific Method</a:t>
+            </a:r>
+            <a:endParaRPr lang="en-US" sz="2600" dirty="0"/>
+          </a:p>
+        </p:txBody>
+      </p:sp>
+      <p:sp>
+        <p:nvSpPr>
+          <p:cNvPr id="4" name="Text 2"/>
+          <p:cNvSpPr/>
+          <p:nvPr/>
+        </p:nvSpPr>
+        <p:spPr>
+          <a:xfrm>
+            <a:off x="548640" y="1097280"/>
+            <a:ext cx="8046720" cy="3474720"/>
+          </a:xfrm>
+          <a:prstGeom prst="rect">
+            <a:avLst/>
+          </a:prstGeom>
+          <a:noFill/>
+          <a:ln/>
+        </p:spPr>
+        <p:txBody>
+          <a:bodyPr wrap="square" rtlCol="0" anchor="t"/>
+          <a:lstStyle/>
+          <a:p>
+            <a:pPr marL="342900" indent="-342900">
+              <a:spcAft>
+                <a:spcPts val="800"/>
+              </a:spcAft>
+              <a:buSzPct val="100000"/>
+              <a:buChar char="•"/>
+            </a:pPr>
+            <a:r>
+              <a:rPr lang="en-US" sz="1500" dirty="0">
+                <a:solidFill>
+                  <a:srgbClr val="3D3A36"/>
                 </a:solidFill>
                 <a:latin typeface="Calibri" pitchFamily="34" charset="0"/>
                 <a:ea typeface="Calibri" pitchFamily="34" charset="-122"/>
                 <a:cs typeface="Calibri" pitchFamily="34" charset="-120"/>
               </a:rPr>
-              <a:t>Scientific method recap</a:t>
-            </a:r>
-            <a:endParaRPr lang="en-US" sz="1800" dirty="0"/>
-          </a:p>
-        </p:txBody>
-      </p:sp>
-      <p:sp>
-        <p:nvSpPr>
-          <p:cNvPr id="4" name="Text 2"/>
-          <p:cNvSpPr/>
-          <p:nvPr/>
-        </p:nvSpPr>
-        <p:spPr>
-          <a:xfrm>
-            <a:off x="731520" y="1097280"/>
-            <a:ext cx="7680960" cy="3200400"/>
-          </a:xfrm>
-          <a:prstGeom prst="rect">
-            <a:avLst/>
-          </a:prstGeom>
-          <a:noFill/>
-          <a:ln/>
-        </p:spPr>
-        <p:txBody>
-          <a:bodyPr wrap="square" rtlCol="0" anchor="ctr"/>
-          <a:lstStyle/>
-          <a:p>
-            <a:pPr indent="0" marL="0">
-              <a:buNone/>
-            </a:pPr>
-            <a:r>
-              <a:rPr lang="en-US" sz="1600" dirty="0">
-                <a:solidFill>
-                  <a:srgbClr val="363636"/>
+              <a:t>Question → Research → Hypothesis → Experiment → Analyse → Conclude</a:t>
+            </a:r>
+            <a:endParaRPr lang="en-US" sz="1500" dirty="0"/>
+          </a:p>
+          <a:p>
+            <a:pPr marL="342900" indent="-342900">
+              <a:spcAft>
+                <a:spcPts val="800"/>
+              </a:spcAft>
+              <a:buSzPct val="100000"/>
+              <a:buChar char="•"/>
+            </a:pPr>
+            <a:r>
+              <a:rPr lang="en-US" sz="1500" dirty="0">
+                <a:solidFill>
+                  <a:srgbClr val="3D3A36"/>
                 </a:solidFill>
                 <a:latin typeface="Calibri" pitchFamily="34" charset="0"/>
                 <a:ea typeface="Calibri" pitchFamily="34" charset="-122"/>
                 <a:cs typeface="Calibri" pitchFamily="34" charset="-120"/>
               </a:rPr>
-              <a:t>Content for: Scientific method recap</a:t>
-            </a:r>
-            <a:endParaRPr lang="en-US" sz="1600" dirty="0"/>
-          </a:p>
-          <a:p>
-            <a:pPr indent="0" marL="0">
-              <a:buNone/>
-            </a:pPr>
-            <a:endParaRPr lang="en-US" sz="1600" dirty="0"/>
-          </a:p>
-          <a:p>
-            <a:pPr indent="0" marL="0">
-              <a:buNone/>
-            </a:pPr>
-            <a:r>
-              <a:rPr lang="en-US" sz="1600" dirty="0">
-                <a:solidFill>
-                  <a:srgbClr val="363636"/>
+              <a:t>Hypothesis format: If... then... because...</a:t>
+            </a:r>
+            <a:endParaRPr lang="en-US" sz="1500" dirty="0"/>
+          </a:p>
+          <a:p>
+            <a:pPr marL="342900" indent="-342900">
+              <a:spcAft>
+                <a:spcPts val="800"/>
+              </a:spcAft>
+              <a:buSzPct val="100000"/>
+              <a:buChar char="•"/>
+            </a:pPr>
+            <a:r>
+              <a:rPr lang="en-US" sz="1500" dirty="0">
+                <a:solidFill>
+                  <a:srgbClr val="3D3A36"/>
                 </a:solidFill>
                 <a:latin typeface="Calibri" pitchFamily="34" charset="0"/>
                 <a:ea typeface="Calibri" pitchFamily="34" charset="-122"/>
                 <a:cs typeface="Calibri" pitchFamily="34" charset="-120"/>
               </a:rPr>
-              <a:t>Key points will be covered in class.</a:t>
-            </a:r>
-            <a:endParaRPr lang="en-US" sz="1600" dirty="0"/>
-          </a:p>
-        </p:txBody>
-      </p:sp>
-      <p:sp>
-        <p:nvSpPr>
-          <p:cNvPr id="5" name="Text 3"/>
-          <p:cNvSpPr/>
-          <p:nvPr/>
-        </p:nvSpPr>
-        <p:spPr>
-          <a:xfrm>
-            <a:off x="7772400" y="4663440"/>
-            <a:ext cx="1097280" cy="365760"/>
-          </a:xfrm>
-          <a:prstGeom prst="rect">
-            <a:avLst/>
-          </a:prstGeom>
-          <a:noFill/>
-          <a:ln/>
-        </p:spPr>
-        <p:txBody>
-          <a:bodyPr wrap="square" rtlCol="0" anchor="ctr"/>
-          <a:lstStyle/>
-          <a:p>
-            <a:pPr algn="r" indent="0" marL="0">
-              <a:buNone/>
-            </a:pPr>
-            <a:r>
-              <a:rPr lang="en-US" sz="1000" dirty="0">
-                <a:solidFill>
-                  <a:srgbClr val="999999"/>
+              <a:t>A fair test changes only ONE variable (the IV)</a:t>
+            </a:r>
+            <a:endParaRPr lang="en-US" sz="1500" dirty="0"/>
+          </a:p>
+          <a:p>
+            <a:pPr marL="342900" indent="-342900">
+              <a:spcAft>
+                <a:spcPts val="800"/>
+              </a:spcAft>
+              <a:buSzPct val="100000"/>
+              <a:buChar char="•"/>
+            </a:pPr>
+            <a:r>
+              <a:rPr lang="en-US" sz="1500" dirty="0">
+                <a:solidFill>
+                  <a:srgbClr val="3D3A36"/>
                 </a:solidFill>
                 <a:latin typeface="Calibri" pitchFamily="34" charset="0"/>
                 <a:ea typeface="Calibri" pitchFamily="34" charset="-122"/>
                 <a:cs typeface="Calibri" pitchFamily="34" charset="-120"/>
               </a:rPr>
-              <a:t>3 / 6</a:t>
-            </a:r>
-            <a:endParaRPr lang="en-US" sz="1000" dirty="0"/>
+              <a:t>Conclusions must be based on evidence from data</a:t>
+            </a:r>
+            <a:endParaRPr lang="en-US" sz="1500" dirty="0"/>
+          </a:p>
+        </p:txBody>
+      </p:sp>
+      <p:sp>
+        <p:nvSpPr>
+          <p:cNvPr id="5" name="Shape 3"/>
+          <p:cNvSpPr/>
+          <p:nvPr/>
+        </p:nvSpPr>
+        <p:spPr>
+          <a:xfrm>
+            <a:off x="548640" y="4754880"/>
+            <a:ext cx="8046720" cy="9144"/>
+          </a:xfrm>
+          <a:prstGeom prst="rect">
+            <a:avLst/>
+          </a:prstGeom>
+          <a:solidFill>
+            <a:srgbClr val="F3F1EE"/>
+          </a:solidFill>
+          <a:ln/>
+        </p:spPr>
+      </p:sp>
+      <p:sp>
+        <p:nvSpPr>
+          <p:cNvPr id="6" name="Text 4"/>
+          <p:cNvSpPr/>
+          <p:nvPr/>
+        </p:nvSpPr>
+        <p:spPr>
+          <a:xfrm>
+            <a:off x="548640" y="4800600"/>
+            <a:ext cx="3657600" cy="274320"/>
+          </a:xfrm>
+          <a:prstGeom prst="rect">
+            <a:avLst/>
+          </a:prstGeom>
+          <a:noFill/>
+          <a:ln/>
+        </p:spPr>
+        <p:txBody>
+          <a:bodyPr wrap="square" rtlCol="0" anchor="ctr"/>
+          <a:lstStyle/>
+          <a:p>
+            <a:pPr indent="0" marL="0">
+              <a:buNone/>
+            </a:pPr>
+            <a:r>
+              <a:rPr lang="en-US" sz="800" dirty="0">
+                <a:solidFill>
+                  <a:srgbClr val="9B9690"/>
+                </a:solidFill>
+              </a:rPr>
+              <a:t>mrzocchi.com</a:t>
+            </a:r>
+            <a:endParaRPr lang="en-US" sz="800" dirty="0"/>
           </a:p>
         </p:txBody>
       </p:sp>
@@ -1779,6 +1974,13 @@
 <file path=ppt/slides/slide4.xml><?xml version="1.0" encoding="utf-8"?>
 <p:sld xmlns:a="http://schemas.openxmlformats.org/drawingml/2006/main" xmlns:r="http://schemas.openxmlformats.org/officeDocument/2006/relationships" xmlns:p="http://schemas.openxmlformats.org/presentationml/2006/main">
   <p:cSld name="Slide 4">
+    <p:bg>
+      <p:bgPr>
+        <a:solidFill>
+          <a:srgbClr val="FFFFFF"/>
+        </a:solidFill>
+      </p:bgPr>
+    </p:bg>
     <p:spTree>
       <p:nvGrpSpPr>
         <p:cNvPr id="1" name=""/>
@@ -1802,13 +2004,13 @@
         <p:spPr>
           <a:xfrm>
             <a:off x="0" y="0"/>
-            <a:ext cx="9144000" cy="548640"/>
-          </a:xfrm>
-          <a:prstGeom prst="rect">
-            <a:avLst/>
-          </a:prstGeom>
-          <a:solidFill>
-            <a:srgbClr val="1A7A6F"/>
+            <a:ext cx="9144000" cy="54864"/>
+          </a:xfrm>
+          <a:prstGeom prst="rect">
+            <a:avLst/>
+          </a:prstGeom>
+          <a:solidFill>
+            <a:srgbClr val="2A9D8F"/>
           </a:solidFill>
           <a:ln/>
         </p:spPr>
@@ -1821,8 +2023,8 @@
         </p:nvSpPr>
         <p:spPr>
           <a:xfrm>
-            <a:off x="457200" y="45720"/>
-            <a:ext cx="8229600" cy="457200"/>
+            <a:off x="548640" y="274320"/>
+            <a:ext cx="8046720" cy="640080"/>
           </a:xfrm>
           <a:prstGeom prst="rect">
             <a:avLst/>
@@ -1831,125 +2033,186 @@
           <a:ln/>
         </p:spPr>
         <p:txBody>
-          <a:bodyPr wrap="square" rtlCol="0" anchor="ctr"/>
+          <a:bodyPr wrap="square" lIns="0" tIns="0" rIns="0" bIns="0" rtlCol="0" anchor="ctr"/>
           <a:lstStyle/>
           <a:p>
             <a:pPr indent="0" marL="0">
               <a:buNone/>
             </a:pPr>
             <a:r>
-              <a:rPr lang="en-US" sz="1800" b="1" dirty="0">
-                <a:solidFill>
-                  <a:srgbClr val="FFFFFF"/>
+              <a:rPr lang="en-US" sz="2600" b="1" dirty="0">
+                <a:solidFill>
+                  <a:srgbClr val="1B2A4A"/>
+                </a:solidFill>
+                <a:latin typeface="Georgia" pitchFamily="34" charset="0"/>
+                <a:ea typeface="Georgia" pitchFamily="34" charset="-122"/>
+                <a:cs typeface="Georgia" pitchFamily="34" charset="-120"/>
+              </a:rPr>
+              <a:t>Variables</a:t>
+            </a:r>
+            <a:endParaRPr lang="en-US" sz="2600" dirty="0"/>
+          </a:p>
+        </p:txBody>
+      </p:sp>
+      <p:sp>
+        <p:nvSpPr>
+          <p:cNvPr id="4" name="Text 2"/>
+          <p:cNvSpPr/>
+          <p:nvPr/>
+        </p:nvSpPr>
+        <p:spPr>
+          <a:xfrm>
+            <a:off x="548640" y="1097280"/>
+            <a:ext cx="8046720" cy="3474720"/>
+          </a:xfrm>
+          <a:prstGeom prst="rect">
+            <a:avLst/>
+          </a:prstGeom>
+          <a:noFill/>
+          <a:ln/>
+        </p:spPr>
+        <p:txBody>
+          <a:bodyPr wrap="square" rtlCol="0" anchor="t"/>
+          <a:lstStyle/>
+          <a:p>
+            <a:pPr marL="342900" indent="-342900">
+              <a:spcAft>
+                <a:spcPts val="800"/>
+              </a:spcAft>
+              <a:buSzPct val="100000"/>
+              <a:buChar char="•"/>
+            </a:pPr>
+            <a:r>
+              <a:rPr lang="en-US" sz="1500" dirty="0">
+                <a:solidFill>
+                  <a:srgbClr val="3D3A36"/>
                 </a:solidFill>
                 <a:latin typeface="Calibri" pitchFamily="34" charset="0"/>
                 <a:ea typeface="Calibri" pitchFamily="34" charset="-122"/>
                 <a:cs typeface="Calibri" pitchFamily="34" charset="-120"/>
               </a:rPr>
-              <a:t>Variables recap</a:t>
-            </a:r>
-            <a:endParaRPr lang="en-US" sz="1800" dirty="0"/>
-          </a:p>
-        </p:txBody>
-      </p:sp>
-      <p:sp>
-        <p:nvSpPr>
-          <p:cNvPr id="4" name="Text 2"/>
-          <p:cNvSpPr/>
-          <p:nvPr/>
-        </p:nvSpPr>
-        <p:spPr>
-          <a:xfrm>
-            <a:off x="731520" y="1097280"/>
-            <a:ext cx="7680960" cy="3200400"/>
-          </a:xfrm>
-          <a:prstGeom prst="rect">
-            <a:avLst/>
-          </a:prstGeom>
-          <a:noFill/>
-          <a:ln/>
-        </p:spPr>
-        <p:txBody>
-          <a:bodyPr wrap="square" rtlCol="0" anchor="ctr"/>
-          <a:lstStyle/>
-          <a:p>
-            <a:pPr indent="0" marL="0">
-              <a:buNone/>
-            </a:pPr>
-            <a:r>
-              <a:rPr lang="en-US" sz="1600" dirty="0">
-                <a:solidFill>
-                  <a:srgbClr val="363636"/>
+              <a:t>Independent Variable (IV): what you CHANGE</a:t>
+            </a:r>
+            <a:endParaRPr lang="en-US" sz="1500" dirty="0"/>
+          </a:p>
+          <a:p>
+            <a:pPr marL="342900" indent="-342900">
+              <a:spcAft>
+                <a:spcPts val="800"/>
+              </a:spcAft>
+              <a:buSzPct val="100000"/>
+              <a:buChar char="•"/>
+            </a:pPr>
+            <a:r>
+              <a:rPr lang="en-US" sz="1500" dirty="0">
+                <a:solidFill>
+                  <a:srgbClr val="3D3A36"/>
                 </a:solidFill>
                 <a:latin typeface="Calibri" pitchFamily="34" charset="0"/>
                 <a:ea typeface="Calibri" pitchFamily="34" charset="-122"/>
                 <a:cs typeface="Calibri" pitchFamily="34" charset="-120"/>
               </a:rPr>
-              <a:t>Content for: Variables recap</a:t>
-            </a:r>
-            <a:endParaRPr lang="en-US" sz="1600" dirty="0"/>
-          </a:p>
-          <a:p>
-            <a:pPr indent="0" marL="0">
-              <a:buNone/>
-            </a:pPr>
-            <a:endParaRPr lang="en-US" sz="1600" dirty="0"/>
-          </a:p>
-          <a:p>
-            <a:pPr indent="0" marL="0">
-              <a:buNone/>
-            </a:pPr>
-            <a:r>
-              <a:rPr lang="en-US" sz="1600" dirty="0">
-                <a:solidFill>
-                  <a:srgbClr val="363636"/>
+              <a:t>Dependent Variable (DV): what you MEASURE</a:t>
+            </a:r>
+            <a:endParaRPr lang="en-US" sz="1500" dirty="0"/>
+          </a:p>
+          <a:p>
+            <a:pPr marL="342900" indent="-342900">
+              <a:spcAft>
+                <a:spcPts val="800"/>
+              </a:spcAft>
+              <a:buSzPct val="100000"/>
+              <a:buChar char="•"/>
+            </a:pPr>
+            <a:r>
+              <a:rPr lang="en-US" sz="1500" dirty="0">
+                <a:solidFill>
+                  <a:srgbClr val="3D3A36"/>
                 </a:solidFill>
                 <a:latin typeface="Calibri" pitchFamily="34" charset="0"/>
                 <a:ea typeface="Calibri" pitchFamily="34" charset="-122"/>
                 <a:cs typeface="Calibri" pitchFamily="34" charset="-120"/>
               </a:rPr>
-              <a:t>Key points will be covered in class.</a:t>
-            </a:r>
-            <a:endParaRPr lang="en-US" sz="1600" dirty="0"/>
-          </a:p>
-        </p:txBody>
-      </p:sp>
-      <p:sp>
-        <p:nvSpPr>
-          <p:cNvPr id="5" name="Text 3"/>
-          <p:cNvSpPr/>
-          <p:nvPr/>
-        </p:nvSpPr>
-        <p:spPr>
-          <a:xfrm>
-            <a:off x="7772400" y="4663440"/>
-            <a:ext cx="1097280" cy="365760"/>
-          </a:xfrm>
-          <a:prstGeom prst="rect">
-            <a:avLst/>
-          </a:prstGeom>
-          <a:noFill/>
-          <a:ln/>
-        </p:spPr>
-        <p:txBody>
-          <a:bodyPr wrap="square" rtlCol="0" anchor="ctr"/>
-          <a:lstStyle/>
-          <a:p>
-            <a:pPr algn="r" indent="0" marL="0">
-              <a:buNone/>
-            </a:pPr>
-            <a:r>
-              <a:rPr lang="en-US" sz="1000" dirty="0">
-                <a:solidFill>
-                  <a:srgbClr val="999999"/>
+              <a:t>Control Variables (CV): what you keep the SAME</a:t>
+            </a:r>
+            <a:endParaRPr lang="en-US" sz="1500" dirty="0"/>
+          </a:p>
+          <a:p>
+            <a:pPr marL="342900" indent="-342900">
+              <a:spcAft>
+                <a:spcPts val="800"/>
+              </a:spcAft>
+              <a:buSzPct val="100000"/>
+              <a:buChar char="•"/>
+            </a:pPr>
+            <a:r>
+              <a:rPr lang="en-US" sz="1500" dirty="0">
+                <a:solidFill>
+                  <a:srgbClr val="3D3A36"/>
                 </a:solidFill>
                 <a:latin typeface="Calibri" pitchFamily="34" charset="0"/>
                 <a:ea typeface="Calibri" pitchFamily="34" charset="-122"/>
                 <a:cs typeface="Calibri" pitchFamily="34" charset="-120"/>
               </a:rPr>
-              <a:t>4 / 6</a:t>
-            </a:r>
-            <a:endParaRPr lang="en-US" sz="1000" dirty="0"/>
+              <a:t>A fair test = only one IV, everything else controlled</a:t>
+            </a:r>
+            <a:endParaRPr lang="en-US" sz="1500" dirty="0"/>
+          </a:p>
+        </p:txBody>
+      </p:sp>
+      <p:sp>
+        <p:nvSpPr>
+          <p:cNvPr id="5" name="Shape 3"/>
+          <p:cNvSpPr/>
+          <p:nvPr/>
+        </p:nvSpPr>
+        <p:spPr>
+          <a:xfrm>
+            <a:off x="548640" y="4754880"/>
+            <a:ext cx="8046720" cy="9144"/>
+          </a:xfrm>
+          <a:prstGeom prst="rect">
+            <a:avLst/>
+          </a:prstGeom>
+          <a:solidFill>
+            <a:srgbClr val="F3F1EE"/>
+          </a:solidFill>
+          <a:ln/>
+        </p:spPr>
+      </p:sp>
+      <p:sp>
+        <p:nvSpPr>
+          <p:cNvPr id="6" name="Text 4"/>
+          <p:cNvSpPr/>
+          <p:nvPr/>
+        </p:nvSpPr>
+        <p:spPr>
+          <a:xfrm>
+            <a:off x="548640" y="4800600"/>
+            <a:ext cx="3657600" cy="274320"/>
+          </a:xfrm>
+          <a:prstGeom prst="rect">
+            <a:avLst/>
+          </a:prstGeom>
+          <a:noFill/>
+          <a:ln/>
+        </p:spPr>
+        <p:txBody>
+          <a:bodyPr wrap="square" rtlCol="0" anchor="ctr"/>
+          <a:lstStyle/>
+          <a:p>
+            <a:pPr indent="0" marL="0">
+              <a:buNone/>
+            </a:pPr>
+            <a:r>
+              <a:rPr lang="en-US" sz="800" dirty="0">
+                <a:solidFill>
+                  <a:srgbClr val="9B9690"/>
+                </a:solidFill>
+              </a:rPr>
+              <a:t>mrzocchi.com</a:t>
+            </a:r>
+            <a:endParaRPr lang="en-US" sz="800" dirty="0"/>
           </a:p>
         </p:txBody>
       </p:sp>
@@ -1964,6 +2227,13 @@
 <file path=ppt/slides/slide5.xml><?xml version="1.0" encoding="utf-8"?>
 <p:sld xmlns:a="http://schemas.openxmlformats.org/drawingml/2006/main" xmlns:r="http://schemas.openxmlformats.org/officeDocument/2006/relationships" xmlns:p="http://schemas.openxmlformats.org/presentationml/2006/main">
   <p:cSld name="Slide 5">
+    <p:bg>
+      <p:bgPr>
+        <a:solidFill>
+          <a:srgbClr val="FFFFFF"/>
+        </a:solidFill>
+      </p:bgPr>
+    </p:bg>
     <p:spTree>
       <p:nvGrpSpPr>
         <p:cNvPr id="1" name=""/>
@@ -1987,13 +2257,13 @@
         <p:spPr>
           <a:xfrm>
             <a:off x="0" y="0"/>
-            <a:ext cx="9144000" cy="548640"/>
-          </a:xfrm>
-          <a:prstGeom prst="rect">
-            <a:avLst/>
-          </a:prstGeom>
-          <a:solidFill>
-            <a:srgbClr val="1A7A6F"/>
+            <a:ext cx="9144000" cy="54864"/>
+          </a:xfrm>
+          <a:prstGeom prst="rect">
+            <a:avLst/>
+          </a:prstGeom>
+          <a:solidFill>
+            <a:srgbClr val="2A9D8F"/>
           </a:solidFill>
           <a:ln/>
         </p:spPr>
@@ -2006,8 +2276,8 @@
         </p:nvSpPr>
         <p:spPr>
           <a:xfrm>
-            <a:off x="457200" y="45720"/>
-            <a:ext cx="8229600" cy="457200"/>
+            <a:off x="548640" y="274320"/>
+            <a:ext cx="8046720" cy="640080"/>
           </a:xfrm>
           <a:prstGeom prst="rect">
             <a:avLst/>
@@ -2016,125 +2286,186 @@
           <a:ln/>
         </p:spPr>
         <p:txBody>
-          <a:bodyPr wrap="square" rtlCol="0" anchor="ctr"/>
+          <a:bodyPr wrap="square" lIns="0" tIns="0" rIns="0" bIns="0" rtlCol="0" anchor="ctr"/>
           <a:lstStyle/>
           <a:p>
             <a:pPr indent="0" marL="0">
               <a:buNone/>
             </a:pPr>
             <a:r>
-              <a:rPr lang="en-US" sz="1800" b="1" dirty="0">
-                <a:solidFill>
-                  <a:srgbClr val="FFFFFF"/>
+              <a:rPr lang="en-US" sz="2600" b="1" dirty="0">
+                <a:solidFill>
+                  <a:srgbClr val="1B2A4A"/>
+                </a:solidFill>
+                <a:latin typeface="Georgia" pitchFamily="34" charset="0"/>
+                <a:ea typeface="Georgia" pitchFamily="34" charset="-122"/>
+                <a:cs typeface="Georgia" pitchFamily="34" charset="-120"/>
+              </a:rPr>
+              <a:t>Measurement &amp; Data</a:t>
+            </a:r>
+            <a:endParaRPr lang="en-US" sz="2600" dirty="0"/>
+          </a:p>
+        </p:txBody>
+      </p:sp>
+      <p:sp>
+        <p:nvSpPr>
+          <p:cNvPr id="4" name="Text 2"/>
+          <p:cNvSpPr/>
+          <p:nvPr/>
+        </p:nvSpPr>
+        <p:spPr>
+          <a:xfrm>
+            <a:off x="548640" y="1097280"/>
+            <a:ext cx="8046720" cy="3474720"/>
+          </a:xfrm>
+          <a:prstGeom prst="rect">
+            <a:avLst/>
+          </a:prstGeom>
+          <a:noFill/>
+          <a:ln/>
+        </p:spPr>
+        <p:txBody>
+          <a:bodyPr wrap="square" rtlCol="0" anchor="t"/>
+          <a:lstStyle/>
+          <a:p>
+            <a:pPr marL="342900" indent="-342900">
+              <a:spcAft>
+                <a:spcPts val="800"/>
+              </a:spcAft>
+              <a:buSzPct val="100000"/>
+              <a:buChar char="•"/>
+            </a:pPr>
+            <a:r>
+              <a:rPr lang="en-US" sz="1500" dirty="0">
+                <a:solidFill>
+                  <a:srgbClr val="3D3A36"/>
                 </a:solidFill>
                 <a:latin typeface="Calibri" pitchFamily="34" charset="0"/>
                 <a:ea typeface="Calibri" pitchFamily="34" charset="-122"/>
                 <a:cs typeface="Calibri" pitchFamily="34" charset="-120"/>
               </a:rPr>
-              <a:t>Measurement recap</a:t>
-            </a:r>
-            <a:endParaRPr lang="en-US" sz="1800" dirty="0"/>
-          </a:p>
-        </p:txBody>
-      </p:sp>
-      <p:sp>
-        <p:nvSpPr>
-          <p:cNvPr id="4" name="Text 2"/>
-          <p:cNvSpPr/>
-          <p:nvPr/>
-        </p:nvSpPr>
-        <p:spPr>
-          <a:xfrm>
-            <a:off x="731520" y="1097280"/>
-            <a:ext cx="7680960" cy="3200400"/>
-          </a:xfrm>
-          <a:prstGeom prst="rect">
-            <a:avLst/>
-          </a:prstGeom>
-          <a:noFill/>
-          <a:ln/>
-        </p:spPr>
-        <p:txBody>
-          <a:bodyPr wrap="square" rtlCol="0" anchor="ctr"/>
-          <a:lstStyle/>
-          <a:p>
-            <a:pPr indent="0" marL="0">
-              <a:buNone/>
-            </a:pPr>
-            <a:r>
-              <a:rPr lang="en-US" sz="1600" dirty="0">
-                <a:solidFill>
-                  <a:srgbClr val="363636"/>
+              <a:t>Use SI units: metres, grams, litres, °C, seconds, Newtons</a:t>
+            </a:r>
+            <a:endParaRPr lang="en-US" sz="1500" dirty="0"/>
+          </a:p>
+          <a:p>
+            <a:pPr marL="342900" indent="-342900">
+              <a:spcAft>
+                <a:spcPts val="800"/>
+              </a:spcAft>
+              <a:buSzPct val="100000"/>
+              <a:buChar char="•"/>
+            </a:pPr>
+            <a:r>
+              <a:rPr lang="en-US" sz="1500" dirty="0">
+                <a:solidFill>
+                  <a:srgbClr val="3D3A36"/>
                 </a:solidFill>
                 <a:latin typeface="Calibri" pitchFamily="34" charset="0"/>
                 <a:ea typeface="Calibri" pitchFamily="34" charset="-122"/>
                 <a:cs typeface="Calibri" pitchFamily="34" charset="-120"/>
               </a:rPr>
-              <a:t>Content for: Measurement recap</a:t>
-            </a:r>
-            <a:endParaRPr lang="en-US" sz="1600" dirty="0"/>
-          </a:p>
-          <a:p>
-            <a:pPr indent="0" marL="0">
-              <a:buNone/>
-            </a:pPr>
-            <a:endParaRPr lang="en-US" sz="1600" dirty="0"/>
-          </a:p>
-          <a:p>
-            <a:pPr indent="0" marL="0">
-              <a:buNone/>
-            </a:pPr>
-            <a:r>
-              <a:rPr lang="en-US" sz="1600" dirty="0">
-                <a:solidFill>
-                  <a:srgbClr val="363636"/>
+              <a:t>Take multiple readings → calculate the mean</a:t>
+            </a:r>
+            <a:endParaRPr lang="en-US" sz="1500" dirty="0"/>
+          </a:p>
+          <a:p>
+            <a:pPr marL="342900" indent="-342900">
+              <a:spcAft>
+                <a:spcPts val="800"/>
+              </a:spcAft>
+              <a:buSzPct val="100000"/>
+              <a:buChar char="•"/>
+            </a:pPr>
+            <a:r>
+              <a:rPr lang="en-US" sz="1500" dirty="0">
+                <a:solidFill>
+                  <a:srgbClr val="3D3A36"/>
                 </a:solidFill>
                 <a:latin typeface="Calibri" pitchFamily="34" charset="0"/>
                 <a:ea typeface="Calibri" pitchFamily="34" charset="-122"/>
                 <a:cs typeface="Calibri" pitchFamily="34" charset="-120"/>
               </a:rPr>
-              <a:t>Key points will be covered in class.</a:t>
-            </a:r>
-            <a:endParaRPr lang="en-US" sz="1600" dirty="0"/>
-          </a:p>
-        </p:txBody>
-      </p:sp>
-      <p:sp>
-        <p:nvSpPr>
-          <p:cNvPr id="5" name="Text 3"/>
-          <p:cNvSpPr/>
-          <p:nvPr/>
-        </p:nvSpPr>
-        <p:spPr>
-          <a:xfrm>
-            <a:off x="7772400" y="4663440"/>
-            <a:ext cx="1097280" cy="365760"/>
-          </a:xfrm>
-          <a:prstGeom prst="rect">
-            <a:avLst/>
-          </a:prstGeom>
-          <a:noFill/>
-          <a:ln/>
-        </p:spPr>
-        <p:txBody>
-          <a:bodyPr wrap="square" rtlCol="0" anchor="ctr"/>
-          <a:lstStyle/>
-          <a:p>
-            <a:pPr algn="r" indent="0" marL="0">
-              <a:buNone/>
-            </a:pPr>
-            <a:r>
-              <a:rPr lang="en-US" sz="1000" dirty="0">
-                <a:solidFill>
-                  <a:srgbClr val="999999"/>
+              <a:t>Read scales at eye level to avoid parallax error</a:t>
+            </a:r>
+            <a:endParaRPr lang="en-US" sz="1500" dirty="0"/>
+          </a:p>
+          <a:p>
+            <a:pPr marL="342900" indent="-342900">
+              <a:spcAft>
+                <a:spcPts val="800"/>
+              </a:spcAft>
+              <a:buSzPct val="100000"/>
+              <a:buChar char="•"/>
+            </a:pPr>
+            <a:r>
+              <a:rPr lang="en-US" sz="1500" dirty="0">
+                <a:solidFill>
+                  <a:srgbClr val="3D3A36"/>
                 </a:solidFill>
                 <a:latin typeface="Calibri" pitchFamily="34" charset="0"/>
                 <a:ea typeface="Calibri" pitchFamily="34" charset="-122"/>
                 <a:cs typeface="Calibri" pitchFamily="34" charset="-120"/>
               </a:rPr>
-              <a:t>5 / 6</a:t>
-            </a:r>
-            <a:endParaRPr lang="en-US" sz="1000" dirty="0"/>
+              <a:t>Tables: IV left, DV right, units in headings</a:t>
+            </a:r>
+            <a:endParaRPr lang="en-US" sz="1500" dirty="0"/>
+          </a:p>
+        </p:txBody>
+      </p:sp>
+      <p:sp>
+        <p:nvSpPr>
+          <p:cNvPr id="5" name="Shape 3"/>
+          <p:cNvSpPr/>
+          <p:nvPr/>
+        </p:nvSpPr>
+        <p:spPr>
+          <a:xfrm>
+            <a:off x="548640" y="4754880"/>
+            <a:ext cx="8046720" cy="9144"/>
+          </a:xfrm>
+          <a:prstGeom prst="rect">
+            <a:avLst/>
+          </a:prstGeom>
+          <a:solidFill>
+            <a:srgbClr val="F3F1EE"/>
+          </a:solidFill>
+          <a:ln/>
+        </p:spPr>
+      </p:sp>
+      <p:sp>
+        <p:nvSpPr>
+          <p:cNvPr id="6" name="Text 4"/>
+          <p:cNvSpPr/>
+          <p:nvPr/>
+        </p:nvSpPr>
+        <p:spPr>
+          <a:xfrm>
+            <a:off x="548640" y="4800600"/>
+            <a:ext cx="3657600" cy="274320"/>
+          </a:xfrm>
+          <a:prstGeom prst="rect">
+            <a:avLst/>
+          </a:prstGeom>
+          <a:noFill/>
+          <a:ln/>
+        </p:spPr>
+        <p:txBody>
+          <a:bodyPr wrap="square" rtlCol="0" anchor="ctr"/>
+          <a:lstStyle/>
+          <a:p>
+            <a:pPr indent="0" marL="0">
+              <a:buNone/>
+            </a:pPr>
+            <a:r>
+              <a:rPr lang="en-US" sz="800" dirty="0">
+                <a:solidFill>
+                  <a:srgbClr val="9B9690"/>
+                </a:solidFill>
+              </a:rPr>
+              <a:t>mrzocchi.com</a:t>
+            </a:r>
+            <a:endParaRPr lang="en-US" sz="800" dirty="0"/>
           </a:p>
         </p:txBody>
       </p:sp>
@@ -2149,6 +2480,13 @@
 <file path=ppt/slides/slide6.xml><?xml version="1.0" encoding="utf-8"?>
 <p:sld xmlns:a="http://schemas.openxmlformats.org/drawingml/2006/main" xmlns:r="http://schemas.openxmlformats.org/officeDocument/2006/relationships" xmlns:p="http://schemas.openxmlformats.org/presentationml/2006/main">
   <p:cSld name="Slide 6">
+    <p:bg>
+      <p:bgPr>
+        <a:solidFill>
+          <a:srgbClr val="1B2A4A"/>
+        </a:solidFill>
+      </p:bgPr>
+    </p:bg>
     <p:spTree>
       <p:nvGrpSpPr>
         <p:cNvPr id="1" name=""/>
@@ -2172,13 +2510,13 @@
         <p:spPr>
           <a:xfrm>
             <a:off x="0" y="0"/>
-            <a:ext cx="9144000" cy="548640"/>
-          </a:xfrm>
-          <a:prstGeom prst="rect">
-            <a:avLst/>
-          </a:prstGeom>
-          <a:solidFill>
-            <a:srgbClr val="1A7A6F"/>
+            <a:ext cx="9144000" cy="54864"/>
+          </a:xfrm>
+          <a:prstGeom prst="rect">
+            <a:avLst/>
+          </a:prstGeom>
+          <a:solidFill>
+            <a:srgbClr val="2A9D8F"/>
           </a:solidFill>
           <a:ln/>
         </p:spPr>
@@ -2191,8 +2529,8 @@
         </p:nvSpPr>
         <p:spPr>
           <a:xfrm>
-            <a:off x="457200" y="45720"/>
-            <a:ext cx="8229600" cy="457200"/>
+            <a:off x="548640" y="457200"/>
+            <a:ext cx="8046720" cy="640080"/>
           </a:xfrm>
           <a:prstGeom prst="rect">
             <a:avLst/>
@@ -2208,77 +2546,121 @@
               <a:buNone/>
             </a:pPr>
             <a:r>
-              <a:rPr lang="en-US" sz="1800" b="1" dirty="0">
+              <a:rPr lang="en-US" sz="2800" b="1" dirty="0">
                 <a:solidFill>
                   <a:srgbClr val="FFFFFF"/>
+                </a:solidFill>
+                <a:latin typeface="Georgia" pitchFamily="34" charset="0"/>
+                <a:ea typeface="Georgia" pitchFamily="34" charset="-122"/>
+                <a:cs typeface="Georgia" pitchFamily="34" charset="-120"/>
+              </a:rPr>
+              <a:t>Key Takeaways</a:t>
+            </a:r>
+            <a:endParaRPr lang="en-US" sz="2800" dirty="0"/>
+          </a:p>
+        </p:txBody>
+      </p:sp>
+      <p:sp>
+        <p:nvSpPr>
+          <p:cNvPr id="4" name="Text 2"/>
+          <p:cNvSpPr/>
+          <p:nvPr/>
+        </p:nvSpPr>
+        <p:spPr>
+          <a:xfrm>
+            <a:off x="731520" y="1371600"/>
+            <a:ext cx="7680960" cy="3200400"/>
+          </a:xfrm>
+          <a:prstGeom prst="rect">
+            <a:avLst/>
+          </a:prstGeom>
+          <a:noFill/>
+          <a:ln/>
+        </p:spPr>
+        <p:txBody>
+          <a:bodyPr wrap="square" rtlCol="0" anchor="t"/>
+          <a:lstStyle/>
+          <a:p>
+            <a:pPr marL="342900" indent="-342900">
+              <a:spcAft>
+                <a:spcPts val="1000"/>
+              </a:spcAft>
+              <a:buSzPct val="100000"/>
+              <a:buChar char="•"/>
+            </a:pPr>
+            <a:r>
+              <a:rPr lang="en-US" sz="1600" dirty="0">
+                <a:solidFill>
+                  <a:srgbClr val="CADCFC"/>
                 </a:solidFill>
                 <a:latin typeface="Calibri" pitchFamily="34" charset="0"/>
                 <a:ea typeface="Calibri" pitchFamily="34" charset="-122"/>
                 <a:cs typeface="Calibri" pitchFamily="34" charset="-120"/>
               </a:rPr>
-              <a:t>Data &amp; graphs recap</a:t>
-            </a:r>
-            <a:endParaRPr lang="en-US" sz="1800" dirty="0"/>
-          </a:p>
-        </p:txBody>
-      </p:sp>
-      <p:sp>
-        <p:nvSpPr>
-          <p:cNvPr id="4" name="Text 2"/>
-          <p:cNvSpPr/>
-          <p:nvPr/>
-        </p:nvSpPr>
-        <p:spPr>
-          <a:xfrm>
-            <a:off x="731520" y="1097280"/>
-            <a:ext cx="7680960" cy="3200400"/>
-          </a:xfrm>
-          <a:prstGeom prst="rect">
-            <a:avLst/>
-          </a:prstGeom>
-          <a:noFill/>
-          <a:ln/>
-        </p:spPr>
-        <p:txBody>
-          <a:bodyPr wrap="square" rtlCol="0" anchor="ctr"/>
-          <a:lstStyle/>
-          <a:p>
-            <a:pPr indent="0" marL="0">
-              <a:buNone/>
+              <a:t>Safety first — PPE, hazard symbols, reporting</a:t>
+            </a:r>
+            <a:endParaRPr lang="en-US" sz="1600" dirty="0"/>
+          </a:p>
+          <a:p>
+            <a:pPr marL="342900" indent="-342900">
+              <a:spcAft>
+                <a:spcPts val="1000"/>
+              </a:spcAft>
+              <a:buSzPct val="100000"/>
+              <a:buChar char="•"/>
             </a:pPr>
             <a:r>
               <a:rPr lang="en-US" sz="1600" dirty="0">
                 <a:solidFill>
-                  <a:srgbClr val="363636"/>
+                  <a:srgbClr val="CADCFC"/>
                 </a:solidFill>
                 <a:latin typeface="Calibri" pitchFamily="34" charset="0"/>
                 <a:ea typeface="Calibri" pitchFamily="34" charset="-122"/>
                 <a:cs typeface="Calibri" pitchFamily="34" charset="-120"/>
               </a:rPr>
-              <a:t>Content for: Data &amp; graphs recap</a:t>
+              <a:t>Scientific method is a repeatable process</a:t>
             </a:r>
             <a:endParaRPr lang="en-US" sz="1600" dirty="0"/>
           </a:p>
           <a:p>
-            <a:pPr indent="0" marL="0">
-              <a:buNone/>
-            </a:pPr>
-            <a:endParaRPr lang="en-US" sz="1600" dirty="0"/>
-          </a:p>
-          <a:p>
-            <a:pPr indent="0" marL="0">
-              <a:buNone/>
+            <a:pPr marL="342900" indent="-342900">
+              <a:spcAft>
+                <a:spcPts val="1000"/>
+              </a:spcAft>
+              <a:buSzPct val="100000"/>
+              <a:buChar char="•"/>
             </a:pPr>
             <a:r>
               <a:rPr lang="en-US" sz="1600" dirty="0">
                 <a:solidFill>
-                  <a:srgbClr val="363636"/>
+                  <a:srgbClr val="CADCFC"/>
                 </a:solidFill>
                 <a:latin typeface="Calibri" pitchFamily="34" charset="0"/>
                 <a:ea typeface="Calibri" pitchFamily="34" charset="-122"/>
                 <a:cs typeface="Calibri" pitchFamily="34" charset="-120"/>
               </a:rPr>
-              <a:t>Key points will be covered in class.</a:t>
+              <a:t>Three types of variable: IV, DV, CV</a:t>
+            </a:r>
+            <a:endParaRPr lang="en-US" sz="1600" dirty="0"/>
+          </a:p>
+          <a:p>
+            <a:pPr marL="342900" indent="-342900">
+              <a:spcAft>
+                <a:spcPts val="1000"/>
+              </a:spcAft>
+              <a:buSzPct val="100000"/>
+              <a:buChar char="•"/>
+            </a:pPr>
+            <a:r>
+              <a:rPr lang="en-US" sz="1600" dirty="0">
+                <a:solidFill>
+                  <a:srgbClr val="CADCFC"/>
+                </a:solidFill>
+                <a:latin typeface="Calibri" pitchFamily="34" charset="0"/>
+                <a:ea typeface="Calibri" pitchFamily="34" charset="-122"/>
+                <a:cs typeface="Calibri" pitchFamily="34" charset="-120"/>
+              </a:rPr>
+              <a:t>Accurate measurement + clear data presentation = good science</a:t>
             </a:r>
             <a:endParaRPr lang="en-US" sz="1600" dirty="0"/>
           </a:p>
@@ -2292,8 +2674,8 @@
         </p:nvSpPr>
         <p:spPr>
           <a:xfrm>
-            <a:off x="7772400" y="4663440"/>
-            <a:ext cx="1097280" cy="365760"/>
+            <a:off x="548640" y="4572000"/>
+            <a:ext cx="3657600" cy="274320"/>
           </a:xfrm>
           <a:prstGeom prst="rect">
             <a:avLst/>
@@ -2305,19 +2687,16 @@
           <a:bodyPr wrap="square" rtlCol="0" anchor="ctr"/>
           <a:lstStyle/>
           <a:p>
-            <a:pPr algn="r" indent="0" marL="0">
+            <a:pPr indent="0" marL="0">
               <a:buNone/>
             </a:pPr>
             <a:r>
               <a:rPr lang="en-US" sz="1000" dirty="0">
                 <a:solidFill>
-                  <a:srgbClr val="999999"/>
-                </a:solidFill>
-                <a:latin typeface="Calibri" pitchFamily="34" charset="0"/>
-                <a:ea typeface="Calibri" pitchFamily="34" charset="-122"/>
-                <a:cs typeface="Calibri" pitchFamily="34" charset="-120"/>
-              </a:rPr>
-              <a:t>6 / 6</a:t>
+                  <a:srgbClr val="6B6660"/>
+                </a:solidFill>
+              </a:rPr>
+              <a:t>mrzocchi.com</a:t>
             </a:r>
             <a:endParaRPr lang="en-US" sz="1000" dirty="0"/>
           </a:p>

--- a/static/ppts/G6_Sci_T1_Full_Revision.pptx
+++ b/static/ppts/G6_Sci_T1_Full_Revision.pptx
@@ -10,10 +10,9 @@
     <p:sldId id="258" r:id="rId4"/>
     <p:sldId id="259" r:id="rId5"/>
     <p:sldId id="260" r:id="rId6"/>
-    <p:sldId id="261" r:id="rId7"/>
   </p:sldIdLst>
   <p:notesMasterIdLst>
-    <p:notesMasterId r:id="rId8"/>
+    <p:notesMasterId r:id="rId7"/>
   </p:notesMasterIdLst>
   <p:sldSz cx="9144000" cy="5143500"/>
   <p:notesSz cx="5143500" cy="9144000"/>
@@ -901,94 +900,6 @@
 </p:notes>
 </file>
 
-<file path=ppt/notesSlides/notesSlide6.xml><?xml version="1.0" encoding="utf-8"?>
-<p:notes xmlns:a="http://schemas.openxmlformats.org/drawingml/2006/main" xmlns:r="http://schemas.openxmlformats.org/officeDocument/2006/relationships" xmlns:p="http://schemas.openxmlformats.org/presentationml/2006/main">
-  <p:cSld>
-    <p:spTree>
-      <p:nvGrpSpPr>
-        <p:cNvPr id="1" name=""/>
-        <p:cNvGrpSpPr/>
-        <p:nvPr/>
-      </p:nvGrpSpPr>
-      <p:grpSpPr>
-        <a:xfrm>
-          <a:off x="0" y="0"/>
-          <a:ext cx="0" cy="0"/>
-          <a:chOff x="0" y="0"/>
-          <a:chExt cx="0" cy="0"/>
-        </a:xfrm>
-      </p:grpSpPr>
-      <p:sp>
-        <p:nvSpPr>
-          <p:cNvPr id="2" name="Slide Image Placeholder 1"/>
-          <p:cNvSpPr>
-            <a:spLocks noGrp="1" noRot="1" noChangeAspect="1"/>
-          </p:cNvSpPr>
-          <p:nvPr>
-            <p:ph type="sldImg"/>
-          </p:nvPr>
-        </p:nvSpPr>
-        <p:spPr/>
-      </p:sp>
-      <p:sp>
-        <p:nvSpPr>
-          <p:cNvPr id="3" name="Notes Placeholder 2"/>
-          <p:cNvSpPr>
-            <a:spLocks noGrp="1"/>
-          </p:cNvSpPr>
-          <p:nvPr>
-            <p:ph type="body" idx="1"/>
-          </p:nvPr>
-        </p:nvSpPr>
-        <p:spPr/>
-        <p:txBody>
-          <a:bodyPr/>
-          <a:lstStyle/>
-          <a:p>
-            <a:r>
-              <a:rPr lang="en-US" dirty="0"/>
-              <a:t/>
-            </a:r>
-            <a:endParaRPr lang="en-US" dirty="0"/>
-          </a:p>
-        </p:txBody>
-      </p:sp>
-      <p:sp>
-        <p:nvSpPr>
-          <p:cNvPr id="4" name="Slide Number Placeholder 3"/>
-          <p:cNvSpPr>
-            <a:spLocks noGrp="1"/>
-          </p:cNvSpPr>
-          <p:nvPr>
-            <p:ph type="sldNum" sz="quarter" idx="10"/>
-          </p:nvPr>
-        </p:nvSpPr>
-        <p:spPr/>
-        <p:txBody>
-          <a:bodyPr/>
-          <a:lstStyle/>
-          <a:p>
-            <a:fld id="{F7021451-1387-4CA6-816F-3879F97B5CBC}" type="slidenum">
-              <a:rPr lang="en-US"/>
-              <a:t>6</a:t>
-            </a:fld>
-            <a:endParaRPr lang="en-US"/>
-          </a:p>
-        </p:txBody>
-      </p:sp>
-    </p:spTree>
-    <p:extLst>
-      <p:ext uri="{BB962C8B-B14F-4D97-AF65-F5344CB8AC3E}">
-        <p14:creationId xmlns:p14="http://schemas.microsoft.com/office/powerpoint/2010/main" val="1024086991"/>
-      </p:ext>
-    </p:extLst>
-  </p:cSld>
-  <p:clrMapOvr>
-    <a:masterClrMapping/>
-  </p:clrMapOvr>
-</p:notes>
-</file>
-
 <file path=ppt/slideLayouts/slideLayout1.xml><?xml version="1.0" encoding="utf-8"?>
 <p:sldLayout xmlns:a="http://schemas.openxmlformats.org/drawingml/2006/main" xmlns:r="http://schemas.openxmlformats.org/officeDocument/2006/relationships" xmlns:p="http://schemas.openxmlformats.org/presentationml/2006/main" preserve="1">
   <p:cSld name="DEFAULT">
@@ -1348,7 +1259,7 @@
         </p:nvSpPr>
         <p:spPr>
           <a:xfrm>
-            <a:off x="731520" y="1280160"/>
+            <a:off x="731520" y="1097280"/>
             <a:ext cx="7772400" cy="1371600"/>
           </a:xfrm>
           <a:prstGeom prst="rect">
@@ -1365,7 +1276,7 @@
               <a:buNone/>
             </a:pPr>
             <a:r>
-              <a:rPr lang="en-US" sz="3600" b="1" dirty="0">
+              <a:rPr lang="en-US" sz="4000" b="1" dirty="0">
                 <a:solidFill>
                   <a:srgbClr val="FFFFFF"/>
                 </a:solidFill>
@@ -1375,7 +1286,7 @@
               </a:rPr>
               <a:t>Scientific Skills — Full Revision</a:t>
             </a:r>
-            <a:endParaRPr lang="en-US" sz="3600" dirty="0"/>
+            <a:endParaRPr lang="en-US" sz="4000" dirty="0"/>
           </a:p>
         </p:txBody>
       </p:sp>
@@ -1387,7 +1298,7 @@
         </p:nvSpPr>
         <p:spPr>
           <a:xfrm>
-            <a:off x="731520" y="2743200"/>
+            <a:off x="731520" y="2560320"/>
             <a:ext cx="7772400" cy="548640"/>
           </a:xfrm>
           <a:prstGeom prst="rect">
@@ -1406,13 +1317,13 @@
             <a:r>
               <a:rPr lang="en-US" sz="1600" dirty="0">
                 <a:solidFill>
-                  <a:srgbClr val="9B9690"/>
+                  <a:srgbClr val="E9C46A"/>
                 </a:solidFill>
                 <a:latin typeface="Calibri" pitchFamily="34" charset="0"/>
                 <a:ea typeface="Calibri" pitchFamily="34" charset="-122"/>
                 <a:cs typeface="Calibri" pitchFamily="34" charset="-120"/>
               </a:rPr>
-              <a:t>G6 Science · Term 1 Review</a:t>
+              <a:t>Grade 6 Science · Mr Zocchi</a:t>
             </a:r>
             <a:endParaRPr lang="en-US" sz="1600" dirty="0"/>
           </a:p>
@@ -1420,14 +1331,36 @@
       </p:sp>
       <p:sp>
         <p:nvSpPr>
-          <p:cNvPr id="5" name="Text 3"/>
-          <p:cNvSpPr/>
-          <p:nvPr/>
-        </p:nvSpPr>
-        <p:spPr>
-          <a:xfrm>
-            <a:off x="731520" y="4389120"/>
-            <a:ext cx="7772400" cy="457200"/>
+          <p:cNvPr id="5" name="Shape 3"/>
+          <p:cNvSpPr/>
+          <p:nvPr/>
+        </p:nvSpPr>
+        <p:spPr>
+          <a:xfrm>
+            <a:off x="731520" y="3474720"/>
+            <a:ext cx="2011680" cy="411480"/>
+          </a:xfrm>
+          <a:prstGeom prst="roundRect">
+            <a:avLst>
+              <a:gd name="adj" fmla="val 17778"/>
+            </a:avLst>
+          </a:prstGeom>
+          <a:solidFill>
+            <a:srgbClr val="2A9D8F"/>
+          </a:solidFill>
+          <a:ln/>
+        </p:spPr>
+      </p:sp>
+      <p:sp>
+        <p:nvSpPr>
+          <p:cNvPr id="6" name="Text 4"/>
+          <p:cNvSpPr/>
+          <p:nvPr/>
+        </p:nvSpPr>
+        <p:spPr>
+          <a:xfrm>
+            <a:off x="731520" y="3474720"/>
+            <a:ext cx="2011680" cy="411480"/>
           </a:xfrm>
           <a:prstGeom prst="rect">
             <a:avLst/>
@@ -1439,21 +1372,21 @@
           <a:bodyPr wrap="square" rtlCol="0" anchor="ctr"/>
           <a:lstStyle/>
           <a:p>
-            <a:pPr indent="0" marL="0">
+            <a:pPr algn="ctr" indent="0" marL="0">
               <a:buNone/>
             </a:pPr>
             <a:r>
-              <a:rPr lang="en-US" sz="1000" dirty="0">
+              <a:rPr lang="en-US" sz="1200" b="1" dirty="0">
                 <a:solidFill>
-                  <a:srgbClr val="6B6660"/>
+                  <a:srgbClr val="FFFFFF"/>
                 </a:solidFill>
                 <a:latin typeface="Calibri" pitchFamily="34" charset="0"/>
                 <a:ea typeface="Calibri" pitchFamily="34" charset="-122"/>
                 <a:cs typeface="Calibri" pitchFamily="34" charset="-120"/>
               </a:rPr>
-              <a:t>Mr Zocchi · mrzocchi.com</a:t>
-            </a:r>
-            <a:endParaRPr lang="en-US" sz="1000" dirty="0"/>
+              <a:t>Term 1 · Scientific Skills</a:t>
+            </a:r>
+            <a:endParaRPr lang="en-US" sz="1200" dirty="0"/>
           </a:p>
         </p:txBody>
       </p:sp>
@@ -1471,7 +1404,7 @@
     <p:bg>
       <p:bgPr>
         <a:solidFill>
-          <a:srgbClr val="FFFFFF"/>
+          <a:srgbClr val="FAF8F5"/>
         </a:solidFill>
       </p:bgPr>
     </p:bg>
@@ -1517,8 +1450,8 @@
         </p:nvSpPr>
         <p:spPr>
           <a:xfrm>
-            <a:off x="548640" y="274320"/>
-            <a:ext cx="8046720" cy="640080"/>
+            <a:off x="7772400" y="4709160"/>
+            <a:ext cx="1097280" cy="320040"/>
           </a:xfrm>
           <a:prstGeom prst="rect">
             <a:avLst/>
@@ -1527,7 +1460,46 @@
           <a:ln/>
         </p:spPr>
         <p:txBody>
-          <a:bodyPr wrap="square" lIns="0" tIns="0" rIns="0" bIns="0" rtlCol="0" anchor="ctr"/>
+          <a:bodyPr wrap="square" rtlCol="0" anchor="ctr"/>
+          <a:lstStyle/>
+          <a:p>
+            <a:pPr algn="r" indent="0" marL="0">
+              <a:buNone/>
+            </a:pPr>
+            <a:r>
+              <a:rPr lang="en-US" sz="900" dirty="0">
+                <a:solidFill>
+                  <a:srgbClr val="6B6660"/>
+                </a:solidFill>
+                <a:latin typeface="Calibri" pitchFamily="34" charset="0"/>
+                <a:ea typeface="Calibri" pitchFamily="34" charset="-122"/>
+                <a:cs typeface="Calibri" pitchFamily="34" charset="-120"/>
+              </a:rPr>
+              <a:t>2 / 5</a:t>
+            </a:r>
+            <a:endParaRPr lang="en-US" sz="900" dirty="0"/>
+          </a:p>
+        </p:txBody>
+      </p:sp>
+      <p:sp>
+        <p:nvSpPr>
+          <p:cNvPr id="4" name="Text 2"/>
+          <p:cNvSpPr/>
+          <p:nvPr/>
+        </p:nvSpPr>
+        <p:spPr>
+          <a:xfrm>
+            <a:off x="457200" y="274320"/>
+            <a:ext cx="8229600" cy="640080"/>
+          </a:xfrm>
+          <a:prstGeom prst="rect">
+            <a:avLst/>
+          </a:prstGeom>
+          <a:noFill/>
+          <a:ln/>
+        </p:spPr>
+        <p:txBody>
+          <a:bodyPr wrap="square" rtlCol="0" anchor="ctr"/>
           <a:lstStyle/>
           <a:p>
             <a:pPr indent="0" marL="0">
@@ -1542,7 +1514,7 @@
                 <a:ea typeface="Georgia" pitchFamily="34" charset="-122"/>
                 <a:cs typeface="Georgia" pitchFamily="34" charset="-120"/>
               </a:rPr>
-              <a:t>Lab Safety Review</a:t>
+              <a:t>Lab Safety Essentials</a:t>
             </a:r>
             <a:endParaRPr lang="en-US" sz="2600" dirty="0"/>
           </a:p>
@@ -1550,14 +1522,66 @@
       </p:sp>
       <p:sp>
         <p:nvSpPr>
-          <p:cNvPr id="4" name="Text 2"/>
-          <p:cNvSpPr/>
-          <p:nvPr/>
-        </p:nvSpPr>
-        <p:spPr>
-          <a:xfrm>
-            <a:off x="548640" y="1097280"/>
-            <a:ext cx="8046720" cy="3474720"/>
+          <p:cNvPr id="5" name="Shape 3"/>
+          <p:cNvSpPr/>
+          <p:nvPr/>
+        </p:nvSpPr>
+        <p:spPr>
+          <a:xfrm>
+            <a:off x="457200" y="1188720"/>
+            <a:ext cx="2560320" cy="1828800"/>
+          </a:xfrm>
+          <a:prstGeom prst="rect">
+            <a:avLst/>
+          </a:prstGeom>
+          <a:solidFill>
+            <a:srgbClr val="FFFFFF"/>
+          </a:solidFill>
+          <a:ln w="12700">
+            <a:solidFill>
+              <a:srgbClr val="E5E2DC"/>
+            </a:solidFill>
+            <a:prstDash val="solid"/>
+          </a:ln>
+          <a:effectLst>
+            <a:outerShdw sx="100000" sy="100000" kx="0" ky="0" algn="bl" rotWithShape="0" blurRad="50800" dist="25400" dir="8100000">
+              <a:srgbClr val="000000">
+                <a:alpha val="10000"/>
+              </a:srgbClr>
+            </a:outerShdw>
+          </a:effectLst>
+        </p:spPr>
+      </p:sp>
+      <p:sp>
+        <p:nvSpPr>
+          <p:cNvPr id="6" name="Shape 4"/>
+          <p:cNvSpPr/>
+          <p:nvPr/>
+        </p:nvSpPr>
+        <p:spPr>
+          <a:xfrm>
+            <a:off x="457200" y="1188720"/>
+            <a:ext cx="2560320" cy="54864"/>
+          </a:xfrm>
+          <a:prstGeom prst="rect">
+            <a:avLst/>
+          </a:prstGeom>
+          <a:solidFill>
+            <a:srgbClr val="2A9D8F"/>
+          </a:solidFill>
+          <a:ln/>
+        </p:spPr>
+      </p:sp>
+      <p:sp>
+        <p:nvSpPr>
+          <p:cNvPr id="7" name="Text 5"/>
+          <p:cNvSpPr/>
+          <p:nvPr/>
+        </p:nvSpPr>
+        <p:spPr>
+          <a:xfrm>
+            <a:off x="594360" y="1325880"/>
+            <a:ext cx="2286000" cy="365760"/>
           </a:xfrm>
           <a:prstGeom prst="rect">
             <a:avLst/>
@@ -1566,18 +1590,53 @@
           <a:ln/>
         </p:spPr>
         <p:txBody>
+          <a:bodyPr wrap="square" rtlCol="0" anchor="ctr"/>
+          <a:lstStyle/>
+          <a:p>
+            <a:pPr indent="0" marL="0">
+              <a:buNone/>
+            </a:pPr>
+            <a:r>
+              <a:rPr lang="en-US" sz="1400" b="1" dirty="0">
+                <a:solidFill>
+                  <a:srgbClr val="1B2A4A"/>
+                </a:solidFill>
+                <a:latin typeface="Calibri" pitchFamily="34" charset="0"/>
+                <a:ea typeface="Calibri" pitchFamily="34" charset="-122"/>
+                <a:cs typeface="Calibri" pitchFamily="34" charset="-120"/>
+              </a:rPr>
+              <a:t>Rules</a:t>
+            </a:r>
+            <a:endParaRPr lang="en-US" sz="1400" dirty="0"/>
+          </a:p>
+        </p:txBody>
+      </p:sp>
+      <p:sp>
+        <p:nvSpPr>
+          <p:cNvPr id="8" name="Text 6"/>
+          <p:cNvSpPr/>
+          <p:nvPr/>
+        </p:nvSpPr>
+        <p:spPr>
+          <a:xfrm>
+            <a:off x="594360" y="1737360"/>
+            <a:ext cx="2286000" cy="1097280"/>
+          </a:xfrm>
+          <a:prstGeom prst="rect">
+            <a:avLst/>
+          </a:prstGeom>
+          <a:noFill/>
+          <a:ln/>
+        </p:spPr>
+        <p:txBody>
           <a:bodyPr wrap="square" rtlCol="0" anchor="t"/>
           <a:lstStyle/>
           <a:p>
-            <a:pPr marL="342900" indent="-342900">
-              <a:spcAft>
-                <a:spcPts val="800"/>
-              </a:spcAft>
-              <a:buSzPct val="100000"/>
-              <a:buChar char="•"/>
+            <a:pPr indent="0" marL="0">
+              <a:buNone/>
             </a:pPr>
             <a:r>
-              <a:rPr lang="en-US" sz="1500" dirty="0">
+              <a:rPr lang="en-US" sz="1100" dirty="0">
                 <a:solidFill>
                   <a:srgbClr val="3D3A36"/>
                 </a:solidFill>
@@ -1585,20 +1644,129 @@
                 <a:ea typeface="Calibri" pitchFamily="34" charset="-122"/>
                 <a:cs typeface="Calibri" pitchFamily="34" charset="-120"/>
               </a:rPr>
-              <a:t>Always wear PPE (goggles, gloves, lab coat) when instructed</a:t>
-            </a:r>
-            <a:endParaRPr lang="en-US" sz="1500" dirty="0"/>
-          </a:p>
-          <a:p>
-            <a:pPr marL="342900" indent="-342900">
-              <a:spcAft>
-                <a:spcPts val="800"/>
-              </a:spcAft>
-              <a:buSzPct val="100000"/>
-              <a:buChar char="•"/>
+              <a:t>Goggles on. Hair tied. No eating/drinking. Report all accidents. Know where safety equipment is.</a:t>
+            </a:r>
+            <a:endParaRPr lang="en-US" sz="1100" dirty="0"/>
+          </a:p>
+        </p:txBody>
+      </p:sp>
+      <p:sp>
+        <p:nvSpPr>
+          <p:cNvPr id="9" name="Shape 7"/>
+          <p:cNvSpPr/>
+          <p:nvPr/>
+        </p:nvSpPr>
+        <p:spPr>
+          <a:xfrm>
+            <a:off x="3291840" y="1188720"/>
+            <a:ext cx="2560320" cy="1828800"/>
+          </a:xfrm>
+          <a:prstGeom prst="rect">
+            <a:avLst/>
+          </a:prstGeom>
+          <a:solidFill>
+            <a:srgbClr val="FFFFFF"/>
+          </a:solidFill>
+          <a:ln w="12700">
+            <a:solidFill>
+              <a:srgbClr val="E5E2DC"/>
+            </a:solidFill>
+            <a:prstDash val="solid"/>
+          </a:ln>
+          <a:effectLst>
+            <a:outerShdw sx="100000" sy="100000" kx="0" ky="0" algn="bl" rotWithShape="0" blurRad="50800" dist="25400" dir="8100000">
+              <a:srgbClr val="000000">
+                <a:alpha val="10000"/>
+              </a:srgbClr>
+            </a:outerShdw>
+          </a:effectLst>
+        </p:spPr>
+      </p:sp>
+      <p:sp>
+        <p:nvSpPr>
+          <p:cNvPr id="10" name="Shape 8"/>
+          <p:cNvSpPr/>
+          <p:nvPr/>
+        </p:nvSpPr>
+        <p:spPr>
+          <a:xfrm>
+            <a:off x="3291840" y="1188720"/>
+            <a:ext cx="2560320" cy="54864"/>
+          </a:xfrm>
+          <a:prstGeom prst="rect">
+            <a:avLst/>
+          </a:prstGeom>
+          <a:solidFill>
+            <a:srgbClr val="2A9D8F"/>
+          </a:solidFill>
+          <a:ln/>
+        </p:spPr>
+      </p:sp>
+      <p:sp>
+        <p:nvSpPr>
+          <p:cNvPr id="11" name="Text 9"/>
+          <p:cNvSpPr/>
+          <p:nvPr/>
+        </p:nvSpPr>
+        <p:spPr>
+          <a:xfrm>
+            <a:off x="3429000" y="1325880"/>
+            <a:ext cx="2286000" cy="365760"/>
+          </a:xfrm>
+          <a:prstGeom prst="rect">
+            <a:avLst/>
+          </a:prstGeom>
+          <a:noFill/>
+          <a:ln/>
+        </p:spPr>
+        <p:txBody>
+          <a:bodyPr wrap="square" rtlCol="0" anchor="ctr"/>
+          <a:lstStyle/>
+          <a:p>
+            <a:pPr indent="0" marL="0">
+              <a:buNone/>
             </a:pPr>
             <a:r>
-              <a:rPr lang="en-US" sz="1500" dirty="0">
+              <a:rPr lang="en-US" sz="1400" b="1" dirty="0">
+                <a:solidFill>
+                  <a:srgbClr val="1B2A4A"/>
+                </a:solidFill>
+                <a:latin typeface="Calibri" pitchFamily="34" charset="0"/>
+                <a:ea typeface="Calibri" pitchFamily="34" charset="-122"/>
+                <a:cs typeface="Calibri" pitchFamily="34" charset="-120"/>
+              </a:rPr>
+              <a:t>Hazard Symbols</a:t>
+            </a:r>
+            <a:endParaRPr lang="en-US" sz="1400" dirty="0"/>
+          </a:p>
+        </p:txBody>
+      </p:sp>
+      <p:sp>
+        <p:nvSpPr>
+          <p:cNvPr id="12" name="Text 10"/>
+          <p:cNvSpPr/>
+          <p:nvPr/>
+        </p:nvSpPr>
+        <p:spPr>
+          <a:xfrm>
+            <a:off x="3429000" y="1737360"/>
+            <a:ext cx="2286000" cy="1097280"/>
+          </a:xfrm>
+          <a:prstGeom prst="rect">
+            <a:avLst/>
+          </a:prstGeom>
+          <a:noFill/>
+          <a:ln/>
+        </p:spPr>
+        <p:txBody>
+          <a:bodyPr wrap="square" rtlCol="0" anchor="t"/>
+          <a:lstStyle/>
+          <a:p>
+            <a:pPr indent="0" marL="0">
+              <a:buNone/>
+            </a:pPr>
+            <a:r>
+              <a:rPr lang="en-US" sz="1100" dirty="0">
                 <a:solidFill>
                   <a:srgbClr val="3D3A36"/>
                 </a:solidFill>
@@ -1606,20 +1774,129 @@
                 <a:ea typeface="Calibri" pitchFamily="34" charset="-122"/>
                 <a:cs typeface="Calibri" pitchFamily="34" charset="-120"/>
               </a:rPr>
-              <a:t>Know hazard symbols: flammable, corrosive, toxic, irritant</a:t>
-            </a:r>
-            <a:endParaRPr lang="en-US" sz="1500" dirty="0"/>
-          </a:p>
-          <a:p>
-            <a:pPr marL="342900" indent="-342900">
-              <a:spcAft>
-                <a:spcPts val="800"/>
-              </a:spcAft>
-              <a:buSzPct val="100000"/>
-              <a:buChar char="•"/>
+              <a:t>Flammable, Corrosive, Toxic, Irritant, Oxidising — learn to recognise all five symbols.</a:t>
+            </a:r>
+            <a:endParaRPr lang="en-US" sz="1100" dirty="0"/>
+          </a:p>
+        </p:txBody>
+      </p:sp>
+      <p:sp>
+        <p:nvSpPr>
+          <p:cNvPr id="13" name="Shape 11"/>
+          <p:cNvSpPr/>
+          <p:nvPr/>
+        </p:nvSpPr>
+        <p:spPr>
+          <a:xfrm>
+            <a:off x="6126480" y="1188720"/>
+            <a:ext cx="2560320" cy="1828800"/>
+          </a:xfrm>
+          <a:prstGeom prst="rect">
+            <a:avLst/>
+          </a:prstGeom>
+          <a:solidFill>
+            <a:srgbClr val="FFFFFF"/>
+          </a:solidFill>
+          <a:ln w="12700">
+            <a:solidFill>
+              <a:srgbClr val="E5E2DC"/>
+            </a:solidFill>
+            <a:prstDash val="solid"/>
+          </a:ln>
+          <a:effectLst>
+            <a:outerShdw sx="100000" sy="100000" kx="0" ky="0" algn="bl" rotWithShape="0" blurRad="50800" dist="25400" dir="8100000">
+              <a:srgbClr val="000000">
+                <a:alpha val="10000"/>
+              </a:srgbClr>
+            </a:outerShdw>
+          </a:effectLst>
+        </p:spPr>
+      </p:sp>
+      <p:sp>
+        <p:nvSpPr>
+          <p:cNvPr id="14" name="Shape 12"/>
+          <p:cNvSpPr/>
+          <p:nvPr/>
+        </p:nvSpPr>
+        <p:spPr>
+          <a:xfrm>
+            <a:off x="6126480" y="1188720"/>
+            <a:ext cx="2560320" cy="54864"/>
+          </a:xfrm>
+          <a:prstGeom prst="rect">
+            <a:avLst/>
+          </a:prstGeom>
+          <a:solidFill>
+            <a:srgbClr val="2A9D8F"/>
+          </a:solidFill>
+          <a:ln/>
+        </p:spPr>
+      </p:sp>
+      <p:sp>
+        <p:nvSpPr>
+          <p:cNvPr id="15" name="Text 13"/>
+          <p:cNvSpPr/>
+          <p:nvPr/>
+        </p:nvSpPr>
+        <p:spPr>
+          <a:xfrm>
+            <a:off x="6263640" y="1325880"/>
+            <a:ext cx="2286000" cy="365760"/>
+          </a:xfrm>
+          <a:prstGeom prst="rect">
+            <a:avLst/>
+          </a:prstGeom>
+          <a:noFill/>
+          <a:ln/>
+        </p:spPr>
+        <p:txBody>
+          <a:bodyPr wrap="square" rtlCol="0" anchor="ctr"/>
+          <a:lstStyle/>
+          <a:p>
+            <a:pPr indent="0" marL="0">
+              <a:buNone/>
             </a:pPr>
             <a:r>
-              <a:rPr lang="en-US" sz="1500" dirty="0">
+              <a:rPr lang="en-US" sz="1400" b="1" dirty="0">
+                <a:solidFill>
+                  <a:srgbClr val="1B2A4A"/>
+                </a:solidFill>
+                <a:latin typeface="Calibri" pitchFamily="34" charset="0"/>
+                <a:ea typeface="Calibri" pitchFamily="34" charset="-122"/>
+                <a:cs typeface="Calibri" pitchFamily="34" charset="-120"/>
+              </a:rPr>
+              <a:t>Clean Up</a:t>
+            </a:r>
+            <a:endParaRPr lang="en-US" sz="1400" dirty="0"/>
+          </a:p>
+        </p:txBody>
+      </p:sp>
+      <p:sp>
+        <p:nvSpPr>
+          <p:cNvPr id="16" name="Text 14"/>
+          <p:cNvSpPr/>
+          <p:nvPr/>
+        </p:nvSpPr>
+        <p:spPr>
+          <a:xfrm>
+            <a:off x="6263640" y="1737360"/>
+            <a:ext cx="2286000" cy="1097280"/>
+          </a:xfrm>
+          <a:prstGeom prst="rect">
+            <a:avLst/>
+          </a:prstGeom>
+          <a:noFill/>
+          <a:ln/>
+        </p:spPr>
+        <p:txBody>
+          <a:bodyPr wrap="square" rtlCol="0" anchor="t"/>
+          <a:lstStyle/>
+          <a:p>
+            <a:pPr indent="0" marL="0">
+              <a:buNone/>
+            </a:pPr>
+            <a:r>
+              <a:rPr lang="en-US" sz="1100" dirty="0">
                 <a:solidFill>
                   <a:srgbClr val="3D3A36"/>
                 </a:solidFill>
@@ -1627,86 +1904,9 @@
                 <a:ea typeface="Calibri" pitchFamily="34" charset="-122"/>
                 <a:cs typeface="Calibri" pitchFamily="34" charset="-120"/>
               </a:rPr>
-              <a:t>Report ALL accidents immediately to your teacher</a:t>
-            </a:r>
-            <a:endParaRPr lang="en-US" sz="1500" dirty="0"/>
-          </a:p>
-          <a:p>
-            <a:pPr marL="342900" indent="-342900">
-              <a:spcAft>
-                <a:spcPts val="800"/>
-              </a:spcAft>
-              <a:buSzPct val="100000"/>
-              <a:buChar char="•"/>
-            </a:pPr>
-            <a:r>
-              <a:rPr lang="en-US" sz="1500" dirty="0">
-                <a:solidFill>
-                  <a:srgbClr val="3D3A36"/>
-                </a:solidFill>
-                <a:latin typeface="Calibri" pitchFamily="34" charset="0"/>
-                <a:ea typeface="Calibri" pitchFamily="34" charset="-122"/>
-                <a:cs typeface="Calibri" pitchFamily="34" charset="-120"/>
-              </a:rPr>
-              <a:t>Never eat, drink, or run in the lab</a:t>
-            </a:r>
-            <a:endParaRPr lang="en-US" sz="1500" dirty="0"/>
-          </a:p>
-        </p:txBody>
-      </p:sp>
-      <p:sp>
-        <p:nvSpPr>
-          <p:cNvPr id="5" name="Shape 3"/>
-          <p:cNvSpPr/>
-          <p:nvPr/>
-        </p:nvSpPr>
-        <p:spPr>
-          <a:xfrm>
-            <a:off x="548640" y="4754880"/>
-            <a:ext cx="8046720" cy="9144"/>
-          </a:xfrm>
-          <a:prstGeom prst="rect">
-            <a:avLst/>
-          </a:prstGeom>
-          <a:solidFill>
-            <a:srgbClr val="F3F1EE"/>
-          </a:solidFill>
-          <a:ln/>
-        </p:spPr>
-      </p:sp>
-      <p:sp>
-        <p:nvSpPr>
-          <p:cNvPr id="6" name="Text 4"/>
-          <p:cNvSpPr/>
-          <p:nvPr/>
-        </p:nvSpPr>
-        <p:spPr>
-          <a:xfrm>
-            <a:off x="548640" y="4800600"/>
-            <a:ext cx="3657600" cy="274320"/>
-          </a:xfrm>
-          <a:prstGeom prst="rect">
-            <a:avLst/>
-          </a:prstGeom>
-          <a:noFill/>
-          <a:ln/>
-        </p:spPr>
-        <p:txBody>
-          <a:bodyPr wrap="square" rtlCol="0" anchor="ctr"/>
-          <a:lstStyle/>
-          <a:p>
-            <a:pPr indent="0" marL="0">
-              <a:buNone/>
-            </a:pPr>
-            <a:r>
-              <a:rPr lang="en-US" sz="800" dirty="0">
-                <a:solidFill>
-                  <a:srgbClr val="9B9690"/>
-                </a:solidFill>
-              </a:rPr>
-              <a:t>mrzocchi.com</a:t>
-            </a:r>
-            <a:endParaRPr lang="en-US" sz="800" dirty="0"/>
+              <a:t>Wash equipment. Wipe surfaces. Dispose chemicals correctly. Wash hands.</a:t>
+            </a:r>
+            <a:endParaRPr lang="en-US" sz="1100" dirty="0"/>
           </a:p>
         </p:txBody>
       </p:sp>
@@ -1724,7 +1924,7 @@
     <p:bg>
       <p:bgPr>
         <a:solidFill>
-          <a:srgbClr val="FFFFFF"/>
+          <a:srgbClr val="FAF8F5"/>
         </a:solidFill>
       </p:bgPr>
     </p:bg>
@@ -1770,8 +1970,8 @@
         </p:nvSpPr>
         <p:spPr>
           <a:xfrm>
-            <a:off x="548640" y="274320"/>
-            <a:ext cx="8046720" cy="640080"/>
+            <a:off x="7772400" y="4709160"/>
+            <a:ext cx="1097280" cy="320040"/>
           </a:xfrm>
           <a:prstGeom prst="rect">
             <a:avLst/>
@@ -1780,7 +1980,46 @@
           <a:ln/>
         </p:spPr>
         <p:txBody>
-          <a:bodyPr wrap="square" lIns="0" tIns="0" rIns="0" bIns="0" rtlCol="0" anchor="ctr"/>
+          <a:bodyPr wrap="square" rtlCol="0" anchor="ctr"/>
+          <a:lstStyle/>
+          <a:p>
+            <a:pPr algn="r" indent="0" marL="0">
+              <a:buNone/>
+            </a:pPr>
+            <a:r>
+              <a:rPr lang="en-US" sz="900" dirty="0">
+                <a:solidFill>
+                  <a:srgbClr val="6B6660"/>
+                </a:solidFill>
+                <a:latin typeface="Calibri" pitchFamily="34" charset="0"/>
+                <a:ea typeface="Calibri" pitchFamily="34" charset="-122"/>
+                <a:cs typeface="Calibri" pitchFamily="34" charset="-120"/>
+              </a:rPr>
+              <a:t>3 / 5</a:t>
+            </a:r>
+            <a:endParaRPr lang="en-US" sz="900" dirty="0"/>
+          </a:p>
+        </p:txBody>
+      </p:sp>
+      <p:sp>
+        <p:nvSpPr>
+          <p:cNvPr id="4" name="Text 2"/>
+          <p:cNvSpPr/>
+          <p:nvPr/>
+        </p:nvSpPr>
+        <p:spPr>
+          <a:xfrm>
+            <a:off x="457200" y="274320"/>
+            <a:ext cx="8229600" cy="640080"/>
+          </a:xfrm>
+          <a:prstGeom prst="rect">
+            <a:avLst/>
+          </a:prstGeom>
+          <a:noFill/>
+          <a:ln/>
+        </p:spPr>
+        <p:txBody>
+          <a:bodyPr wrap="square" rtlCol="0" anchor="ctr"/>
           <a:lstStyle/>
           <a:p>
             <a:pPr indent="0" marL="0">
@@ -1803,14 +2042,66 @@
       </p:sp>
       <p:sp>
         <p:nvSpPr>
-          <p:cNvPr id="4" name="Text 2"/>
-          <p:cNvSpPr/>
-          <p:nvPr/>
-        </p:nvSpPr>
-        <p:spPr>
-          <a:xfrm>
-            <a:off x="548640" y="1097280"/>
-            <a:ext cx="8046720" cy="3474720"/>
+          <p:cNvPr id="5" name="Shape 3"/>
+          <p:cNvSpPr/>
+          <p:nvPr/>
+        </p:nvSpPr>
+        <p:spPr>
+          <a:xfrm>
+            <a:off x="457200" y="1188720"/>
+            <a:ext cx="2560320" cy="1828800"/>
+          </a:xfrm>
+          <a:prstGeom prst="rect">
+            <a:avLst/>
+          </a:prstGeom>
+          <a:solidFill>
+            <a:srgbClr val="FFFFFF"/>
+          </a:solidFill>
+          <a:ln w="12700">
+            <a:solidFill>
+              <a:srgbClr val="E5E2DC"/>
+            </a:solidFill>
+            <a:prstDash val="solid"/>
+          </a:ln>
+          <a:effectLst>
+            <a:outerShdw sx="100000" sy="100000" kx="0" ky="0" algn="bl" rotWithShape="0" blurRad="50800" dist="25400" dir="8100000">
+              <a:srgbClr val="000000">
+                <a:alpha val="10000"/>
+              </a:srgbClr>
+            </a:outerShdw>
+          </a:effectLst>
+        </p:spPr>
+      </p:sp>
+      <p:sp>
+        <p:nvSpPr>
+          <p:cNvPr id="6" name="Shape 4"/>
+          <p:cNvSpPr/>
+          <p:nvPr/>
+        </p:nvSpPr>
+        <p:spPr>
+          <a:xfrm>
+            <a:off x="457200" y="1188720"/>
+            <a:ext cx="2560320" cy="54864"/>
+          </a:xfrm>
+          <a:prstGeom prst="rect">
+            <a:avLst/>
+          </a:prstGeom>
+          <a:solidFill>
+            <a:srgbClr val="2A9D8F"/>
+          </a:solidFill>
+          <a:ln/>
+        </p:spPr>
+      </p:sp>
+      <p:sp>
+        <p:nvSpPr>
+          <p:cNvPr id="7" name="Text 5"/>
+          <p:cNvSpPr/>
+          <p:nvPr/>
+        </p:nvSpPr>
+        <p:spPr>
+          <a:xfrm>
+            <a:off x="594360" y="1325880"/>
+            <a:ext cx="2286000" cy="365760"/>
           </a:xfrm>
           <a:prstGeom prst="rect">
             <a:avLst/>
@@ -1819,18 +2110,53 @@
           <a:ln/>
         </p:spPr>
         <p:txBody>
+          <a:bodyPr wrap="square" rtlCol="0" anchor="ctr"/>
+          <a:lstStyle/>
+          <a:p>
+            <a:pPr indent="0" marL="0">
+              <a:buNone/>
+            </a:pPr>
+            <a:r>
+              <a:rPr lang="en-US" sz="1400" b="1" dirty="0">
+                <a:solidFill>
+                  <a:srgbClr val="1B2A4A"/>
+                </a:solidFill>
+                <a:latin typeface="Calibri" pitchFamily="34" charset="0"/>
+                <a:ea typeface="Calibri" pitchFamily="34" charset="-122"/>
+                <a:cs typeface="Calibri" pitchFamily="34" charset="-120"/>
+              </a:rPr>
+              <a:t>6 Steps</a:t>
+            </a:r>
+            <a:endParaRPr lang="en-US" sz="1400" dirty="0"/>
+          </a:p>
+        </p:txBody>
+      </p:sp>
+      <p:sp>
+        <p:nvSpPr>
+          <p:cNvPr id="8" name="Text 6"/>
+          <p:cNvSpPr/>
+          <p:nvPr/>
+        </p:nvSpPr>
+        <p:spPr>
+          <a:xfrm>
+            <a:off x="594360" y="1737360"/>
+            <a:ext cx="2286000" cy="1097280"/>
+          </a:xfrm>
+          <a:prstGeom prst="rect">
+            <a:avLst/>
+          </a:prstGeom>
+          <a:noFill/>
+          <a:ln/>
+        </p:spPr>
+        <p:txBody>
           <a:bodyPr wrap="square" rtlCol="0" anchor="t"/>
           <a:lstStyle/>
           <a:p>
-            <a:pPr marL="342900" indent="-342900">
-              <a:spcAft>
-                <a:spcPts val="800"/>
-              </a:spcAft>
-              <a:buSzPct val="100000"/>
-              <a:buChar char="•"/>
+            <a:pPr indent="0" marL="0">
+              <a:buNone/>
             </a:pPr>
             <a:r>
-              <a:rPr lang="en-US" sz="1500" dirty="0">
+              <a:rPr lang="en-US" sz="1100" dirty="0">
                 <a:solidFill>
                   <a:srgbClr val="3D3A36"/>
                 </a:solidFill>
@@ -1838,20 +2164,129 @@
                 <a:ea typeface="Calibri" pitchFamily="34" charset="-122"/>
                 <a:cs typeface="Calibri" pitchFamily="34" charset="-120"/>
               </a:rPr>
-              <a:t>Question → Research → Hypothesis → Experiment → Analyse → Conclude</a:t>
-            </a:r>
-            <a:endParaRPr lang="en-US" sz="1500" dirty="0"/>
-          </a:p>
-          <a:p>
-            <a:pPr marL="342900" indent="-342900">
-              <a:spcAft>
-                <a:spcPts val="800"/>
-              </a:spcAft>
-              <a:buSzPct val="100000"/>
-              <a:buChar char="•"/>
+              <a:t>Observe → Research → Hypothesise → Experiment → Analyse → Conclude. It's a cycle — conclusions lead to new questions.</a:t>
+            </a:r>
+            <a:endParaRPr lang="en-US" sz="1100" dirty="0"/>
+          </a:p>
+        </p:txBody>
+      </p:sp>
+      <p:sp>
+        <p:nvSpPr>
+          <p:cNvPr id="9" name="Shape 7"/>
+          <p:cNvSpPr/>
+          <p:nvPr/>
+        </p:nvSpPr>
+        <p:spPr>
+          <a:xfrm>
+            <a:off x="3291840" y="1188720"/>
+            <a:ext cx="2560320" cy="1828800"/>
+          </a:xfrm>
+          <a:prstGeom prst="rect">
+            <a:avLst/>
+          </a:prstGeom>
+          <a:solidFill>
+            <a:srgbClr val="FFFFFF"/>
+          </a:solidFill>
+          <a:ln w="12700">
+            <a:solidFill>
+              <a:srgbClr val="E5E2DC"/>
+            </a:solidFill>
+            <a:prstDash val="solid"/>
+          </a:ln>
+          <a:effectLst>
+            <a:outerShdw sx="100000" sy="100000" kx="0" ky="0" algn="bl" rotWithShape="0" blurRad="50800" dist="25400" dir="8100000">
+              <a:srgbClr val="000000">
+                <a:alpha val="10000"/>
+              </a:srgbClr>
+            </a:outerShdw>
+          </a:effectLst>
+        </p:spPr>
+      </p:sp>
+      <p:sp>
+        <p:nvSpPr>
+          <p:cNvPr id="10" name="Shape 8"/>
+          <p:cNvSpPr/>
+          <p:nvPr/>
+        </p:nvSpPr>
+        <p:spPr>
+          <a:xfrm>
+            <a:off x="3291840" y="1188720"/>
+            <a:ext cx="2560320" cy="54864"/>
+          </a:xfrm>
+          <a:prstGeom prst="rect">
+            <a:avLst/>
+          </a:prstGeom>
+          <a:solidFill>
+            <a:srgbClr val="2A9D8F"/>
+          </a:solidFill>
+          <a:ln/>
+        </p:spPr>
+      </p:sp>
+      <p:sp>
+        <p:nvSpPr>
+          <p:cNvPr id="11" name="Text 9"/>
+          <p:cNvSpPr/>
+          <p:nvPr/>
+        </p:nvSpPr>
+        <p:spPr>
+          <a:xfrm>
+            <a:off x="3429000" y="1325880"/>
+            <a:ext cx="2286000" cy="365760"/>
+          </a:xfrm>
+          <a:prstGeom prst="rect">
+            <a:avLst/>
+          </a:prstGeom>
+          <a:noFill/>
+          <a:ln/>
+        </p:spPr>
+        <p:txBody>
+          <a:bodyPr wrap="square" rtlCol="0" anchor="ctr"/>
+          <a:lstStyle/>
+          <a:p>
+            <a:pPr indent="0" marL="0">
+              <a:buNone/>
             </a:pPr>
             <a:r>
-              <a:rPr lang="en-US" sz="1500" dirty="0">
+              <a:rPr lang="en-US" sz="1400" b="1" dirty="0">
+                <a:solidFill>
+                  <a:srgbClr val="1B2A4A"/>
+                </a:solidFill>
+                <a:latin typeface="Calibri" pitchFamily="34" charset="0"/>
+                <a:ea typeface="Calibri" pitchFamily="34" charset="-122"/>
+                <a:cs typeface="Calibri" pitchFamily="34" charset="-120"/>
+              </a:rPr>
+              <a:t>Hypothesis Format</a:t>
+            </a:r>
+            <a:endParaRPr lang="en-US" sz="1400" dirty="0"/>
+          </a:p>
+        </p:txBody>
+      </p:sp>
+      <p:sp>
+        <p:nvSpPr>
+          <p:cNvPr id="12" name="Text 10"/>
+          <p:cNvSpPr/>
+          <p:nvPr/>
+        </p:nvSpPr>
+        <p:spPr>
+          <a:xfrm>
+            <a:off x="3429000" y="1737360"/>
+            <a:ext cx="2286000" cy="1097280"/>
+          </a:xfrm>
+          <a:prstGeom prst="rect">
+            <a:avLst/>
+          </a:prstGeom>
+          <a:noFill/>
+          <a:ln/>
+        </p:spPr>
+        <p:txBody>
+          <a:bodyPr wrap="square" rtlCol="0" anchor="t"/>
+          <a:lstStyle/>
+          <a:p>
+            <a:pPr indent="0" marL="0">
+              <a:buNone/>
+            </a:pPr>
+            <a:r>
+              <a:rPr lang="en-US" sz="1100" dirty="0">
                 <a:solidFill>
                   <a:srgbClr val="3D3A36"/>
                 </a:solidFill>
@@ -1859,20 +2294,129 @@
                 <a:ea typeface="Calibri" pitchFamily="34" charset="-122"/>
                 <a:cs typeface="Calibri" pitchFamily="34" charset="-120"/>
               </a:rPr>
-              <a:t>Hypothesis format: If... then... because...</a:t>
-            </a:r>
-            <a:endParaRPr lang="en-US" sz="1500" dirty="0"/>
-          </a:p>
-          <a:p>
-            <a:pPr marL="342900" indent="-342900">
-              <a:spcAft>
-                <a:spcPts val="800"/>
-              </a:spcAft>
-              <a:buSzPct val="100000"/>
-              <a:buChar char="•"/>
+              <a:t>'If [independent variable changes], then [dependent variable will...], because [scientific reasoning].'</a:t>
+            </a:r>
+            <a:endParaRPr lang="en-US" sz="1100" dirty="0"/>
+          </a:p>
+        </p:txBody>
+      </p:sp>
+      <p:sp>
+        <p:nvSpPr>
+          <p:cNvPr id="13" name="Shape 11"/>
+          <p:cNvSpPr/>
+          <p:nvPr/>
+        </p:nvSpPr>
+        <p:spPr>
+          <a:xfrm>
+            <a:off x="6126480" y="1188720"/>
+            <a:ext cx="2560320" cy="1828800"/>
+          </a:xfrm>
+          <a:prstGeom prst="rect">
+            <a:avLst/>
+          </a:prstGeom>
+          <a:solidFill>
+            <a:srgbClr val="FFFFFF"/>
+          </a:solidFill>
+          <a:ln w="12700">
+            <a:solidFill>
+              <a:srgbClr val="E5E2DC"/>
+            </a:solidFill>
+            <a:prstDash val="solid"/>
+          </a:ln>
+          <a:effectLst>
+            <a:outerShdw sx="100000" sy="100000" kx="0" ky="0" algn="bl" rotWithShape="0" blurRad="50800" dist="25400" dir="8100000">
+              <a:srgbClr val="000000">
+                <a:alpha val="10000"/>
+              </a:srgbClr>
+            </a:outerShdw>
+          </a:effectLst>
+        </p:spPr>
+      </p:sp>
+      <p:sp>
+        <p:nvSpPr>
+          <p:cNvPr id="14" name="Shape 12"/>
+          <p:cNvSpPr/>
+          <p:nvPr/>
+        </p:nvSpPr>
+        <p:spPr>
+          <a:xfrm>
+            <a:off x="6126480" y="1188720"/>
+            <a:ext cx="2560320" cy="54864"/>
+          </a:xfrm>
+          <a:prstGeom prst="rect">
+            <a:avLst/>
+          </a:prstGeom>
+          <a:solidFill>
+            <a:srgbClr val="2A9D8F"/>
+          </a:solidFill>
+          <a:ln/>
+        </p:spPr>
+      </p:sp>
+      <p:sp>
+        <p:nvSpPr>
+          <p:cNvPr id="15" name="Text 13"/>
+          <p:cNvSpPr/>
+          <p:nvPr/>
+        </p:nvSpPr>
+        <p:spPr>
+          <a:xfrm>
+            <a:off x="6263640" y="1325880"/>
+            <a:ext cx="2286000" cy="365760"/>
+          </a:xfrm>
+          <a:prstGeom prst="rect">
+            <a:avLst/>
+          </a:prstGeom>
+          <a:noFill/>
+          <a:ln/>
+        </p:spPr>
+        <p:txBody>
+          <a:bodyPr wrap="square" rtlCol="0" anchor="ctr"/>
+          <a:lstStyle/>
+          <a:p>
+            <a:pPr indent="0" marL="0">
+              <a:buNone/>
             </a:pPr>
             <a:r>
-              <a:rPr lang="en-US" sz="1500" dirty="0">
+              <a:rPr lang="en-US" sz="1400" b="1" dirty="0">
+                <a:solidFill>
+                  <a:srgbClr val="1B2A4A"/>
+                </a:solidFill>
+                <a:latin typeface="Calibri" pitchFamily="34" charset="0"/>
+                <a:ea typeface="Calibri" pitchFamily="34" charset="-122"/>
+                <a:cs typeface="Calibri" pitchFamily="34" charset="-120"/>
+              </a:rPr>
+              <a:t>Fair Test</a:t>
+            </a:r>
+            <a:endParaRPr lang="en-US" sz="1400" dirty="0"/>
+          </a:p>
+        </p:txBody>
+      </p:sp>
+      <p:sp>
+        <p:nvSpPr>
+          <p:cNvPr id="16" name="Text 14"/>
+          <p:cNvSpPr/>
+          <p:nvPr/>
+        </p:nvSpPr>
+        <p:spPr>
+          <a:xfrm>
+            <a:off x="6263640" y="1737360"/>
+            <a:ext cx="2286000" cy="1097280"/>
+          </a:xfrm>
+          <a:prstGeom prst="rect">
+            <a:avLst/>
+          </a:prstGeom>
+          <a:noFill/>
+          <a:ln/>
+        </p:spPr>
+        <p:txBody>
+          <a:bodyPr wrap="square" rtlCol="0" anchor="t"/>
+          <a:lstStyle/>
+          <a:p>
+            <a:pPr indent="0" marL="0">
+              <a:buNone/>
+            </a:pPr>
+            <a:r>
+              <a:rPr lang="en-US" sz="1100" dirty="0">
                 <a:solidFill>
                   <a:srgbClr val="3D3A36"/>
                 </a:solidFill>
@@ -1880,86 +2424,9 @@
                 <a:ea typeface="Calibri" pitchFamily="34" charset="-122"/>
                 <a:cs typeface="Calibri" pitchFamily="34" charset="-120"/>
               </a:rPr>
-              <a:t>A fair test changes only ONE variable (the IV)</a:t>
-            </a:r>
-            <a:endParaRPr lang="en-US" sz="1500" dirty="0"/>
-          </a:p>
-          <a:p>
-            <a:pPr marL="342900" indent="-342900">
-              <a:spcAft>
-                <a:spcPts val="800"/>
-              </a:spcAft>
-              <a:buSzPct val="100000"/>
-              <a:buChar char="•"/>
-            </a:pPr>
-            <a:r>
-              <a:rPr lang="en-US" sz="1500" dirty="0">
-                <a:solidFill>
-                  <a:srgbClr val="3D3A36"/>
-                </a:solidFill>
-                <a:latin typeface="Calibri" pitchFamily="34" charset="0"/>
-                <a:ea typeface="Calibri" pitchFamily="34" charset="-122"/>
-                <a:cs typeface="Calibri" pitchFamily="34" charset="-120"/>
-              </a:rPr>
-              <a:t>Conclusions must be based on evidence from data</a:t>
-            </a:r>
-            <a:endParaRPr lang="en-US" sz="1500" dirty="0"/>
-          </a:p>
-        </p:txBody>
-      </p:sp>
-      <p:sp>
-        <p:nvSpPr>
-          <p:cNvPr id="5" name="Shape 3"/>
-          <p:cNvSpPr/>
-          <p:nvPr/>
-        </p:nvSpPr>
-        <p:spPr>
-          <a:xfrm>
-            <a:off x="548640" y="4754880"/>
-            <a:ext cx="8046720" cy="9144"/>
-          </a:xfrm>
-          <a:prstGeom prst="rect">
-            <a:avLst/>
-          </a:prstGeom>
-          <a:solidFill>
-            <a:srgbClr val="F3F1EE"/>
-          </a:solidFill>
-          <a:ln/>
-        </p:spPr>
-      </p:sp>
-      <p:sp>
-        <p:nvSpPr>
-          <p:cNvPr id="6" name="Text 4"/>
-          <p:cNvSpPr/>
-          <p:nvPr/>
-        </p:nvSpPr>
-        <p:spPr>
-          <a:xfrm>
-            <a:off x="548640" y="4800600"/>
-            <a:ext cx="3657600" cy="274320"/>
-          </a:xfrm>
-          <a:prstGeom prst="rect">
-            <a:avLst/>
-          </a:prstGeom>
-          <a:noFill/>
-          <a:ln/>
-        </p:spPr>
-        <p:txBody>
-          <a:bodyPr wrap="square" rtlCol="0" anchor="ctr"/>
-          <a:lstStyle/>
-          <a:p>
-            <a:pPr indent="0" marL="0">
-              <a:buNone/>
-            </a:pPr>
-            <a:r>
-              <a:rPr lang="en-US" sz="800" dirty="0">
-                <a:solidFill>
-                  <a:srgbClr val="9B9690"/>
-                </a:solidFill>
-              </a:rPr>
-              <a:t>mrzocchi.com</a:t>
-            </a:r>
-            <a:endParaRPr lang="en-US" sz="800" dirty="0"/>
+              <a:t>Change ONE variable (independent). Measure ONE variable (dependent). Keep EVERYTHING else the same (controlled).</a:t>
+            </a:r>
+            <a:endParaRPr lang="en-US" sz="1100" dirty="0"/>
           </a:p>
         </p:txBody>
       </p:sp>
@@ -1977,7 +2444,7 @@
     <p:bg>
       <p:bgPr>
         <a:solidFill>
-          <a:srgbClr val="FFFFFF"/>
+          <a:srgbClr val="FAF8F5"/>
         </a:solidFill>
       </p:bgPr>
     </p:bg>
@@ -2023,8 +2490,8 @@
         </p:nvSpPr>
         <p:spPr>
           <a:xfrm>
-            <a:off x="548640" y="274320"/>
-            <a:ext cx="8046720" cy="640080"/>
+            <a:off x="7772400" y="4709160"/>
+            <a:ext cx="1097280" cy="320040"/>
           </a:xfrm>
           <a:prstGeom prst="rect">
             <a:avLst/>
@@ -2033,7 +2500,46 @@
           <a:ln/>
         </p:spPr>
         <p:txBody>
-          <a:bodyPr wrap="square" lIns="0" tIns="0" rIns="0" bIns="0" rtlCol="0" anchor="ctr"/>
+          <a:bodyPr wrap="square" rtlCol="0" anchor="ctr"/>
+          <a:lstStyle/>
+          <a:p>
+            <a:pPr algn="r" indent="0" marL="0">
+              <a:buNone/>
+            </a:pPr>
+            <a:r>
+              <a:rPr lang="en-US" sz="900" dirty="0">
+                <a:solidFill>
+                  <a:srgbClr val="6B6660"/>
+                </a:solidFill>
+                <a:latin typeface="Calibri" pitchFamily="34" charset="0"/>
+                <a:ea typeface="Calibri" pitchFamily="34" charset="-122"/>
+                <a:cs typeface="Calibri" pitchFamily="34" charset="-120"/>
+              </a:rPr>
+              <a:t>4 / 5</a:t>
+            </a:r>
+            <a:endParaRPr lang="en-US" sz="900" dirty="0"/>
+          </a:p>
+        </p:txBody>
+      </p:sp>
+      <p:sp>
+        <p:nvSpPr>
+          <p:cNvPr id="4" name="Text 2"/>
+          <p:cNvSpPr/>
+          <p:nvPr/>
+        </p:nvSpPr>
+        <p:spPr>
+          <a:xfrm>
+            <a:off x="457200" y="274320"/>
+            <a:ext cx="8229600" cy="640080"/>
+          </a:xfrm>
+          <a:prstGeom prst="rect">
+            <a:avLst/>
+          </a:prstGeom>
+          <a:noFill/>
+          <a:ln/>
+        </p:spPr>
+        <p:txBody>
+          <a:bodyPr wrap="square" rtlCol="0" anchor="ctr"/>
           <a:lstStyle/>
           <a:p>
             <a:pPr indent="0" marL="0">
@@ -2048,7 +2554,7 @@
                 <a:ea typeface="Georgia" pitchFamily="34" charset="-122"/>
                 <a:cs typeface="Georgia" pitchFamily="34" charset="-120"/>
               </a:rPr>
-              <a:t>Variables</a:t>
+              <a:t>Measurement &amp; Data</a:t>
             </a:r>
             <a:endParaRPr lang="en-US" sz="2600" dirty="0"/>
           </a:p>
@@ -2056,14 +2562,66 @@
       </p:sp>
       <p:sp>
         <p:nvSpPr>
-          <p:cNvPr id="4" name="Text 2"/>
-          <p:cNvSpPr/>
-          <p:nvPr/>
-        </p:nvSpPr>
-        <p:spPr>
-          <a:xfrm>
-            <a:off x="548640" y="1097280"/>
-            <a:ext cx="8046720" cy="3474720"/>
+          <p:cNvPr id="5" name="Shape 3"/>
+          <p:cNvSpPr/>
+          <p:nvPr/>
+        </p:nvSpPr>
+        <p:spPr>
+          <a:xfrm>
+            <a:off x="457200" y="1188720"/>
+            <a:ext cx="2560320" cy="1828800"/>
+          </a:xfrm>
+          <a:prstGeom prst="rect">
+            <a:avLst/>
+          </a:prstGeom>
+          <a:solidFill>
+            <a:srgbClr val="FFFFFF"/>
+          </a:solidFill>
+          <a:ln w="12700">
+            <a:solidFill>
+              <a:srgbClr val="E5E2DC"/>
+            </a:solidFill>
+            <a:prstDash val="solid"/>
+          </a:ln>
+          <a:effectLst>
+            <a:outerShdw sx="100000" sy="100000" kx="0" ky="0" algn="bl" rotWithShape="0" blurRad="50800" dist="25400" dir="8100000">
+              <a:srgbClr val="000000">
+                <a:alpha val="10000"/>
+              </a:srgbClr>
+            </a:outerShdw>
+          </a:effectLst>
+        </p:spPr>
+      </p:sp>
+      <p:sp>
+        <p:nvSpPr>
+          <p:cNvPr id="6" name="Shape 4"/>
+          <p:cNvSpPr/>
+          <p:nvPr/>
+        </p:nvSpPr>
+        <p:spPr>
+          <a:xfrm>
+            <a:off x="457200" y="1188720"/>
+            <a:ext cx="2560320" cy="54864"/>
+          </a:xfrm>
+          <a:prstGeom prst="rect">
+            <a:avLst/>
+          </a:prstGeom>
+          <a:solidFill>
+            <a:srgbClr val="2A9D8F"/>
+          </a:solidFill>
+          <a:ln/>
+        </p:spPr>
+      </p:sp>
+      <p:sp>
+        <p:nvSpPr>
+          <p:cNvPr id="7" name="Text 5"/>
+          <p:cNvSpPr/>
+          <p:nvPr/>
+        </p:nvSpPr>
+        <p:spPr>
+          <a:xfrm>
+            <a:off x="594360" y="1325880"/>
+            <a:ext cx="2286000" cy="365760"/>
           </a:xfrm>
           <a:prstGeom prst="rect">
             <a:avLst/>
@@ -2072,18 +2630,53 @@
           <a:ln/>
         </p:spPr>
         <p:txBody>
+          <a:bodyPr wrap="square" rtlCol="0" anchor="ctr"/>
+          <a:lstStyle/>
+          <a:p>
+            <a:pPr indent="0" marL="0">
+              <a:buNone/>
+            </a:pPr>
+            <a:r>
+              <a:rPr lang="en-US" sz="1400" b="1" dirty="0">
+                <a:solidFill>
+                  <a:srgbClr val="1B2A4A"/>
+                </a:solidFill>
+                <a:latin typeface="Calibri" pitchFamily="34" charset="0"/>
+                <a:ea typeface="Calibri" pitchFamily="34" charset="-122"/>
+                <a:cs typeface="Calibri" pitchFamily="34" charset="-120"/>
+              </a:rPr>
+              <a:t>SI Units</a:t>
+            </a:r>
+            <a:endParaRPr lang="en-US" sz="1400" dirty="0"/>
+          </a:p>
+        </p:txBody>
+      </p:sp>
+      <p:sp>
+        <p:nvSpPr>
+          <p:cNvPr id="8" name="Text 6"/>
+          <p:cNvSpPr/>
+          <p:nvPr/>
+        </p:nvSpPr>
+        <p:spPr>
+          <a:xfrm>
+            <a:off x="594360" y="1737360"/>
+            <a:ext cx="2286000" cy="1097280"/>
+          </a:xfrm>
+          <a:prstGeom prst="rect">
+            <a:avLst/>
+          </a:prstGeom>
+          <a:noFill/>
+          <a:ln/>
+        </p:spPr>
+        <p:txBody>
           <a:bodyPr wrap="square" rtlCol="0" anchor="t"/>
           <a:lstStyle/>
           <a:p>
-            <a:pPr marL="342900" indent="-342900">
-              <a:spcAft>
-                <a:spcPts val="800"/>
-              </a:spcAft>
-              <a:buSzPct val="100000"/>
-              <a:buChar char="•"/>
+            <a:pPr indent="0" marL="0">
+              <a:buNone/>
             </a:pPr>
             <a:r>
-              <a:rPr lang="en-US" sz="1500" dirty="0">
+              <a:rPr lang="en-US" sz="1100" dirty="0">
                 <a:solidFill>
                   <a:srgbClr val="3D3A36"/>
                 </a:solidFill>
@@ -2091,20 +2684,129 @@
                 <a:ea typeface="Calibri" pitchFamily="34" charset="-122"/>
                 <a:cs typeface="Calibri" pitchFamily="34" charset="-120"/>
               </a:rPr>
-              <a:t>Independent Variable (IV): what you CHANGE</a:t>
-            </a:r>
-            <a:endParaRPr lang="en-US" sz="1500" dirty="0"/>
-          </a:p>
-          <a:p>
-            <a:pPr marL="342900" indent="-342900">
-              <a:spcAft>
-                <a:spcPts val="800"/>
-              </a:spcAft>
-              <a:buSzPct val="100000"/>
-              <a:buChar char="•"/>
+              <a:t>Length: m. Mass: g. Volume: L/mL. Temperature: °C. Time: s. Always read at eye level.</a:t>
+            </a:r>
+            <a:endParaRPr lang="en-US" sz="1100" dirty="0"/>
+          </a:p>
+        </p:txBody>
+      </p:sp>
+      <p:sp>
+        <p:nvSpPr>
+          <p:cNvPr id="9" name="Shape 7"/>
+          <p:cNvSpPr/>
+          <p:nvPr/>
+        </p:nvSpPr>
+        <p:spPr>
+          <a:xfrm>
+            <a:off x="3291840" y="1188720"/>
+            <a:ext cx="2560320" cy="1828800"/>
+          </a:xfrm>
+          <a:prstGeom prst="rect">
+            <a:avLst/>
+          </a:prstGeom>
+          <a:solidFill>
+            <a:srgbClr val="FFFFFF"/>
+          </a:solidFill>
+          <a:ln w="12700">
+            <a:solidFill>
+              <a:srgbClr val="E5E2DC"/>
+            </a:solidFill>
+            <a:prstDash val="solid"/>
+          </a:ln>
+          <a:effectLst>
+            <a:outerShdw sx="100000" sy="100000" kx="0" ky="0" algn="bl" rotWithShape="0" blurRad="50800" dist="25400" dir="8100000">
+              <a:srgbClr val="000000">
+                <a:alpha val="10000"/>
+              </a:srgbClr>
+            </a:outerShdw>
+          </a:effectLst>
+        </p:spPr>
+      </p:sp>
+      <p:sp>
+        <p:nvSpPr>
+          <p:cNvPr id="10" name="Shape 8"/>
+          <p:cNvSpPr/>
+          <p:nvPr/>
+        </p:nvSpPr>
+        <p:spPr>
+          <a:xfrm>
+            <a:off x="3291840" y="1188720"/>
+            <a:ext cx="2560320" cy="54864"/>
+          </a:xfrm>
+          <a:prstGeom prst="rect">
+            <a:avLst/>
+          </a:prstGeom>
+          <a:solidFill>
+            <a:srgbClr val="2A9D8F"/>
+          </a:solidFill>
+          <a:ln/>
+        </p:spPr>
+      </p:sp>
+      <p:sp>
+        <p:nvSpPr>
+          <p:cNvPr id="11" name="Text 9"/>
+          <p:cNvSpPr/>
+          <p:nvPr/>
+        </p:nvSpPr>
+        <p:spPr>
+          <a:xfrm>
+            <a:off x="3429000" y="1325880"/>
+            <a:ext cx="2286000" cy="365760"/>
+          </a:xfrm>
+          <a:prstGeom prst="rect">
+            <a:avLst/>
+          </a:prstGeom>
+          <a:noFill/>
+          <a:ln/>
+        </p:spPr>
+        <p:txBody>
+          <a:bodyPr wrap="square" rtlCol="0" anchor="ctr"/>
+          <a:lstStyle/>
+          <a:p>
+            <a:pPr indent="0" marL="0">
+              <a:buNone/>
             </a:pPr>
             <a:r>
-              <a:rPr lang="en-US" sz="1500" dirty="0">
+              <a:rPr lang="en-US" sz="1400" b="1" dirty="0">
+                <a:solidFill>
+                  <a:srgbClr val="1B2A4A"/>
+                </a:solidFill>
+                <a:latin typeface="Calibri" pitchFamily="34" charset="0"/>
+                <a:ea typeface="Calibri" pitchFamily="34" charset="-122"/>
+                <a:cs typeface="Calibri" pitchFamily="34" charset="-120"/>
+              </a:rPr>
+              <a:t>Conversions</a:t>
+            </a:r>
+            <a:endParaRPr lang="en-US" sz="1400" dirty="0"/>
+          </a:p>
+        </p:txBody>
+      </p:sp>
+      <p:sp>
+        <p:nvSpPr>
+          <p:cNvPr id="12" name="Text 10"/>
+          <p:cNvSpPr/>
+          <p:nvPr/>
+        </p:nvSpPr>
+        <p:spPr>
+          <a:xfrm>
+            <a:off x="3429000" y="1737360"/>
+            <a:ext cx="2286000" cy="1097280"/>
+          </a:xfrm>
+          <a:prstGeom prst="rect">
+            <a:avLst/>
+          </a:prstGeom>
+          <a:noFill/>
+          <a:ln/>
+        </p:spPr>
+        <p:txBody>
+          <a:bodyPr wrap="square" rtlCol="0" anchor="t"/>
+          <a:lstStyle/>
+          <a:p>
+            <a:pPr indent="0" marL="0">
+              <a:buNone/>
+            </a:pPr>
+            <a:r>
+              <a:rPr lang="en-US" sz="1100" dirty="0">
                 <a:solidFill>
                   <a:srgbClr val="3D3A36"/>
                 </a:solidFill>
@@ -2112,20 +2814,129 @@
                 <a:ea typeface="Calibri" pitchFamily="34" charset="-122"/>
                 <a:cs typeface="Calibri" pitchFamily="34" charset="-120"/>
               </a:rPr>
-              <a:t>Dependent Variable (DV): what you MEASURE</a:t>
-            </a:r>
-            <a:endParaRPr lang="en-US" sz="1500" dirty="0"/>
-          </a:p>
-          <a:p>
-            <a:pPr marL="342900" indent="-342900">
-              <a:spcAft>
-                <a:spcPts val="800"/>
-              </a:spcAft>
-              <a:buSzPct val="100000"/>
-              <a:buChar char="•"/>
+              <a:t>kilo = ×1000. milli = ÷1000. Example: 3.5 km = 3500 m. 250 mL = 0.25 L.</a:t>
+            </a:r>
+            <a:endParaRPr lang="en-US" sz="1100" dirty="0"/>
+          </a:p>
+        </p:txBody>
+      </p:sp>
+      <p:sp>
+        <p:nvSpPr>
+          <p:cNvPr id="13" name="Shape 11"/>
+          <p:cNvSpPr/>
+          <p:nvPr/>
+        </p:nvSpPr>
+        <p:spPr>
+          <a:xfrm>
+            <a:off x="6126480" y="1188720"/>
+            <a:ext cx="2560320" cy="1828800"/>
+          </a:xfrm>
+          <a:prstGeom prst="rect">
+            <a:avLst/>
+          </a:prstGeom>
+          <a:solidFill>
+            <a:srgbClr val="FFFFFF"/>
+          </a:solidFill>
+          <a:ln w="12700">
+            <a:solidFill>
+              <a:srgbClr val="E5E2DC"/>
+            </a:solidFill>
+            <a:prstDash val="solid"/>
+          </a:ln>
+          <a:effectLst>
+            <a:outerShdw sx="100000" sy="100000" kx="0" ky="0" algn="bl" rotWithShape="0" blurRad="50800" dist="25400" dir="8100000">
+              <a:srgbClr val="000000">
+                <a:alpha val="10000"/>
+              </a:srgbClr>
+            </a:outerShdw>
+          </a:effectLst>
+        </p:spPr>
+      </p:sp>
+      <p:sp>
+        <p:nvSpPr>
+          <p:cNvPr id="14" name="Shape 12"/>
+          <p:cNvSpPr/>
+          <p:nvPr/>
+        </p:nvSpPr>
+        <p:spPr>
+          <a:xfrm>
+            <a:off x="6126480" y="1188720"/>
+            <a:ext cx="2560320" cy="54864"/>
+          </a:xfrm>
+          <a:prstGeom prst="rect">
+            <a:avLst/>
+          </a:prstGeom>
+          <a:solidFill>
+            <a:srgbClr val="2A9D8F"/>
+          </a:solidFill>
+          <a:ln/>
+        </p:spPr>
+      </p:sp>
+      <p:sp>
+        <p:nvSpPr>
+          <p:cNvPr id="15" name="Text 13"/>
+          <p:cNvSpPr/>
+          <p:nvPr/>
+        </p:nvSpPr>
+        <p:spPr>
+          <a:xfrm>
+            <a:off x="6263640" y="1325880"/>
+            <a:ext cx="2286000" cy="365760"/>
+          </a:xfrm>
+          <a:prstGeom prst="rect">
+            <a:avLst/>
+          </a:prstGeom>
+          <a:noFill/>
+          <a:ln/>
+        </p:spPr>
+        <p:txBody>
+          <a:bodyPr wrap="square" rtlCol="0" anchor="ctr"/>
+          <a:lstStyle/>
+          <a:p>
+            <a:pPr indent="0" marL="0">
+              <a:buNone/>
             </a:pPr>
             <a:r>
-              <a:rPr lang="en-US" sz="1500" dirty="0">
+              <a:rPr lang="en-US" sz="1400" b="1" dirty="0">
+                <a:solidFill>
+                  <a:srgbClr val="1B2A4A"/>
+                </a:solidFill>
+                <a:latin typeface="Calibri" pitchFamily="34" charset="0"/>
+                <a:ea typeface="Calibri" pitchFamily="34" charset="-122"/>
+                <a:cs typeface="Calibri" pitchFamily="34" charset="-120"/>
+              </a:rPr>
+              <a:t>Graphs</a:t>
+            </a:r>
+            <a:endParaRPr lang="en-US" sz="1400" dirty="0"/>
+          </a:p>
+        </p:txBody>
+      </p:sp>
+      <p:sp>
+        <p:nvSpPr>
+          <p:cNvPr id="16" name="Text 14"/>
+          <p:cNvSpPr/>
+          <p:nvPr/>
+        </p:nvSpPr>
+        <p:spPr>
+          <a:xfrm>
+            <a:off x="6263640" y="1737360"/>
+            <a:ext cx="2286000" cy="1097280"/>
+          </a:xfrm>
+          <a:prstGeom prst="rect">
+            <a:avLst/>
+          </a:prstGeom>
+          <a:noFill/>
+          <a:ln/>
+        </p:spPr>
+        <p:txBody>
+          <a:bodyPr wrap="square" rtlCol="0" anchor="t"/>
+          <a:lstStyle/>
+          <a:p>
+            <a:pPr indent="0" marL="0">
+              <a:buNone/>
+            </a:pPr>
+            <a:r>
+              <a:rPr lang="en-US" sz="1100" dirty="0">
                 <a:solidFill>
                   <a:srgbClr val="3D3A36"/>
                 </a:solidFill>
@@ -2133,86 +2944,9 @@
                 <a:ea typeface="Calibri" pitchFamily="34" charset="-122"/>
                 <a:cs typeface="Calibri" pitchFamily="34" charset="-120"/>
               </a:rPr>
-              <a:t>Control Variables (CV): what you keep the SAME</a:t>
-            </a:r>
-            <a:endParaRPr lang="en-US" sz="1500" dirty="0"/>
-          </a:p>
-          <a:p>
-            <a:pPr marL="342900" indent="-342900">
-              <a:spcAft>
-                <a:spcPts val="800"/>
-              </a:spcAft>
-              <a:buSzPct val="100000"/>
-              <a:buChar char="•"/>
-            </a:pPr>
-            <a:r>
-              <a:rPr lang="en-US" sz="1500" dirty="0">
-                <a:solidFill>
-                  <a:srgbClr val="3D3A36"/>
-                </a:solidFill>
-                <a:latin typeface="Calibri" pitchFamily="34" charset="0"/>
-                <a:ea typeface="Calibri" pitchFamily="34" charset="-122"/>
-                <a:cs typeface="Calibri" pitchFamily="34" charset="-120"/>
-              </a:rPr>
-              <a:t>A fair test = only one IV, everything else controlled</a:t>
-            </a:r>
-            <a:endParaRPr lang="en-US" sz="1500" dirty="0"/>
-          </a:p>
-        </p:txBody>
-      </p:sp>
-      <p:sp>
-        <p:nvSpPr>
-          <p:cNvPr id="5" name="Shape 3"/>
-          <p:cNvSpPr/>
-          <p:nvPr/>
-        </p:nvSpPr>
-        <p:spPr>
-          <a:xfrm>
-            <a:off x="548640" y="4754880"/>
-            <a:ext cx="8046720" cy="9144"/>
-          </a:xfrm>
-          <a:prstGeom prst="rect">
-            <a:avLst/>
-          </a:prstGeom>
-          <a:solidFill>
-            <a:srgbClr val="F3F1EE"/>
-          </a:solidFill>
-          <a:ln/>
-        </p:spPr>
-      </p:sp>
-      <p:sp>
-        <p:nvSpPr>
-          <p:cNvPr id="6" name="Text 4"/>
-          <p:cNvSpPr/>
-          <p:nvPr/>
-        </p:nvSpPr>
-        <p:spPr>
-          <a:xfrm>
-            <a:off x="548640" y="4800600"/>
-            <a:ext cx="3657600" cy="274320"/>
-          </a:xfrm>
-          <a:prstGeom prst="rect">
-            <a:avLst/>
-          </a:prstGeom>
-          <a:noFill/>
-          <a:ln/>
-        </p:spPr>
-        <p:txBody>
-          <a:bodyPr wrap="square" rtlCol="0" anchor="ctr"/>
-          <a:lstStyle/>
-          <a:p>
-            <a:pPr indent="0" marL="0">
-              <a:buNone/>
-            </a:pPr>
-            <a:r>
-              <a:rPr lang="en-US" sz="800" dirty="0">
-                <a:solidFill>
-                  <a:srgbClr val="9B9690"/>
-                </a:solidFill>
-              </a:rPr>
-              <a:t>mrzocchi.com</a:t>
-            </a:r>
-            <a:endParaRPr lang="en-US" sz="800" dirty="0"/>
+              <a:t>Bar = categories. Line = continuous. Pie = proportions. Always label axes with name + unit.</a:t>
+            </a:r>
+            <a:endParaRPr lang="en-US" sz="1100" dirty="0"/>
           </a:p>
         </p:txBody>
       </p:sp>
@@ -2227,259 +2961,6 @@
 <file path=ppt/slides/slide5.xml><?xml version="1.0" encoding="utf-8"?>
 <p:sld xmlns:a="http://schemas.openxmlformats.org/drawingml/2006/main" xmlns:r="http://schemas.openxmlformats.org/officeDocument/2006/relationships" xmlns:p="http://schemas.openxmlformats.org/presentationml/2006/main">
   <p:cSld name="Slide 5">
-    <p:bg>
-      <p:bgPr>
-        <a:solidFill>
-          <a:srgbClr val="FFFFFF"/>
-        </a:solidFill>
-      </p:bgPr>
-    </p:bg>
-    <p:spTree>
-      <p:nvGrpSpPr>
-        <p:cNvPr id="1" name=""/>
-        <p:cNvGrpSpPr/>
-        <p:nvPr/>
-      </p:nvGrpSpPr>
-      <p:grpSpPr>
-        <a:xfrm>
-          <a:off x="0" y="0"/>
-          <a:ext cx="0" cy="0"/>
-          <a:chOff x="0" y="0"/>
-          <a:chExt cx="0" cy="0"/>
-        </a:xfrm>
-      </p:grpSpPr>
-      <p:sp>
-        <p:nvSpPr>
-          <p:cNvPr id="2" name="Shape 0"/>
-          <p:cNvSpPr/>
-          <p:nvPr/>
-        </p:nvSpPr>
-        <p:spPr>
-          <a:xfrm>
-            <a:off x="0" y="0"/>
-            <a:ext cx="9144000" cy="54864"/>
-          </a:xfrm>
-          <a:prstGeom prst="rect">
-            <a:avLst/>
-          </a:prstGeom>
-          <a:solidFill>
-            <a:srgbClr val="2A9D8F"/>
-          </a:solidFill>
-          <a:ln/>
-        </p:spPr>
-      </p:sp>
-      <p:sp>
-        <p:nvSpPr>
-          <p:cNvPr id="3" name="Text 1"/>
-          <p:cNvSpPr/>
-          <p:nvPr/>
-        </p:nvSpPr>
-        <p:spPr>
-          <a:xfrm>
-            <a:off x="548640" y="274320"/>
-            <a:ext cx="8046720" cy="640080"/>
-          </a:xfrm>
-          <a:prstGeom prst="rect">
-            <a:avLst/>
-          </a:prstGeom>
-          <a:noFill/>
-          <a:ln/>
-        </p:spPr>
-        <p:txBody>
-          <a:bodyPr wrap="square" lIns="0" tIns="0" rIns="0" bIns="0" rtlCol="0" anchor="ctr"/>
-          <a:lstStyle/>
-          <a:p>
-            <a:pPr indent="0" marL="0">
-              <a:buNone/>
-            </a:pPr>
-            <a:r>
-              <a:rPr lang="en-US" sz="2600" b="1" dirty="0">
-                <a:solidFill>
-                  <a:srgbClr val="1B2A4A"/>
-                </a:solidFill>
-                <a:latin typeface="Georgia" pitchFamily="34" charset="0"/>
-                <a:ea typeface="Georgia" pitchFamily="34" charset="-122"/>
-                <a:cs typeface="Georgia" pitchFamily="34" charset="-120"/>
-              </a:rPr>
-              <a:t>Measurement &amp; Data</a:t>
-            </a:r>
-            <a:endParaRPr lang="en-US" sz="2600" dirty="0"/>
-          </a:p>
-        </p:txBody>
-      </p:sp>
-      <p:sp>
-        <p:nvSpPr>
-          <p:cNvPr id="4" name="Text 2"/>
-          <p:cNvSpPr/>
-          <p:nvPr/>
-        </p:nvSpPr>
-        <p:spPr>
-          <a:xfrm>
-            <a:off x="548640" y="1097280"/>
-            <a:ext cx="8046720" cy="3474720"/>
-          </a:xfrm>
-          <a:prstGeom prst="rect">
-            <a:avLst/>
-          </a:prstGeom>
-          <a:noFill/>
-          <a:ln/>
-        </p:spPr>
-        <p:txBody>
-          <a:bodyPr wrap="square" rtlCol="0" anchor="t"/>
-          <a:lstStyle/>
-          <a:p>
-            <a:pPr marL="342900" indent="-342900">
-              <a:spcAft>
-                <a:spcPts val="800"/>
-              </a:spcAft>
-              <a:buSzPct val="100000"/>
-              <a:buChar char="•"/>
-            </a:pPr>
-            <a:r>
-              <a:rPr lang="en-US" sz="1500" dirty="0">
-                <a:solidFill>
-                  <a:srgbClr val="3D3A36"/>
-                </a:solidFill>
-                <a:latin typeface="Calibri" pitchFamily="34" charset="0"/>
-                <a:ea typeface="Calibri" pitchFamily="34" charset="-122"/>
-                <a:cs typeface="Calibri" pitchFamily="34" charset="-120"/>
-              </a:rPr>
-              <a:t>Use SI units: metres, grams, litres, °C, seconds, Newtons</a:t>
-            </a:r>
-            <a:endParaRPr lang="en-US" sz="1500" dirty="0"/>
-          </a:p>
-          <a:p>
-            <a:pPr marL="342900" indent="-342900">
-              <a:spcAft>
-                <a:spcPts val="800"/>
-              </a:spcAft>
-              <a:buSzPct val="100000"/>
-              <a:buChar char="•"/>
-            </a:pPr>
-            <a:r>
-              <a:rPr lang="en-US" sz="1500" dirty="0">
-                <a:solidFill>
-                  <a:srgbClr val="3D3A36"/>
-                </a:solidFill>
-                <a:latin typeface="Calibri" pitchFamily="34" charset="0"/>
-                <a:ea typeface="Calibri" pitchFamily="34" charset="-122"/>
-                <a:cs typeface="Calibri" pitchFamily="34" charset="-120"/>
-              </a:rPr>
-              <a:t>Take multiple readings → calculate the mean</a:t>
-            </a:r>
-            <a:endParaRPr lang="en-US" sz="1500" dirty="0"/>
-          </a:p>
-          <a:p>
-            <a:pPr marL="342900" indent="-342900">
-              <a:spcAft>
-                <a:spcPts val="800"/>
-              </a:spcAft>
-              <a:buSzPct val="100000"/>
-              <a:buChar char="•"/>
-            </a:pPr>
-            <a:r>
-              <a:rPr lang="en-US" sz="1500" dirty="0">
-                <a:solidFill>
-                  <a:srgbClr val="3D3A36"/>
-                </a:solidFill>
-                <a:latin typeface="Calibri" pitchFamily="34" charset="0"/>
-                <a:ea typeface="Calibri" pitchFamily="34" charset="-122"/>
-                <a:cs typeface="Calibri" pitchFamily="34" charset="-120"/>
-              </a:rPr>
-              <a:t>Read scales at eye level to avoid parallax error</a:t>
-            </a:r>
-            <a:endParaRPr lang="en-US" sz="1500" dirty="0"/>
-          </a:p>
-          <a:p>
-            <a:pPr marL="342900" indent="-342900">
-              <a:spcAft>
-                <a:spcPts val="800"/>
-              </a:spcAft>
-              <a:buSzPct val="100000"/>
-              <a:buChar char="•"/>
-            </a:pPr>
-            <a:r>
-              <a:rPr lang="en-US" sz="1500" dirty="0">
-                <a:solidFill>
-                  <a:srgbClr val="3D3A36"/>
-                </a:solidFill>
-                <a:latin typeface="Calibri" pitchFamily="34" charset="0"/>
-                <a:ea typeface="Calibri" pitchFamily="34" charset="-122"/>
-                <a:cs typeface="Calibri" pitchFamily="34" charset="-120"/>
-              </a:rPr>
-              <a:t>Tables: IV left, DV right, units in headings</a:t>
-            </a:r>
-            <a:endParaRPr lang="en-US" sz="1500" dirty="0"/>
-          </a:p>
-        </p:txBody>
-      </p:sp>
-      <p:sp>
-        <p:nvSpPr>
-          <p:cNvPr id="5" name="Shape 3"/>
-          <p:cNvSpPr/>
-          <p:nvPr/>
-        </p:nvSpPr>
-        <p:spPr>
-          <a:xfrm>
-            <a:off x="548640" y="4754880"/>
-            <a:ext cx="8046720" cy="9144"/>
-          </a:xfrm>
-          <a:prstGeom prst="rect">
-            <a:avLst/>
-          </a:prstGeom>
-          <a:solidFill>
-            <a:srgbClr val="F3F1EE"/>
-          </a:solidFill>
-          <a:ln/>
-        </p:spPr>
-      </p:sp>
-      <p:sp>
-        <p:nvSpPr>
-          <p:cNvPr id="6" name="Text 4"/>
-          <p:cNvSpPr/>
-          <p:nvPr/>
-        </p:nvSpPr>
-        <p:spPr>
-          <a:xfrm>
-            <a:off x="548640" y="4800600"/>
-            <a:ext cx="3657600" cy="274320"/>
-          </a:xfrm>
-          <a:prstGeom prst="rect">
-            <a:avLst/>
-          </a:prstGeom>
-          <a:noFill/>
-          <a:ln/>
-        </p:spPr>
-        <p:txBody>
-          <a:bodyPr wrap="square" rtlCol="0" anchor="ctr"/>
-          <a:lstStyle/>
-          <a:p>
-            <a:pPr indent="0" marL="0">
-              <a:buNone/>
-            </a:pPr>
-            <a:r>
-              <a:rPr lang="en-US" sz="800" dirty="0">
-                <a:solidFill>
-                  <a:srgbClr val="9B9690"/>
-                </a:solidFill>
-              </a:rPr>
-              <a:t>mrzocchi.com</a:t>
-            </a:r>
-            <a:endParaRPr lang="en-US" sz="800" dirty="0"/>
-          </a:p>
-        </p:txBody>
-      </p:sp>
-    </p:spTree>
-  </p:cSld>
-  <p:clrMapOvr>
-    <a:masterClrMapping/>
-  </p:clrMapOvr>
-</p:sld>
-</file>
-
-<file path=ppt/slides/slide6.xml><?xml version="1.0" encoding="utf-8"?>
-<p:sld xmlns:a="http://schemas.openxmlformats.org/drawingml/2006/main" xmlns:r="http://schemas.openxmlformats.org/officeDocument/2006/relationships" xmlns:p="http://schemas.openxmlformats.org/presentationml/2006/main">
-  <p:cSld name="Slide 6">
     <p:bg>
       <p:bgPr>
         <a:solidFill>
@@ -2510,13 +2991,13 @@
         <p:spPr>
           <a:xfrm>
             <a:off x="0" y="0"/>
-            <a:ext cx="9144000" cy="54864"/>
-          </a:xfrm>
-          <a:prstGeom prst="rect">
-            <a:avLst/>
-          </a:prstGeom>
-          <a:solidFill>
-            <a:srgbClr val="2A9D8F"/>
+            <a:ext cx="109728" cy="5143500"/>
+          </a:xfrm>
+          <a:prstGeom prst="rect">
+            <a:avLst/>
+          </a:prstGeom>
+          <a:solidFill>
+            <a:srgbClr val="E9C46A"/>
           </a:solidFill>
           <a:ln/>
         </p:spPr>
@@ -2529,8 +3010,8 @@
         </p:nvSpPr>
         <p:spPr>
           <a:xfrm>
-            <a:off x="548640" y="457200"/>
-            <a:ext cx="8046720" cy="640080"/>
+            <a:off x="731520" y="457200"/>
+            <a:ext cx="7772400" cy="731520"/>
           </a:xfrm>
           <a:prstGeom prst="rect">
             <a:avLst/>
@@ -2546,7 +3027,7 @@
               <a:buNone/>
             </a:pPr>
             <a:r>
-              <a:rPr lang="en-US" sz="2800" b="1" dirty="0">
+              <a:rPr lang="en-US" sz="3200" b="1" dirty="0">
                 <a:solidFill>
                   <a:srgbClr val="FFFFFF"/>
                 </a:solidFill>
@@ -2556,7 +3037,7 @@
               </a:rPr>
               <a:t>Key Takeaways</a:t>
             </a:r>
-            <a:endParaRPr lang="en-US" sz="2800" dirty="0"/>
+            <a:endParaRPr lang="en-US" sz="3200" dirty="0"/>
           </a:p>
         </p:txBody>
       </p:sp>
@@ -2568,8 +3049,8 @@
         </p:nvSpPr>
         <p:spPr>
           <a:xfrm>
-            <a:off x="731520" y="1371600"/>
-            <a:ext cx="7680960" cy="3200400"/>
+            <a:off x="731520" y="1463040"/>
+            <a:ext cx="7772400" cy="3200400"/>
           </a:xfrm>
           <a:prstGeom prst="rect">
             <a:avLst/>
@@ -2589,7 +3070,7 @@
               <a:buChar char="•"/>
             </a:pPr>
             <a:r>
-              <a:rPr lang="en-US" sz="1600" dirty="0">
+              <a:rPr lang="en-US" sz="1500" dirty="0">
                 <a:solidFill>
                   <a:srgbClr val="CADCFC"/>
                 </a:solidFill>
@@ -2597,9 +3078,9 @@
                 <a:ea typeface="Calibri" pitchFamily="34" charset="-122"/>
                 <a:cs typeface="Calibri" pitchFamily="34" charset="-120"/>
               </a:rPr>
-              <a:t>Safety first — PPE, hazard symbols, reporting</a:t>
-            </a:r>
-            <a:endParaRPr lang="en-US" sz="1600" dirty="0"/>
+              <a:t>Lab safety: goggles, no food, report accidents, know hazard symbols</a:t>
+            </a:r>
+            <a:endParaRPr lang="en-US" sz="1500" dirty="0"/>
           </a:p>
           <a:p>
             <a:pPr marL="342900" indent="-342900">
@@ -2610,7 +3091,7 @@
               <a:buChar char="•"/>
             </a:pPr>
             <a:r>
-              <a:rPr lang="en-US" sz="1600" dirty="0">
+              <a:rPr lang="en-US" sz="1500" dirty="0">
                 <a:solidFill>
                   <a:srgbClr val="CADCFC"/>
                 </a:solidFill>
@@ -2618,9 +3099,9 @@
                 <a:ea typeface="Calibri" pitchFamily="34" charset="-122"/>
                 <a:cs typeface="Calibri" pitchFamily="34" charset="-120"/>
               </a:rPr>
-              <a:t>Scientific method is a repeatable process</a:t>
-            </a:r>
-            <a:endParaRPr lang="en-US" sz="1600" dirty="0"/>
+              <a:t>Scientific method: 6 steps, hypothesis = If...then...because</a:t>
+            </a:r>
+            <a:endParaRPr lang="en-US" sz="1500" dirty="0"/>
           </a:p>
           <a:p>
             <a:pPr marL="342900" indent="-342900">
@@ -2631,7 +3112,7 @@
               <a:buChar char="•"/>
             </a:pPr>
             <a:r>
-              <a:rPr lang="en-US" sz="1600" dirty="0">
+              <a:rPr lang="en-US" sz="1500" dirty="0">
                 <a:solidFill>
                   <a:srgbClr val="CADCFC"/>
                 </a:solidFill>
@@ -2639,9 +3120,9 @@
                 <a:ea typeface="Calibri" pitchFamily="34" charset="-122"/>
                 <a:cs typeface="Calibri" pitchFamily="34" charset="-120"/>
               </a:rPr>
-              <a:t>Three types of variable: IV, DV, CV</a:t>
-            </a:r>
-            <a:endParaRPr lang="en-US" sz="1600" dirty="0"/>
+              <a:t>Variables: independent (change), dependent (measure), controlled (same)</a:t>
+            </a:r>
+            <a:endParaRPr lang="en-US" sz="1500" dirty="0"/>
           </a:p>
           <a:p>
             <a:pPr marL="342900" indent="-342900">
@@ -2652,7 +3133,7 @@
               <a:buChar char="•"/>
             </a:pPr>
             <a:r>
-              <a:rPr lang="en-US" sz="1600" dirty="0">
+              <a:rPr lang="en-US" sz="1500" dirty="0">
                 <a:solidFill>
                   <a:srgbClr val="CADCFC"/>
                 </a:solidFill>
@@ -2660,9 +3141,30 @@
                 <a:ea typeface="Calibri" pitchFamily="34" charset="-122"/>
                 <a:cs typeface="Calibri" pitchFamily="34" charset="-120"/>
               </a:rPr>
-              <a:t>Accurate measurement + clear data presentation = good science</a:t>
-            </a:r>
-            <a:endParaRPr lang="en-US" sz="1600" dirty="0"/>
+              <a:t>SI units: m, g, L, °C, s — read at eye level</a:t>
+            </a:r>
+            <a:endParaRPr lang="en-US" sz="1500" dirty="0"/>
+          </a:p>
+          <a:p>
+            <a:pPr marL="342900" indent="-342900">
+              <a:spcAft>
+                <a:spcPts val="1000"/>
+              </a:spcAft>
+              <a:buSzPct val="100000"/>
+              <a:buChar char="•"/>
+            </a:pPr>
+            <a:r>
+              <a:rPr lang="en-US" sz="1500" dirty="0">
+                <a:solidFill>
+                  <a:srgbClr val="CADCFC"/>
+                </a:solidFill>
+                <a:latin typeface="Calibri" pitchFamily="34" charset="0"/>
+                <a:ea typeface="Calibri" pitchFamily="34" charset="-122"/>
+                <a:cs typeface="Calibri" pitchFamily="34" charset="-120"/>
+              </a:rPr>
+              <a:t>Graphs: bar (categories), line (continuous), pie (proportions)</a:t>
+            </a:r>
+            <a:endParaRPr lang="en-US" sz="1500" dirty="0"/>
           </a:p>
         </p:txBody>
       </p:sp>
@@ -2674,8 +3176,8 @@
         </p:nvSpPr>
         <p:spPr>
           <a:xfrm>
-            <a:off x="548640" y="4572000"/>
-            <a:ext cx="3657600" cy="274320"/>
+            <a:off x="731520" y="4572000"/>
+            <a:ext cx="7772400" cy="365760"/>
           </a:xfrm>
           <a:prstGeom prst="rect">
             <a:avLst/>
@@ -2691,14 +3193,17 @@
               <a:buNone/>
             </a:pPr>
             <a:r>
-              <a:rPr lang="en-US" sz="1000" dirty="0">
+              <a:rPr lang="en-US" sz="1100" dirty="0">
                 <a:solidFill>
-                  <a:srgbClr val="6B6660"/>
+                  <a:srgbClr val="E9C46A"/>
                 </a:solidFill>
+                <a:latin typeface="Calibri" pitchFamily="34" charset="0"/>
+                <a:ea typeface="Calibri" pitchFamily="34" charset="-122"/>
+                <a:cs typeface="Calibri" pitchFamily="34" charset="-120"/>
               </a:rPr>
               <a:t>mrzocchi.com</a:t>
             </a:r>
-            <a:endParaRPr lang="en-US" sz="1000" dirty="0"/>
+            <a:endParaRPr lang="en-US" sz="1100" dirty="0"/>
           </a:p>
         </p:txBody>
       </p:sp>

--- a/static/ppts/G6_Sci_T1_Full_Revision.pptx
+++ b/static/ppts/G6_Sci_T1_Full_Revision.pptx
@@ -10,9 +10,13 @@
     <p:sldId id="258" r:id="rId4"/>
     <p:sldId id="259" r:id="rId5"/>
     <p:sldId id="260" r:id="rId6"/>
+    <p:sldId id="261" r:id="rId7"/>
+    <p:sldId id="262" r:id="rId8"/>
+    <p:sldId id="263" r:id="rId9"/>
+    <p:sldId id="264" r:id="rId10"/>
   </p:sldIdLst>
   <p:notesMasterIdLst>
-    <p:notesMasterId r:id="rId7"/>
+    <p:notesMasterId r:id="rId11"/>
   </p:notesMasterIdLst>
   <p:sldSz cx="9144000" cy="5143500"/>
   <p:notesSz cx="5143500" cy="9144000"/>
@@ -900,6 +904,358 @@
 </p:notes>
 </file>
 
+<file path=ppt/notesSlides/notesSlide6.xml><?xml version="1.0" encoding="utf-8"?>
+<p:notes xmlns:a="http://schemas.openxmlformats.org/drawingml/2006/main" xmlns:r="http://schemas.openxmlformats.org/officeDocument/2006/relationships" xmlns:p="http://schemas.openxmlformats.org/presentationml/2006/main">
+  <p:cSld>
+    <p:spTree>
+      <p:nvGrpSpPr>
+        <p:cNvPr id="1" name=""/>
+        <p:cNvGrpSpPr/>
+        <p:nvPr/>
+      </p:nvGrpSpPr>
+      <p:grpSpPr>
+        <a:xfrm>
+          <a:off x="0" y="0"/>
+          <a:ext cx="0" cy="0"/>
+          <a:chOff x="0" y="0"/>
+          <a:chExt cx="0" cy="0"/>
+        </a:xfrm>
+      </p:grpSpPr>
+      <p:sp>
+        <p:nvSpPr>
+          <p:cNvPr id="2" name="Slide Image Placeholder 1"/>
+          <p:cNvSpPr>
+            <a:spLocks noGrp="1" noRot="1" noChangeAspect="1"/>
+          </p:cNvSpPr>
+          <p:nvPr>
+            <p:ph type="sldImg"/>
+          </p:nvPr>
+        </p:nvSpPr>
+        <p:spPr/>
+      </p:sp>
+      <p:sp>
+        <p:nvSpPr>
+          <p:cNvPr id="3" name="Notes Placeholder 2"/>
+          <p:cNvSpPr>
+            <a:spLocks noGrp="1"/>
+          </p:cNvSpPr>
+          <p:nvPr>
+            <p:ph type="body" idx="1"/>
+          </p:nvPr>
+        </p:nvSpPr>
+        <p:spPr/>
+        <p:txBody>
+          <a:bodyPr/>
+          <a:lstStyle/>
+          <a:p>
+            <a:r>
+              <a:rPr lang="en-US" dirty="0"/>
+              <a:t/>
+            </a:r>
+            <a:endParaRPr lang="en-US" dirty="0"/>
+          </a:p>
+        </p:txBody>
+      </p:sp>
+      <p:sp>
+        <p:nvSpPr>
+          <p:cNvPr id="4" name="Slide Number Placeholder 3"/>
+          <p:cNvSpPr>
+            <a:spLocks noGrp="1"/>
+          </p:cNvSpPr>
+          <p:nvPr>
+            <p:ph type="sldNum" sz="quarter" idx="10"/>
+          </p:nvPr>
+        </p:nvSpPr>
+        <p:spPr/>
+        <p:txBody>
+          <a:bodyPr/>
+          <a:lstStyle/>
+          <a:p>
+            <a:fld id="{F7021451-1387-4CA6-816F-3879F97B5CBC}" type="slidenum">
+              <a:rPr lang="en-US"/>
+              <a:t>6</a:t>
+            </a:fld>
+            <a:endParaRPr lang="en-US"/>
+          </a:p>
+        </p:txBody>
+      </p:sp>
+    </p:spTree>
+    <p:extLst>
+      <p:ext uri="{BB962C8B-B14F-4D97-AF65-F5344CB8AC3E}">
+        <p14:creationId xmlns:p14="http://schemas.microsoft.com/office/powerpoint/2010/main" val="1024086991"/>
+      </p:ext>
+    </p:extLst>
+  </p:cSld>
+  <p:clrMapOvr>
+    <a:masterClrMapping/>
+  </p:clrMapOvr>
+</p:notes>
+</file>
+
+<file path=ppt/notesSlides/notesSlide7.xml><?xml version="1.0" encoding="utf-8"?>
+<p:notes xmlns:a="http://schemas.openxmlformats.org/drawingml/2006/main" xmlns:r="http://schemas.openxmlformats.org/officeDocument/2006/relationships" xmlns:p="http://schemas.openxmlformats.org/presentationml/2006/main">
+  <p:cSld>
+    <p:spTree>
+      <p:nvGrpSpPr>
+        <p:cNvPr id="1" name=""/>
+        <p:cNvGrpSpPr/>
+        <p:nvPr/>
+      </p:nvGrpSpPr>
+      <p:grpSpPr>
+        <a:xfrm>
+          <a:off x="0" y="0"/>
+          <a:ext cx="0" cy="0"/>
+          <a:chOff x="0" y="0"/>
+          <a:chExt cx="0" cy="0"/>
+        </a:xfrm>
+      </p:grpSpPr>
+      <p:sp>
+        <p:nvSpPr>
+          <p:cNvPr id="2" name="Slide Image Placeholder 1"/>
+          <p:cNvSpPr>
+            <a:spLocks noGrp="1" noRot="1" noChangeAspect="1"/>
+          </p:cNvSpPr>
+          <p:nvPr>
+            <p:ph type="sldImg"/>
+          </p:nvPr>
+        </p:nvSpPr>
+        <p:spPr/>
+      </p:sp>
+      <p:sp>
+        <p:nvSpPr>
+          <p:cNvPr id="3" name="Notes Placeholder 2"/>
+          <p:cNvSpPr>
+            <a:spLocks noGrp="1"/>
+          </p:cNvSpPr>
+          <p:nvPr>
+            <p:ph type="body" idx="1"/>
+          </p:nvPr>
+        </p:nvSpPr>
+        <p:spPr/>
+        <p:txBody>
+          <a:bodyPr/>
+          <a:lstStyle/>
+          <a:p>
+            <a:r>
+              <a:rPr lang="en-US" dirty="0"/>
+              <a:t/>
+            </a:r>
+            <a:endParaRPr lang="en-US" dirty="0"/>
+          </a:p>
+        </p:txBody>
+      </p:sp>
+      <p:sp>
+        <p:nvSpPr>
+          <p:cNvPr id="4" name="Slide Number Placeholder 3"/>
+          <p:cNvSpPr>
+            <a:spLocks noGrp="1"/>
+          </p:cNvSpPr>
+          <p:nvPr>
+            <p:ph type="sldNum" sz="quarter" idx="10"/>
+          </p:nvPr>
+        </p:nvSpPr>
+        <p:spPr/>
+        <p:txBody>
+          <a:bodyPr/>
+          <a:lstStyle/>
+          <a:p>
+            <a:fld id="{F7021451-1387-4CA6-816F-3879F97B5CBC}" type="slidenum">
+              <a:rPr lang="en-US"/>
+              <a:t>7</a:t>
+            </a:fld>
+            <a:endParaRPr lang="en-US"/>
+          </a:p>
+        </p:txBody>
+      </p:sp>
+    </p:spTree>
+    <p:extLst>
+      <p:ext uri="{BB962C8B-B14F-4D97-AF65-F5344CB8AC3E}">
+        <p14:creationId xmlns:p14="http://schemas.microsoft.com/office/powerpoint/2010/main" val="1024086991"/>
+      </p:ext>
+    </p:extLst>
+  </p:cSld>
+  <p:clrMapOvr>
+    <a:masterClrMapping/>
+  </p:clrMapOvr>
+</p:notes>
+</file>
+
+<file path=ppt/notesSlides/notesSlide8.xml><?xml version="1.0" encoding="utf-8"?>
+<p:notes xmlns:a="http://schemas.openxmlformats.org/drawingml/2006/main" xmlns:r="http://schemas.openxmlformats.org/officeDocument/2006/relationships" xmlns:p="http://schemas.openxmlformats.org/presentationml/2006/main">
+  <p:cSld>
+    <p:spTree>
+      <p:nvGrpSpPr>
+        <p:cNvPr id="1" name=""/>
+        <p:cNvGrpSpPr/>
+        <p:nvPr/>
+      </p:nvGrpSpPr>
+      <p:grpSpPr>
+        <a:xfrm>
+          <a:off x="0" y="0"/>
+          <a:ext cx="0" cy="0"/>
+          <a:chOff x="0" y="0"/>
+          <a:chExt cx="0" cy="0"/>
+        </a:xfrm>
+      </p:grpSpPr>
+      <p:sp>
+        <p:nvSpPr>
+          <p:cNvPr id="2" name="Slide Image Placeholder 1"/>
+          <p:cNvSpPr>
+            <a:spLocks noGrp="1" noRot="1" noChangeAspect="1"/>
+          </p:cNvSpPr>
+          <p:nvPr>
+            <p:ph type="sldImg"/>
+          </p:nvPr>
+        </p:nvSpPr>
+        <p:spPr/>
+      </p:sp>
+      <p:sp>
+        <p:nvSpPr>
+          <p:cNvPr id="3" name="Notes Placeholder 2"/>
+          <p:cNvSpPr>
+            <a:spLocks noGrp="1"/>
+          </p:cNvSpPr>
+          <p:nvPr>
+            <p:ph type="body" idx="1"/>
+          </p:nvPr>
+        </p:nvSpPr>
+        <p:spPr/>
+        <p:txBody>
+          <a:bodyPr/>
+          <a:lstStyle/>
+          <a:p>
+            <a:r>
+              <a:rPr lang="en-US" dirty="0"/>
+              <a:t/>
+            </a:r>
+            <a:endParaRPr lang="en-US" dirty="0"/>
+          </a:p>
+        </p:txBody>
+      </p:sp>
+      <p:sp>
+        <p:nvSpPr>
+          <p:cNvPr id="4" name="Slide Number Placeholder 3"/>
+          <p:cNvSpPr>
+            <a:spLocks noGrp="1"/>
+          </p:cNvSpPr>
+          <p:nvPr>
+            <p:ph type="sldNum" sz="quarter" idx="10"/>
+          </p:nvPr>
+        </p:nvSpPr>
+        <p:spPr/>
+        <p:txBody>
+          <a:bodyPr/>
+          <a:lstStyle/>
+          <a:p>
+            <a:fld id="{F7021451-1387-4CA6-816F-3879F97B5CBC}" type="slidenum">
+              <a:rPr lang="en-US"/>
+              <a:t>8</a:t>
+            </a:fld>
+            <a:endParaRPr lang="en-US"/>
+          </a:p>
+        </p:txBody>
+      </p:sp>
+    </p:spTree>
+    <p:extLst>
+      <p:ext uri="{BB962C8B-B14F-4D97-AF65-F5344CB8AC3E}">
+        <p14:creationId xmlns:p14="http://schemas.microsoft.com/office/powerpoint/2010/main" val="1024086991"/>
+      </p:ext>
+    </p:extLst>
+  </p:cSld>
+  <p:clrMapOvr>
+    <a:masterClrMapping/>
+  </p:clrMapOvr>
+</p:notes>
+</file>
+
+<file path=ppt/notesSlides/notesSlide9.xml><?xml version="1.0" encoding="utf-8"?>
+<p:notes xmlns:a="http://schemas.openxmlformats.org/drawingml/2006/main" xmlns:r="http://schemas.openxmlformats.org/officeDocument/2006/relationships" xmlns:p="http://schemas.openxmlformats.org/presentationml/2006/main">
+  <p:cSld>
+    <p:spTree>
+      <p:nvGrpSpPr>
+        <p:cNvPr id="1" name=""/>
+        <p:cNvGrpSpPr/>
+        <p:nvPr/>
+      </p:nvGrpSpPr>
+      <p:grpSpPr>
+        <a:xfrm>
+          <a:off x="0" y="0"/>
+          <a:ext cx="0" cy="0"/>
+          <a:chOff x="0" y="0"/>
+          <a:chExt cx="0" cy="0"/>
+        </a:xfrm>
+      </p:grpSpPr>
+      <p:sp>
+        <p:nvSpPr>
+          <p:cNvPr id="2" name="Slide Image Placeholder 1"/>
+          <p:cNvSpPr>
+            <a:spLocks noGrp="1" noRot="1" noChangeAspect="1"/>
+          </p:cNvSpPr>
+          <p:nvPr>
+            <p:ph type="sldImg"/>
+          </p:nvPr>
+        </p:nvSpPr>
+        <p:spPr/>
+      </p:sp>
+      <p:sp>
+        <p:nvSpPr>
+          <p:cNvPr id="3" name="Notes Placeholder 2"/>
+          <p:cNvSpPr>
+            <a:spLocks noGrp="1"/>
+          </p:cNvSpPr>
+          <p:nvPr>
+            <p:ph type="body" idx="1"/>
+          </p:nvPr>
+        </p:nvSpPr>
+        <p:spPr/>
+        <p:txBody>
+          <a:bodyPr/>
+          <a:lstStyle/>
+          <a:p>
+            <a:r>
+              <a:rPr lang="en-US" dirty="0"/>
+              <a:t/>
+            </a:r>
+            <a:endParaRPr lang="en-US" dirty="0"/>
+          </a:p>
+        </p:txBody>
+      </p:sp>
+      <p:sp>
+        <p:nvSpPr>
+          <p:cNvPr id="4" name="Slide Number Placeholder 3"/>
+          <p:cNvSpPr>
+            <a:spLocks noGrp="1"/>
+          </p:cNvSpPr>
+          <p:nvPr>
+            <p:ph type="sldNum" sz="quarter" idx="10"/>
+          </p:nvPr>
+        </p:nvSpPr>
+        <p:spPr/>
+        <p:txBody>
+          <a:bodyPr/>
+          <a:lstStyle/>
+          <a:p>
+            <a:fld id="{F7021451-1387-4CA6-816F-3879F97B5CBC}" type="slidenum">
+              <a:rPr lang="en-US"/>
+              <a:t>9</a:t>
+            </a:fld>
+            <a:endParaRPr lang="en-US"/>
+          </a:p>
+        </p:txBody>
+      </p:sp>
+    </p:spTree>
+    <p:extLst>
+      <p:ext uri="{BB962C8B-B14F-4D97-AF65-F5344CB8AC3E}">
+        <p14:creationId xmlns:p14="http://schemas.microsoft.com/office/powerpoint/2010/main" val="1024086991"/>
+      </p:ext>
+    </p:extLst>
+  </p:cSld>
+  <p:clrMapOvr>
+    <a:masterClrMapping/>
+  </p:clrMapOvr>
+</p:notes>
+</file>
+
 <file path=ppt/slideLayouts/slideLayout1.xml><?xml version="1.0" encoding="utf-8"?>
 <p:sldLayout xmlns:a="http://schemas.openxmlformats.org/drawingml/2006/main" xmlns:r="http://schemas.openxmlformats.org/officeDocument/2006/relationships" xmlns:p="http://schemas.openxmlformats.org/presentationml/2006/main" preserve="1">
   <p:cSld name="DEFAULT">
@@ -1210,13 +1566,6 @@
 <file path=ppt/slides/slide1.xml><?xml version="1.0" encoding="utf-8"?>
 <p:sld xmlns:a="http://schemas.openxmlformats.org/drawingml/2006/main" xmlns:r="http://schemas.openxmlformats.org/officeDocument/2006/relationships" xmlns:p="http://schemas.openxmlformats.org/presentationml/2006/main">
   <p:cSld name="Slide 1">
-    <p:bg>
-      <p:bgPr>
-        <a:solidFill>
-          <a:srgbClr val="1B2A4A"/>
-        </a:solidFill>
-      </p:bgPr>
-    </p:bg>
     <p:spTree>
       <p:nvGrpSpPr>
         <p:cNvPr id="1" name=""/>
@@ -1240,7 +1589,27 @@
         <p:spPr>
           <a:xfrm>
             <a:off x="0" y="0"/>
-            <a:ext cx="109728" cy="5143500"/>
+            <a:ext cx="9144000" cy="5143500"/>
+          </a:xfrm>
+          <a:prstGeom prst="rect">
+            <a:avLst/>
+          </a:prstGeom>
+          <a:solidFill>
+            <a:srgbClr val="1B2A4A"/>
+          </a:solidFill>
+          <a:ln/>
+        </p:spPr>
+      </p:sp>
+      <p:sp>
+        <p:nvSpPr>
+          <p:cNvPr id="3" name="Shape 1"/>
+          <p:cNvSpPr/>
+          <p:nvPr/>
+        </p:nvSpPr>
+        <p:spPr>
+          <a:xfrm>
+            <a:off x="0" y="4777740"/>
+            <a:ext cx="9144000" cy="365760"/>
           </a:xfrm>
           <a:prstGeom prst="rect">
             <a:avLst/>
@@ -1253,14 +1622,36 @@
       </p:sp>
       <p:sp>
         <p:nvSpPr>
-          <p:cNvPr id="3" name="Text 1"/>
-          <p:cNvSpPr/>
-          <p:nvPr/>
-        </p:nvSpPr>
-        <p:spPr>
-          <a:xfrm>
-            <a:off x="731520" y="1097280"/>
-            <a:ext cx="7772400" cy="1371600"/>
+          <p:cNvPr id="4" name="Shape 2"/>
+          <p:cNvSpPr/>
+          <p:nvPr/>
+        </p:nvSpPr>
+        <p:spPr>
+          <a:xfrm>
+            <a:off x="6858000" y="-1371600"/>
+            <a:ext cx="4572000" cy="4572000"/>
+          </a:xfrm>
+          <a:prstGeom prst="ellipse">
+            <a:avLst/>
+          </a:prstGeom>
+          <a:solidFill>
+            <a:srgbClr val="2A9D8F">
+              <a:alpha val="12000"/>
+            </a:srgbClr>
+          </a:solidFill>
+          <a:ln/>
+        </p:spPr>
+      </p:sp>
+      <p:sp>
+        <p:nvSpPr>
+          <p:cNvPr id="5" name="Text 3"/>
+          <p:cNvSpPr/>
+          <p:nvPr/>
+        </p:nvSpPr>
+        <p:spPr>
+          <a:xfrm>
+            <a:off x="731520" y="914400"/>
+            <a:ext cx="7680960" cy="457200"/>
           </a:xfrm>
           <a:prstGeom prst="rect">
             <a:avLst/>
@@ -1276,7 +1667,46 @@
               <a:buNone/>
             </a:pPr>
             <a:r>
-              <a:rPr lang="en-US" sz="4000" b="1" dirty="0">
+              <a:rPr lang="en-US" sz="1300" b="1" spc="500" kern="0" dirty="0">
+                <a:solidFill>
+                  <a:srgbClr val="2A9D8F"/>
+                </a:solidFill>
+                <a:latin typeface="Calibri" pitchFamily="34" charset="0"/>
+                <a:ea typeface="Calibri" pitchFamily="34" charset="-122"/>
+                <a:cs typeface="Calibri" pitchFamily="34" charset="-120"/>
+              </a:rPr>
+              <a:t>GRADE 6 SCIENCE</a:t>
+            </a:r>
+            <a:endParaRPr lang="en-US" sz="1300" dirty="0"/>
+          </a:p>
+        </p:txBody>
+      </p:sp>
+      <p:sp>
+        <p:nvSpPr>
+          <p:cNvPr id="6" name="Text 4"/>
+          <p:cNvSpPr/>
+          <p:nvPr/>
+        </p:nvSpPr>
+        <p:spPr>
+          <a:xfrm>
+            <a:off x="731520" y="1463040"/>
+            <a:ext cx="6858000" cy="1645920"/>
+          </a:xfrm>
+          <a:prstGeom prst="rect">
+            <a:avLst/>
+          </a:prstGeom>
+          <a:noFill/>
+          <a:ln/>
+        </p:spPr>
+        <p:txBody>
+          <a:bodyPr wrap="square" rtlCol="0" anchor="t"/>
+          <a:lstStyle/>
+          <a:p>
+            <a:pPr indent="0" marL="0">
+              <a:buNone/>
+            </a:pPr>
+            <a:r>
+              <a:rPr lang="en-US" sz="3800" b="1" dirty="0">
                 <a:solidFill>
                   <a:srgbClr val="FFFFFF"/>
                 </a:solidFill>
@@ -1284,46 +1714,63 @@
                 <a:ea typeface="Georgia" pitchFamily="34" charset="-122"/>
                 <a:cs typeface="Georgia" pitchFamily="34" charset="-120"/>
               </a:rPr>
-              <a:t>Scientific Skills — Full Revision</a:t>
-            </a:r>
-            <a:endParaRPr lang="en-US" sz="4000" dirty="0"/>
-          </a:p>
-        </p:txBody>
-      </p:sp>
-      <p:sp>
-        <p:nvSpPr>
-          <p:cNvPr id="4" name="Text 2"/>
-          <p:cNvSpPr/>
-          <p:nvPr/>
-        </p:nvSpPr>
-        <p:spPr>
-          <a:xfrm>
-            <a:off x="731520" y="2560320"/>
-            <a:ext cx="7772400" cy="548640"/>
-          </a:xfrm>
-          <a:prstGeom prst="rect">
-            <a:avLst/>
-          </a:prstGeom>
-          <a:noFill/>
-          <a:ln/>
-        </p:spPr>
-        <p:txBody>
-          <a:bodyPr wrap="square" rtlCol="0" anchor="ctr"/>
-          <a:lstStyle/>
+              <a:t>Scientific Skills</a:t>
+            </a:r>
+            <a:endParaRPr lang="en-US" sz="3800" dirty="0"/>
+          </a:p>
           <a:p>
             <a:pPr indent="0" marL="0">
               <a:buNone/>
             </a:pPr>
             <a:r>
-              <a:rPr lang="en-US" sz="1600" dirty="0">
-                <a:solidFill>
-                  <a:srgbClr val="E9C46A"/>
+              <a:rPr lang="en-US" sz="3800" b="1" dirty="0">
+                <a:solidFill>
+                  <a:srgbClr val="FFFFFF"/>
+                </a:solidFill>
+                <a:latin typeface="Georgia" pitchFamily="34" charset="0"/>
+                <a:ea typeface="Georgia" pitchFamily="34" charset="-122"/>
+                <a:cs typeface="Georgia" pitchFamily="34" charset="-120"/>
+              </a:rPr>
+              <a:t>Full Revision</a:t>
+            </a:r>
+            <a:endParaRPr lang="en-US" sz="3800" dirty="0"/>
+          </a:p>
+        </p:txBody>
+      </p:sp>
+      <p:sp>
+        <p:nvSpPr>
+          <p:cNvPr id="7" name="Text 5"/>
+          <p:cNvSpPr/>
+          <p:nvPr/>
+        </p:nvSpPr>
+        <p:spPr>
+          <a:xfrm>
+            <a:off x="731520" y="3200400"/>
+            <a:ext cx="6400800" cy="548640"/>
+          </a:xfrm>
+          <a:prstGeom prst="rect">
+            <a:avLst/>
+          </a:prstGeom>
+          <a:noFill/>
+          <a:ln/>
+        </p:spPr>
+        <p:txBody>
+          <a:bodyPr wrap="square" rtlCol="0" anchor="ctr"/>
+          <a:lstStyle/>
+          <a:p>
+            <a:pPr indent="0" marL="0">
+              <a:buNone/>
+            </a:pPr>
+            <a:r>
+              <a:rPr lang="en-US" sz="1600" i="1" dirty="0">
+                <a:solidFill>
+                  <a:srgbClr val="9B9690"/>
                 </a:solidFill>
                 <a:latin typeface="Calibri" pitchFamily="34" charset="0"/>
                 <a:ea typeface="Calibri" pitchFamily="34" charset="-122"/>
                 <a:cs typeface="Calibri" pitchFamily="34" charset="-120"/>
               </a:rPr>
-              <a:t>Grade 6 Science · Mr Zocchi</a:t>
+              <a:t>Everything you need for the test</a:t>
             </a:r>
             <a:endParaRPr lang="en-US" sz="1600" dirty="0"/>
           </a:p>
@@ -1331,36 +1778,14 @@
       </p:sp>
       <p:sp>
         <p:nvSpPr>
-          <p:cNvPr id="5" name="Shape 3"/>
-          <p:cNvSpPr/>
-          <p:nvPr/>
-        </p:nvSpPr>
-        <p:spPr>
-          <a:xfrm>
-            <a:off x="731520" y="3474720"/>
-            <a:ext cx="2011680" cy="411480"/>
-          </a:xfrm>
-          <a:prstGeom prst="roundRect">
-            <a:avLst>
-              <a:gd name="adj" fmla="val 17778"/>
-            </a:avLst>
-          </a:prstGeom>
-          <a:solidFill>
-            <a:srgbClr val="2A9D8F"/>
-          </a:solidFill>
-          <a:ln/>
-        </p:spPr>
-      </p:sp>
-      <p:sp>
-        <p:nvSpPr>
-          <p:cNvPr id="6" name="Text 4"/>
-          <p:cNvSpPr/>
-          <p:nvPr/>
-        </p:nvSpPr>
-        <p:spPr>
-          <a:xfrm>
-            <a:off x="731520" y="3474720"/>
-            <a:ext cx="2011680" cy="411480"/>
+          <p:cNvPr id="8" name="Text 6"/>
+          <p:cNvSpPr/>
+          <p:nvPr/>
+        </p:nvSpPr>
+        <p:spPr>
+          <a:xfrm>
+            <a:off x="731520" y="4297680"/>
+            <a:ext cx="2743200" cy="365760"/>
           </a:xfrm>
           <a:prstGeom prst="rect">
             <a:avLst/>
@@ -1372,21 +1797,21 @@
           <a:bodyPr wrap="square" rtlCol="0" anchor="ctr"/>
           <a:lstStyle/>
           <a:p>
-            <a:pPr algn="ctr" indent="0" marL="0">
+            <a:pPr indent="0" marL="0">
               <a:buNone/>
             </a:pPr>
             <a:r>
-              <a:rPr lang="en-US" sz="1200" b="1" dirty="0">
-                <a:solidFill>
-                  <a:srgbClr val="FFFFFF"/>
+              <a:rPr lang="en-US" sz="1100" dirty="0">
+                <a:solidFill>
+                  <a:srgbClr val="9B9690"/>
                 </a:solidFill>
                 <a:latin typeface="Calibri" pitchFamily="34" charset="0"/>
                 <a:ea typeface="Calibri" pitchFamily="34" charset="-122"/>
                 <a:cs typeface="Calibri" pitchFamily="34" charset="-120"/>
               </a:rPr>
-              <a:t>Term 1 · Scientific Skills</a:t>
-            </a:r>
-            <a:endParaRPr lang="en-US" sz="1200" dirty="0"/>
+              <a:t>mrzocchi.com</a:t>
+            </a:r>
+            <a:endParaRPr lang="en-US" sz="1100" dirty="0"/>
           </a:p>
         </p:txBody>
       </p:sp>
@@ -1401,13 +1826,6 @@
 <file path=ppt/slides/slide2.xml><?xml version="1.0" encoding="utf-8"?>
 <p:sld xmlns:a="http://schemas.openxmlformats.org/drawingml/2006/main" xmlns:r="http://schemas.openxmlformats.org/officeDocument/2006/relationships" xmlns:p="http://schemas.openxmlformats.org/presentationml/2006/main">
   <p:cSld name="Slide 2">
-    <p:bg>
-      <p:bgPr>
-        <a:solidFill>
-          <a:srgbClr val="FAF8F5"/>
-        </a:solidFill>
-      </p:bgPr>
-    </p:bg>
     <p:spTree>
       <p:nvGrpSpPr>
         <p:cNvPr id="1" name=""/>
@@ -1431,7 +1849,27 @@
         <p:spPr>
           <a:xfrm>
             <a:off x="0" y="0"/>
-            <a:ext cx="9144000" cy="54864"/>
+            <a:ext cx="9144000" cy="5143500"/>
+          </a:xfrm>
+          <a:prstGeom prst="rect">
+            <a:avLst/>
+          </a:prstGeom>
+          <a:solidFill>
+            <a:srgbClr val="1B2A4A"/>
+          </a:solidFill>
+          <a:ln/>
+        </p:spPr>
+      </p:sp>
+      <p:sp>
+        <p:nvSpPr>
+          <p:cNvPr id="3" name="Shape 1"/>
+          <p:cNvSpPr/>
+          <p:nvPr/>
+        </p:nvSpPr>
+        <p:spPr>
+          <a:xfrm>
+            <a:off x="731520" y="1828800"/>
+            <a:ext cx="73152" cy="1463040"/>
           </a:xfrm>
           <a:prstGeom prst="rect">
             <a:avLst/>
@@ -1444,14 +1882,14 @@
       </p:sp>
       <p:sp>
         <p:nvSpPr>
-          <p:cNvPr id="3" name="Text 1"/>
-          <p:cNvSpPr/>
-          <p:nvPr/>
-        </p:nvSpPr>
-        <p:spPr>
-          <a:xfrm>
-            <a:off x="7772400" y="4709160"/>
-            <a:ext cx="1097280" cy="320040"/>
+          <p:cNvPr id="4" name="Text 2"/>
+          <p:cNvSpPr/>
+          <p:nvPr/>
+        </p:nvSpPr>
+        <p:spPr>
+          <a:xfrm>
+            <a:off x="1097280" y="1463040"/>
+            <a:ext cx="1097280" cy="1097280"/>
           </a:xfrm>
           <a:prstGeom prst="rect">
             <a:avLst/>
@@ -1463,125 +1901,34 @@
           <a:bodyPr wrap="square" rtlCol="0" anchor="ctr"/>
           <a:lstStyle/>
           <a:p>
-            <a:pPr algn="r" indent="0" marL="0">
+            <a:pPr algn="l" indent="0" marL="0">
               <a:buNone/>
             </a:pPr>
             <a:r>
-              <a:rPr lang="en-US" sz="900" dirty="0">
-                <a:solidFill>
-                  <a:srgbClr val="6B6660"/>
-                </a:solidFill>
-                <a:latin typeface="Calibri" pitchFamily="34" charset="0"/>
-                <a:ea typeface="Calibri" pitchFamily="34" charset="-122"/>
-                <a:cs typeface="Calibri" pitchFamily="34" charset="-120"/>
-              </a:rPr>
-              <a:t>2 / 5</a:t>
-            </a:r>
-            <a:endParaRPr lang="en-US" sz="900" dirty="0"/>
-          </a:p>
-        </p:txBody>
-      </p:sp>
-      <p:sp>
-        <p:nvSpPr>
-          <p:cNvPr id="4" name="Text 2"/>
-          <p:cNvSpPr/>
-          <p:nvPr/>
-        </p:nvSpPr>
-        <p:spPr>
-          <a:xfrm>
-            <a:off x="457200" y="274320"/>
-            <a:ext cx="8229600" cy="640080"/>
-          </a:xfrm>
-          <a:prstGeom prst="rect">
-            <a:avLst/>
-          </a:prstGeom>
-          <a:noFill/>
-          <a:ln/>
-        </p:spPr>
-        <p:txBody>
-          <a:bodyPr wrap="square" rtlCol="0" anchor="ctr"/>
-          <a:lstStyle/>
-          <a:p>
-            <a:pPr indent="0" marL="0">
-              <a:buNone/>
-            </a:pPr>
-            <a:r>
-              <a:rPr lang="en-US" sz="2600" b="1" dirty="0">
-                <a:solidFill>
-                  <a:srgbClr val="1B2A4A"/>
+              <a:rPr lang="en-US" sz="4800" b="1" dirty="0">
+                <a:solidFill>
+                  <a:srgbClr val="2A9D8F"/>
                 </a:solidFill>
                 <a:latin typeface="Georgia" pitchFamily="34" charset="0"/>
                 <a:ea typeface="Georgia" pitchFamily="34" charset="-122"/>
                 <a:cs typeface="Georgia" pitchFamily="34" charset="-120"/>
               </a:rPr>
-              <a:t>Lab Safety Essentials</a:t>
-            </a:r>
-            <a:endParaRPr lang="en-US" sz="2600" dirty="0"/>
-          </a:p>
-        </p:txBody>
-      </p:sp>
-      <p:sp>
-        <p:nvSpPr>
-          <p:cNvPr id="5" name="Shape 3"/>
-          <p:cNvSpPr/>
-          <p:nvPr/>
-        </p:nvSpPr>
-        <p:spPr>
-          <a:xfrm>
-            <a:off x="457200" y="1188720"/>
-            <a:ext cx="2560320" cy="1828800"/>
-          </a:xfrm>
-          <a:prstGeom prst="rect">
-            <a:avLst/>
-          </a:prstGeom>
-          <a:solidFill>
-            <a:srgbClr val="FFFFFF"/>
-          </a:solidFill>
-          <a:ln w="12700">
-            <a:solidFill>
-              <a:srgbClr val="E5E2DC"/>
-            </a:solidFill>
-            <a:prstDash val="solid"/>
-          </a:ln>
-          <a:effectLst>
-            <a:outerShdw sx="100000" sy="100000" kx="0" ky="0" algn="bl" rotWithShape="0" blurRad="50800" dist="25400" dir="8100000">
-              <a:srgbClr val="000000">
-                <a:alpha val="10000"/>
-              </a:srgbClr>
-            </a:outerShdw>
-          </a:effectLst>
-        </p:spPr>
-      </p:sp>
-      <p:sp>
-        <p:nvSpPr>
-          <p:cNvPr id="6" name="Shape 4"/>
-          <p:cNvSpPr/>
-          <p:nvPr/>
-        </p:nvSpPr>
-        <p:spPr>
-          <a:xfrm>
-            <a:off x="457200" y="1188720"/>
-            <a:ext cx="2560320" cy="54864"/>
-          </a:xfrm>
-          <a:prstGeom prst="rect">
-            <a:avLst/>
-          </a:prstGeom>
-          <a:solidFill>
-            <a:srgbClr val="2A9D8F"/>
-          </a:solidFill>
-          <a:ln/>
-        </p:spPr>
-      </p:sp>
-      <p:sp>
-        <p:nvSpPr>
-          <p:cNvPr id="7" name="Text 5"/>
-          <p:cNvSpPr/>
-          <p:nvPr/>
-        </p:nvSpPr>
-        <p:spPr>
-          <a:xfrm>
-            <a:off x="594360" y="1325880"/>
-            <a:ext cx="2286000" cy="365760"/>
+              <a:t>1</a:t>
+            </a:r>
+            <a:endParaRPr lang="en-US" sz="4800" dirty="0"/>
+          </a:p>
+        </p:txBody>
+      </p:sp>
+      <p:sp>
+        <p:nvSpPr>
+          <p:cNvPr id="5" name="Text 3"/>
+          <p:cNvSpPr/>
+          <p:nvPr/>
+        </p:nvSpPr>
+        <p:spPr>
+          <a:xfrm>
+            <a:off x="2194560" y="1920240"/>
+            <a:ext cx="5943600" cy="1097280"/>
           </a:xfrm>
           <a:prstGeom prst="rect">
             <a:avLst/>
@@ -1597,316 +1944,17 @@
               <a:buNone/>
             </a:pPr>
             <a:r>
-              <a:rPr lang="en-US" sz="1400" b="1" dirty="0">
-                <a:solidFill>
-                  <a:srgbClr val="1B2A4A"/>
-                </a:solidFill>
-                <a:latin typeface="Calibri" pitchFamily="34" charset="0"/>
-                <a:ea typeface="Calibri" pitchFamily="34" charset="-122"/>
-                <a:cs typeface="Calibri" pitchFamily="34" charset="-120"/>
-              </a:rPr>
-              <a:t>Rules</a:t>
-            </a:r>
-            <a:endParaRPr lang="en-US" sz="1400" dirty="0"/>
-          </a:p>
-        </p:txBody>
-      </p:sp>
-      <p:sp>
-        <p:nvSpPr>
-          <p:cNvPr id="8" name="Text 6"/>
-          <p:cNvSpPr/>
-          <p:nvPr/>
-        </p:nvSpPr>
-        <p:spPr>
-          <a:xfrm>
-            <a:off x="594360" y="1737360"/>
-            <a:ext cx="2286000" cy="1097280"/>
-          </a:xfrm>
-          <a:prstGeom prst="rect">
-            <a:avLst/>
-          </a:prstGeom>
-          <a:noFill/>
-          <a:ln/>
-        </p:spPr>
-        <p:txBody>
-          <a:bodyPr wrap="square" rtlCol="0" anchor="t"/>
-          <a:lstStyle/>
-          <a:p>
-            <a:pPr indent="0" marL="0">
-              <a:buNone/>
-            </a:pPr>
-            <a:r>
-              <a:rPr lang="en-US" sz="1100" dirty="0">
-                <a:solidFill>
-                  <a:srgbClr val="3D3A36"/>
-                </a:solidFill>
-                <a:latin typeface="Calibri" pitchFamily="34" charset="0"/>
-                <a:ea typeface="Calibri" pitchFamily="34" charset="-122"/>
-                <a:cs typeface="Calibri" pitchFamily="34" charset="-120"/>
-              </a:rPr>
-              <a:t>Goggles on. Hair tied. No eating/drinking. Report all accidents. Know where safety equipment is.</a:t>
-            </a:r>
-            <a:endParaRPr lang="en-US" sz="1100" dirty="0"/>
-          </a:p>
-        </p:txBody>
-      </p:sp>
-      <p:sp>
-        <p:nvSpPr>
-          <p:cNvPr id="9" name="Shape 7"/>
-          <p:cNvSpPr/>
-          <p:nvPr/>
-        </p:nvSpPr>
-        <p:spPr>
-          <a:xfrm>
-            <a:off x="3291840" y="1188720"/>
-            <a:ext cx="2560320" cy="1828800"/>
-          </a:xfrm>
-          <a:prstGeom prst="rect">
-            <a:avLst/>
-          </a:prstGeom>
-          <a:solidFill>
-            <a:srgbClr val="FFFFFF"/>
-          </a:solidFill>
-          <a:ln w="12700">
-            <a:solidFill>
-              <a:srgbClr val="E5E2DC"/>
-            </a:solidFill>
-            <a:prstDash val="solid"/>
-          </a:ln>
-          <a:effectLst>
-            <a:outerShdw sx="100000" sy="100000" kx="0" ky="0" algn="bl" rotWithShape="0" blurRad="50800" dist="25400" dir="8100000">
-              <a:srgbClr val="000000">
-                <a:alpha val="10000"/>
-              </a:srgbClr>
-            </a:outerShdw>
-          </a:effectLst>
-        </p:spPr>
-      </p:sp>
-      <p:sp>
-        <p:nvSpPr>
-          <p:cNvPr id="10" name="Shape 8"/>
-          <p:cNvSpPr/>
-          <p:nvPr/>
-        </p:nvSpPr>
-        <p:spPr>
-          <a:xfrm>
-            <a:off x="3291840" y="1188720"/>
-            <a:ext cx="2560320" cy="54864"/>
-          </a:xfrm>
-          <a:prstGeom prst="rect">
-            <a:avLst/>
-          </a:prstGeom>
-          <a:solidFill>
-            <a:srgbClr val="2A9D8F"/>
-          </a:solidFill>
-          <a:ln/>
-        </p:spPr>
-      </p:sp>
-      <p:sp>
-        <p:nvSpPr>
-          <p:cNvPr id="11" name="Text 9"/>
-          <p:cNvSpPr/>
-          <p:nvPr/>
-        </p:nvSpPr>
-        <p:spPr>
-          <a:xfrm>
-            <a:off x="3429000" y="1325880"/>
-            <a:ext cx="2286000" cy="365760"/>
-          </a:xfrm>
-          <a:prstGeom prst="rect">
-            <a:avLst/>
-          </a:prstGeom>
-          <a:noFill/>
-          <a:ln/>
-        </p:spPr>
-        <p:txBody>
-          <a:bodyPr wrap="square" rtlCol="0" anchor="ctr"/>
-          <a:lstStyle/>
-          <a:p>
-            <a:pPr indent="0" marL="0">
-              <a:buNone/>
-            </a:pPr>
-            <a:r>
-              <a:rPr lang="en-US" sz="1400" b="1" dirty="0">
-                <a:solidFill>
-                  <a:srgbClr val="1B2A4A"/>
-                </a:solidFill>
-                <a:latin typeface="Calibri" pitchFamily="34" charset="0"/>
-                <a:ea typeface="Calibri" pitchFamily="34" charset="-122"/>
-                <a:cs typeface="Calibri" pitchFamily="34" charset="-120"/>
-              </a:rPr>
-              <a:t>Hazard Symbols</a:t>
-            </a:r>
-            <a:endParaRPr lang="en-US" sz="1400" dirty="0"/>
-          </a:p>
-        </p:txBody>
-      </p:sp>
-      <p:sp>
-        <p:nvSpPr>
-          <p:cNvPr id="12" name="Text 10"/>
-          <p:cNvSpPr/>
-          <p:nvPr/>
-        </p:nvSpPr>
-        <p:spPr>
-          <a:xfrm>
-            <a:off x="3429000" y="1737360"/>
-            <a:ext cx="2286000" cy="1097280"/>
-          </a:xfrm>
-          <a:prstGeom prst="rect">
-            <a:avLst/>
-          </a:prstGeom>
-          <a:noFill/>
-          <a:ln/>
-        </p:spPr>
-        <p:txBody>
-          <a:bodyPr wrap="square" rtlCol="0" anchor="t"/>
-          <a:lstStyle/>
-          <a:p>
-            <a:pPr indent="0" marL="0">
-              <a:buNone/>
-            </a:pPr>
-            <a:r>
-              <a:rPr lang="en-US" sz="1100" dirty="0">
-                <a:solidFill>
-                  <a:srgbClr val="3D3A36"/>
-                </a:solidFill>
-                <a:latin typeface="Calibri" pitchFamily="34" charset="0"/>
-                <a:ea typeface="Calibri" pitchFamily="34" charset="-122"/>
-                <a:cs typeface="Calibri" pitchFamily="34" charset="-120"/>
-              </a:rPr>
-              <a:t>Flammable, Corrosive, Toxic, Irritant, Oxidising — learn to recognise all five symbols.</a:t>
-            </a:r>
-            <a:endParaRPr lang="en-US" sz="1100" dirty="0"/>
-          </a:p>
-        </p:txBody>
-      </p:sp>
-      <p:sp>
-        <p:nvSpPr>
-          <p:cNvPr id="13" name="Shape 11"/>
-          <p:cNvSpPr/>
-          <p:nvPr/>
-        </p:nvSpPr>
-        <p:spPr>
-          <a:xfrm>
-            <a:off x="6126480" y="1188720"/>
-            <a:ext cx="2560320" cy="1828800"/>
-          </a:xfrm>
-          <a:prstGeom prst="rect">
-            <a:avLst/>
-          </a:prstGeom>
-          <a:solidFill>
-            <a:srgbClr val="FFFFFF"/>
-          </a:solidFill>
-          <a:ln w="12700">
-            <a:solidFill>
-              <a:srgbClr val="E5E2DC"/>
-            </a:solidFill>
-            <a:prstDash val="solid"/>
-          </a:ln>
-          <a:effectLst>
-            <a:outerShdw sx="100000" sy="100000" kx="0" ky="0" algn="bl" rotWithShape="0" blurRad="50800" dist="25400" dir="8100000">
-              <a:srgbClr val="000000">
-                <a:alpha val="10000"/>
-              </a:srgbClr>
-            </a:outerShdw>
-          </a:effectLst>
-        </p:spPr>
-      </p:sp>
-      <p:sp>
-        <p:nvSpPr>
-          <p:cNvPr id="14" name="Shape 12"/>
-          <p:cNvSpPr/>
-          <p:nvPr/>
-        </p:nvSpPr>
-        <p:spPr>
-          <a:xfrm>
-            <a:off x="6126480" y="1188720"/>
-            <a:ext cx="2560320" cy="54864"/>
-          </a:xfrm>
-          <a:prstGeom prst="rect">
-            <a:avLst/>
-          </a:prstGeom>
-          <a:solidFill>
-            <a:srgbClr val="2A9D8F"/>
-          </a:solidFill>
-          <a:ln/>
-        </p:spPr>
-      </p:sp>
-      <p:sp>
-        <p:nvSpPr>
-          <p:cNvPr id="15" name="Text 13"/>
-          <p:cNvSpPr/>
-          <p:nvPr/>
-        </p:nvSpPr>
-        <p:spPr>
-          <a:xfrm>
-            <a:off x="6263640" y="1325880"/>
-            <a:ext cx="2286000" cy="365760"/>
-          </a:xfrm>
-          <a:prstGeom prst="rect">
-            <a:avLst/>
-          </a:prstGeom>
-          <a:noFill/>
-          <a:ln/>
-        </p:spPr>
-        <p:txBody>
-          <a:bodyPr wrap="square" rtlCol="0" anchor="ctr"/>
-          <a:lstStyle/>
-          <a:p>
-            <a:pPr indent="0" marL="0">
-              <a:buNone/>
-            </a:pPr>
-            <a:r>
-              <a:rPr lang="en-US" sz="1400" b="1" dirty="0">
-                <a:solidFill>
-                  <a:srgbClr val="1B2A4A"/>
-                </a:solidFill>
-                <a:latin typeface="Calibri" pitchFamily="34" charset="0"/>
-                <a:ea typeface="Calibri" pitchFamily="34" charset="-122"/>
-                <a:cs typeface="Calibri" pitchFamily="34" charset="-120"/>
-              </a:rPr>
-              <a:t>Clean Up</a:t>
-            </a:r>
-            <a:endParaRPr lang="en-US" sz="1400" dirty="0"/>
-          </a:p>
-        </p:txBody>
-      </p:sp>
-      <p:sp>
-        <p:nvSpPr>
-          <p:cNvPr id="16" name="Text 14"/>
-          <p:cNvSpPr/>
-          <p:nvPr/>
-        </p:nvSpPr>
-        <p:spPr>
-          <a:xfrm>
-            <a:off x="6263640" y="1737360"/>
-            <a:ext cx="2286000" cy="1097280"/>
-          </a:xfrm>
-          <a:prstGeom prst="rect">
-            <a:avLst/>
-          </a:prstGeom>
-          <a:noFill/>
-          <a:ln/>
-        </p:spPr>
-        <p:txBody>
-          <a:bodyPr wrap="square" rtlCol="0" anchor="t"/>
-          <a:lstStyle/>
-          <a:p>
-            <a:pPr indent="0" marL="0">
-              <a:buNone/>
-            </a:pPr>
-            <a:r>
-              <a:rPr lang="en-US" sz="1100" dirty="0">
-                <a:solidFill>
-                  <a:srgbClr val="3D3A36"/>
-                </a:solidFill>
-                <a:latin typeface="Calibri" pitchFamily="34" charset="0"/>
-                <a:ea typeface="Calibri" pitchFamily="34" charset="-122"/>
-                <a:cs typeface="Calibri" pitchFamily="34" charset="-120"/>
-              </a:rPr>
-              <a:t>Wash equipment. Wipe surfaces. Dispose chemicals correctly. Wash hands.</a:t>
-            </a:r>
-            <a:endParaRPr lang="en-US" sz="1100" dirty="0"/>
+              <a:rPr lang="en-US" sz="3200" b="1" dirty="0">
+                <a:solidFill>
+                  <a:srgbClr val="FFFFFF"/>
+                </a:solidFill>
+                <a:latin typeface="Georgia" pitchFamily="34" charset="0"/>
+                <a:ea typeface="Georgia" pitchFamily="34" charset="-122"/>
+                <a:cs typeface="Georgia" pitchFamily="34" charset="-120"/>
+              </a:rPr>
+              <a:t>Lab Safety</a:t>
+            </a:r>
+            <a:endParaRPr lang="en-US" sz="3200" dirty="0"/>
           </a:p>
         </p:txBody>
       </p:sp>
@@ -1951,7 +1999,47 @@
         <p:spPr>
           <a:xfrm>
             <a:off x="0" y="0"/>
-            <a:ext cx="9144000" cy="54864"/>
+            <a:ext cx="9144000" cy="822960"/>
+          </a:xfrm>
+          <a:prstGeom prst="rect">
+            <a:avLst/>
+          </a:prstGeom>
+          <a:solidFill>
+            <a:srgbClr val="FFFFFF"/>
+          </a:solidFill>
+          <a:ln/>
+        </p:spPr>
+      </p:sp>
+      <p:sp>
+        <p:nvSpPr>
+          <p:cNvPr id="3" name="Shape 1"/>
+          <p:cNvSpPr/>
+          <p:nvPr/>
+        </p:nvSpPr>
+        <p:spPr>
+          <a:xfrm>
+            <a:off x="0" y="804672"/>
+            <a:ext cx="9144000" cy="27432"/>
+          </a:xfrm>
+          <a:prstGeom prst="rect">
+            <a:avLst/>
+          </a:prstGeom>
+          <a:solidFill>
+            <a:srgbClr val="E5E2DC"/>
+          </a:solidFill>
+          <a:ln/>
+        </p:spPr>
+      </p:sp>
+      <p:sp>
+        <p:nvSpPr>
+          <p:cNvPr id="4" name="Shape 2"/>
+          <p:cNvSpPr/>
+          <p:nvPr/>
+        </p:nvSpPr>
+        <p:spPr>
+          <a:xfrm>
+            <a:off x="548640" y="201168"/>
+            <a:ext cx="54864" cy="420624"/>
           </a:xfrm>
           <a:prstGeom prst="rect">
             <a:avLst/>
@@ -1964,14 +2052,14 @@
       </p:sp>
       <p:sp>
         <p:nvSpPr>
-          <p:cNvPr id="3" name="Text 1"/>
-          <p:cNvSpPr/>
-          <p:nvPr/>
-        </p:nvSpPr>
-        <p:spPr>
-          <a:xfrm>
-            <a:off x="7772400" y="4709160"/>
-            <a:ext cx="1097280" cy="320040"/>
+          <p:cNvPr id="5" name="Text 3"/>
+          <p:cNvSpPr/>
+          <p:nvPr/>
+        </p:nvSpPr>
+        <p:spPr>
+          <a:xfrm>
+            <a:off x="777240" y="137160"/>
+            <a:ext cx="7772400" cy="548640"/>
           </a:xfrm>
           <a:prstGeom prst="rect">
             <a:avLst/>
@@ -1980,183 +2068,99 @@
           <a:ln/>
         </p:spPr>
         <p:txBody>
-          <a:bodyPr wrap="square" rtlCol="0" anchor="ctr"/>
-          <a:lstStyle/>
-          <a:p>
-            <a:pPr algn="r" indent="0" marL="0">
+          <a:bodyPr wrap="square" lIns="0" tIns="0" rIns="0" bIns="0" rtlCol="0" anchor="ctr"/>
+          <a:lstStyle/>
+          <a:p>
+            <a:pPr indent="0" marL="0">
               <a:buNone/>
             </a:pPr>
             <a:r>
-              <a:rPr lang="en-US" sz="900" dirty="0">
-                <a:solidFill>
-                  <a:srgbClr val="6B6660"/>
+              <a:rPr lang="en-US" sz="2000" b="1" dirty="0">
+                <a:solidFill>
+                  <a:srgbClr val="1B2A4A"/>
+                </a:solidFill>
+                <a:latin typeface="Georgia" pitchFamily="34" charset="0"/>
+                <a:ea typeface="Georgia" pitchFamily="34" charset="-122"/>
+                <a:cs typeface="Georgia" pitchFamily="34" charset="-120"/>
+              </a:rPr>
+              <a:t>Safety Review</a:t>
+            </a:r>
+            <a:endParaRPr lang="en-US" sz="2000" dirty="0"/>
+          </a:p>
+        </p:txBody>
+      </p:sp>
+      <p:sp>
+        <p:nvSpPr>
+          <p:cNvPr id="6" name="Text 4"/>
+          <p:cNvSpPr/>
+          <p:nvPr/>
+        </p:nvSpPr>
+        <p:spPr>
+          <a:xfrm>
+            <a:off x="731520" y="1051560"/>
+            <a:ext cx="7680960" cy="3108960"/>
+          </a:xfrm>
+          <a:prstGeom prst="rect">
+            <a:avLst/>
+          </a:prstGeom>
+          <a:noFill/>
+          <a:ln/>
+        </p:spPr>
+        <p:txBody>
+          <a:bodyPr wrap="square" rtlCol="0" anchor="t"/>
+          <a:lstStyle/>
+          <a:p>
+            <a:pPr marL="342900" indent="-342900">
+              <a:spcAft>
+                <a:spcPts val="800"/>
+              </a:spcAft>
+              <a:buSzPct val="100000"/>
+              <a:buChar char="•"/>
+            </a:pPr>
+            <a:r>
+              <a:rPr lang="en-US" sz="1500" dirty="0">
+                <a:solidFill>
+                  <a:srgbClr val="3D3A36"/>
                 </a:solidFill>
                 <a:latin typeface="Calibri" pitchFamily="34" charset="0"/>
                 <a:ea typeface="Calibri" pitchFamily="34" charset="-122"/>
                 <a:cs typeface="Calibri" pitchFamily="34" charset="-120"/>
               </a:rPr>
-              <a:t>3 / 5</a:t>
-            </a:r>
-            <a:endParaRPr lang="en-US" sz="900" dirty="0"/>
-          </a:p>
-        </p:txBody>
-      </p:sp>
-      <p:sp>
-        <p:nvSpPr>
-          <p:cNvPr id="4" name="Text 2"/>
-          <p:cNvSpPr/>
-          <p:nvPr/>
-        </p:nvSpPr>
-        <p:spPr>
-          <a:xfrm>
-            <a:off x="457200" y="274320"/>
-            <a:ext cx="8229600" cy="640080"/>
-          </a:xfrm>
-          <a:prstGeom prst="rect">
-            <a:avLst/>
-          </a:prstGeom>
-          <a:noFill/>
-          <a:ln/>
-        </p:spPr>
-        <p:txBody>
-          <a:bodyPr wrap="square" rtlCol="0" anchor="ctr"/>
-          <a:lstStyle/>
-          <a:p>
-            <a:pPr indent="0" marL="0">
-              <a:buNone/>
-            </a:pPr>
-            <a:r>
-              <a:rPr lang="en-US" sz="2600" b="1" dirty="0">
-                <a:solidFill>
-                  <a:srgbClr val="1B2A4A"/>
-                </a:solidFill>
-                <a:latin typeface="Georgia" pitchFamily="34" charset="0"/>
-                <a:ea typeface="Georgia" pitchFamily="34" charset="-122"/>
-                <a:cs typeface="Georgia" pitchFamily="34" charset="-120"/>
-              </a:rPr>
-              <a:t>The Scientific Method</a:t>
-            </a:r>
-            <a:endParaRPr lang="en-US" sz="2600" dirty="0"/>
-          </a:p>
-        </p:txBody>
-      </p:sp>
-      <p:sp>
-        <p:nvSpPr>
-          <p:cNvPr id="5" name="Shape 3"/>
-          <p:cNvSpPr/>
-          <p:nvPr/>
-        </p:nvSpPr>
-        <p:spPr>
-          <a:xfrm>
-            <a:off x="457200" y="1188720"/>
-            <a:ext cx="2560320" cy="1828800"/>
-          </a:xfrm>
-          <a:prstGeom prst="rect">
-            <a:avLst/>
-          </a:prstGeom>
-          <a:solidFill>
-            <a:srgbClr val="FFFFFF"/>
-          </a:solidFill>
-          <a:ln w="12700">
-            <a:solidFill>
-              <a:srgbClr val="E5E2DC"/>
-            </a:solidFill>
-            <a:prstDash val="solid"/>
-          </a:ln>
-          <a:effectLst>
-            <a:outerShdw sx="100000" sy="100000" kx="0" ky="0" algn="bl" rotWithShape="0" blurRad="50800" dist="25400" dir="8100000">
-              <a:srgbClr val="000000">
-                <a:alpha val="10000"/>
-              </a:srgbClr>
-            </a:outerShdw>
-          </a:effectLst>
-        </p:spPr>
-      </p:sp>
-      <p:sp>
-        <p:nvSpPr>
-          <p:cNvPr id="6" name="Shape 4"/>
-          <p:cNvSpPr/>
-          <p:nvPr/>
-        </p:nvSpPr>
-        <p:spPr>
-          <a:xfrm>
-            <a:off x="457200" y="1188720"/>
-            <a:ext cx="2560320" cy="54864"/>
-          </a:xfrm>
-          <a:prstGeom prst="rect">
-            <a:avLst/>
-          </a:prstGeom>
-          <a:solidFill>
-            <a:srgbClr val="2A9D8F"/>
-          </a:solidFill>
-          <a:ln/>
-        </p:spPr>
-      </p:sp>
-      <p:sp>
-        <p:nvSpPr>
-          <p:cNvPr id="7" name="Text 5"/>
-          <p:cNvSpPr/>
-          <p:nvPr/>
-        </p:nvSpPr>
-        <p:spPr>
-          <a:xfrm>
-            <a:off x="594360" y="1325880"/>
-            <a:ext cx="2286000" cy="365760"/>
-          </a:xfrm>
-          <a:prstGeom prst="rect">
-            <a:avLst/>
-          </a:prstGeom>
-          <a:noFill/>
-          <a:ln/>
-        </p:spPr>
-        <p:txBody>
-          <a:bodyPr wrap="square" rtlCol="0" anchor="ctr"/>
-          <a:lstStyle/>
-          <a:p>
-            <a:pPr indent="0" marL="0">
-              <a:buNone/>
-            </a:pPr>
-            <a:r>
-              <a:rPr lang="en-US" sz="1400" b="1" dirty="0">
-                <a:solidFill>
-                  <a:srgbClr val="1B2A4A"/>
+              <a:t>Know your hazard symbols: flammable, corrosive, toxic, irritant, oxidising.</a:t>
+            </a:r>
+            <a:endParaRPr lang="en-US" sz="1500" dirty="0"/>
+          </a:p>
+          <a:p>
+            <a:pPr marL="342900" indent="-342900">
+              <a:spcAft>
+                <a:spcPts val="800"/>
+              </a:spcAft>
+              <a:buSzPct val="100000"/>
+              <a:buChar char="•"/>
+            </a:pPr>
+            <a:r>
+              <a:rPr lang="en-US" sz="1500" dirty="0">
+                <a:solidFill>
+                  <a:srgbClr val="3D3A36"/>
                 </a:solidFill>
                 <a:latin typeface="Calibri" pitchFamily="34" charset="0"/>
                 <a:ea typeface="Calibri" pitchFamily="34" charset="-122"/>
                 <a:cs typeface="Calibri" pitchFamily="34" charset="-120"/>
               </a:rPr>
-              <a:t>6 Steps</a:t>
-            </a:r>
-            <a:endParaRPr lang="en-US" sz="1400" dirty="0"/>
-          </a:p>
-        </p:txBody>
-      </p:sp>
-      <p:sp>
-        <p:nvSpPr>
-          <p:cNvPr id="8" name="Text 6"/>
-          <p:cNvSpPr/>
-          <p:nvPr/>
-        </p:nvSpPr>
-        <p:spPr>
-          <a:xfrm>
-            <a:off x="594360" y="1737360"/>
-            <a:ext cx="2286000" cy="1097280"/>
-          </a:xfrm>
-          <a:prstGeom prst="rect">
-            <a:avLst/>
-          </a:prstGeom>
-          <a:noFill/>
-          <a:ln/>
-        </p:spPr>
-        <p:txBody>
-          <a:bodyPr wrap="square" rtlCol="0" anchor="t"/>
-          <a:lstStyle/>
-          <a:p>
-            <a:pPr indent="0" marL="0">
-              <a:buNone/>
-            </a:pPr>
-            <a:r>
-              <a:rPr lang="en-US" sz="1100" dirty="0">
+              <a:t>Always wear appropriate PPE: goggles, gloves, lab coat.</a:t>
+            </a:r>
+            <a:endParaRPr lang="en-US" sz="1500" dirty="0"/>
+          </a:p>
+          <a:p>
+            <a:pPr marL="342900" indent="-342900">
+              <a:spcAft>
+                <a:spcPts val="800"/>
+              </a:spcAft>
+              <a:buSzPct val="100000"/>
+              <a:buChar char="•"/>
+            </a:pPr>
+            <a:r>
+              <a:rPr lang="en-US" sz="1500" dirty="0">
                 <a:solidFill>
                   <a:srgbClr val="3D3A36"/>
                 </a:solidFill>
@@ -2164,129 +2168,41 @@
                 <a:ea typeface="Calibri" pitchFamily="34" charset="-122"/>
                 <a:cs typeface="Calibri" pitchFamily="34" charset="-120"/>
               </a:rPr>
-              <a:t>Observe → Research → Hypothesise → Experiment → Analyse → Conclude. It's a cycle — conclusions lead to new questions.</a:t>
-            </a:r>
-            <a:endParaRPr lang="en-US" sz="1100" dirty="0"/>
-          </a:p>
-        </p:txBody>
-      </p:sp>
-      <p:sp>
-        <p:nvSpPr>
-          <p:cNvPr id="9" name="Shape 7"/>
-          <p:cNvSpPr/>
-          <p:nvPr/>
-        </p:nvSpPr>
-        <p:spPr>
-          <a:xfrm>
-            <a:off x="3291840" y="1188720"/>
-            <a:ext cx="2560320" cy="1828800"/>
-          </a:xfrm>
-          <a:prstGeom prst="rect">
-            <a:avLst/>
-          </a:prstGeom>
-          <a:solidFill>
-            <a:srgbClr val="FFFFFF"/>
-          </a:solidFill>
-          <a:ln w="12700">
-            <a:solidFill>
-              <a:srgbClr val="E5E2DC"/>
-            </a:solidFill>
-            <a:prstDash val="solid"/>
-          </a:ln>
-          <a:effectLst>
-            <a:outerShdw sx="100000" sy="100000" kx="0" ky="0" algn="bl" rotWithShape="0" blurRad="50800" dist="25400" dir="8100000">
-              <a:srgbClr val="000000">
-                <a:alpha val="10000"/>
-              </a:srgbClr>
-            </a:outerShdw>
-          </a:effectLst>
-        </p:spPr>
-      </p:sp>
-      <p:sp>
-        <p:nvSpPr>
-          <p:cNvPr id="10" name="Shape 8"/>
-          <p:cNvSpPr/>
-          <p:nvPr/>
-        </p:nvSpPr>
-        <p:spPr>
-          <a:xfrm>
-            <a:off x="3291840" y="1188720"/>
-            <a:ext cx="2560320" cy="54864"/>
-          </a:xfrm>
-          <a:prstGeom prst="rect">
-            <a:avLst/>
-          </a:prstGeom>
-          <a:solidFill>
-            <a:srgbClr val="2A9D8F"/>
-          </a:solidFill>
-          <a:ln/>
-        </p:spPr>
-      </p:sp>
-      <p:sp>
-        <p:nvSpPr>
-          <p:cNvPr id="11" name="Text 9"/>
-          <p:cNvSpPr/>
-          <p:nvPr/>
-        </p:nvSpPr>
-        <p:spPr>
-          <a:xfrm>
-            <a:off x="3429000" y="1325880"/>
-            <a:ext cx="2286000" cy="365760"/>
-          </a:xfrm>
-          <a:prstGeom prst="rect">
-            <a:avLst/>
-          </a:prstGeom>
-          <a:noFill/>
-          <a:ln/>
-        </p:spPr>
-        <p:txBody>
-          <a:bodyPr wrap="square" rtlCol="0" anchor="ctr"/>
-          <a:lstStyle/>
-          <a:p>
-            <a:pPr indent="0" marL="0">
-              <a:buNone/>
-            </a:pPr>
-            <a:r>
-              <a:rPr lang="en-US" sz="1400" b="1" dirty="0">
-                <a:solidFill>
-                  <a:srgbClr val="1B2A4A"/>
+              <a:t>A HAZARD is something that CAN cause harm. A RISK is the CHANCE it WILL.</a:t>
+            </a:r>
+            <a:endParaRPr lang="en-US" sz="1500" dirty="0"/>
+          </a:p>
+          <a:p>
+            <a:pPr marL="342900" indent="-342900">
+              <a:spcAft>
+                <a:spcPts val="800"/>
+              </a:spcAft>
+              <a:buSzPct val="100000"/>
+              <a:buChar char="•"/>
+            </a:pPr>
+            <a:r>
+              <a:rPr lang="en-US" sz="1500" dirty="0">
+                <a:solidFill>
+                  <a:srgbClr val="3D3A36"/>
                 </a:solidFill>
                 <a:latin typeface="Calibri" pitchFamily="34" charset="0"/>
                 <a:ea typeface="Calibri" pitchFamily="34" charset="-122"/>
                 <a:cs typeface="Calibri" pitchFamily="34" charset="-120"/>
               </a:rPr>
-              <a:t>Hypothesis Format</a:t>
-            </a:r>
-            <a:endParaRPr lang="en-US" sz="1400" dirty="0"/>
-          </a:p>
-        </p:txBody>
-      </p:sp>
-      <p:sp>
-        <p:nvSpPr>
-          <p:cNvPr id="12" name="Text 10"/>
-          <p:cNvSpPr/>
-          <p:nvPr/>
-        </p:nvSpPr>
-        <p:spPr>
-          <a:xfrm>
-            <a:off x="3429000" y="1737360"/>
-            <a:ext cx="2286000" cy="1097280"/>
-          </a:xfrm>
-          <a:prstGeom prst="rect">
-            <a:avLst/>
-          </a:prstGeom>
-          <a:noFill/>
-          <a:ln/>
-        </p:spPr>
-        <p:txBody>
-          <a:bodyPr wrap="square" rtlCol="0" anchor="t"/>
-          <a:lstStyle/>
-          <a:p>
-            <a:pPr indent="0" marL="0">
-              <a:buNone/>
-            </a:pPr>
-            <a:r>
-              <a:rPr lang="en-US" sz="1100" dirty="0">
+              <a:t>Emergency: TELL YOUR TEACHER first, then follow first aid steps.</a:t>
+            </a:r>
+            <a:endParaRPr lang="en-US" sz="1500" dirty="0"/>
+          </a:p>
+          <a:p>
+            <a:pPr marL="342900" indent="-342900">
+              <a:spcAft>
+                <a:spcPts val="800"/>
+              </a:spcAft>
+              <a:buSzPct val="100000"/>
+              <a:buChar char="•"/>
+            </a:pPr>
+            <a:r>
+              <a:rPr lang="en-US" sz="1500" dirty="0">
                 <a:solidFill>
                   <a:srgbClr val="3D3A36"/>
                 </a:solidFill>
@@ -2294,139 +2210,9 @@
                 <a:ea typeface="Calibri" pitchFamily="34" charset="-122"/>
                 <a:cs typeface="Calibri" pitchFamily="34" charset="-120"/>
               </a:rPr>
-              <a:t>'If [independent variable changes], then [dependent variable will...], because [scientific reasoning].'</a:t>
-            </a:r>
-            <a:endParaRPr lang="en-US" sz="1100" dirty="0"/>
-          </a:p>
-        </p:txBody>
-      </p:sp>
-      <p:sp>
-        <p:nvSpPr>
-          <p:cNvPr id="13" name="Shape 11"/>
-          <p:cNvSpPr/>
-          <p:nvPr/>
-        </p:nvSpPr>
-        <p:spPr>
-          <a:xfrm>
-            <a:off x="6126480" y="1188720"/>
-            <a:ext cx="2560320" cy="1828800"/>
-          </a:xfrm>
-          <a:prstGeom prst="rect">
-            <a:avLst/>
-          </a:prstGeom>
-          <a:solidFill>
-            <a:srgbClr val="FFFFFF"/>
-          </a:solidFill>
-          <a:ln w="12700">
-            <a:solidFill>
-              <a:srgbClr val="E5E2DC"/>
-            </a:solidFill>
-            <a:prstDash val="solid"/>
-          </a:ln>
-          <a:effectLst>
-            <a:outerShdw sx="100000" sy="100000" kx="0" ky="0" algn="bl" rotWithShape="0" blurRad="50800" dist="25400" dir="8100000">
-              <a:srgbClr val="000000">
-                <a:alpha val="10000"/>
-              </a:srgbClr>
-            </a:outerShdw>
-          </a:effectLst>
-        </p:spPr>
-      </p:sp>
-      <p:sp>
-        <p:nvSpPr>
-          <p:cNvPr id="14" name="Shape 12"/>
-          <p:cNvSpPr/>
-          <p:nvPr/>
-        </p:nvSpPr>
-        <p:spPr>
-          <a:xfrm>
-            <a:off x="6126480" y="1188720"/>
-            <a:ext cx="2560320" cy="54864"/>
-          </a:xfrm>
-          <a:prstGeom prst="rect">
-            <a:avLst/>
-          </a:prstGeom>
-          <a:solidFill>
-            <a:srgbClr val="2A9D8F"/>
-          </a:solidFill>
-          <a:ln/>
-        </p:spPr>
-      </p:sp>
-      <p:sp>
-        <p:nvSpPr>
-          <p:cNvPr id="15" name="Text 13"/>
-          <p:cNvSpPr/>
-          <p:nvPr/>
-        </p:nvSpPr>
-        <p:spPr>
-          <a:xfrm>
-            <a:off x="6263640" y="1325880"/>
-            <a:ext cx="2286000" cy="365760"/>
-          </a:xfrm>
-          <a:prstGeom prst="rect">
-            <a:avLst/>
-          </a:prstGeom>
-          <a:noFill/>
-          <a:ln/>
-        </p:spPr>
-        <p:txBody>
-          <a:bodyPr wrap="square" rtlCol="0" anchor="ctr"/>
-          <a:lstStyle/>
-          <a:p>
-            <a:pPr indent="0" marL="0">
-              <a:buNone/>
-            </a:pPr>
-            <a:r>
-              <a:rPr lang="en-US" sz="1400" b="1" dirty="0">
-                <a:solidFill>
-                  <a:srgbClr val="1B2A4A"/>
-                </a:solidFill>
-                <a:latin typeface="Calibri" pitchFamily="34" charset="0"/>
-                <a:ea typeface="Calibri" pitchFamily="34" charset="-122"/>
-                <a:cs typeface="Calibri" pitchFamily="34" charset="-120"/>
-              </a:rPr>
-              <a:t>Fair Test</a:t>
-            </a:r>
-            <a:endParaRPr lang="en-US" sz="1400" dirty="0"/>
-          </a:p>
-        </p:txBody>
-      </p:sp>
-      <p:sp>
-        <p:nvSpPr>
-          <p:cNvPr id="16" name="Text 14"/>
-          <p:cNvSpPr/>
-          <p:nvPr/>
-        </p:nvSpPr>
-        <p:spPr>
-          <a:xfrm>
-            <a:off x="6263640" y="1737360"/>
-            <a:ext cx="2286000" cy="1097280"/>
-          </a:xfrm>
-          <a:prstGeom prst="rect">
-            <a:avLst/>
-          </a:prstGeom>
-          <a:noFill/>
-          <a:ln/>
-        </p:spPr>
-        <p:txBody>
-          <a:bodyPr wrap="square" rtlCol="0" anchor="t"/>
-          <a:lstStyle/>
-          <a:p>
-            <a:pPr indent="0" marL="0">
-              <a:buNone/>
-            </a:pPr>
-            <a:r>
-              <a:rPr lang="en-US" sz="1100" dirty="0">
-                <a:solidFill>
-                  <a:srgbClr val="3D3A36"/>
-                </a:solidFill>
-                <a:latin typeface="Calibri" pitchFamily="34" charset="0"/>
-                <a:ea typeface="Calibri" pitchFamily="34" charset="-122"/>
-                <a:cs typeface="Calibri" pitchFamily="34" charset="-120"/>
-              </a:rPr>
-              <a:t>Change ONE variable (independent). Measure ONE variable (dependent). Keep EVERYTHING else the same (controlled).</a:t>
-            </a:r>
-            <a:endParaRPr lang="en-US" sz="1100" dirty="0"/>
+              <a:t>Never eat, drink, run, or play in the laboratory.</a:t>
+            </a:r>
+            <a:endParaRPr lang="en-US" sz="1500" dirty="0"/>
           </a:p>
         </p:txBody>
       </p:sp>
@@ -2441,6 +2227,149 @@
 <file path=ppt/slides/slide4.xml><?xml version="1.0" encoding="utf-8"?>
 <p:sld xmlns:a="http://schemas.openxmlformats.org/drawingml/2006/main" xmlns:r="http://schemas.openxmlformats.org/officeDocument/2006/relationships" xmlns:p="http://schemas.openxmlformats.org/presentationml/2006/main">
   <p:cSld name="Slide 4">
+    <p:spTree>
+      <p:nvGrpSpPr>
+        <p:cNvPr id="1" name=""/>
+        <p:cNvGrpSpPr/>
+        <p:nvPr/>
+      </p:nvGrpSpPr>
+      <p:grpSpPr>
+        <a:xfrm>
+          <a:off x="0" y="0"/>
+          <a:ext cx="0" cy="0"/>
+          <a:chOff x="0" y="0"/>
+          <a:chExt cx="0" cy="0"/>
+        </a:xfrm>
+      </p:grpSpPr>
+      <p:sp>
+        <p:nvSpPr>
+          <p:cNvPr id="2" name="Shape 0"/>
+          <p:cNvSpPr/>
+          <p:nvPr/>
+        </p:nvSpPr>
+        <p:spPr>
+          <a:xfrm>
+            <a:off x="0" y="0"/>
+            <a:ext cx="9144000" cy="5143500"/>
+          </a:xfrm>
+          <a:prstGeom prst="rect">
+            <a:avLst/>
+          </a:prstGeom>
+          <a:solidFill>
+            <a:srgbClr val="1B2A4A"/>
+          </a:solidFill>
+          <a:ln/>
+        </p:spPr>
+      </p:sp>
+      <p:sp>
+        <p:nvSpPr>
+          <p:cNvPr id="3" name="Shape 1"/>
+          <p:cNvSpPr/>
+          <p:nvPr/>
+        </p:nvSpPr>
+        <p:spPr>
+          <a:xfrm>
+            <a:off x="731520" y="1828800"/>
+            <a:ext cx="73152" cy="1463040"/>
+          </a:xfrm>
+          <a:prstGeom prst="rect">
+            <a:avLst/>
+          </a:prstGeom>
+          <a:solidFill>
+            <a:srgbClr val="2A9D8F"/>
+          </a:solidFill>
+          <a:ln/>
+        </p:spPr>
+      </p:sp>
+      <p:sp>
+        <p:nvSpPr>
+          <p:cNvPr id="4" name="Text 2"/>
+          <p:cNvSpPr/>
+          <p:nvPr/>
+        </p:nvSpPr>
+        <p:spPr>
+          <a:xfrm>
+            <a:off x="1097280" y="1463040"/>
+            <a:ext cx="1097280" cy="1097280"/>
+          </a:xfrm>
+          <a:prstGeom prst="rect">
+            <a:avLst/>
+          </a:prstGeom>
+          <a:noFill/>
+          <a:ln/>
+        </p:spPr>
+        <p:txBody>
+          <a:bodyPr wrap="square" rtlCol="0" anchor="ctr"/>
+          <a:lstStyle/>
+          <a:p>
+            <a:pPr algn="l" indent="0" marL="0">
+              <a:buNone/>
+            </a:pPr>
+            <a:r>
+              <a:rPr lang="en-US" sz="4800" b="1" dirty="0">
+                <a:solidFill>
+                  <a:srgbClr val="2A9D8F"/>
+                </a:solidFill>
+                <a:latin typeface="Georgia" pitchFamily="34" charset="0"/>
+                <a:ea typeface="Georgia" pitchFamily="34" charset="-122"/>
+                <a:cs typeface="Georgia" pitchFamily="34" charset="-120"/>
+              </a:rPr>
+              <a:t>2</a:t>
+            </a:r>
+            <a:endParaRPr lang="en-US" sz="4800" dirty="0"/>
+          </a:p>
+        </p:txBody>
+      </p:sp>
+      <p:sp>
+        <p:nvSpPr>
+          <p:cNvPr id="5" name="Text 3"/>
+          <p:cNvSpPr/>
+          <p:nvPr/>
+        </p:nvSpPr>
+        <p:spPr>
+          <a:xfrm>
+            <a:off x="2194560" y="1920240"/>
+            <a:ext cx="5943600" cy="1097280"/>
+          </a:xfrm>
+          <a:prstGeom prst="rect">
+            <a:avLst/>
+          </a:prstGeom>
+          <a:noFill/>
+          <a:ln/>
+        </p:spPr>
+        <p:txBody>
+          <a:bodyPr wrap="square" rtlCol="0" anchor="ctr"/>
+          <a:lstStyle/>
+          <a:p>
+            <a:pPr indent="0" marL="0">
+              <a:buNone/>
+            </a:pPr>
+            <a:r>
+              <a:rPr lang="en-US" sz="3200" b="1" dirty="0">
+                <a:solidFill>
+                  <a:srgbClr val="FFFFFF"/>
+                </a:solidFill>
+                <a:latin typeface="Georgia" pitchFamily="34" charset="0"/>
+                <a:ea typeface="Georgia" pitchFamily="34" charset="-122"/>
+                <a:cs typeface="Georgia" pitchFamily="34" charset="-120"/>
+              </a:rPr>
+              <a:t>Scientific Method</a:t>
+            </a:r>
+            <a:endParaRPr lang="en-US" sz="3200" dirty="0"/>
+          </a:p>
+        </p:txBody>
+      </p:sp>
+    </p:spTree>
+  </p:cSld>
+  <p:clrMapOvr>
+    <a:masterClrMapping/>
+  </p:clrMapOvr>
+</p:sld>
+</file>
+
+<file path=ppt/slides/slide5.xml><?xml version="1.0" encoding="utf-8"?>
+<p:sld xmlns:a="http://schemas.openxmlformats.org/drawingml/2006/main" xmlns:r="http://schemas.openxmlformats.org/officeDocument/2006/relationships" xmlns:p="http://schemas.openxmlformats.org/presentationml/2006/main">
+  <p:cSld name="Slide 5">
     <p:bg>
       <p:bgPr>
         <a:solidFill>
@@ -2471,7 +2400,47 @@
         <p:spPr>
           <a:xfrm>
             <a:off x="0" y="0"/>
-            <a:ext cx="9144000" cy="54864"/>
+            <a:ext cx="9144000" cy="822960"/>
+          </a:xfrm>
+          <a:prstGeom prst="rect">
+            <a:avLst/>
+          </a:prstGeom>
+          <a:solidFill>
+            <a:srgbClr val="FFFFFF"/>
+          </a:solidFill>
+          <a:ln/>
+        </p:spPr>
+      </p:sp>
+      <p:sp>
+        <p:nvSpPr>
+          <p:cNvPr id="3" name="Shape 1"/>
+          <p:cNvSpPr/>
+          <p:nvPr/>
+        </p:nvSpPr>
+        <p:spPr>
+          <a:xfrm>
+            <a:off x="0" y="804672"/>
+            <a:ext cx="9144000" cy="27432"/>
+          </a:xfrm>
+          <a:prstGeom prst="rect">
+            <a:avLst/>
+          </a:prstGeom>
+          <a:solidFill>
+            <a:srgbClr val="E5E2DC"/>
+          </a:solidFill>
+          <a:ln/>
+        </p:spPr>
+      </p:sp>
+      <p:sp>
+        <p:nvSpPr>
+          <p:cNvPr id="4" name="Shape 2"/>
+          <p:cNvSpPr/>
+          <p:nvPr/>
+        </p:nvSpPr>
+        <p:spPr>
+          <a:xfrm>
+            <a:off x="548640" y="201168"/>
+            <a:ext cx="54864" cy="420624"/>
           </a:xfrm>
           <a:prstGeom prst="rect">
             <a:avLst/>
@@ -2484,14 +2453,14 @@
       </p:sp>
       <p:sp>
         <p:nvSpPr>
-          <p:cNvPr id="3" name="Text 1"/>
-          <p:cNvSpPr/>
-          <p:nvPr/>
-        </p:nvSpPr>
-        <p:spPr>
-          <a:xfrm>
-            <a:off x="7772400" y="4709160"/>
-            <a:ext cx="1097280" cy="320040"/>
+          <p:cNvPr id="5" name="Text 3"/>
+          <p:cNvSpPr/>
+          <p:nvPr/>
+        </p:nvSpPr>
+        <p:spPr>
+          <a:xfrm>
+            <a:off x="777240" y="137160"/>
+            <a:ext cx="7772400" cy="548640"/>
           </a:xfrm>
           <a:prstGeom prst="rect">
             <a:avLst/>
@@ -2500,183 +2469,99 @@
           <a:ln/>
         </p:spPr>
         <p:txBody>
-          <a:bodyPr wrap="square" rtlCol="0" anchor="ctr"/>
-          <a:lstStyle/>
-          <a:p>
-            <a:pPr algn="r" indent="0" marL="0">
+          <a:bodyPr wrap="square" lIns="0" tIns="0" rIns="0" bIns="0" rtlCol="0" anchor="ctr"/>
+          <a:lstStyle/>
+          <a:p>
+            <a:pPr indent="0" marL="0">
               <a:buNone/>
             </a:pPr>
             <a:r>
-              <a:rPr lang="en-US" sz="900" dirty="0">
-                <a:solidFill>
-                  <a:srgbClr val="6B6660"/>
+              <a:rPr lang="en-US" sz="2000" b="1" dirty="0">
+                <a:solidFill>
+                  <a:srgbClr val="1B2A4A"/>
+                </a:solidFill>
+                <a:latin typeface="Georgia" pitchFamily="34" charset="0"/>
+                <a:ea typeface="Georgia" pitchFamily="34" charset="-122"/>
+                <a:cs typeface="Georgia" pitchFamily="34" charset="-120"/>
+              </a:rPr>
+              <a:t>Method &amp; Variables Review</a:t>
+            </a:r>
+            <a:endParaRPr lang="en-US" sz="2000" dirty="0"/>
+          </a:p>
+        </p:txBody>
+      </p:sp>
+      <p:sp>
+        <p:nvSpPr>
+          <p:cNvPr id="6" name="Text 4"/>
+          <p:cNvSpPr/>
+          <p:nvPr/>
+        </p:nvSpPr>
+        <p:spPr>
+          <a:xfrm>
+            <a:off x="731520" y="1051560"/>
+            <a:ext cx="7680960" cy="3108960"/>
+          </a:xfrm>
+          <a:prstGeom prst="rect">
+            <a:avLst/>
+          </a:prstGeom>
+          <a:noFill/>
+          <a:ln/>
+        </p:spPr>
+        <p:txBody>
+          <a:bodyPr wrap="square" rtlCol="0" anchor="t"/>
+          <a:lstStyle/>
+          <a:p>
+            <a:pPr marL="342900" indent="-342900">
+              <a:spcAft>
+                <a:spcPts val="800"/>
+              </a:spcAft>
+              <a:buSzPct val="100000"/>
+              <a:buChar char="•"/>
+            </a:pPr>
+            <a:r>
+              <a:rPr lang="en-US" sz="1500" dirty="0">
+                <a:solidFill>
+                  <a:srgbClr val="3D3A36"/>
                 </a:solidFill>
                 <a:latin typeface="Calibri" pitchFamily="34" charset="0"/>
                 <a:ea typeface="Calibri" pitchFamily="34" charset="-122"/>
                 <a:cs typeface="Calibri" pitchFamily="34" charset="-120"/>
               </a:rPr>
-              <a:t>4 / 5</a:t>
-            </a:r>
-            <a:endParaRPr lang="en-US" sz="900" dirty="0"/>
-          </a:p>
-        </p:txBody>
-      </p:sp>
-      <p:sp>
-        <p:nvSpPr>
-          <p:cNvPr id="4" name="Text 2"/>
-          <p:cNvSpPr/>
-          <p:nvPr/>
-        </p:nvSpPr>
-        <p:spPr>
-          <a:xfrm>
-            <a:off x="457200" y="274320"/>
-            <a:ext cx="8229600" cy="640080"/>
-          </a:xfrm>
-          <a:prstGeom prst="rect">
-            <a:avLst/>
-          </a:prstGeom>
-          <a:noFill/>
-          <a:ln/>
-        </p:spPr>
-        <p:txBody>
-          <a:bodyPr wrap="square" rtlCol="0" anchor="ctr"/>
-          <a:lstStyle/>
-          <a:p>
-            <a:pPr indent="0" marL="0">
-              <a:buNone/>
-            </a:pPr>
-            <a:r>
-              <a:rPr lang="en-US" sz="2600" b="1" dirty="0">
-                <a:solidFill>
-                  <a:srgbClr val="1B2A4A"/>
-                </a:solidFill>
-                <a:latin typeface="Georgia" pitchFamily="34" charset="0"/>
-                <a:ea typeface="Georgia" pitchFamily="34" charset="-122"/>
-                <a:cs typeface="Georgia" pitchFamily="34" charset="-120"/>
-              </a:rPr>
-              <a:t>Measurement &amp; Data</a:t>
-            </a:r>
-            <a:endParaRPr lang="en-US" sz="2600" dirty="0"/>
-          </a:p>
-        </p:txBody>
-      </p:sp>
-      <p:sp>
-        <p:nvSpPr>
-          <p:cNvPr id="5" name="Shape 3"/>
-          <p:cNvSpPr/>
-          <p:nvPr/>
-        </p:nvSpPr>
-        <p:spPr>
-          <a:xfrm>
-            <a:off x="457200" y="1188720"/>
-            <a:ext cx="2560320" cy="1828800"/>
-          </a:xfrm>
-          <a:prstGeom prst="rect">
-            <a:avLst/>
-          </a:prstGeom>
-          <a:solidFill>
-            <a:srgbClr val="FFFFFF"/>
-          </a:solidFill>
-          <a:ln w="12700">
-            <a:solidFill>
-              <a:srgbClr val="E5E2DC"/>
-            </a:solidFill>
-            <a:prstDash val="solid"/>
-          </a:ln>
-          <a:effectLst>
-            <a:outerShdw sx="100000" sy="100000" kx="0" ky="0" algn="bl" rotWithShape="0" blurRad="50800" dist="25400" dir="8100000">
-              <a:srgbClr val="000000">
-                <a:alpha val="10000"/>
-              </a:srgbClr>
-            </a:outerShdw>
-          </a:effectLst>
-        </p:spPr>
-      </p:sp>
-      <p:sp>
-        <p:nvSpPr>
-          <p:cNvPr id="6" name="Shape 4"/>
-          <p:cNvSpPr/>
-          <p:nvPr/>
-        </p:nvSpPr>
-        <p:spPr>
-          <a:xfrm>
-            <a:off x="457200" y="1188720"/>
-            <a:ext cx="2560320" cy="54864"/>
-          </a:xfrm>
-          <a:prstGeom prst="rect">
-            <a:avLst/>
-          </a:prstGeom>
-          <a:solidFill>
-            <a:srgbClr val="2A9D8F"/>
-          </a:solidFill>
-          <a:ln/>
-        </p:spPr>
-      </p:sp>
-      <p:sp>
-        <p:nvSpPr>
-          <p:cNvPr id="7" name="Text 5"/>
-          <p:cNvSpPr/>
-          <p:nvPr/>
-        </p:nvSpPr>
-        <p:spPr>
-          <a:xfrm>
-            <a:off x="594360" y="1325880"/>
-            <a:ext cx="2286000" cy="365760"/>
-          </a:xfrm>
-          <a:prstGeom prst="rect">
-            <a:avLst/>
-          </a:prstGeom>
-          <a:noFill/>
-          <a:ln/>
-        </p:spPr>
-        <p:txBody>
-          <a:bodyPr wrap="square" rtlCol="0" anchor="ctr"/>
-          <a:lstStyle/>
-          <a:p>
-            <a:pPr indent="0" marL="0">
-              <a:buNone/>
-            </a:pPr>
-            <a:r>
-              <a:rPr lang="en-US" sz="1400" b="1" dirty="0">
-                <a:solidFill>
-                  <a:srgbClr val="1B2A4A"/>
+              <a:t>Steps: Question → Research → Hypothesis → Experiment → Data → Analysis → Conclusion.</a:t>
+            </a:r>
+            <a:endParaRPr lang="en-US" sz="1500" dirty="0"/>
+          </a:p>
+          <a:p>
+            <a:pPr marL="342900" indent="-342900">
+              <a:spcAft>
+                <a:spcPts val="800"/>
+              </a:spcAft>
+              <a:buSzPct val="100000"/>
+              <a:buChar char="•"/>
+            </a:pPr>
+            <a:r>
+              <a:rPr lang="en-US" sz="1500" dirty="0">
+                <a:solidFill>
+                  <a:srgbClr val="3D3A36"/>
                 </a:solidFill>
                 <a:latin typeface="Calibri" pitchFamily="34" charset="0"/>
                 <a:ea typeface="Calibri" pitchFamily="34" charset="-122"/>
                 <a:cs typeface="Calibri" pitchFamily="34" charset="-120"/>
               </a:rPr>
-              <a:t>SI Units</a:t>
-            </a:r>
-            <a:endParaRPr lang="en-US" sz="1400" dirty="0"/>
-          </a:p>
-        </p:txBody>
-      </p:sp>
-      <p:sp>
-        <p:nvSpPr>
-          <p:cNvPr id="8" name="Text 6"/>
-          <p:cNvSpPr/>
-          <p:nvPr/>
-        </p:nvSpPr>
-        <p:spPr>
-          <a:xfrm>
-            <a:off x="594360" y="1737360"/>
-            <a:ext cx="2286000" cy="1097280"/>
-          </a:xfrm>
-          <a:prstGeom prst="rect">
-            <a:avLst/>
-          </a:prstGeom>
-          <a:noFill/>
-          <a:ln/>
-        </p:spPr>
-        <p:txBody>
-          <a:bodyPr wrap="square" rtlCol="0" anchor="t"/>
-          <a:lstStyle/>
-          <a:p>
-            <a:pPr indent="0" marL="0">
-              <a:buNone/>
-            </a:pPr>
-            <a:r>
-              <a:rPr lang="en-US" sz="1100" dirty="0">
+              <a:t>Independent variable (IV): what YOU change. Dependent variable (DV): what you MEASURE.</a:t>
+            </a:r>
+            <a:endParaRPr lang="en-US" sz="1500" dirty="0"/>
+          </a:p>
+          <a:p>
+            <a:pPr marL="342900" indent="-342900">
+              <a:spcAft>
+                <a:spcPts val="800"/>
+              </a:spcAft>
+              <a:buSzPct val="100000"/>
+              <a:buChar char="•"/>
+            </a:pPr>
+            <a:r>
+              <a:rPr lang="en-US" sz="1500" dirty="0">
                 <a:solidFill>
                   <a:srgbClr val="3D3A36"/>
                 </a:solidFill>
@@ -2684,129 +2569,41 @@
                 <a:ea typeface="Calibri" pitchFamily="34" charset="-122"/>
                 <a:cs typeface="Calibri" pitchFamily="34" charset="-120"/>
               </a:rPr>
-              <a:t>Length: m. Mass: g. Volume: L/mL. Temperature: °C. Time: s. Always read at eye level.</a:t>
-            </a:r>
-            <a:endParaRPr lang="en-US" sz="1100" dirty="0"/>
-          </a:p>
-        </p:txBody>
-      </p:sp>
-      <p:sp>
-        <p:nvSpPr>
-          <p:cNvPr id="9" name="Shape 7"/>
-          <p:cNvSpPr/>
-          <p:nvPr/>
-        </p:nvSpPr>
-        <p:spPr>
-          <a:xfrm>
-            <a:off x="3291840" y="1188720"/>
-            <a:ext cx="2560320" cy="1828800"/>
-          </a:xfrm>
-          <a:prstGeom prst="rect">
-            <a:avLst/>
-          </a:prstGeom>
-          <a:solidFill>
-            <a:srgbClr val="FFFFFF"/>
-          </a:solidFill>
-          <a:ln w="12700">
-            <a:solidFill>
-              <a:srgbClr val="E5E2DC"/>
-            </a:solidFill>
-            <a:prstDash val="solid"/>
-          </a:ln>
-          <a:effectLst>
-            <a:outerShdw sx="100000" sy="100000" kx="0" ky="0" algn="bl" rotWithShape="0" blurRad="50800" dist="25400" dir="8100000">
-              <a:srgbClr val="000000">
-                <a:alpha val="10000"/>
-              </a:srgbClr>
-            </a:outerShdw>
-          </a:effectLst>
-        </p:spPr>
-      </p:sp>
-      <p:sp>
-        <p:nvSpPr>
-          <p:cNvPr id="10" name="Shape 8"/>
-          <p:cNvSpPr/>
-          <p:nvPr/>
-        </p:nvSpPr>
-        <p:spPr>
-          <a:xfrm>
-            <a:off x="3291840" y="1188720"/>
-            <a:ext cx="2560320" cy="54864"/>
-          </a:xfrm>
-          <a:prstGeom prst="rect">
-            <a:avLst/>
-          </a:prstGeom>
-          <a:solidFill>
-            <a:srgbClr val="2A9D8F"/>
-          </a:solidFill>
-          <a:ln/>
-        </p:spPr>
-      </p:sp>
-      <p:sp>
-        <p:nvSpPr>
-          <p:cNvPr id="11" name="Text 9"/>
-          <p:cNvSpPr/>
-          <p:nvPr/>
-        </p:nvSpPr>
-        <p:spPr>
-          <a:xfrm>
-            <a:off x="3429000" y="1325880"/>
-            <a:ext cx="2286000" cy="365760"/>
-          </a:xfrm>
-          <a:prstGeom prst="rect">
-            <a:avLst/>
-          </a:prstGeom>
-          <a:noFill/>
-          <a:ln/>
-        </p:spPr>
-        <p:txBody>
-          <a:bodyPr wrap="square" rtlCol="0" anchor="ctr"/>
-          <a:lstStyle/>
-          <a:p>
-            <a:pPr indent="0" marL="0">
-              <a:buNone/>
-            </a:pPr>
-            <a:r>
-              <a:rPr lang="en-US" sz="1400" b="1" dirty="0">
-                <a:solidFill>
-                  <a:srgbClr val="1B2A4A"/>
+              <a:t>Controlled variables (CV): what you KEEP THE SAME to make it fair.</a:t>
+            </a:r>
+            <a:endParaRPr lang="en-US" sz="1500" dirty="0"/>
+          </a:p>
+          <a:p>
+            <a:pPr marL="342900" indent="-342900">
+              <a:spcAft>
+                <a:spcPts val="800"/>
+              </a:spcAft>
+              <a:buSzPct val="100000"/>
+              <a:buChar char="•"/>
+            </a:pPr>
+            <a:r>
+              <a:rPr lang="en-US" sz="1500" dirty="0">
+                <a:solidFill>
+                  <a:srgbClr val="3D3A36"/>
                 </a:solidFill>
                 <a:latin typeface="Calibri" pitchFamily="34" charset="0"/>
                 <a:ea typeface="Calibri" pitchFamily="34" charset="-122"/>
                 <a:cs typeface="Calibri" pitchFamily="34" charset="-120"/>
               </a:rPr>
-              <a:t>Conversions</a:t>
-            </a:r>
-            <a:endParaRPr lang="en-US" sz="1400" dirty="0"/>
-          </a:p>
-        </p:txBody>
-      </p:sp>
-      <p:sp>
-        <p:nvSpPr>
-          <p:cNvPr id="12" name="Text 10"/>
-          <p:cNvSpPr/>
-          <p:nvPr/>
-        </p:nvSpPr>
-        <p:spPr>
-          <a:xfrm>
-            <a:off x="3429000" y="1737360"/>
-            <a:ext cx="2286000" cy="1097280"/>
-          </a:xfrm>
-          <a:prstGeom prst="rect">
-            <a:avLst/>
-          </a:prstGeom>
-          <a:noFill/>
-          <a:ln/>
-        </p:spPr>
-        <p:txBody>
-          <a:bodyPr wrap="square" rtlCol="0" anchor="t"/>
-          <a:lstStyle/>
-          <a:p>
-            <a:pPr indent="0" marL="0">
-              <a:buNone/>
-            </a:pPr>
-            <a:r>
-              <a:rPr lang="en-US" sz="1100" dirty="0">
+              <a:t>Fair test = only ONE variable changes at a time.</a:t>
+            </a:r>
+            <a:endParaRPr lang="en-US" sz="1500" dirty="0"/>
+          </a:p>
+          <a:p>
+            <a:pPr marL="342900" indent="-342900">
+              <a:spcAft>
+                <a:spcPts val="800"/>
+              </a:spcAft>
+              <a:buSzPct val="100000"/>
+              <a:buChar char="•"/>
+            </a:pPr>
+            <a:r>
+              <a:rPr lang="en-US" sz="1500" dirty="0">
                 <a:solidFill>
                   <a:srgbClr val="3D3A36"/>
                 </a:solidFill>
@@ -2814,139 +2611,9 @@
                 <a:ea typeface="Calibri" pitchFamily="34" charset="-122"/>
                 <a:cs typeface="Calibri" pitchFamily="34" charset="-120"/>
               </a:rPr>
-              <a:t>kilo = ×1000. milli = ÷1000. Example: 3.5 km = 3500 m. 250 mL = 0.25 L.</a:t>
-            </a:r>
-            <a:endParaRPr lang="en-US" sz="1100" dirty="0"/>
-          </a:p>
-        </p:txBody>
-      </p:sp>
-      <p:sp>
-        <p:nvSpPr>
-          <p:cNvPr id="13" name="Shape 11"/>
-          <p:cNvSpPr/>
-          <p:nvPr/>
-        </p:nvSpPr>
-        <p:spPr>
-          <a:xfrm>
-            <a:off x="6126480" y="1188720"/>
-            <a:ext cx="2560320" cy="1828800"/>
-          </a:xfrm>
-          <a:prstGeom prst="rect">
-            <a:avLst/>
-          </a:prstGeom>
-          <a:solidFill>
-            <a:srgbClr val="FFFFFF"/>
-          </a:solidFill>
-          <a:ln w="12700">
-            <a:solidFill>
-              <a:srgbClr val="E5E2DC"/>
-            </a:solidFill>
-            <a:prstDash val="solid"/>
-          </a:ln>
-          <a:effectLst>
-            <a:outerShdw sx="100000" sy="100000" kx="0" ky="0" algn="bl" rotWithShape="0" blurRad="50800" dist="25400" dir="8100000">
-              <a:srgbClr val="000000">
-                <a:alpha val="10000"/>
-              </a:srgbClr>
-            </a:outerShdw>
-          </a:effectLst>
-        </p:spPr>
-      </p:sp>
-      <p:sp>
-        <p:nvSpPr>
-          <p:cNvPr id="14" name="Shape 12"/>
-          <p:cNvSpPr/>
-          <p:nvPr/>
-        </p:nvSpPr>
-        <p:spPr>
-          <a:xfrm>
-            <a:off x="6126480" y="1188720"/>
-            <a:ext cx="2560320" cy="54864"/>
-          </a:xfrm>
-          <a:prstGeom prst="rect">
-            <a:avLst/>
-          </a:prstGeom>
-          <a:solidFill>
-            <a:srgbClr val="2A9D8F"/>
-          </a:solidFill>
-          <a:ln/>
-        </p:spPr>
-      </p:sp>
-      <p:sp>
-        <p:nvSpPr>
-          <p:cNvPr id="15" name="Text 13"/>
-          <p:cNvSpPr/>
-          <p:nvPr/>
-        </p:nvSpPr>
-        <p:spPr>
-          <a:xfrm>
-            <a:off x="6263640" y="1325880"/>
-            <a:ext cx="2286000" cy="365760"/>
-          </a:xfrm>
-          <a:prstGeom prst="rect">
-            <a:avLst/>
-          </a:prstGeom>
-          <a:noFill/>
-          <a:ln/>
-        </p:spPr>
-        <p:txBody>
-          <a:bodyPr wrap="square" rtlCol="0" anchor="ctr"/>
-          <a:lstStyle/>
-          <a:p>
-            <a:pPr indent="0" marL="0">
-              <a:buNone/>
-            </a:pPr>
-            <a:r>
-              <a:rPr lang="en-US" sz="1400" b="1" dirty="0">
-                <a:solidFill>
-                  <a:srgbClr val="1B2A4A"/>
-                </a:solidFill>
-                <a:latin typeface="Calibri" pitchFamily="34" charset="0"/>
-                <a:ea typeface="Calibri" pitchFamily="34" charset="-122"/>
-                <a:cs typeface="Calibri" pitchFamily="34" charset="-120"/>
-              </a:rPr>
-              <a:t>Graphs</a:t>
-            </a:r>
-            <a:endParaRPr lang="en-US" sz="1400" dirty="0"/>
-          </a:p>
-        </p:txBody>
-      </p:sp>
-      <p:sp>
-        <p:nvSpPr>
-          <p:cNvPr id="16" name="Text 14"/>
-          <p:cNvSpPr/>
-          <p:nvPr/>
-        </p:nvSpPr>
-        <p:spPr>
-          <a:xfrm>
-            <a:off x="6263640" y="1737360"/>
-            <a:ext cx="2286000" cy="1097280"/>
-          </a:xfrm>
-          <a:prstGeom prst="rect">
-            <a:avLst/>
-          </a:prstGeom>
-          <a:noFill/>
-          <a:ln/>
-        </p:spPr>
-        <p:txBody>
-          <a:bodyPr wrap="square" rtlCol="0" anchor="t"/>
-          <a:lstStyle/>
-          <a:p>
-            <a:pPr indent="0" marL="0">
-              <a:buNone/>
-            </a:pPr>
-            <a:r>
-              <a:rPr lang="en-US" sz="1100" dirty="0">
-                <a:solidFill>
-                  <a:srgbClr val="3D3A36"/>
-                </a:solidFill>
-                <a:latin typeface="Calibri" pitchFamily="34" charset="0"/>
-                <a:ea typeface="Calibri" pitchFamily="34" charset="-122"/>
-                <a:cs typeface="Calibri" pitchFamily="34" charset="-120"/>
-              </a:rPr>
-              <a:t>Bar = categories. Line = continuous. Pie = proportions. Always label axes with name + unit.</a:t>
-            </a:r>
-            <a:endParaRPr lang="en-US" sz="1100" dirty="0"/>
+              <a:t>Repeat experiments at least 3 times and calculate the MEAN (average).</a:t>
+            </a:r>
+            <a:endParaRPr lang="en-US" sz="1500" dirty="0"/>
           </a:p>
         </p:txBody>
       </p:sp>
@@ -2958,13 +2625,156 @@
 </p:sld>
 </file>
 
-<file path=ppt/slides/slide5.xml><?xml version="1.0" encoding="utf-8"?>
+<file path=ppt/slides/slide6.xml><?xml version="1.0" encoding="utf-8"?>
 <p:sld xmlns:a="http://schemas.openxmlformats.org/drawingml/2006/main" xmlns:r="http://schemas.openxmlformats.org/officeDocument/2006/relationships" xmlns:p="http://schemas.openxmlformats.org/presentationml/2006/main">
-  <p:cSld name="Slide 5">
+  <p:cSld name="Slide 6">
+    <p:spTree>
+      <p:nvGrpSpPr>
+        <p:cNvPr id="1" name=""/>
+        <p:cNvGrpSpPr/>
+        <p:nvPr/>
+      </p:nvGrpSpPr>
+      <p:grpSpPr>
+        <a:xfrm>
+          <a:off x="0" y="0"/>
+          <a:ext cx="0" cy="0"/>
+          <a:chOff x="0" y="0"/>
+          <a:chExt cx="0" cy="0"/>
+        </a:xfrm>
+      </p:grpSpPr>
+      <p:sp>
+        <p:nvSpPr>
+          <p:cNvPr id="2" name="Shape 0"/>
+          <p:cNvSpPr/>
+          <p:nvPr/>
+        </p:nvSpPr>
+        <p:spPr>
+          <a:xfrm>
+            <a:off x="0" y="0"/>
+            <a:ext cx="9144000" cy="5143500"/>
+          </a:xfrm>
+          <a:prstGeom prst="rect">
+            <a:avLst/>
+          </a:prstGeom>
+          <a:solidFill>
+            <a:srgbClr val="1B2A4A"/>
+          </a:solidFill>
+          <a:ln/>
+        </p:spPr>
+      </p:sp>
+      <p:sp>
+        <p:nvSpPr>
+          <p:cNvPr id="3" name="Shape 1"/>
+          <p:cNvSpPr/>
+          <p:nvPr/>
+        </p:nvSpPr>
+        <p:spPr>
+          <a:xfrm>
+            <a:off x="731520" y="1828800"/>
+            <a:ext cx="73152" cy="1463040"/>
+          </a:xfrm>
+          <a:prstGeom prst="rect">
+            <a:avLst/>
+          </a:prstGeom>
+          <a:solidFill>
+            <a:srgbClr val="2A9D8F"/>
+          </a:solidFill>
+          <a:ln/>
+        </p:spPr>
+      </p:sp>
+      <p:sp>
+        <p:nvSpPr>
+          <p:cNvPr id="4" name="Text 2"/>
+          <p:cNvSpPr/>
+          <p:nvPr/>
+        </p:nvSpPr>
+        <p:spPr>
+          <a:xfrm>
+            <a:off x="1097280" y="1463040"/>
+            <a:ext cx="1097280" cy="1097280"/>
+          </a:xfrm>
+          <a:prstGeom prst="rect">
+            <a:avLst/>
+          </a:prstGeom>
+          <a:noFill/>
+          <a:ln/>
+        </p:spPr>
+        <p:txBody>
+          <a:bodyPr wrap="square" rtlCol="0" anchor="ctr"/>
+          <a:lstStyle/>
+          <a:p>
+            <a:pPr algn="l" indent="0" marL="0">
+              <a:buNone/>
+            </a:pPr>
+            <a:r>
+              <a:rPr lang="en-US" sz="4800" b="1" dirty="0">
+                <a:solidFill>
+                  <a:srgbClr val="2A9D8F"/>
+                </a:solidFill>
+                <a:latin typeface="Georgia" pitchFamily="34" charset="0"/>
+                <a:ea typeface="Georgia" pitchFamily="34" charset="-122"/>
+                <a:cs typeface="Georgia" pitchFamily="34" charset="-120"/>
+              </a:rPr>
+              <a:t>3</a:t>
+            </a:r>
+            <a:endParaRPr lang="en-US" sz="4800" dirty="0"/>
+          </a:p>
+        </p:txBody>
+      </p:sp>
+      <p:sp>
+        <p:nvSpPr>
+          <p:cNvPr id="5" name="Text 3"/>
+          <p:cNvSpPr/>
+          <p:nvPr/>
+        </p:nvSpPr>
+        <p:spPr>
+          <a:xfrm>
+            <a:off x="2194560" y="1920240"/>
+            <a:ext cx="5943600" cy="1097280"/>
+          </a:xfrm>
+          <a:prstGeom prst="rect">
+            <a:avLst/>
+          </a:prstGeom>
+          <a:noFill/>
+          <a:ln/>
+        </p:spPr>
+        <p:txBody>
+          <a:bodyPr wrap="square" rtlCol="0" anchor="ctr"/>
+          <a:lstStyle/>
+          <a:p>
+            <a:pPr indent="0" marL="0">
+              <a:buNone/>
+            </a:pPr>
+            <a:r>
+              <a:rPr lang="en-US" sz="3200" b="1" dirty="0">
+                <a:solidFill>
+                  <a:srgbClr val="FFFFFF"/>
+                </a:solidFill>
+                <a:latin typeface="Georgia" pitchFamily="34" charset="0"/>
+                <a:ea typeface="Georgia" pitchFamily="34" charset="-122"/>
+                <a:cs typeface="Georgia" pitchFamily="34" charset="-120"/>
+              </a:rPr>
+              <a:t>Measurement &amp; Data</a:t>
+            </a:r>
+            <a:endParaRPr lang="en-US" sz="3200" dirty="0"/>
+          </a:p>
+        </p:txBody>
+      </p:sp>
+    </p:spTree>
+  </p:cSld>
+  <p:clrMapOvr>
+    <a:masterClrMapping/>
+  </p:clrMapOvr>
+</p:sld>
+</file>
+
+<file path=ppt/slides/slide7.xml><?xml version="1.0" encoding="utf-8"?>
+<p:sld xmlns:a="http://schemas.openxmlformats.org/drawingml/2006/main" xmlns:r="http://schemas.openxmlformats.org/officeDocument/2006/relationships" xmlns:p="http://schemas.openxmlformats.org/presentationml/2006/main">
+  <p:cSld name="Slide 7">
     <p:bg>
       <p:bgPr>
         <a:solidFill>
-          <a:srgbClr val="1B2A4A"/>
+          <a:srgbClr val="FAF8F5"/>
         </a:solidFill>
       </p:bgPr>
     </p:bg>
@@ -2991,27 +2801,67 @@
         <p:spPr>
           <a:xfrm>
             <a:off x="0" y="0"/>
-            <a:ext cx="109728" cy="5143500"/>
-          </a:xfrm>
-          <a:prstGeom prst="rect">
-            <a:avLst/>
-          </a:prstGeom>
-          <a:solidFill>
-            <a:srgbClr val="E9C46A"/>
-          </a:solidFill>
-          <a:ln/>
-        </p:spPr>
-      </p:sp>
-      <p:sp>
-        <p:nvSpPr>
-          <p:cNvPr id="3" name="Text 1"/>
-          <p:cNvSpPr/>
-          <p:nvPr/>
-        </p:nvSpPr>
-        <p:spPr>
-          <a:xfrm>
-            <a:off x="731520" y="457200"/>
-            <a:ext cx="7772400" cy="731520"/>
+            <a:ext cx="9144000" cy="822960"/>
+          </a:xfrm>
+          <a:prstGeom prst="rect">
+            <a:avLst/>
+          </a:prstGeom>
+          <a:solidFill>
+            <a:srgbClr val="FFFFFF"/>
+          </a:solidFill>
+          <a:ln/>
+        </p:spPr>
+      </p:sp>
+      <p:sp>
+        <p:nvSpPr>
+          <p:cNvPr id="3" name="Shape 1"/>
+          <p:cNvSpPr/>
+          <p:nvPr/>
+        </p:nvSpPr>
+        <p:spPr>
+          <a:xfrm>
+            <a:off x="0" y="804672"/>
+            <a:ext cx="9144000" cy="27432"/>
+          </a:xfrm>
+          <a:prstGeom prst="rect">
+            <a:avLst/>
+          </a:prstGeom>
+          <a:solidFill>
+            <a:srgbClr val="E5E2DC"/>
+          </a:solidFill>
+          <a:ln/>
+        </p:spPr>
+      </p:sp>
+      <p:sp>
+        <p:nvSpPr>
+          <p:cNvPr id="4" name="Shape 2"/>
+          <p:cNvSpPr/>
+          <p:nvPr/>
+        </p:nvSpPr>
+        <p:spPr>
+          <a:xfrm>
+            <a:off x="548640" y="201168"/>
+            <a:ext cx="54864" cy="420624"/>
+          </a:xfrm>
+          <a:prstGeom prst="rect">
+            <a:avLst/>
+          </a:prstGeom>
+          <a:solidFill>
+            <a:srgbClr val="2A9D8F"/>
+          </a:solidFill>
+          <a:ln/>
+        </p:spPr>
+      </p:sp>
+      <p:sp>
+        <p:nvSpPr>
+          <p:cNvPr id="5" name="Text 3"/>
+          <p:cNvSpPr/>
+          <p:nvPr/>
+        </p:nvSpPr>
+        <p:spPr>
+          <a:xfrm>
+            <a:off x="777240" y="137160"/>
+            <a:ext cx="7772400" cy="548640"/>
           </a:xfrm>
           <a:prstGeom prst="rect">
             <a:avLst/>
@@ -3020,37 +2870,37 @@
           <a:ln/>
         </p:spPr>
         <p:txBody>
-          <a:bodyPr wrap="square" rtlCol="0" anchor="ctr"/>
+          <a:bodyPr wrap="square" lIns="0" tIns="0" rIns="0" bIns="0" rtlCol="0" anchor="ctr"/>
           <a:lstStyle/>
           <a:p>
             <a:pPr indent="0" marL="0">
               <a:buNone/>
             </a:pPr>
             <a:r>
-              <a:rPr lang="en-US" sz="3200" b="1" dirty="0">
-                <a:solidFill>
-                  <a:srgbClr val="FFFFFF"/>
+              <a:rPr lang="en-US" sz="2000" b="1" dirty="0">
+                <a:solidFill>
+                  <a:srgbClr val="1B2A4A"/>
                 </a:solidFill>
                 <a:latin typeface="Georgia" pitchFamily="34" charset="0"/>
                 <a:ea typeface="Georgia" pitchFamily="34" charset="-122"/>
                 <a:cs typeface="Georgia" pitchFamily="34" charset="-120"/>
               </a:rPr>
-              <a:t>Key Takeaways</a:t>
-            </a:r>
-            <a:endParaRPr lang="en-US" sz="3200" dirty="0"/>
-          </a:p>
-        </p:txBody>
-      </p:sp>
-      <p:sp>
-        <p:nvSpPr>
-          <p:cNvPr id="4" name="Text 2"/>
-          <p:cNvSpPr/>
-          <p:nvPr/>
-        </p:nvSpPr>
-        <p:spPr>
-          <a:xfrm>
-            <a:off x="731520" y="1463040"/>
-            <a:ext cx="7772400" cy="3200400"/>
+              <a:t>Measurement &amp; Graphs Review</a:t>
+            </a:r>
+            <a:endParaRPr lang="en-US" sz="2000" dirty="0"/>
+          </a:p>
+        </p:txBody>
+      </p:sp>
+      <p:sp>
+        <p:nvSpPr>
+          <p:cNvPr id="6" name="Text 4"/>
+          <p:cNvSpPr/>
+          <p:nvPr/>
+        </p:nvSpPr>
+        <p:spPr>
+          <a:xfrm>
+            <a:off x="731520" y="1051560"/>
+            <a:ext cx="7680960" cy="3108960"/>
           </a:xfrm>
           <a:prstGeom prst="rect">
             <a:avLst/>
@@ -3064,7 +2914,7 @@
           <a:p>
             <a:pPr marL="342900" indent="-342900">
               <a:spcAft>
-                <a:spcPts val="1000"/>
+                <a:spcPts val="800"/>
               </a:spcAft>
               <a:buSzPct val="100000"/>
               <a:buChar char="•"/>
@@ -3072,20 +2922,20 @@
             <a:r>
               <a:rPr lang="en-US" sz="1500" dirty="0">
                 <a:solidFill>
-                  <a:srgbClr val="CADCFC"/>
+                  <a:srgbClr val="3D3A36"/>
                 </a:solidFill>
                 <a:latin typeface="Calibri" pitchFamily="34" charset="0"/>
                 <a:ea typeface="Calibri" pitchFamily="34" charset="-122"/>
                 <a:cs typeface="Calibri" pitchFamily="34" charset="-120"/>
               </a:rPr>
-              <a:t>Lab safety: goggles, no food, report accidents, know hazard symbols</a:t>
+              <a:t>SI units: length (m), mass (kg), time (s), temperature (°C), volume (cm³).</a:t>
             </a:r>
             <a:endParaRPr lang="en-US" sz="1500" dirty="0"/>
           </a:p>
           <a:p>
             <a:pPr marL="342900" indent="-342900">
               <a:spcAft>
-                <a:spcPts val="1000"/>
+                <a:spcPts val="800"/>
               </a:spcAft>
               <a:buSzPct val="100000"/>
               <a:buChar char="•"/>
@@ -3093,20 +2943,20 @@
             <a:r>
               <a:rPr lang="en-US" sz="1500" dirty="0">
                 <a:solidFill>
-                  <a:srgbClr val="CADCFC"/>
+                  <a:srgbClr val="3D3A36"/>
                 </a:solidFill>
                 <a:latin typeface="Calibri" pitchFamily="34" charset="0"/>
                 <a:ea typeface="Calibri" pitchFamily="34" charset="-122"/>
                 <a:cs typeface="Calibri" pitchFamily="34" charset="-120"/>
               </a:rPr>
-              <a:t>Scientific method: 6 steps, hypothesis = If...then...because</a:t>
+              <a:t>Read a measuring cylinder at the MENISCUS at EYE LEVEL.</a:t>
             </a:r>
             <a:endParaRPr lang="en-US" sz="1500" dirty="0"/>
           </a:p>
           <a:p>
             <a:pPr marL="342900" indent="-342900">
               <a:spcAft>
-                <a:spcPts val="1000"/>
+                <a:spcPts val="800"/>
               </a:spcAft>
               <a:buSzPct val="100000"/>
               <a:buChar char="•"/>
@@ -3114,20 +2964,20 @@
             <a:r>
               <a:rPr lang="en-US" sz="1500" dirty="0">
                 <a:solidFill>
-                  <a:srgbClr val="CADCFC"/>
+                  <a:srgbClr val="3D3A36"/>
                 </a:solidFill>
                 <a:latin typeface="Calibri" pitchFamily="34" charset="0"/>
                 <a:ea typeface="Calibri" pitchFamily="34" charset="-122"/>
                 <a:cs typeface="Calibri" pitchFamily="34" charset="-120"/>
               </a:rPr>
-              <a:t>Variables: independent (change), dependent (measure), controlled (same)</a:t>
+              <a:t>Accuracy = close to true value. Precision = repeated results close together.</a:t>
             </a:r>
             <a:endParaRPr lang="en-US" sz="1500" dirty="0"/>
           </a:p>
           <a:p>
             <a:pPr marL="342900" indent="-342900">
               <a:spcAft>
-                <a:spcPts val="1000"/>
+                <a:spcPts val="800"/>
               </a:spcAft>
               <a:buSzPct val="100000"/>
               <a:buChar char="•"/>
@@ -3135,20 +2985,20 @@
             <a:r>
               <a:rPr lang="en-US" sz="1500" dirty="0">
                 <a:solidFill>
-                  <a:srgbClr val="CADCFC"/>
+                  <a:srgbClr val="3D3A36"/>
                 </a:solidFill>
                 <a:latin typeface="Calibri" pitchFamily="34" charset="0"/>
                 <a:ea typeface="Calibri" pitchFamily="34" charset="-122"/>
                 <a:cs typeface="Calibri" pitchFamily="34" charset="-120"/>
               </a:rPr>
-              <a:t>SI units: m, g, L, °C, s — read at eye level</a:t>
+              <a:t>Bar chart for CATEGORICAL data (bars don't touch).</a:t>
             </a:r>
             <a:endParaRPr lang="en-US" sz="1500" dirty="0"/>
           </a:p>
           <a:p>
             <a:pPr marL="342900" indent="-342900">
               <a:spcAft>
-                <a:spcPts val="1000"/>
+                <a:spcPts val="800"/>
               </a:spcAft>
               <a:buSzPct val="100000"/>
               <a:buChar char="•"/>
@@ -3156,54 +3006,1021 @@
             <a:r>
               <a:rPr lang="en-US" sz="1500" dirty="0">
                 <a:solidFill>
-                  <a:srgbClr val="CADCFC"/>
+                  <a:srgbClr val="3D3A36"/>
                 </a:solidFill>
                 <a:latin typeface="Calibri" pitchFamily="34" charset="0"/>
                 <a:ea typeface="Calibri" pitchFamily="34" charset="-122"/>
                 <a:cs typeface="Calibri" pitchFamily="34" charset="-120"/>
               </a:rPr>
-              <a:t>Graphs: bar (categories), line (continuous), pie (proportions)</a:t>
+              <a:t>Line graph for CONTINUOUS data (points connected by lines).</a:t>
             </a:r>
             <a:endParaRPr lang="en-US" sz="1500" dirty="0"/>
           </a:p>
-        </p:txBody>
-      </p:sp>
-      <p:sp>
-        <p:nvSpPr>
-          <p:cNvPr id="5" name="Text 3"/>
-          <p:cNvSpPr/>
-          <p:nvPr/>
-        </p:nvSpPr>
-        <p:spPr>
-          <a:xfrm>
-            <a:off x="731520" y="4572000"/>
-            <a:ext cx="7772400" cy="365760"/>
-          </a:xfrm>
-          <a:prstGeom prst="rect">
-            <a:avLst/>
-          </a:prstGeom>
-          <a:noFill/>
-          <a:ln/>
-        </p:spPr>
-        <p:txBody>
-          <a:bodyPr wrap="square" rtlCol="0" anchor="ctr"/>
-          <a:lstStyle/>
-          <a:p>
-            <a:pPr indent="0" marL="0">
-              <a:buNone/>
-            </a:pPr>
-            <a:r>
-              <a:rPr lang="en-US" sz="1100" dirty="0">
-                <a:solidFill>
-                  <a:srgbClr val="E9C46A"/>
+          <a:p>
+            <a:pPr marL="342900" indent="-342900">
+              <a:spcAft>
+                <a:spcPts val="800"/>
+              </a:spcAft>
+              <a:buSzPct val="100000"/>
+              <a:buChar char="•"/>
+            </a:pPr>
+            <a:r>
+              <a:rPr lang="en-US" sz="1500" dirty="0">
+                <a:solidFill>
+                  <a:srgbClr val="3D3A36"/>
                 </a:solidFill>
                 <a:latin typeface="Calibri" pitchFamily="34" charset="0"/>
                 <a:ea typeface="Calibri" pitchFamily="34" charset="-122"/>
                 <a:cs typeface="Calibri" pitchFamily="34" charset="-120"/>
               </a:rPr>
+              <a:t>Always label axes with variable name AND unit.</a:t>
+            </a:r>
+            <a:endParaRPr lang="en-US" sz="1500" dirty="0"/>
+          </a:p>
+        </p:txBody>
+      </p:sp>
+    </p:spTree>
+  </p:cSld>
+  <p:clrMapOvr>
+    <a:masterClrMapping/>
+  </p:clrMapOvr>
+</p:sld>
+</file>
+
+<file path=ppt/slides/slide8.xml><?xml version="1.0" encoding="utf-8"?>
+<p:sld xmlns:a="http://schemas.openxmlformats.org/drawingml/2006/main" xmlns:r="http://schemas.openxmlformats.org/officeDocument/2006/relationships" xmlns:p="http://schemas.openxmlformats.org/presentationml/2006/main">
+  <p:cSld name="Slide 8">
+    <p:bg>
+      <p:bgPr>
+        <a:solidFill>
+          <a:srgbClr val="FAF8F5"/>
+        </a:solidFill>
+      </p:bgPr>
+    </p:bg>
+    <p:spTree>
+      <p:nvGrpSpPr>
+        <p:cNvPr id="1" name=""/>
+        <p:cNvGrpSpPr/>
+        <p:nvPr/>
+      </p:nvGrpSpPr>
+      <p:grpSpPr>
+        <a:xfrm>
+          <a:off x="0" y="0"/>
+          <a:ext cx="0" cy="0"/>
+          <a:chOff x="0" y="0"/>
+          <a:chExt cx="0" cy="0"/>
+        </a:xfrm>
+      </p:grpSpPr>
+      <p:sp>
+        <p:nvSpPr>
+          <p:cNvPr id="2" name="Shape 0"/>
+          <p:cNvSpPr/>
+          <p:nvPr/>
+        </p:nvSpPr>
+        <p:spPr>
+          <a:xfrm>
+            <a:off x="0" y="0"/>
+            <a:ext cx="9144000" cy="822960"/>
+          </a:xfrm>
+          <a:prstGeom prst="rect">
+            <a:avLst/>
+          </a:prstGeom>
+          <a:solidFill>
+            <a:srgbClr val="FFFFFF"/>
+          </a:solidFill>
+          <a:ln/>
+        </p:spPr>
+      </p:sp>
+      <p:sp>
+        <p:nvSpPr>
+          <p:cNvPr id="3" name="Shape 1"/>
+          <p:cNvSpPr/>
+          <p:nvPr/>
+        </p:nvSpPr>
+        <p:spPr>
+          <a:xfrm>
+            <a:off x="0" y="804672"/>
+            <a:ext cx="9144000" cy="27432"/>
+          </a:xfrm>
+          <a:prstGeom prst="rect">
+            <a:avLst/>
+          </a:prstGeom>
+          <a:solidFill>
+            <a:srgbClr val="E5E2DC"/>
+          </a:solidFill>
+          <a:ln/>
+        </p:spPr>
+      </p:sp>
+      <p:sp>
+        <p:nvSpPr>
+          <p:cNvPr id="4" name="Shape 2"/>
+          <p:cNvSpPr/>
+          <p:nvPr/>
+        </p:nvSpPr>
+        <p:spPr>
+          <a:xfrm>
+            <a:off x="548640" y="201168"/>
+            <a:ext cx="54864" cy="420624"/>
+          </a:xfrm>
+          <a:prstGeom prst="rect">
+            <a:avLst/>
+          </a:prstGeom>
+          <a:solidFill>
+            <a:srgbClr val="2A9D8F"/>
+          </a:solidFill>
+          <a:ln/>
+        </p:spPr>
+      </p:sp>
+      <p:sp>
+        <p:nvSpPr>
+          <p:cNvPr id="5" name="Text 3"/>
+          <p:cNvSpPr/>
+          <p:nvPr/>
+        </p:nvSpPr>
+        <p:spPr>
+          <a:xfrm>
+            <a:off x="777240" y="137160"/>
+            <a:ext cx="7772400" cy="548640"/>
+          </a:xfrm>
+          <a:prstGeom prst="rect">
+            <a:avLst/>
+          </a:prstGeom>
+          <a:noFill/>
+          <a:ln/>
+        </p:spPr>
+        <p:txBody>
+          <a:bodyPr wrap="square" lIns="0" tIns="0" rIns="0" bIns="0" rtlCol="0" anchor="ctr"/>
+          <a:lstStyle/>
+          <a:p>
+            <a:pPr indent="0" marL="0">
+              <a:buNone/>
+            </a:pPr>
+            <a:r>
+              <a:rPr lang="en-US" sz="2000" b="1" dirty="0">
+                <a:solidFill>
+                  <a:srgbClr val="1B2A4A"/>
+                </a:solidFill>
+                <a:latin typeface="Georgia" pitchFamily="34" charset="0"/>
+                <a:ea typeface="Georgia" pitchFamily="34" charset="-122"/>
+                <a:cs typeface="Georgia" pitchFamily="34" charset="-120"/>
+              </a:rPr>
+              <a:t>Final Revision Checklist</a:t>
+            </a:r>
+            <a:endParaRPr lang="en-US" sz="2000" dirty="0"/>
+          </a:p>
+        </p:txBody>
+      </p:sp>
+      <p:sp>
+        <p:nvSpPr>
+          <p:cNvPr id="6" name="Shape 4"/>
+          <p:cNvSpPr/>
+          <p:nvPr/>
+        </p:nvSpPr>
+        <p:spPr>
+          <a:xfrm>
+            <a:off x="731520" y="1051560"/>
+            <a:ext cx="7680960" cy="438912"/>
+          </a:xfrm>
+          <a:prstGeom prst="rect">
+            <a:avLst/>
+          </a:prstGeom>
+          <a:solidFill>
+            <a:srgbClr val="FFFFFF"/>
+          </a:solidFill>
+          <a:ln/>
+        </p:spPr>
+      </p:sp>
+      <p:sp>
+        <p:nvSpPr>
+          <p:cNvPr id="7" name="Text 5"/>
+          <p:cNvSpPr/>
+          <p:nvPr/>
+        </p:nvSpPr>
+        <p:spPr>
+          <a:xfrm>
+            <a:off x="868680" y="1051560"/>
+            <a:ext cx="320040" cy="438912"/>
+          </a:xfrm>
+          <a:prstGeom prst="rect">
+            <a:avLst/>
+          </a:prstGeom>
+          <a:noFill/>
+          <a:ln/>
+        </p:spPr>
+        <p:txBody>
+          <a:bodyPr wrap="square" rtlCol="0" anchor="ctr"/>
+          <a:lstStyle/>
+          <a:p>
+            <a:pPr indent="0" marL="0">
+              <a:buNone/>
+            </a:pPr>
+            <a:r>
+              <a:rPr lang="en-US" sz="1400" dirty="0">
+                <a:solidFill>
+                  <a:srgbClr val="2A9D8F"/>
+                </a:solidFill>
+              </a:rPr>
+              <a:t>☐</a:t>
+            </a:r>
+            <a:endParaRPr lang="en-US" sz="1400" dirty="0"/>
+          </a:p>
+        </p:txBody>
+      </p:sp>
+      <p:sp>
+        <p:nvSpPr>
+          <p:cNvPr id="8" name="Text 6"/>
+          <p:cNvSpPr/>
+          <p:nvPr/>
+        </p:nvSpPr>
+        <p:spPr>
+          <a:xfrm>
+            <a:off x="1234440" y="1051560"/>
+            <a:ext cx="6949440" cy="438912"/>
+          </a:xfrm>
+          <a:prstGeom prst="rect">
+            <a:avLst/>
+          </a:prstGeom>
+          <a:noFill/>
+          <a:ln/>
+        </p:spPr>
+        <p:txBody>
+          <a:bodyPr wrap="square" rtlCol="0" anchor="ctr"/>
+          <a:lstStyle/>
+          <a:p>
+            <a:pPr indent="0" marL="0">
+              <a:buNone/>
+            </a:pPr>
+            <a:r>
+              <a:rPr lang="en-US" sz="1300" dirty="0">
+                <a:solidFill>
+                  <a:srgbClr val="3D3A36"/>
+                </a:solidFill>
+                <a:latin typeface="Calibri" pitchFamily="34" charset="0"/>
+                <a:ea typeface="Calibri" pitchFamily="34" charset="-122"/>
+                <a:cs typeface="Calibri" pitchFamily="34" charset="-120"/>
+              </a:rPr>
+              <a:t>Lab safety rules and hazard symbols</a:t>
+            </a:r>
+            <a:endParaRPr lang="en-US" sz="1300" dirty="0"/>
+          </a:p>
+        </p:txBody>
+      </p:sp>
+      <p:sp>
+        <p:nvSpPr>
+          <p:cNvPr id="9" name="Shape 7"/>
+          <p:cNvSpPr/>
+          <p:nvPr/>
+        </p:nvSpPr>
+        <p:spPr>
+          <a:xfrm>
+            <a:off x="731520" y="1554480"/>
+            <a:ext cx="7680960" cy="438912"/>
+          </a:xfrm>
+          <a:prstGeom prst="rect">
+            <a:avLst/>
+          </a:prstGeom>
+          <a:solidFill>
+            <a:srgbClr val="F8F6F3"/>
+          </a:solidFill>
+          <a:ln/>
+        </p:spPr>
+      </p:sp>
+      <p:sp>
+        <p:nvSpPr>
+          <p:cNvPr id="10" name="Text 8"/>
+          <p:cNvSpPr/>
+          <p:nvPr/>
+        </p:nvSpPr>
+        <p:spPr>
+          <a:xfrm>
+            <a:off x="868680" y="1554480"/>
+            <a:ext cx="320040" cy="438912"/>
+          </a:xfrm>
+          <a:prstGeom prst="rect">
+            <a:avLst/>
+          </a:prstGeom>
+          <a:noFill/>
+          <a:ln/>
+        </p:spPr>
+        <p:txBody>
+          <a:bodyPr wrap="square" rtlCol="0" anchor="ctr"/>
+          <a:lstStyle/>
+          <a:p>
+            <a:pPr indent="0" marL="0">
+              <a:buNone/>
+            </a:pPr>
+            <a:r>
+              <a:rPr lang="en-US" sz="1400" dirty="0">
+                <a:solidFill>
+                  <a:srgbClr val="2A9D8F"/>
+                </a:solidFill>
+              </a:rPr>
+              <a:t>☐</a:t>
+            </a:r>
+            <a:endParaRPr lang="en-US" sz="1400" dirty="0"/>
+          </a:p>
+        </p:txBody>
+      </p:sp>
+      <p:sp>
+        <p:nvSpPr>
+          <p:cNvPr id="11" name="Text 9"/>
+          <p:cNvSpPr/>
+          <p:nvPr/>
+        </p:nvSpPr>
+        <p:spPr>
+          <a:xfrm>
+            <a:off x="1234440" y="1554480"/>
+            <a:ext cx="6949440" cy="438912"/>
+          </a:xfrm>
+          <a:prstGeom prst="rect">
+            <a:avLst/>
+          </a:prstGeom>
+          <a:noFill/>
+          <a:ln/>
+        </p:spPr>
+        <p:txBody>
+          <a:bodyPr wrap="square" rtlCol="0" anchor="ctr"/>
+          <a:lstStyle/>
+          <a:p>
+            <a:pPr indent="0" marL="0">
+              <a:buNone/>
+            </a:pPr>
+            <a:r>
+              <a:rPr lang="en-US" sz="1300" dirty="0">
+                <a:solidFill>
+                  <a:srgbClr val="3D3A36"/>
+                </a:solidFill>
+                <a:latin typeface="Calibri" pitchFamily="34" charset="0"/>
+                <a:ea typeface="Calibri" pitchFamily="34" charset="-122"/>
+                <a:cs typeface="Calibri" pitchFamily="34" charset="-120"/>
+              </a:rPr>
+              <a:t>Steps of the scientific method</a:t>
+            </a:r>
+            <a:endParaRPr lang="en-US" sz="1300" dirty="0"/>
+          </a:p>
+        </p:txBody>
+      </p:sp>
+      <p:sp>
+        <p:nvSpPr>
+          <p:cNvPr id="12" name="Shape 10"/>
+          <p:cNvSpPr/>
+          <p:nvPr/>
+        </p:nvSpPr>
+        <p:spPr>
+          <a:xfrm>
+            <a:off x="731520" y="2057400"/>
+            <a:ext cx="7680960" cy="438912"/>
+          </a:xfrm>
+          <a:prstGeom prst="rect">
+            <a:avLst/>
+          </a:prstGeom>
+          <a:solidFill>
+            <a:srgbClr val="FFFFFF"/>
+          </a:solidFill>
+          <a:ln/>
+        </p:spPr>
+      </p:sp>
+      <p:sp>
+        <p:nvSpPr>
+          <p:cNvPr id="13" name="Text 11"/>
+          <p:cNvSpPr/>
+          <p:nvPr/>
+        </p:nvSpPr>
+        <p:spPr>
+          <a:xfrm>
+            <a:off x="868680" y="2057400"/>
+            <a:ext cx="320040" cy="438912"/>
+          </a:xfrm>
+          <a:prstGeom prst="rect">
+            <a:avLst/>
+          </a:prstGeom>
+          <a:noFill/>
+          <a:ln/>
+        </p:spPr>
+        <p:txBody>
+          <a:bodyPr wrap="square" rtlCol="0" anchor="ctr"/>
+          <a:lstStyle/>
+          <a:p>
+            <a:pPr indent="0" marL="0">
+              <a:buNone/>
+            </a:pPr>
+            <a:r>
+              <a:rPr lang="en-US" sz="1400" dirty="0">
+                <a:solidFill>
+                  <a:srgbClr val="2A9D8F"/>
+                </a:solidFill>
+              </a:rPr>
+              <a:t>☐</a:t>
+            </a:r>
+            <a:endParaRPr lang="en-US" sz="1400" dirty="0"/>
+          </a:p>
+        </p:txBody>
+      </p:sp>
+      <p:sp>
+        <p:nvSpPr>
+          <p:cNvPr id="14" name="Text 12"/>
+          <p:cNvSpPr/>
+          <p:nvPr/>
+        </p:nvSpPr>
+        <p:spPr>
+          <a:xfrm>
+            <a:off x="1234440" y="2057400"/>
+            <a:ext cx="6949440" cy="438912"/>
+          </a:xfrm>
+          <a:prstGeom prst="rect">
+            <a:avLst/>
+          </a:prstGeom>
+          <a:noFill/>
+          <a:ln/>
+        </p:spPr>
+        <p:txBody>
+          <a:bodyPr wrap="square" rtlCol="0" anchor="ctr"/>
+          <a:lstStyle/>
+          <a:p>
+            <a:pPr indent="0" marL="0">
+              <a:buNone/>
+            </a:pPr>
+            <a:r>
+              <a:rPr lang="en-US" sz="1300" dirty="0">
+                <a:solidFill>
+                  <a:srgbClr val="3D3A36"/>
+                </a:solidFill>
+                <a:latin typeface="Calibri" pitchFamily="34" charset="0"/>
+                <a:ea typeface="Calibri" pitchFamily="34" charset="-122"/>
+                <a:cs typeface="Calibri" pitchFamily="34" charset="-120"/>
+              </a:rPr>
+              <a:t>Three types of variables (IV, DV, CV)</a:t>
+            </a:r>
+            <a:endParaRPr lang="en-US" sz="1300" dirty="0"/>
+          </a:p>
+        </p:txBody>
+      </p:sp>
+      <p:sp>
+        <p:nvSpPr>
+          <p:cNvPr id="15" name="Shape 13"/>
+          <p:cNvSpPr/>
+          <p:nvPr/>
+        </p:nvSpPr>
+        <p:spPr>
+          <a:xfrm>
+            <a:off x="731520" y="2560320"/>
+            <a:ext cx="7680960" cy="438912"/>
+          </a:xfrm>
+          <a:prstGeom prst="rect">
+            <a:avLst/>
+          </a:prstGeom>
+          <a:solidFill>
+            <a:srgbClr val="F8F6F3"/>
+          </a:solidFill>
+          <a:ln/>
+        </p:spPr>
+      </p:sp>
+      <p:sp>
+        <p:nvSpPr>
+          <p:cNvPr id="16" name="Text 14"/>
+          <p:cNvSpPr/>
+          <p:nvPr/>
+        </p:nvSpPr>
+        <p:spPr>
+          <a:xfrm>
+            <a:off x="868680" y="2560320"/>
+            <a:ext cx="320040" cy="438912"/>
+          </a:xfrm>
+          <a:prstGeom prst="rect">
+            <a:avLst/>
+          </a:prstGeom>
+          <a:noFill/>
+          <a:ln/>
+        </p:spPr>
+        <p:txBody>
+          <a:bodyPr wrap="square" rtlCol="0" anchor="ctr"/>
+          <a:lstStyle/>
+          <a:p>
+            <a:pPr indent="0" marL="0">
+              <a:buNone/>
+            </a:pPr>
+            <a:r>
+              <a:rPr lang="en-US" sz="1400" dirty="0">
+                <a:solidFill>
+                  <a:srgbClr val="2A9D8F"/>
+                </a:solidFill>
+              </a:rPr>
+              <a:t>☐</a:t>
+            </a:r>
+            <a:endParaRPr lang="en-US" sz="1400" dirty="0"/>
+          </a:p>
+        </p:txBody>
+      </p:sp>
+      <p:sp>
+        <p:nvSpPr>
+          <p:cNvPr id="17" name="Text 15"/>
+          <p:cNvSpPr/>
+          <p:nvPr/>
+        </p:nvSpPr>
+        <p:spPr>
+          <a:xfrm>
+            <a:off x="1234440" y="2560320"/>
+            <a:ext cx="6949440" cy="438912"/>
+          </a:xfrm>
+          <a:prstGeom prst="rect">
+            <a:avLst/>
+          </a:prstGeom>
+          <a:noFill/>
+          <a:ln/>
+        </p:spPr>
+        <p:txBody>
+          <a:bodyPr wrap="square" rtlCol="0" anchor="ctr"/>
+          <a:lstStyle/>
+          <a:p>
+            <a:pPr indent="0" marL="0">
+              <a:buNone/>
+            </a:pPr>
+            <a:r>
+              <a:rPr lang="en-US" sz="1300" dirty="0">
+                <a:solidFill>
+                  <a:srgbClr val="3D3A36"/>
+                </a:solidFill>
+                <a:latin typeface="Calibri" pitchFamily="34" charset="0"/>
+                <a:ea typeface="Calibri" pitchFamily="34" charset="-122"/>
+                <a:cs typeface="Calibri" pitchFamily="34" charset="-120"/>
+              </a:rPr>
+              <a:t>Writing a testable hypothesis</a:t>
+            </a:r>
+            <a:endParaRPr lang="en-US" sz="1300" dirty="0"/>
+          </a:p>
+        </p:txBody>
+      </p:sp>
+      <p:sp>
+        <p:nvSpPr>
+          <p:cNvPr id="18" name="Shape 16"/>
+          <p:cNvSpPr/>
+          <p:nvPr/>
+        </p:nvSpPr>
+        <p:spPr>
+          <a:xfrm>
+            <a:off x="731520" y="3063240"/>
+            <a:ext cx="7680960" cy="438912"/>
+          </a:xfrm>
+          <a:prstGeom prst="rect">
+            <a:avLst/>
+          </a:prstGeom>
+          <a:solidFill>
+            <a:srgbClr val="FFFFFF"/>
+          </a:solidFill>
+          <a:ln/>
+        </p:spPr>
+      </p:sp>
+      <p:sp>
+        <p:nvSpPr>
+          <p:cNvPr id="19" name="Text 17"/>
+          <p:cNvSpPr/>
+          <p:nvPr/>
+        </p:nvSpPr>
+        <p:spPr>
+          <a:xfrm>
+            <a:off x="868680" y="3063240"/>
+            <a:ext cx="320040" cy="438912"/>
+          </a:xfrm>
+          <a:prstGeom prst="rect">
+            <a:avLst/>
+          </a:prstGeom>
+          <a:noFill/>
+          <a:ln/>
+        </p:spPr>
+        <p:txBody>
+          <a:bodyPr wrap="square" rtlCol="0" anchor="ctr"/>
+          <a:lstStyle/>
+          <a:p>
+            <a:pPr indent="0" marL="0">
+              <a:buNone/>
+            </a:pPr>
+            <a:r>
+              <a:rPr lang="en-US" sz="1400" dirty="0">
+                <a:solidFill>
+                  <a:srgbClr val="2A9D8F"/>
+                </a:solidFill>
+              </a:rPr>
+              <a:t>☐</a:t>
+            </a:r>
+            <a:endParaRPr lang="en-US" sz="1400" dirty="0"/>
+          </a:p>
+        </p:txBody>
+      </p:sp>
+      <p:sp>
+        <p:nvSpPr>
+          <p:cNvPr id="20" name="Text 18"/>
+          <p:cNvSpPr/>
+          <p:nvPr/>
+        </p:nvSpPr>
+        <p:spPr>
+          <a:xfrm>
+            <a:off x="1234440" y="3063240"/>
+            <a:ext cx="6949440" cy="438912"/>
+          </a:xfrm>
+          <a:prstGeom prst="rect">
+            <a:avLst/>
+          </a:prstGeom>
+          <a:noFill/>
+          <a:ln/>
+        </p:spPr>
+        <p:txBody>
+          <a:bodyPr wrap="square" rtlCol="0" anchor="ctr"/>
+          <a:lstStyle/>
+          <a:p>
+            <a:pPr indent="0" marL="0">
+              <a:buNone/>
+            </a:pPr>
+            <a:r>
+              <a:rPr lang="en-US" sz="1300" dirty="0">
+                <a:solidFill>
+                  <a:srgbClr val="3D3A36"/>
+                </a:solidFill>
+                <a:latin typeface="Calibri" pitchFamily="34" charset="0"/>
+                <a:ea typeface="Calibri" pitchFamily="34" charset="-122"/>
+                <a:cs typeface="Calibri" pitchFamily="34" charset="-120"/>
+              </a:rPr>
+              <a:t>SI units and measurement techniques</a:t>
+            </a:r>
+            <a:endParaRPr lang="en-US" sz="1300" dirty="0"/>
+          </a:p>
+        </p:txBody>
+      </p:sp>
+      <p:sp>
+        <p:nvSpPr>
+          <p:cNvPr id="21" name="Shape 19"/>
+          <p:cNvSpPr/>
+          <p:nvPr/>
+        </p:nvSpPr>
+        <p:spPr>
+          <a:xfrm>
+            <a:off x="731520" y="3566160"/>
+            <a:ext cx="7680960" cy="438912"/>
+          </a:xfrm>
+          <a:prstGeom prst="rect">
+            <a:avLst/>
+          </a:prstGeom>
+          <a:solidFill>
+            <a:srgbClr val="F8F6F3"/>
+          </a:solidFill>
+          <a:ln/>
+        </p:spPr>
+      </p:sp>
+      <p:sp>
+        <p:nvSpPr>
+          <p:cNvPr id="22" name="Text 20"/>
+          <p:cNvSpPr/>
+          <p:nvPr/>
+        </p:nvSpPr>
+        <p:spPr>
+          <a:xfrm>
+            <a:off x="868680" y="3566160"/>
+            <a:ext cx="320040" cy="438912"/>
+          </a:xfrm>
+          <a:prstGeom prst="rect">
+            <a:avLst/>
+          </a:prstGeom>
+          <a:noFill/>
+          <a:ln/>
+        </p:spPr>
+        <p:txBody>
+          <a:bodyPr wrap="square" rtlCol="0" anchor="ctr"/>
+          <a:lstStyle/>
+          <a:p>
+            <a:pPr indent="0" marL="0">
+              <a:buNone/>
+            </a:pPr>
+            <a:r>
+              <a:rPr lang="en-US" sz="1400" dirty="0">
+                <a:solidFill>
+                  <a:srgbClr val="2A9D8F"/>
+                </a:solidFill>
+              </a:rPr>
+              <a:t>☐</a:t>
+            </a:r>
+            <a:endParaRPr lang="en-US" sz="1400" dirty="0"/>
+          </a:p>
+        </p:txBody>
+      </p:sp>
+      <p:sp>
+        <p:nvSpPr>
+          <p:cNvPr id="23" name="Text 21"/>
+          <p:cNvSpPr/>
+          <p:nvPr/>
+        </p:nvSpPr>
+        <p:spPr>
+          <a:xfrm>
+            <a:off x="1234440" y="3566160"/>
+            <a:ext cx="6949440" cy="438912"/>
+          </a:xfrm>
+          <a:prstGeom prst="rect">
+            <a:avLst/>
+          </a:prstGeom>
+          <a:noFill/>
+          <a:ln/>
+        </p:spPr>
+        <p:txBody>
+          <a:bodyPr wrap="square" rtlCol="0" anchor="ctr"/>
+          <a:lstStyle/>
+          <a:p>
+            <a:pPr indent="0" marL="0">
+              <a:buNone/>
+            </a:pPr>
+            <a:r>
+              <a:rPr lang="en-US" sz="1300" dirty="0">
+                <a:solidFill>
+                  <a:srgbClr val="3D3A36"/>
+                </a:solidFill>
+                <a:latin typeface="Calibri" pitchFamily="34" charset="0"/>
+                <a:ea typeface="Calibri" pitchFamily="34" charset="-122"/>
+                <a:cs typeface="Calibri" pitchFamily="34" charset="-120"/>
+              </a:rPr>
+              <a:t>Choosing and drawing the correct graph type</a:t>
+            </a:r>
+            <a:endParaRPr lang="en-US" sz="1300" dirty="0"/>
+          </a:p>
+        </p:txBody>
+      </p:sp>
+      <p:sp>
+        <p:nvSpPr>
+          <p:cNvPr id="24" name="Shape 22"/>
+          <p:cNvSpPr/>
+          <p:nvPr/>
+        </p:nvSpPr>
+        <p:spPr>
+          <a:xfrm>
+            <a:off x="731520" y="4251960"/>
+            <a:ext cx="7680960" cy="594360"/>
+          </a:xfrm>
+          <a:prstGeom prst="rect">
+            <a:avLst/>
+          </a:prstGeom>
+          <a:solidFill>
+            <a:srgbClr val="E8F5F3"/>
+          </a:solidFill>
+          <a:ln/>
+          <a:effectLst>
+            <a:outerShdw sx="100000" sy="100000" kx="0" ky="0" algn="bl" rotWithShape="0" blurRad="50800" dist="25400" dir="8100000">
+              <a:srgbClr val="000000">
+                <a:alpha val="10000"/>
+              </a:srgbClr>
+            </a:outerShdw>
+          </a:effectLst>
+        </p:spPr>
+      </p:sp>
+      <p:sp>
+        <p:nvSpPr>
+          <p:cNvPr id="25" name="Text 23"/>
+          <p:cNvSpPr/>
+          <p:nvPr/>
+        </p:nvSpPr>
+        <p:spPr>
+          <a:xfrm>
+            <a:off x="914400" y="4251960"/>
+            <a:ext cx="7315200" cy="594360"/>
+          </a:xfrm>
+          <a:prstGeom prst="rect">
+            <a:avLst/>
+          </a:prstGeom>
+          <a:noFill/>
+          <a:ln/>
+        </p:spPr>
+        <p:txBody>
+          <a:bodyPr wrap="square" rtlCol="0" anchor="ctr"/>
+          <a:lstStyle/>
+          <a:p>
+            <a:pPr indent="0" marL="0">
+              <a:buNone/>
+            </a:pPr>
+            <a:r>
+              <a:rPr lang="en-US" sz="1200" b="1" dirty="0">
+                <a:solidFill>
+                  <a:srgbClr val="2A9D8F"/>
+                </a:solidFill>
+                <a:latin typeface="Calibri" pitchFamily="34" charset="0"/>
+                <a:ea typeface="Calibri" pitchFamily="34" charset="-122"/>
+                <a:cs typeface="Calibri" pitchFamily="34" charset="-120"/>
+              </a:rPr>
+              <a:t>Key Idea: </a:t>
+            </a:r>
+            <a:pPr indent="0" marL="0">
+              <a:buNone/>
+            </a:pPr>
+            <a:r>
+              <a:rPr lang="en-US" sz="1200" i="1" dirty="0">
+                <a:solidFill>
+                  <a:srgbClr val="3D3A36"/>
+                </a:solidFill>
+                <a:latin typeface="Calibri" pitchFamily="34" charset="0"/>
+                <a:ea typeface="Calibri" pitchFamily="34" charset="-122"/>
+                <a:cs typeface="Calibri" pitchFamily="34" charset="-120"/>
+              </a:rPr>
+              <a:t>Review these topics, then test yourself with the Self-Quiz on mrzocchi.com.</a:t>
+            </a:r>
+            <a:endParaRPr lang="en-US" sz="1200" dirty="0"/>
+          </a:p>
+        </p:txBody>
+      </p:sp>
+    </p:spTree>
+  </p:cSld>
+  <p:clrMapOvr>
+    <a:masterClrMapping/>
+  </p:clrMapOvr>
+</p:sld>
+</file>
+
+<file path=ppt/slides/slide9.xml><?xml version="1.0" encoding="utf-8"?>
+<p:sld xmlns:a="http://schemas.openxmlformats.org/drawingml/2006/main" xmlns:r="http://schemas.openxmlformats.org/officeDocument/2006/relationships" xmlns:p="http://schemas.openxmlformats.org/presentationml/2006/main">
+  <p:cSld name="Slide 9">
+    <p:spTree>
+      <p:nvGrpSpPr>
+        <p:cNvPr id="1" name=""/>
+        <p:cNvGrpSpPr/>
+        <p:nvPr/>
+      </p:nvGrpSpPr>
+      <p:grpSpPr>
+        <a:xfrm>
+          <a:off x="0" y="0"/>
+          <a:ext cx="0" cy="0"/>
+          <a:chOff x="0" y="0"/>
+          <a:chExt cx="0" cy="0"/>
+        </a:xfrm>
+      </p:grpSpPr>
+      <p:sp>
+        <p:nvSpPr>
+          <p:cNvPr id="2" name="Shape 0"/>
+          <p:cNvSpPr/>
+          <p:nvPr/>
+        </p:nvSpPr>
+        <p:spPr>
+          <a:xfrm>
+            <a:off x="0" y="0"/>
+            <a:ext cx="9144000" cy="5143500"/>
+          </a:xfrm>
+          <a:prstGeom prst="rect">
+            <a:avLst/>
+          </a:prstGeom>
+          <a:solidFill>
+            <a:srgbClr val="1B2A4A"/>
+          </a:solidFill>
+          <a:ln/>
+        </p:spPr>
+      </p:sp>
+      <p:sp>
+        <p:nvSpPr>
+          <p:cNvPr id="3" name="Shape 1"/>
+          <p:cNvSpPr/>
+          <p:nvPr/>
+        </p:nvSpPr>
+        <p:spPr>
+          <a:xfrm>
+            <a:off x="0" y="4777740"/>
+            <a:ext cx="9144000" cy="365760"/>
+          </a:xfrm>
+          <a:prstGeom prst="rect">
+            <a:avLst/>
+          </a:prstGeom>
+          <a:solidFill>
+            <a:srgbClr val="2A9D8F"/>
+          </a:solidFill>
+          <a:ln/>
+        </p:spPr>
+      </p:sp>
+      <p:sp>
+        <p:nvSpPr>
+          <p:cNvPr id="4" name="Shape 2"/>
+          <p:cNvSpPr/>
+          <p:nvPr/>
+        </p:nvSpPr>
+        <p:spPr>
+          <a:xfrm>
+            <a:off x="-914400" y="-914400"/>
+            <a:ext cx="3657600" cy="3657600"/>
+          </a:xfrm>
+          <a:prstGeom prst="ellipse">
+            <a:avLst/>
+          </a:prstGeom>
+          <a:solidFill>
+            <a:srgbClr val="2A9D8F">
+              <a:alpha val="10000"/>
+            </a:srgbClr>
+          </a:solidFill>
+          <a:ln/>
+        </p:spPr>
+      </p:sp>
+      <p:sp>
+        <p:nvSpPr>
+          <p:cNvPr id="5" name="Text 3"/>
+          <p:cNvSpPr/>
+          <p:nvPr/>
+        </p:nvSpPr>
+        <p:spPr>
+          <a:xfrm>
+            <a:off x="731520" y="1463040"/>
+            <a:ext cx="7680960" cy="822960"/>
+          </a:xfrm>
+          <a:prstGeom prst="rect">
+            <a:avLst/>
+          </a:prstGeom>
+          <a:noFill/>
+          <a:ln/>
+        </p:spPr>
+        <p:txBody>
+          <a:bodyPr wrap="square" rtlCol="0" anchor="ctr"/>
+          <a:lstStyle/>
+          <a:p>
+            <a:pPr algn="ctr" indent="0" marL="0">
+              <a:buNone/>
+            </a:pPr>
+            <a:r>
+              <a:rPr lang="en-US" sz="3400" b="1" dirty="0">
+                <a:solidFill>
+                  <a:srgbClr val="FFFFFF"/>
+                </a:solidFill>
+                <a:latin typeface="Georgia" pitchFamily="34" charset="0"/>
+                <a:ea typeface="Georgia" pitchFamily="34" charset="-122"/>
+                <a:cs typeface="Georgia" pitchFamily="34" charset="-120"/>
+              </a:rPr>
+              <a:t>Review &amp; Practise</a:t>
+            </a:r>
+            <a:endParaRPr lang="en-US" sz="3400" dirty="0"/>
+          </a:p>
+        </p:txBody>
+      </p:sp>
+      <p:sp>
+        <p:nvSpPr>
+          <p:cNvPr id="6" name="Text 4"/>
+          <p:cNvSpPr/>
+          <p:nvPr/>
+        </p:nvSpPr>
+        <p:spPr>
+          <a:xfrm>
+            <a:off x="731520" y="2468880"/>
+            <a:ext cx="7680960" cy="457200"/>
+          </a:xfrm>
+          <a:prstGeom prst="rect">
+            <a:avLst/>
+          </a:prstGeom>
+          <a:noFill/>
+          <a:ln/>
+        </p:spPr>
+        <p:txBody>
+          <a:bodyPr wrap="square" rtlCol="0" anchor="ctr"/>
+          <a:lstStyle/>
+          <a:p>
+            <a:pPr algn="ctr" indent="0" marL="0">
+              <a:buNone/>
+            </a:pPr>
+            <a:r>
+              <a:rPr lang="en-US" sz="1800" dirty="0">
+                <a:solidFill>
+                  <a:srgbClr val="2A9D8F"/>
+                </a:solidFill>
+                <a:latin typeface="Calibri" pitchFamily="34" charset="0"/>
+                <a:ea typeface="Calibri" pitchFamily="34" charset="-122"/>
+                <a:cs typeface="Calibri" pitchFamily="34" charset="-120"/>
+              </a:rPr>
               <a:t>mrzocchi.com</a:t>
             </a:r>
-            <a:endParaRPr lang="en-US" sz="1100" dirty="0"/>
+            <a:endParaRPr lang="en-US" sz="1800" dirty="0"/>
+          </a:p>
+        </p:txBody>
+      </p:sp>
+      <p:sp>
+        <p:nvSpPr>
+          <p:cNvPr id="7" name="Text 5"/>
+          <p:cNvSpPr/>
+          <p:nvPr/>
+        </p:nvSpPr>
+        <p:spPr>
+          <a:xfrm>
+            <a:off x="731520" y="3108960"/>
+            <a:ext cx="7680960" cy="457200"/>
+          </a:xfrm>
+          <a:prstGeom prst="rect">
+            <a:avLst/>
+          </a:prstGeom>
+          <a:noFill/>
+          <a:ln/>
+        </p:spPr>
+        <p:txBody>
+          <a:bodyPr wrap="square" rtlCol="0" anchor="ctr"/>
+          <a:lstStyle/>
+          <a:p>
+            <a:pPr algn="ctr" indent="0" marL="0">
+              <a:buNone/>
+            </a:pPr>
+            <a:r>
+              <a:rPr lang="en-US" sz="1300" dirty="0">
+                <a:solidFill>
+                  <a:srgbClr val="9B9690"/>
+                </a:solidFill>
+                <a:latin typeface="Calibri" pitchFamily="34" charset="0"/>
+                <a:ea typeface="Calibri" pitchFamily="34" charset="-122"/>
+                <a:cs typeface="Calibri" pitchFamily="34" charset="-120"/>
+              </a:rPr>
+              <a:t>Use the Self-Quiz, Review Games, and Practice Builder to test yourself.</a:t>
+            </a:r>
+            <a:endParaRPr lang="en-US" sz="1300" dirty="0"/>
           </a:p>
         </p:txBody>
       </p:sp>

--- a/static/ppts/G6_Sci_T1_Full_Revision.pptx
+++ b/static/ppts/G6_Sci_T1_Full_Revision.pptx
@@ -14,12 +14,13 @@
     <p:sldId id="262" r:id="rId8"/>
     <p:sldId id="263" r:id="rId9"/>
     <p:sldId id="264" r:id="rId10"/>
+    <p:sldId id="265" r:id="rId11"/>
   </p:sldIdLst>
   <p:notesMasterIdLst>
-    <p:notesMasterId r:id="rId11"/>
+    <p:notesMasterId r:id="rId12"/>
   </p:notesMasterIdLst>
-  <p:sldSz cx="9144000" cy="5143500"/>
-  <p:notesSz cx="5143500" cy="9144000"/>
+  <p:sldSz cx="12192000" cy="6858000"/>
+  <p:notesSz cx="6858000" cy="12192000"/>
   <p:defaultTextStyle>
     <a:lvl1pPr marL="0" algn="l" defTabSz="914400" rtl="0" eaLnBrk="1" latinLnBrk="0" hangingPunct="1">
       <a:defRPr sz="1800" kern="1200">
@@ -534,6 +535,94 @@
             <a:fld id="{F7021451-1387-4CA6-816F-3879F97B5CBC}" type="slidenum">
               <a:rPr lang="en-US"/>
               <a:t>1</a:t>
+            </a:fld>
+            <a:endParaRPr lang="en-US"/>
+          </a:p>
+        </p:txBody>
+      </p:sp>
+    </p:spTree>
+    <p:extLst>
+      <p:ext uri="{BB962C8B-B14F-4D97-AF65-F5344CB8AC3E}">
+        <p14:creationId xmlns:p14="http://schemas.microsoft.com/office/powerpoint/2010/main" val="1024086991"/>
+      </p:ext>
+    </p:extLst>
+  </p:cSld>
+  <p:clrMapOvr>
+    <a:masterClrMapping/>
+  </p:clrMapOvr>
+</p:notes>
+</file>
+
+<file path=ppt/notesSlides/notesSlide10.xml><?xml version="1.0" encoding="utf-8"?>
+<p:notes xmlns:a="http://schemas.openxmlformats.org/drawingml/2006/main" xmlns:r="http://schemas.openxmlformats.org/officeDocument/2006/relationships" xmlns:p="http://schemas.openxmlformats.org/presentationml/2006/main">
+  <p:cSld>
+    <p:spTree>
+      <p:nvGrpSpPr>
+        <p:cNvPr id="1" name=""/>
+        <p:cNvGrpSpPr/>
+        <p:nvPr/>
+      </p:nvGrpSpPr>
+      <p:grpSpPr>
+        <a:xfrm>
+          <a:off x="0" y="0"/>
+          <a:ext cx="0" cy="0"/>
+          <a:chOff x="0" y="0"/>
+          <a:chExt cx="0" cy="0"/>
+        </a:xfrm>
+      </p:grpSpPr>
+      <p:sp>
+        <p:nvSpPr>
+          <p:cNvPr id="2" name="Slide Image Placeholder 1"/>
+          <p:cNvSpPr>
+            <a:spLocks noGrp="1" noRot="1" noChangeAspect="1"/>
+          </p:cNvSpPr>
+          <p:nvPr>
+            <p:ph type="sldImg"/>
+          </p:nvPr>
+        </p:nvSpPr>
+        <p:spPr/>
+      </p:sp>
+      <p:sp>
+        <p:nvSpPr>
+          <p:cNvPr id="3" name="Notes Placeholder 2"/>
+          <p:cNvSpPr>
+            <a:spLocks noGrp="1"/>
+          </p:cNvSpPr>
+          <p:nvPr>
+            <p:ph type="body" idx="1"/>
+          </p:nvPr>
+        </p:nvSpPr>
+        <p:spPr/>
+        <p:txBody>
+          <a:bodyPr/>
+          <a:lstStyle/>
+          <a:p>
+            <a:r>
+              <a:rPr lang="en-US" dirty="0"/>
+              <a:t/>
+            </a:r>
+            <a:endParaRPr lang="en-US" dirty="0"/>
+          </a:p>
+        </p:txBody>
+      </p:sp>
+      <p:sp>
+        <p:nvSpPr>
+          <p:cNvPr id="4" name="Slide Number Placeholder 3"/>
+          <p:cNvSpPr>
+            <a:spLocks noGrp="1"/>
+          </p:cNvSpPr>
+          <p:nvPr>
+            <p:ph type="sldNum" sz="quarter" idx="10"/>
+          </p:nvPr>
+        </p:nvSpPr>
+        <p:spPr/>
+        <p:txBody>
+          <a:bodyPr/>
+          <a:lstStyle/>
+          <a:p>
+            <a:fld id="{F7021451-1387-4CA6-816F-3879F97B5CBC}" type="slidenum">
+              <a:rPr lang="en-US"/>
+              <a:t>10</a:t>
             </a:fld>
             <a:endParaRPr lang="en-US"/>
           </a:p>
@@ -1566,6 +1655,13 @@
 <file path=ppt/slides/slide1.xml><?xml version="1.0" encoding="utf-8"?>
 <p:sld xmlns:a="http://schemas.openxmlformats.org/drawingml/2006/main" xmlns:r="http://schemas.openxmlformats.org/officeDocument/2006/relationships" xmlns:p="http://schemas.openxmlformats.org/presentationml/2006/main">
   <p:cSld name="Slide 1">
+    <p:bg>
+      <p:bgPr>
+        <a:solidFill>
+          <a:srgbClr val="2A9D8F"/>
+        </a:solidFill>
+      </p:bgPr>
+    </p:bg>
     <p:spTree>
       <p:nvGrpSpPr>
         <p:cNvPr id="1" name=""/>
@@ -1588,55 +1684,15 @@
         </p:nvSpPr>
         <p:spPr>
           <a:xfrm>
-            <a:off x="0" y="0"/>
-            <a:ext cx="9144000" cy="5143500"/>
-          </a:xfrm>
-          <a:prstGeom prst="rect">
+            <a:off x="7772400" y="-914400"/>
+            <a:ext cx="3657600" cy="3657600"/>
+          </a:xfrm>
+          <a:prstGeom prst="ellipse">
             <a:avLst/>
           </a:prstGeom>
           <a:solidFill>
-            <a:srgbClr val="1B2A4A"/>
-          </a:solidFill>
-          <a:ln/>
-        </p:spPr>
-      </p:sp>
-      <p:sp>
-        <p:nvSpPr>
-          <p:cNvPr id="3" name="Shape 1"/>
-          <p:cNvSpPr/>
-          <p:nvPr/>
-        </p:nvSpPr>
-        <p:spPr>
-          <a:xfrm>
-            <a:off x="0" y="4777740"/>
-            <a:ext cx="9144000" cy="365760"/>
-          </a:xfrm>
-          <a:prstGeom prst="rect">
-            <a:avLst/>
-          </a:prstGeom>
-          <a:solidFill>
-            <a:srgbClr val="2A9D8F"/>
-          </a:solidFill>
-          <a:ln/>
-        </p:spPr>
-      </p:sp>
-      <p:sp>
-        <p:nvSpPr>
-          <p:cNvPr id="4" name="Shape 2"/>
-          <p:cNvSpPr/>
-          <p:nvPr/>
-        </p:nvSpPr>
-        <p:spPr>
-          <a:xfrm>
-            <a:off x="6858000" y="-1371600"/>
-            <a:ext cx="4572000" cy="4572000"/>
-          </a:xfrm>
-          <a:prstGeom prst="ellipse">
-            <a:avLst/>
-          </a:prstGeom>
-          <a:solidFill>
-            <a:srgbClr val="2A9D8F">
-              <a:alpha val="12000"/>
+            <a:srgbClr val="FFFFFF">
+              <a:alpha val="8000"/>
             </a:srgbClr>
           </a:solidFill>
           <a:ln/>
@@ -1644,14 +1700,14 @@
       </p:sp>
       <p:sp>
         <p:nvSpPr>
-          <p:cNvPr id="5" name="Text 3"/>
+          <p:cNvPr id="3" name="Text 1"/>
           <p:cNvSpPr/>
           <p:nvPr/>
         </p:nvSpPr>
         <p:spPr>
           <a:xfrm>
-            <a:off x="731520" y="914400"/>
-            <a:ext cx="7680960" cy="457200"/>
+            <a:off x="731520" y="548640"/>
+            <a:ext cx="7315200" cy="365760"/>
           </a:xfrm>
           <a:prstGeom prst="rect">
             <a:avLst/>
@@ -1667,30 +1723,30 @@
               <a:buNone/>
             </a:pPr>
             <a:r>
-              <a:rPr lang="en-US" sz="1300" b="1" spc="500" kern="0" dirty="0">
+              <a:rPr lang="en-US" sz="1100" b="1" dirty="0">
                 <a:solidFill>
-                  <a:srgbClr val="2A9D8F"/>
+                  <a:srgbClr val="F2D68A"/>
                 </a:solidFill>
-                <a:latin typeface="Calibri" pitchFamily="34" charset="0"/>
-                <a:ea typeface="Calibri" pitchFamily="34" charset="-122"/>
-                <a:cs typeface="Calibri" pitchFamily="34" charset="-120"/>
+                <a:latin typeface="Arial" pitchFamily="34" charset="0"/>
+                <a:ea typeface="Arial" pitchFamily="34" charset="-122"/>
+                <a:cs typeface="Arial" pitchFamily="34" charset="-120"/>
               </a:rPr>
               <a:t>GRADE 6 SCIENCE</a:t>
             </a:r>
-            <a:endParaRPr lang="en-US" sz="1300" dirty="0"/>
-          </a:p>
-        </p:txBody>
-      </p:sp>
-      <p:sp>
-        <p:nvSpPr>
-          <p:cNvPr id="6" name="Text 4"/>
+            <a:endParaRPr lang="en-US" sz="1100" dirty="0"/>
+          </a:p>
+        </p:txBody>
+      </p:sp>
+      <p:sp>
+        <p:nvSpPr>
+          <p:cNvPr id="4" name="Text 2"/>
           <p:cNvSpPr/>
           <p:nvPr/>
         </p:nvSpPr>
         <p:spPr>
           <a:xfrm>
-            <a:off x="731520" y="1463040"/>
-            <a:ext cx="6858000" cy="1645920"/>
+            <a:off x="731520" y="1371600"/>
+            <a:ext cx="9144000" cy="1645920"/>
           </a:xfrm>
           <a:prstGeom prst="rect">
             <a:avLst/>
@@ -1699,14 +1755,17 @@
           <a:ln/>
         </p:spPr>
         <p:txBody>
-          <a:bodyPr wrap="square" rtlCol="0" anchor="t"/>
+          <a:bodyPr wrap="square" rtlCol="0" anchor="ctr"/>
           <a:lstStyle/>
           <a:p>
             <a:pPr indent="0" marL="0">
+              <a:lnSpc>
+                <a:spcPct val="110000"/>
+              </a:lnSpc>
               <a:buNone/>
             </a:pPr>
             <a:r>
-              <a:rPr lang="en-US" sz="3800" b="1" dirty="0">
+              <a:rPr lang="en-US" sz="3600" b="1" dirty="0">
                 <a:solidFill>
                   <a:srgbClr val="FFFFFF"/>
                 </a:solidFill>
@@ -1714,39 +1773,63 @@
                 <a:ea typeface="Georgia" pitchFamily="34" charset="-122"/>
                 <a:cs typeface="Georgia" pitchFamily="34" charset="-120"/>
               </a:rPr>
-              <a:t>Scientific Skills</a:t>
-            </a:r>
-            <a:endParaRPr lang="en-US" sz="3800" dirty="0"/>
-          </a:p>
+              <a:t>Full Revision — Scientific Skills</a:t>
+            </a:r>
+            <a:endParaRPr lang="en-US" sz="3600" dirty="0"/>
+          </a:p>
+        </p:txBody>
+      </p:sp>
+      <p:sp>
+        <p:nvSpPr>
+          <p:cNvPr id="5" name="Text 3"/>
+          <p:cNvSpPr/>
+          <p:nvPr/>
+        </p:nvSpPr>
+        <p:spPr>
+          <a:xfrm>
+            <a:off x="731520" y="3200400"/>
+            <a:ext cx="7315200" cy="548640"/>
+          </a:xfrm>
+          <a:prstGeom prst="rect">
+            <a:avLst/>
+          </a:prstGeom>
+          <a:noFill/>
+          <a:ln/>
+        </p:spPr>
+        <p:txBody>
+          <a:bodyPr wrap="square" rtlCol="0" anchor="ctr"/>
+          <a:lstStyle/>
           <a:p>
             <a:pPr indent="0" marL="0">
               <a:buNone/>
             </a:pPr>
             <a:r>
-              <a:rPr lang="en-US" sz="3800" b="1" dirty="0">
+              <a:rPr lang="en-US" sz="1600" dirty="0">
                 <a:solidFill>
-                  <a:srgbClr val="FFFFFF"/>
+                  <a:srgbClr val="FFFFFF">
+                    <a:alpha val="65000"/>
+                  </a:srgbClr>
                 </a:solidFill>
-                <a:latin typeface="Georgia" pitchFamily="34" charset="0"/>
-                <a:ea typeface="Georgia" pitchFamily="34" charset="-122"/>
-                <a:cs typeface="Georgia" pitchFamily="34" charset="-120"/>
+                <a:latin typeface="Arial" pitchFamily="34" charset="0"/>
+                <a:ea typeface="Arial" pitchFamily="34" charset="-122"/>
+                <a:cs typeface="Arial" pitchFamily="34" charset="-120"/>
               </a:rPr>
-              <a:t>Full Revision</a:t>
-            </a:r>
-            <a:endParaRPr lang="en-US" sz="3800" dirty="0"/>
-          </a:p>
-        </p:txBody>
-      </p:sp>
-      <p:sp>
-        <p:nvSpPr>
-          <p:cNvPr id="7" name="Text 5"/>
+              <a:t>Review all topics from Term 1</a:t>
+            </a:r>
+            <a:endParaRPr lang="en-US" sz="1600" dirty="0"/>
+          </a:p>
+        </p:txBody>
+      </p:sp>
+      <p:sp>
+        <p:nvSpPr>
+          <p:cNvPr id="6" name="Text 4"/>
           <p:cNvSpPr/>
           <p:nvPr/>
         </p:nvSpPr>
         <p:spPr>
           <a:xfrm>
-            <a:off x="731520" y="3200400"/>
-            <a:ext cx="6400800" cy="548640"/>
+            <a:off x="731520" y="4389120"/>
+            <a:ext cx="2743200" cy="320040"/>
           </a:xfrm>
           <a:prstGeom prst="rect">
             <a:avLst/>
@@ -1762,56 +1845,19 @@
               <a:buNone/>
             </a:pPr>
             <a:r>
-              <a:rPr lang="en-US" sz="1600" i="1" dirty="0">
+              <a:rPr lang="en-US" sz="1000" dirty="0">
                 <a:solidFill>
-                  <a:srgbClr val="9B9690"/>
+                  <a:srgbClr val="FFFFFF">
+                    <a:alpha val="40000"/>
+                  </a:srgbClr>
                 </a:solidFill>
-                <a:latin typeface="Calibri" pitchFamily="34" charset="0"/>
-                <a:ea typeface="Calibri" pitchFamily="34" charset="-122"/>
-                <a:cs typeface="Calibri" pitchFamily="34" charset="-120"/>
-              </a:rPr>
-              <a:t>Everything you need for the test</a:t>
-            </a:r>
-            <a:endParaRPr lang="en-US" sz="1600" dirty="0"/>
-          </a:p>
-        </p:txBody>
-      </p:sp>
-      <p:sp>
-        <p:nvSpPr>
-          <p:cNvPr id="8" name="Text 6"/>
-          <p:cNvSpPr/>
-          <p:nvPr/>
-        </p:nvSpPr>
-        <p:spPr>
-          <a:xfrm>
-            <a:off x="731520" y="4297680"/>
-            <a:ext cx="2743200" cy="365760"/>
-          </a:xfrm>
-          <a:prstGeom prst="rect">
-            <a:avLst/>
-          </a:prstGeom>
-          <a:noFill/>
-          <a:ln/>
-        </p:spPr>
-        <p:txBody>
-          <a:bodyPr wrap="square" rtlCol="0" anchor="ctr"/>
-          <a:lstStyle/>
-          <a:p>
-            <a:pPr indent="0" marL="0">
-              <a:buNone/>
-            </a:pPr>
-            <a:r>
-              <a:rPr lang="en-US" sz="1100" dirty="0">
-                <a:solidFill>
-                  <a:srgbClr val="9B9690"/>
-                </a:solidFill>
-                <a:latin typeface="Calibri" pitchFamily="34" charset="0"/>
-                <a:ea typeface="Calibri" pitchFamily="34" charset="-122"/>
-                <a:cs typeface="Calibri" pitchFamily="34" charset="-120"/>
+                <a:latin typeface="Arial" pitchFamily="34" charset="0"/>
+                <a:ea typeface="Arial" pitchFamily="34" charset="-122"/>
+                <a:cs typeface="Arial" pitchFamily="34" charset="-120"/>
               </a:rPr>
               <a:t>mrzocchi.com</a:t>
             </a:r>
-            <a:endParaRPr lang="en-US" sz="1100" dirty="0"/>
+            <a:endParaRPr lang="en-US" sz="1000" dirty="0"/>
           </a:p>
         </p:txBody>
       </p:sp>
@@ -1823,9 +1869,16 @@
 </p:sld>
 </file>
 
-<file path=ppt/slides/slide2.xml><?xml version="1.0" encoding="utf-8"?>
+<file path=ppt/slides/slide10.xml><?xml version="1.0" encoding="utf-8"?>
 <p:sld xmlns:a="http://schemas.openxmlformats.org/drawingml/2006/main" xmlns:r="http://schemas.openxmlformats.org/officeDocument/2006/relationships" xmlns:p="http://schemas.openxmlformats.org/presentationml/2006/main">
-  <p:cSld name="Slide 2">
+  <p:cSld name="Slide 10">
+    <p:bg>
+      <p:bgPr>
+        <a:solidFill>
+          <a:srgbClr val="111D35"/>
+        </a:solidFill>
+      </p:bgPr>
+    </p:bg>
     <p:spTree>
       <p:nvGrpSpPr>
         <p:cNvPr id="1" name=""/>
@@ -1842,54 +1895,14 @@
       </p:grpSpPr>
       <p:sp>
         <p:nvSpPr>
-          <p:cNvPr id="2" name="Shape 0"/>
+          <p:cNvPr id="2" name="Text 0"/>
           <p:cNvSpPr/>
           <p:nvPr/>
         </p:nvSpPr>
         <p:spPr>
           <a:xfrm>
-            <a:off x="0" y="0"/>
-            <a:ext cx="9144000" cy="5143500"/>
-          </a:xfrm>
-          <a:prstGeom prst="rect">
-            <a:avLst/>
-          </a:prstGeom>
-          <a:solidFill>
-            <a:srgbClr val="1B2A4A"/>
-          </a:solidFill>
-          <a:ln/>
-        </p:spPr>
-      </p:sp>
-      <p:sp>
-        <p:nvSpPr>
-          <p:cNvPr id="3" name="Shape 1"/>
-          <p:cNvSpPr/>
-          <p:nvPr/>
-        </p:nvSpPr>
-        <p:spPr>
-          <a:xfrm>
-            <a:off x="731520" y="1828800"/>
-            <a:ext cx="73152" cy="1463040"/>
-          </a:xfrm>
-          <a:prstGeom prst="rect">
-            <a:avLst/>
-          </a:prstGeom>
-          <a:solidFill>
-            <a:srgbClr val="2A9D8F"/>
-          </a:solidFill>
-          <a:ln/>
-        </p:spPr>
-      </p:sp>
-      <p:sp>
-        <p:nvSpPr>
-          <p:cNvPr id="4" name="Text 2"/>
-          <p:cNvSpPr/>
-          <p:nvPr/>
-        </p:nvSpPr>
-        <p:spPr>
-          <a:xfrm>
-            <a:off x="1097280" y="1463040"/>
-            <a:ext cx="1097280" cy="1097280"/>
+            <a:off x="731520" y="1371600"/>
+            <a:ext cx="9144000" cy="914400"/>
           </a:xfrm>
           <a:prstGeom prst="rect">
             <a:avLst/>
@@ -1901,34 +1914,187 @@
           <a:bodyPr wrap="square" rtlCol="0" anchor="ctr"/>
           <a:lstStyle/>
           <a:p>
-            <a:pPr algn="l" indent="0" marL="0">
+            <a:pPr indent="0" marL="0">
               <a:buNone/>
             </a:pPr>
             <a:r>
-              <a:rPr lang="en-US" sz="4800" b="1" dirty="0">
+              <a:rPr lang="en-US" sz="3200" b="1" dirty="0">
                 <a:solidFill>
-                  <a:srgbClr val="2A9D8F"/>
+                  <a:srgbClr val="FFFFFF"/>
                 </a:solidFill>
                 <a:latin typeface="Georgia" pitchFamily="34" charset="0"/>
                 <a:ea typeface="Georgia" pitchFamily="34" charset="-122"/>
                 <a:cs typeface="Georgia" pitchFamily="34" charset="-120"/>
               </a:rPr>
-              <a:t>1</a:t>
-            </a:r>
-            <a:endParaRPr lang="en-US" sz="4800" dirty="0"/>
-          </a:p>
-        </p:txBody>
-      </p:sp>
-      <p:sp>
-        <p:nvSpPr>
-          <p:cNvPr id="5" name="Text 3"/>
+              <a:t>Review &amp; Practise</a:t>
+            </a:r>
+            <a:endParaRPr lang="en-US" sz="3200" dirty="0"/>
+          </a:p>
+        </p:txBody>
+      </p:sp>
+      <p:sp>
+        <p:nvSpPr>
+          <p:cNvPr id="3" name="Text 1"/>
           <p:cNvSpPr/>
           <p:nvPr/>
         </p:nvSpPr>
         <p:spPr>
           <a:xfrm>
-            <a:off x="2194560" y="1920240"/>
-            <a:ext cx="5943600" cy="1097280"/>
+            <a:off x="731520" y="2377440"/>
+            <a:ext cx="7315200" cy="548640"/>
+          </a:xfrm>
+          <a:prstGeom prst="rect">
+            <a:avLst/>
+          </a:prstGeom>
+          <a:noFill/>
+          <a:ln/>
+        </p:spPr>
+        <p:txBody>
+          <a:bodyPr wrap="square" rtlCol="0" anchor="ctr"/>
+          <a:lstStyle/>
+          <a:p>
+            <a:pPr indent="0" marL="0">
+              <a:buNone/>
+            </a:pPr>
+            <a:r>
+              <a:rPr lang="en-US" sz="1500" dirty="0">
+                <a:solidFill>
+                  <a:srgbClr val="FFFFFF">
+                    <a:alpha val="60000"/>
+                  </a:srgbClr>
+                </a:solidFill>
+                <a:latin typeface="Arial" pitchFamily="34" charset="0"/>
+                <a:ea typeface="Arial" pitchFamily="34" charset="-122"/>
+                <a:cs typeface="Arial" pitchFamily="34" charset="-120"/>
+              </a:rPr>
+              <a:t>Use the Self-Quiz, Review Games, and Practice Builder to test yourself.</a:t>
+            </a:r>
+            <a:endParaRPr lang="en-US" sz="1500" dirty="0"/>
+          </a:p>
+        </p:txBody>
+      </p:sp>
+      <p:sp>
+        <p:nvSpPr>
+          <p:cNvPr id="4" name="Text 2"/>
+          <p:cNvSpPr/>
+          <p:nvPr/>
+        </p:nvSpPr>
+        <p:spPr>
+          <a:xfrm>
+            <a:off x="731520" y="3291840"/>
+            <a:ext cx="3657600" cy="457200"/>
+          </a:xfrm>
+          <a:prstGeom prst="rect">
+            <a:avLst/>
+          </a:prstGeom>
+          <a:noFill/>
+          <a:ln/>
+        </p:spPr>
+        <p:txBody>
+          <a:bodyPr wrap="square" rtlCol="0" anchor="ctr"/>
+          <a:lstStyle/>
+          <a:p>
+            <a:pPr indent="0" marL="0">
+              <a:buNone/>
+            </a:pPr>
+            <a:r>
+              <a:rPr lang="en-US" sz="1800" b="1" dirty="0">
+                <a:solidFill>
+                  <a:srgbClr val="E9C46A"/>
+                </a:solidFill>
+                <a:latin typeface="Georgia" pitchFamily="34" charset="0"/>
+                <a:ea typeface="Georgia" pitchFamily="34" charset="-122"/>
+                <a:cs typeface="Georgia" pitchFamily="34" charset="-120"/>
+              </a:rPr>
+              <a:t>mrzocchi.com</a:t>
+            </a:r>
+            <a:endParaRPr lang="en-US" sz="1800" dirty="0"/>
+          </a:p>
+        </p:txBody>
+      </p:sp>
+    </p:spTree>
+  </p:cSld>
+  <p:clrMapOvr>
+    <a:masterClrMapping/>
+  </p:clrMapOvr>
+</p:sld>
+</file>
+
+<file path=ppt/slides/slide2.xml><?xml version="1.0" encoding="utf-8"?>
+<p:sld xmlns:a="http://schemas.openxmlformats.org/drawingml/2006/main" xmlns:r="http://schemas.openxmlformats.org/officeDocument/2006/relationships" xmlns:p="http://schemas.openxmlformats.org/presentationml/2006/main">
+  <p:cSld name="Slide 2">
+    <p:bg>
+      <p:bgPr>
+        <a:solidFill>
+          <a:srgbClr val="111D35"/>
+        </a:solidFill>
+      </p:bgPr>
+    </p:bg>
+    <p:spTree>
+      <p:nvGrpSpPr>
+        <p:cNvPr id="1" name=""/>
+        <p:cNvGrpSpPr/>
+        <p:nvPr/>
+      </p:nvGrpSpPr>
+      <p:grpSpPr>
+        <a:xfrm>
+          <a:off x="0" y="0"/>
+          <a:ext cx="0" cy="0"/>
+          <a:chOff x="0" y="0"/>
+          <a:chExt cx="0" cy="0"/>
+        </a:xfrm>
+      </p:grpSpPr>
+      <p:sp>
+        <p:nvSpPr>
+          <p:cNvPr id="2" name="Text 0"/>
+          <p:cNvSpPr/>
+          <p:nvPr/>
+        </p:nvSpPr>
+        <p:spPr>
+          <a:xfrm>
+            <a:off x="731520" y="731520"/>
+            <a:ext cx="2286000" cy="1828800"/>
+          </a:xfrm>
+          <a:prstGeom prst="rect">
+            <a:avLst/>
+          </a:prstGeom>
+          <a:noFill/>
+          <a:ln/>
+        </p:spPr>
+        <p:txBody>
+          <a:bodyPr wrap="square" rtlCol="0" anchor="ctr"/>
+          <a:lstStyle/>
+          <a:p>
+            <a:pPr indent="0" marL="0">
+              <a:buNone/>
+            </a:pPr>
+            <a:r>
+              <a:rPr lang="en-US" sz="7200" b="1" dirty="0">
+                <a:solidFill>
+                  <a:srgbClr val="2A9D8F">
+                    <a:alpha val="80000"/>
+                  </a:srgbClr>
+                </a:solidFill>
+                <a:latin typeface="Georgia" pitchFamily="34" charset="0"/>
+                <a:ea typeface="Georgia" pitchFamily="34" charset="-122"/>
+                <a:cs typeface="Georgia" pitchFamily="34" charset="-120"/>
+              </a:rPr>
+              <a:t>01</a:t>
+            </a:r>
+            <a:endParaRPr lang="en-US" sz="7200" dirty="0"/>
+          </a:p>
+        </p:txBody>
+      </p:sp>
+      <p:sp>
+        <p:nvSpPr>
+          <p:cNvPr id="3" name="Text 1"/>
+          <p:cNvSpPr/>
+          <p:nvPr/>
+        </p:nvSpPr>
+        <p:spPr>
+          <a:xfrm>
+            <a:off x="731520" y="1828800"/>
+            <a:ext cx="9144000" cy="1097280"/>
           </a:xfrm>
           <a:prstGeom prst="rect">
             <a:avLst/>
@@ -1955,6 +2121,47 @@
               <a:t>Lab Safety</a:t>
             </a:r>
             <a:endParaRPr lang="en-US" sz="3200" dirty="0"/>
+          </a:p>
+        </p:txBody>
+      </p:sp>
+      <p:sp>
+        <p:nvSpPr>
+          <p:cNvPr id="4" name="Text 2"/>
+          <p:cNvSpPr/>
+          <p:nvPr/>
+        </p:nvSpPr>
+        <p:spPr>
+          <a:xfrm>
+            <a:off x="731520" y="3017520"/>
+            <a:ext cx="7315200" cy="457200"/>
+          </a:xfrm>
+          <a:prstGeom prst="rect">
+            <a:avLst/>
+          </a:prstGeom>
+          <a:noFill/>
+          <a:ln/>
+        </p:spPr>
+        <p:txBody>
+          <a:bodyPr wrap="square" rtlCol="0" anchor="ctr"/>
+          <a:lstStyle/>
+          <a:p>
+            <a:pPr indent="0" marL="0">
+              <a:buNone/>
+            </a:pPr>
+            <a:r>
+              <a:rPr lang="en-US" sz="1400" dirty="0">
+                <a:solidFill>
+                  <a:srgbClr val="FFFFFF">
+                    <a:alpha val="60000"/>
+                  </a:srgbClr>
+                </a:solidFill>
+                <a:latin typeface="Arial" pitchFamily="34" charset="0"/>
+                <a:ea typeface="Arial" pitchFamily="34" charset="-122"/>
+                <a:cs typeface="Arial" pitchFamily="34" charset="-120"/>
+              </a:rPr>
+              <a:t>Key rules and hazard symbols</a:t>
+            </a:r>
+            <a:endParaRPr lang="en-US" sz="1400" dirty="0"/>
           </a:p>
         </p:txBody>
       </p:sp>
@@ -1999,47 +2206,7 @@
         <p:spPr>
           <a:xfrm>
             <a:off x="0" y="0"/>
-            <a:ext cx="9144000" cy="822960"/>
-          </a:xfrm>
-          <a:prstGeom prst="rect">
-            <a:avLst/>
-          </a:prstGeom>
-          <a:solidFill>
-            <a:srgbClr val="FFFFFF"/>
-          </a:solidFill>
-          <a:ln/>
-        </p:spPr>
-      </p:sp>
-      <p:sp>
-        <p:nvSpPr>
-          <p:cNvPr id="3" name="Shape 1"/>
-          <p:cNvSpPr/>
-          <p:nvPr/>
-        </p:nvSpPr>
-        <p:spPr>
-          <a:xfrm>
-            <a:off x="0" y="804672"/>
-            <a:ext cx="9144000" cy="27432"/>
-          </a:xfrm>
-          <a:prstGeom prst="rect">
-            <a:avLst/>
-          </a:prstGeom>
-          <a:solidFill>
-            <a:srgbClr val="E5E2DC"/>
-          </a:solidFill>
-          <a:ln/>
-        </p:spPr>
-      </p:sp>
-      <p:sp>
-        <p:nvSpPr>
-          <p:cNvPr id="4" name="Shape 2"/>
-          <p:cNvSpPr/>
-          <p:nvPr/>
-        </p:nvSpPr>
-        <p:spPr>
-          <a:xfrm>
-            <a:off x="548640" y="201168"/>
-            <a:ext cx="54864" cy="420624"/>
+            <a:ext cx="73152" cy="5148072"/>
           </a:xfrm>
           <a:prstGeom prst="rect">
             <a:avLst/>
@@ -2052,14 +2219,14 @@
       </p:sp>
       <p:sp>
         <p:nvSpPr>
-          <p:cNvPr id="5" name="Text 3"/>
+          <p:cNvPr id="3" name="Text 1"/>
           <p:cNvSpPr/>
           <p:nvPr/>
         </p:nvSpPr>
         <p:spPr>
           <a:xfrm>
-            <a:off x="777240" y="137160"/>
-            <a:ext cx="7772400" cy="548640"/>
+            <a:off x="548640" y="274320"/>
+            <a:ext cx="9144000" cy="640080"/>
           </a:xfrm>
           <a:prstGeom prst="rect">
             <a:avLst/>
@@ -2068,14 +2235,14 @@
           <a:ln/>
         </p:spPr>
         <p:txBody>
-          <a:bodyPr wrap="square" lIns="0" tIns="0" rIns="0" bIns="0" rtlCol="0" anchor="ctr"/>
+          <a:bodyPr wrap="square" rtlCol="0" anchor="ctr"/>
           <a:lstStyle/>
           <a:p>
             <a:pPr indent="0" marL="0">
               <a:buNone/>
             </a:pPr>
             <a:r>
-              <a:rPr lang="en-US" sz="2000" b="1" dirty="0">
+              <a:rPr lang="en-US" sz="2400" b="1" dirty="0">
                 <a:solidFill>
                   <a:srgbClr val="1B2A4A"/>
                 </a:solidFill>
@@ -2083,22 +2250,42 @@
                 <a:ea typeface="Georgia" pitchFamily="34" charset="-122"/>
                 <a:cs typeface="Georgia" pitchFamily="34" charset="-120"/>
               </a:rPr>
-              <a:t>Safety Review</a:t>
-            </a:r>
-            <a:endParaRPr lang="en-US" sz="2000" dirty="0"/>
-          </a:p>
-        </p:txBody>
-      </p:sp>
-      <p:sp>
-        <p:nvSpPr>
-          <p:cNvPr id="6" name="Text 4"/>
+              <a:t>Lab Safety Recap</a:t>
+            </a:r>
+            <a:endParaRPr lang="en-US" sz="2400" dirty="0"/>
+          </a:p>
+        </p:txBody>
+      </p:sp>
+      <p:sp>
+        <p:nvSpPr>
+          <p:cNvPr id="4" name="Shape 2"/>
           <p:cNvSpPr/>
           <p:nvPr/>
         </p:nvSpPr>
         <p:spPr>
           <a:xfrm>
-            <a:off x="731520" y="1051560"/>
-            <a:ext cx="7680960" cy="3108960"/>
+            <a:off x="548640" y="960120"/>
+            <a:ext cx="2286000" cy="36576"/>
+          </a:xfrm>
+          <a:prstGeom prst="rect">
+            <a:avLst/>
+          </a:prstGeom>
+          <a:solidFill>
+            <a:srgbClr val="2A9D8F"/>
+          </a:solidFill>
+          <a:ln/>
+        </p:spPr>
+      </p:sp>
+      <p:sp>
+        <p:nvSpPr>
+          <p:cNvPr id="5" name="Text 3"/>
+          <p:cNvSpPr/>
+          <p:nvPr/>
+        </p:nvSpPr>
+        <p:spPr>
+          <a:xfrm>
+            <a:off x="548640" y="1188720"/>
+            <a:ext cx="10058400" cy="3474720"/>
           </a:xfrm>
           <a:prstGeom prst="rect">
             <a:avLst/>
@@ -2110,107 +2297,90 @@
           <a:bodyPr wrap="square" rtlCol="0" anchor="t"/>
           <a:lstStyle/>
           <a:p>
-            <a:pPr marL="342900" indent="-342900">
+            <a:pPr>
+              <a:lnSpc>
+                <a:spcPct val="150000"/>
+              </a:lnSpc>
               <a:spcAft>
-                <a:spcPts val="800"/>
+                <a:spcPts val="600"/>
               </a:spcAft>
-              <a:buSzPct val="100000"/>
-              <a:buChar char="•"/>
             </a:pPr>
             <a:r>
               <a:rPr lang="en-US" sz="1500" dirty="0">
                 <a:solidFill>
                   <a:srgbClr val="3D3A36"/>
                 </a:solidFill>
-                <a:latin typeface="Calibri" pitchFamily="34" charset="0"/>
-                <a:ea typeface="Calibri" pitchFamily="34" charset="-122"/>
-                <a:cs typeface="Calibri" pitchFamily="34" charset="-120"/>
+                <a:latin typeface="Arial" pitchFamily="34" charset="0"/>
+                <a:ea typeface="Arial" pitchFamily="34" charset="-122"/>
+                <a:cs typeface="Arial" pitchFamily="34" charset="-120"/>
               </a:rPr>
-              <a:t>Know your hazard symbols: flammable, corrosive, toxic, irritant, oxidising.</a:t>
+              <a:t>Always wear goggles. Tie back hair. No eating or drinking.</a:t>
             </a:r>
             <a:endParaRPr lang="en-US" sz="1500" dirty="0"/>
           </a:p>
           <a:p>
-            <a:pPr marL="342900" indent="-342900">
+            <a:pPr>
+              <a:lnSpc>
+                <a:spcPct val="150000"/>
+              </a:lnSpc>
               <a:spcAft>
-                <a:spcPts val="800"/>
+                <a:spcPts val="600"/>
               </a:spcAft>
-              <a:buSzPct val="100000"/>
-              <a:buChar char="•"/>
             </a:pPr>
             <a:r>
               <a:rPr lang="en-US" sz="1500" dirty="0">
                 <a:solidFill>
                   <a:srgbClr val="3D3A36"/>
                 </a:solidFill>
-                <a:latin typeface="Calibri" pitchFamily="34" charset="0"/>
-                <a:ea typeface="Calibri" pitchFamily="34" charset="-122"/>
-                <a:cs typeface="Calibri" pitchFamily="34" charset="-120"/>
+                <a:latin typeface="Arial" pitchFamily="34" charset="0"/>
+                <a:ea typeface="Arial" pitchFamily="34" charset="-122"/>
+                <a:cs typeface="Arial" pitchFamily="34" charset="-120"/>
               </a:rPr>
-              <a:t>Always wear appropriate PPE: goggles, gloves, lab coat.</a:t>
+              <a:t>Know hazard symbols: flammable, toxic, corrosive, irritant.</a:t>
             </a:r>
             <a:endParaRPr lang="en-US" sz="1500" dirty="0"/>
           </a:p>
           <a:p>
-            <a:pPr marL="342900" indent="-342900">
+            <a:pPr>
+              <a:lnSpc>
+                <a:spcPct val="150000"/>
+              </a:lnSpc>
               <a:spcAft>
-                <a:spcPts val="800"/>
+                <a:spcPts val="600"/>
               </a:spcAft>
-              <a:buSzPct val="100000"/>
-              <a:buChar char="•"/>
             </a:pPr>
             <a:r>
               <a:rPr lang="en-US" sz="1500" dirty="0">
                 <a:solidFill>
                   <a:srgbClr val="3D3A36"/>
                 </a:solidFill>
-                <a:latin typeface="Calibri" pitchFamily="34" charset="0"/>
-                <a:ea typeface="Calibri" pitchFamily="34" charset="-122"/>
-                <a:cs typeface="Calibri" pitchFamily="34" charset="-120"/>
+                <a:latin typeface="Arial" pitchFamily="34" charset="0"/>
+                <a:ea typeface="Arial" pitchFamily="34" charset="-122"/>
+                <a:cs typeface="Arial" pitchFamily="34" charset="-120"/>
               </a:rPr>
-              <a:t>A HAZARD is something that CAN cause harm. A RISK is the CHANCE it WILL.</a:t>
+              <a:t>Bunsen burner: yellow = safety flame, blue = heating flame.</a:t>
             </a:r>
             <a:endParaRPr lang="en-US" sz="1500" dirty="0"/>
           </a:p>
           <a:p>
-            <a:pPr marL="342900" indent="-342900">
+            <a:pPr>
+              <a:lnSpc>
+                <a:spcPct val="150000"/>
+              </a:lnSpc>
               <a:spcAft>
-                <a:spcPts val="800"/>
+                <a:spcPts val="600"/>
               </a:spcAft>
-              <a:buSzPct val="100000"/>
-              <a:buChar char="•"/>
             </a:pPr>
             <a:r>
               <a:rPr lang="en-US" sz="1500" dirty="0">
                 <a:solidFill>
                   <a:srgbClr val="3D3A36"/>
                 </a:solidFill>
-                <a:latin typeface="Calibri" pitchFamily="34" charset="0"/>
-                <a:ea typeface="Calibri" pitchFamily="34" charset="-122"/>
-                <a:cs typeface="Calibri" pitchFamily="34" charset="-120"/>
+                <a:latin typeface="Arial" pitchFamily="34" charset="0"/>
+                <a:ea typeface="Arial" pitchFamily="34" charset="-122"/>
+                <a:cs typeface="Arial" pitchFamily="34" charset="-120"/>
               </a:rPr>
-              <a:t>Emergency: TELL YOUR TEACHER first, then follow first aid steps.</a:t>
-            </a:r>
-            <a:endParaRPr lang="en-US" sz="1500" dirty="0"/>
-          </a:p>
-          <a:p>
-            <a:pPr marL="342900" indent="-342900">
-              <a:spcAft>
-                <a:spcPts val="800"/>
-              </a:spcAft>
-              <a:buSzPct val="100000"/>
-              <a:buChar char="•"/>
-            </a:pPr>
-            <a:r>
-              <a:rPr lang="en-US" sz="1500" dirty="0">
-                <a:solidFill>
-                  <a:srgbClr val="3D3A36"/>
-                </a:solidFill>
-                <a:latin typeface="Calibri" pitchFamily="34" charset="0"/>
-                <a:ea typeface="Calibri" pitchFamily="34" charset="-122"/>
-                <a:cs typeface="Calibri" pitchFamily="34" charset="-120"/>
-              </a:rPr>
-              <a:t>Never eat, drink, run, or play in the laboratory.</a:t>
+              <a:t>Report all spills and injuries to your teacher immediately.</a:t>
             </a:r>
             <a:endParaRPr lang="en-US" sz="1500" dirty="0"/>
           </a:p>
@@ -2227,6 +2397,13 @@
 <file path=ppt/slides/slide4.xml><?xml version="1.0" encoding="utf-8"?>
 <p:sld xmlns:a="http://schemas.openxmlformats.org/drawingml/2006/main" xmlns:r="http://schemas.openxmlformats.org/officeDocument/2006/relationships" xmlns:p="http://schemas.openxmlformats.org/presentationml/2006/main">
   <p:cSld name="Slide 4">
+    <p:bg>
+      <p:bgPr>
+        <a:solidFill>
+          <a:srgbClr val="111D35"/>
+        </a:solidFill>
+      </p:bgPr>
+    </p:bg>
     <p:spTree>
       <p:nvGrpSpPr>
         <p:cNvPr id="1" name=""/>
@@ -2243,54 +2420,14 @@
       </p:grpSpPr>
       <p:sp>
         <p:nvSpPr>
-          <p:cNvPr id="2" name="Shape 0"/>
+          <p:cNvPr id="2" name="Text 0"/>
           <p:cNvSpPr/>
           <p:nvPr/>
         </p:nvSpPr>
         <p:spPr>
           <a:xfrm>
-            <a:off x="0" y="0"/>
-            <a:ext cx="9144000" cy="5143500"/>
-          </a:xfrm>
-          <a:prstGeom prst="rect">
-            <a:avLst/>
-          </a:prstGeom>
-          <a:solidFill>
-            <a:srgbClr val="1B2A4A"/>
-          </a:solidFill>
-          <a:ln/>
-        </p:spPr>
-      </p:sp>
-      <p:sp>
-        <p:nvSpPr>
-          <p:cNvPr id="3" name="Shape 1"/>
-          <p:cNvSpPr/>
-          <p:nvPr/>
-        </p:nvSpPr>
-        <p:spPr>
-          <a:xfrm>
-            <a:off x="731520" y="1828800"/>
-            <a:ext cx="73152" cy="1463040"/>
-          </a:xfrm>
-          <a:prstGeom prst="rect">
-            <a:avLst/>
-          </a:prstGeom>
-          <a:solidFill>
-            <a:srgbClr val="2A9D8F"/>
-          </a:solidFill>
-          <a:ln/>
-        </p:spPr>
-      </p:sp>
-      <p:sp>
-        <p:nvSpPr>
-          <p:cNvPr id="4" name="Text 2"/>
-          <p:cNvSpPr/>
-          <p:nvPr/>
-        </p:nvSpPr>
-        <p:spPr>
-          <a:xfrm>
-            <a:off x="1097280" y="1463040"/>
-            <a:ext cx="1097280" cy="1097280"/>
+            <a:off x="731520" y="731520"/>
+            <a:ext cx="2286000" cy="1828800"/>
           </a:xfrm>
           <a:prstGeom prst="rect">
             <a:avLst/>
@@ -2302,34 +2439,36 @@
           <a:bodyPr wrap="square" rtlCol="0" anchor="ctr"/>
           <a:lstStyle/>
           <a:p>
-            <a:pPr algn="l" indent="0" marL="0">
+            <a:pPr indent="0" marL="0">
               <a:buNone/>
             </a:pPr>
             <a:r>
-              <a:rPr lang="en-US" sz="4800" b="1" dirty="0">
+              <a:rPr lang="en-US" sz="7200" b="1" dirty="0">
                 <a:solidFill>
-                  <a:srgbClr val="2A9D8F"/>
+                  <a:srgbClr val="2A9D8F">
+                    <a:alpha val="80000"/>
+                  </a:srgbClr>
                 </a:solidFill>
                 <a:latin typeface="Georgia" pitchFamily="34" charset="0"/>
                 <a:ea typeface="Georgia" pitchFamily="34" charset="-122"/>
                 <a:cs typeface="Georgia" pitchFamily="34" charset="-120"/>
               </a:rPr>
-              <a:t>2</a:t>
-            </a:r>
-            <a:endParaRPr lang="en-US" sz="4800" dirty="0"/>
-          </a:p>
-        </p:txBody>
-      </p:sp>
-      <p:sp>
-        <p:nvSpPr>
-          <p:cNvPr id="5" name="Text 3"/>
+              <a:t>02</a:t>
+            </a:r>
+            <a:endParaRPr lang="en-US" sz="7200" dirty="0"/>
+          </a:p>
+        </p:txBody>
+      </p:sp>
+      <p:sp>
+        <p:nvSpPr>
+          <p:cNvPr id="3" name="Text 1"/>
           <p:cNvSpPr/>
           <p:nvPr/>
         </p:nvSpPr>
         <p:spPr>
           <a:xfrm>
-            <a:off x="2194560" y="1920240"/>
-            <a:ext cx="5943600" cy="1097280"/>
+            <a:off x="731520" y="1828800"/>
+            <a:ext cx="9144000" cy="1097280"/>
           </a:xfrm>
           <a:prstGeom prst="rect">
             <a:avLst/>
@@ -2356,6 +2495,47 @@
               <a:t>Scientific Method</a:t>
             </a:r>
             <a:endParaRPr lang="en-US" sz="3200" dirty="0"/>
+          </a:p>
+        </p:txBody>
+      </p:sp>
+      <p:sp>
+        <p:nvSpPr>
+          <p:cNvPr id="4" name="Text 2"/>
+          <p:cNvSpPr/>
+          <p:nvPr/>
+        </p:nvSpPr>
+        <p:spPr>
+          <a:xfrm>
+            <a:off x="731520" y="3017520"/>
+            <a:ext cx="7315200" cy="457200"/>
+          </a:xfrm>
+          <a:prstGeom prst="rect">
+            <a:avLst/>
+          </a:prstGeom>
+          <a:noFill/>
+          <a:ln/>
+        </p:spPr>
+        <p:txBody>
+          <a:bodyPr wrap="square" rtlCol="0" anchor="ctr"/>
+          <a:lstStyle/>
+          <a:p>
+            <a:pPr indent="0" marL="0">
+              <a:buNone/>
+            </a:pPr>
+            <a:r>
+              <a:rPr lang="en-US" sz="1400" dirty="0">
+                <a:solidFill>
+                  <a:srgbClr val="FFFFFF">
+                    <a:alpha val="60000"/>
+                  </a:srgbClr>
+                </a:solidFill>
+                <a:latin typeface="Arial" pitchFamily="34" charset="0"/>
+                <a:ea typeface="Arial" pitchFamily="34" charset="-122"/>
+                <a:cs typeface="Arial" pitchFamily="34" charset="-120"/>
+              </a:rPr>
+              <a:t>The steps of investigation</a:t>
+            </a:r>
+            <a:endParaRPr lang="en-US" sz="1400" dirty="0"/>
           </a:p>
         </p:txBody>
       </p:sp>
@@ -2400,47 +2580,7 @@
         <p:spPr>
           <a:xfrm>
             <a:off x="0" y="0"/>
-            <a:ext cx="9144000" cy="822960"/>
-          </a:xfrm>
-          <a:prstGeom prst="rect">
-            <a:avLst/>
-          </a:prstGeom>
-          <a:solidFill>
-            <a:srgbClr val="FFFFFF"/>
-          </a:solidFill>
-          <a:ln/>
-        </p:spPr>
-      </p:sp>
-      <p:sp>
-        <p:nvSpPr>
-          <p:cNvPr id="3" name="Shape 1"/>
-          <p:cNvSpPr/>
-          <p:nvPr/>
-        </p:nvSpPr>
-        <p:spPr>
-          <a:xfrm>
-            <a:off x="0" y="804672"/>
-            <a:ext cx="9144000" cy="27432"/>
-          </a:xfrm>
-          <a:prstGeom prst="rect">
-            <a:avLst/>
-          </a:prstGeom>
-          <a:solidFill>
-            <a:srgbClr val="E5E2DC"/>
-          </a:solidFill>
-          <a:ln/>
-        </p:spPr>
-      </p:sp>
-      <p:sp>
-        <p:nvSpPr>
-          <p:cNvPr id="4" name="Shape 2"/>
-          <p:cNvSpPr/>
-          <p:nvPr/>
-        </p:nvSpPr>
-        <p:spPr>
-          <a:xfrm>
-            <a:off x="548640" y="201168"/>
-            <a:ext cx="54864" cy="420624"/>
+            <a:ext cx="73152" cy="5148072"/>
           </a:xfrm>
           <a:prstGeom prst="rect">
             <a:avLst/>
@@ -2453,14 +2593,14 @@
       </p:sp>
       <p:sp>
         <p:nvSpPr>
-          <p:cNvPr id="5" name="Text 3"/>
+          <p:cNvPr id="3" name="Text 1"/>
           <p:cNvSpPr/>
           <p:nvPr/>
         </p:nvSpPr>
         <p:spPr>
           <a:xfrm>
-            <a:off x="777240" y="137160"/>
-            <a:ext cx="7772400" cy="548640"/>
+            <a:off x="548640" y="274320"/>
+            <a:ext cx="9144000" cy="640080"/>
           </a:xfrm>
           <a:prstGeom prst="rect">
             <a:avLst/>
@@ -2469,14 +2609,14 @@
           <a:ln/>
         </p:spPr>
         <p:txBody>
-          <a:bodyPr wrap="square" lIns="0" tIns="0" rIns="0" bIns="0" rtlCol="0" anchor="ctr"/>
+          <a:bodyPr wrap="square" rtlCol="0" anchor="ctr"/>
           <a:lstStyle/>
           <a:p>
             <a:pPr indent="0" marL="0">
               <a:buNone/>
             </a:pPr>
             <a:r>
-              <a:rPr lang="en-US" sz="2000" b="1" dirty="0">
+              <a:rPr lang="en-US" sz="2400" b="1" dirty="0">
                 <a:solidFill>
                   <a:srgbClr val="1B2A4A"/>
                 </a:solidFill>
@@ -2484,22 +2624,42 @@
                 <a:ea typeface="Georgia" pitchFamily="34" charset="-122"/>
                 <a:cs typeface="Georgia" pitchFamily="34" charset="-120"/>
               </a:rPr>
-              <a:t>Method &amp; Variables Review</a:t>
-            </a:r>
-            <a:endParaRPr lang="en-US" sz="2000" dirty="0"/>
-          </a:p>
-        </p:txBody>
-      </p:sp>
-      <p:sp>
-        <p:nvSpPr>
-          <p:cNvPr id="6" name="Text 4"/>
+              <a:t>Scientific Method Recap</a:t>
+            </a:r>
+            <a:endParaRPr lang="en-US" sz="2400" dirty="0"/>
+          </a:p>
+        </p:txBody>
+      </p:sp>
+      <p:sp>
+        <p:nvSpPr>
+          <p:cNvPr id="4" name="Shape 2"/>
           <p:cNvSpPr/>
           <p:nvPr/>
         </p:nvSpPr>
         <p:spPr>
           <a:xfrm>
-            <a:off x="731520" y="1051560"/>
-            <a:ext cx="7680960" cy="3108960"/>
+            <a:off x="548640" y="960120"/>
+            <a:ext cx="2286000" cy="36576"/>
+          </a:xfrm>
+          <a:prstGeom prst="rect">
+            <a:avLst/>
+          </a:prstGeom>
+          <a:solidFill>
+            <a:srgbClr val="2A9D8F"/>
+          </a:solidFill>
+          <a:ln/>
+        </p:spPr>
+      </p:sp>
+      <p:sp>
+        <p:nvSpPr>
+          <p:cNvPr id="5" name="Text 3"/>
+          <p:cNvSpPr/>
+          <p:nvPr/>
+        </p:nvSpPr>
+        <p:spPr>
+          <a:xfrm>
+            <a:off x="548640" y="1188720"/>
+            <a:ext cx="10058400" cy="3474720"/>
           </a:xfrm>
           <a:prstGeom prst="rect">
             <a:avLst/>
@@ -2511,107 +2671,90 @@
           <a:bodyPr wrap="square" rtlCol="0" anchor="t"/>
           <a:lstStyle/>
           <a:p>
-            <a:pPr marL="342900" indent="-342900">
+            <a:pPr>
+              <a:lnSpc>
+                <a:spcPct val="150000"/>
+              </a:lnSpc>
               <a:spcAft>
-                <a:spcPts val="800"/>
+                <a:spcPts val="600"/>
               </a:spcAft>
-              <a:buSzPct val="100000"/>
-              <a:buChar char="•"/>
             </a:pPr>
             <a:r>
               <a:rPr lang="en-US" sz="1500" dirty="0">
                 <a:solidFill>
                   <a:srgbClr val="3D3A36"/>
                 </a:solidFill>
-                <a:latin typeface="Calibri" pitchFamily="34" charset="0"/>
-                <a:ea typeface="Calibri" pitchFamily="34" charset="-122"/>
-                <a:cs typeface="Calibri" pitchFamily="34" charset="-120"/>
+                <a:latin typeface="Arial" pitchFamily="34" charset="0"/>
+                <a:ea typeface="Arial" pitchFamily="34" charset="-122"/>
+                <a:cs typeface="Arial" pitchFamily="34" charset="-120"/>
               </a:rPr>
-              <a:t>Steps: Question → Research → Hypothesis → Experiment → Data → Analysis → Conclusion.</a:t>
+              <a:t>Question → Research → Hypothesis → Experiment → Data → Analyse → Conclude → Evaluate.</a:t>
             </a:r>
             <a:endParaRPr lang="en-US" sz="1500" dirty="0"/>
           </a:p>
           <a:p>
-            <a:pPr marL="342900" indent="-342900">
+            <a:pPr>
+              <a:lnSpc>
+                <a:spcPct val="150000"/>
+              </a:lnSpc>
               <a:spcAft>
-                <a:spcPts val="800"/>
+                <a:spcPts val="600"/>
               </a:spcAft>
-              <a:buSzPct val="100000"/>
-              <a:buChar char="•"/>
             </a:pPr>
             <a:r>
               <a:rPr lang="en-US" sz="1500" dirty="0">
                 <a:solidFill>
                   <a:srgbClr val="3D3A36"/>
                 </a:solidFill>
-                <a:latin typeface="Calibri" pitchFamily="34" charset="0"/>
-                <a:ea typeface="Calibri" pitchFamily="34" charset="-122"/>
-                <a:cs typeface="Calibri" pitchFamily="34" charset="-120"/>
+                <a:latin typeface="Arial" pitchFamily="34" charset="0"/>
+                <a:ea typeface="Arial" pitchFamily="34" charset="-122"/>
+                <a:cs typeface="Arial" pitchFamily="34" charset="-120"/>
               </a:rPr>
-              <a:t>Independent variable (IV): what YOU change. Dependent variable (DV): what you MEASURE.</a:t>
+              <a:t>A good hypothesis is testable and specific.</a:t>
             </a:r>
             <a:endParaRPr lang="en-US" sz="1500" dirty="0"/>
           </a:p>
           <a:p>
-            <a:pPr marL="342900" indent="-342900">
+            <a:pPr>
+              <a:lnSpc>
+                <a:spcPct val="150000"/>
+              </a:lnSpc>
               <a:spcAft>
-                <a:spcPts val="800"/>
+                <a:spcPts val="600"/>
               </a:spcAft>
-              <a:buSzPct val="100000"/>
-              <a:buChar char="•"/>
             </a:pPr>
             <a:r>
               <a:rPr lang="en-US" sz="1500" dirty="0">
                 <a:solidFill>
                   <a:srgbClr val="3D3A36"/>
                 </a:solidFill>
-                <a:latin typeface="Calibri" pitchFamily="34" charset="0"/>
-                <a:ea typeface="Calibri" pitchFamily="34" charset="-122"/>
-                <a:cs typeface="Calibri" pitchFamily="34" charset="-120"/>
+                <a:latin typeface="Arial" pitchFamily="34" charset="0"/>
+                <a:ea typeface="Arial" pitchFamily="34" charset="-122"/>
+                <a:cs typeface="Arial" pitchFamily="34" charset="-120"/>
               </a:rPr>
-              <a:t>Controlled variables (CV): what you KEEP THE SAME to make it fair.</a:t>
+              <a:t>Repeat at least 3 times. Calculate the mean.</a:t>
             </a:r>
             <a:endParaRPr lang="en-US" sz="1500" dirty="0"/>
           </a:p>
           <a:p>
-            <a:pPr marL="342900" indent="-342900">
+            <a:pPr>
+              <a:lnSpc>
+                <a:spcPct val="150000"/>
+              </a:lnSpc>
               <a:spcAft>
-                <a:spcPts val="800"/>
+                <a:spcPts val="600"/>
               </a:spcAft>
-              <a:buSzPct val="100000"/>
-              <a:buChar char="•"/>
             </a:pPr>
             <a:r>
               <a:rPr lang="en-US" sz="1500" dirty="0">
                 <a:solidFill>
                   <a:srgbClr val="3D3A36"/>
                 </a:solidFill>
-                <a:latin typeface="Calibri" pitchFamily="34" charset="0"/>
-                <a:ea typeface="Calibri" pitchFamily="34" charset="-122"/>
-                <a:cs typeface="Calibri" pitchFamily="34" charset="-120"/>
+                <a:latin typeface="Arial" pitchFamily="34" charset="0"/>
+                <a:ea typeface="Arial" pitchFamily="34" charset="-122"/>
+                <a:cs typeface="Arial" pitchFamily="34" charset="-120"/>
               </a:rPr>
-              <a:t>Fair test = only ONE variable changes at a time.</a:t>
-            </a:r>
-            <a:endParaRPr lang="en-US" sz="1500" dirty="0"/>
-          </a:p>
-          <a:p>
-            <a:pPr marL="342900" indent="-342900">
-              <a:spcAft>
-                <a:spcPts val="800"/>
-              </a:spcAft>
-              <a:buSzPct val="100000"/>
-              <a:buChar char="•"/>
-            </a:pPr>
-            <a:r>
-              <a:rPr lang="en-US" sz="1500" dirty="0">
-                <a:solidFill>
-                  <a:srgbClr val="3D3A36"/>
-                </a:solidFill>
-                <a:latin typeface="Calibri" pitchFamily="34" charset="0"/>
-                <a:ea typeface="Calibri" pitchFamily="34" charset="-122"/>
-                <a:cs typeface="Calibri" pitchFamily="34" charset="-120"/>
-              </a:rPr>
-              <a:t>Repeat experiments at least 3 times and calculate the MEAN (average).</a:t>
+              <a:t>Draw a conclusion: did the results support your hypothesis?</a:t>
             </a:r>
             <a:endParaRPr lang="en-US" sz="1500" dirty="0"/>
           </a:p>
@@ -2628,6 +2771,13 @@
 <file path=ppt/slides/slide6.xml><?xml version="1.0" encoding="utf-8"?>
 <p:sld xmlns:a="http://schemas.openxmlformats.org/drawingml/2006/main" xmlns:r="http://schemas.openxmlformats.org/officeDocument/2006/relationships" xmlns:p="http://schemas.openxmlformats.org/presentationml/2006/main">
   <p:cSld name="Slide 6">
+    <p:bg>
+      <p:bgPr>
+        <a:solidFill>
+          <a:srgbClr val="111D35"/>
+        </a:solidFill>
+      </p:bgPr>
+    </p:bg>
     <p:spTree>
       <p:nvGrpSpPr>
         <p:cNvPr id="1" name=""/>
@@ -2644,54 +2794,14 @@
       </p:grpSpPr>
       <p:sp>
         <p:nvSpPr>
-          <p:cNvPr id="2" name="Shape 0"/>
+          <p:cNvPr id="2" name="Text 0"/>
           <p:cNvSpPr/>
           <p:nvPr/>
         </p:nvSpPr>
         <p:spPr>
           <a:xfrm>
-            <a:off x="0" y="0"/>
-            <a:ext cx="9144000" cy="5143500"/>
-          </a:xfrm>
-          <a:prstGeom prst="rect">
-            <a:avLst/>
-          </a:prstGeom>
-          <a:solidFill>
-            <a:srgbClr val="1B2A4A"/>
-          </a:solidFill>
-          <a:ln/>
-        </p:spPr>
-      </p:sp>
-      <p:sp>
-        <p:nvSpPr>
-          <p:cNvPr id="3" name="Shape 1"/>
-          <p:cNvSpPr/>
-          <p:nvPr/>
-        </p:nvSpPr>
-        <p:spPr>
-          <a:xfrm>
-            <a:off x="731520" y="1828800"/>
-            <a:ext cx="73152" cy="1463040"/>
-          </a:xfrm>
-          <a:prstGeom prst="rect">
-            <a:avLst/>
-          </a:prstGeom>
-          <a:solidFill>
-            <a:srgbClr val="2A9D8F"/>
-          </a:solidFill>
-          <a:ln/>
-        </p:spPr>
-      </p:sp>
-      <p:sp>
-        <p:nvSpPr>
-          <p:cNvPr id="4" name="Text 2"/>
-          <p:cNvSpPr/>
-          <p:nvPr/>
-        </p:nvSpPr>
-        <p:spPr>
-          <a:xfrm>
-            <a:off x="1097280" y="1463040"/>
-            <a:ext cx="1097280" cy="1097280"/>
+            <a:off x="731520" y="731520"/>
+            <a:ext cx="2286000" cy="1828800"/>
           </a:xfrm>
           <a:prstGeom prst="rect">
             <a:avLst/>
@@ -2703,34 +2813,36 @@
           <a:bodyPr wrap="square" rtlCol="0" anchor="ctr"/>
           <a:lstStyle/>
           <a:p>
-            <a:pPr algn="l" indent="0" marL="0">
+            <a:pPr indent="0" marL="0">
               <a:buNone/>
             </a:pPr>
             <a:r>
-              <a:rPr lang="en-US" sz="4800" b="1" dirty="0">
+              <a:rPr lang="en-US" sz="7200" b="1" dirty="0">
                 <a:solidFill>
-                  <a:srgbClr val="2A9D8F"/>
+                  <a:srgbClr val="2A9D8F">
+                    <a:alpha val="80000"/>
+                  </a:srgbClr>
                 </a:solidFill>
                 <a:latin typeface="Georgia" pitchFamily="34" charset="0"/>
                 <a:ea typeface="Georgia" pitchFamily="34" charset="-122"/>
                 <a:cs typeface="Georgia" pitchFamily="34" charset="-120"/>
               </a:rPr>
-              <a:t>3</a:t>
-            </a:r>
-            <a:endParaRPr lang="en-US" sz="4800" dirty="0"/>
-          </a:p>
-        </p:txBody>
-      </p:sp>
-      <p:sp>
-        <p:nvSpPr>
-          <p:cNvPr id="5" name="Text 3"/>
+              <a:t>03</a:t>
+            </a:r>
+            <a:endParaRPr lang="en-US" sz="7200" dirty="0"/>
+          </a:p>
+        </p:txBody>
+      </p:sp>
+      <p:sp>
+        <p:nvSpPr>
+          <p:cNvPr id="3" name="Text 1"/>
           <p:cNvSpPr/>
           <p:nvPr/>
         </p:nvSpPr>
         <p:spPr>
           <a:xfrm>
-            <a:off x="2194560" y="1920240"/>
-            <a:ext cx="5943600" cy="1097280"/>
+            <a:off x="731520" y="1828800"/>
+            <a:ext cx="9144000" cy="1097280"/>
           </a:xfrm>
           <a:prstGeom prst="rect">
             <a:avLst/>
@@ -2754,9 +2866,50 @@
                 <a:ea typeface="Georgia" pitchFamily="34" charset="-122"/>
                 <a:cs typeface="Georgia" pitchFamily="34" charset="-120"/>
               </a:rPr>
-              <a:t>Measurement &amp; Data</a:t>
+              <a:t>Variables</a:t>
             </a:r>
             <a:endParaRPr lang="en-US" sz="3200" dirty="0"/>
+          </a:p>
+        </p:txBody>
+      </p:sp>
+      <p:sp>
+        <p:nvSpPr>
+          <p:cNvPr id="4" name="Text 2"/>
+          <p:cNvSpPr/>
+          <p:nvPr/>
+        </p:nvSpPr>
+        <p:spPr>
+          <a:xfrm>
+            <a:off x="731520" y="3017520"/>
+            <a:ext cx="7315200" cy="457200"/>
+          </a:xfrm>
+          <a:prstGeom prst="rect">
+            <a:avLst/>
+          </a:prstGeom>
+          <a:noFill/>
+          <a:ln/>
+        </p:spPr>
+        <p:txBody>
+          <a:bodyPr wrap="square" rtlCol="0" anchor="ctr"/>
+          <a:lstStyle/>
+          <a:p>
+            <a:pPr indent="0" marL="0">
+              <a:buNone/>
+            </a:pPr>
+            <a:r>
+              <a:rPr lang="en-US" sz="1400" dirty="0">
+                <a:solidFill>
+                  <a:srgbClr val="FFFFFF">
+                    <a:alpha val="60000"/>
+                  </a:srgbClr>
+                </a:solidFill>
+                <a:latin typeface="Arial" pitchFamily="34" charset="0"/>
+                <a:ea typeface="Arial" pitchFamily="34" charset="-122"/>
+                <a:cs typeface="Arial" pitchFamily="34" charset="-120"/>
+              </a:rPr>
+              <a:t>Independent, dependent, controlled</a:t>
+            </a:r>
+            <a:endParaRPr lang="en-US" sz="1400" dirty="0"/>
           </a:p>
         </p:txBody>
       </p:sp>
@@ -2801,47 +2954,7 @@
         <p:spPr>
           <a:xfrm>
             <a:off x="0" y="0"/>
-            <a:ext cx="9144000" cy="822960"/>
-          </a:xfrm>
-          <a:prstGeom prst="rect">
-            <a:avLst/>
-          </a:prstGeom>
-          <a:solidFill>
-            <a:srgbClr val="FFFFFF"/>
-          </a:solidFill>
-          <a:ln/>
-        </p:spPr>
-      </p:sp>
-      <p:sp>
-        <p:nvSpPr>
-          <p:cNvPr id="3" name="Shape 1"/>
-          <p:cNvSpPr/>
-          <p:nvPr/>
-        </p:nvSpPr>
-        <p:spPr>
-          <a:xfrm>
-            <a:off x="0" y="804672"/>
-            <a:ext cx="9144000" cy="27432"/>
-          </a:xfrm>
-          <a:prstGeom prst="rect">
-            <a:avLst/>
-          </a:prstGeom>
-          <a:solidFill>
-            <a:srgbClr val="E5E2DC"/>
-          </a:solidFill>
-          <a:ln/>
-        </p:spPr>
-      </p:sp>
-      <p:sp>
-        <p:nvSpPr>
-          <p:cNvPr id="4" name="Shape 2"/>
-          <p:cNvSpPr/>
-          <p:nvPr/>
-        </p:nvSpPr>
-        <p:spPr>
-          <a:xfrm>
-            <a:off x="548640" y="201168"/>
-            <a:ext cx="54864" cy="420624"/>
+            <a:ext cx="73152" cy="5148072"/>
           </a:xfrm>
           <a:prstGeom prst="rect">
             <a:avLst/>
@@ -2854,14 +2967,14 @@
       </p:sp>
       <p:sp>
         <p:nvSpPr>
-          <p:cNvPr id="5" name="Text 3"/>
+          <p:cNvPr id="3" name="Text 1"/>
           <p:cNvSpPr/>
           <p:nvPr/>
         </p:nvSpPr>
         <p:spPr>
           <a:xfrm>
-            <a:off x="777240" y="137160"/>
-            <a:ext cx="7772400" cy="548640"/>
+            <a:off x="548640" y="274320"/>
+            <a:ext cx="9144000" cy="640080"/>
           </a:xfrm>
           <a:prstGeom prst="rect">
             <a:avLst/>
@@ -2870,14 +2983,14 @@
           <a:ln/>
         </p:spPr>
         <p:txBody>
-          <a:bodyPr wrap="square" lIns="0" tIns="0" rIns="0" bIns="0" rtlCol="0" anchor="ctr"/>
+          <a:bodyPr wrap="square" rtlCol="0" anchor="ctr"/>
           <a:lstStyle/>
           <a:p>
             <a:pPr indent="0" marL="0">
               <a:buNone/>
             </a:pPr>
             <a:r>
-              <a:rPr lang="en-US" sz="2000" b="1" dirty="0">
+              <a:rPr lang="en-US" sz="2400" b="1" dirty="0">
                 <a:solidFill>
                   <a:srgbClr val="1B2A4A"/>
                 </a:solidFill>
@@ -2885,22 +2998,42 @@
                 <a:ea typeface="Georgia" pitchFamily="34" charset="-122"/>
                 <a:cs typeface="Georgia" pitchFamily="34" charset="-120"/>
               </a:rPr>
-              <a:t>Measurement &amp; Graphs Review</a:t>
-            </a:r>
-            <a:endParaRPr lang="en-US" sz="2000" dirty="0"/>
-          </a:p>
-        </p:txBody>
-      </p:sp>
-      <p:sp>
-        <p:nvSpPr>
-          <p:cNvPr id="6" name="Text 4"/>
+              <a:t>Variables Recap</a:t>
+            </a:r>
+            <a:endParaRPr lang="en-US" sz="2400" dirty="0"/>
+          </a:p>
+        </p:txBody>
+      </p:sp>
+      <p:sp>
+        <p:nvSpPr>
+          <p:cNvPr id="4" name="Shape 2"/>
           <p:cNvSpPr/>
           <p:nvPr/>
         </p:nvSpPr>
         <p:spPr>
           <a:xfrm>
-            <a:off x="731520" y="1051560"/>
-            <a:ext cx="7680960" cy="3108960"/>
+            <a:off x="548640" y="960120"/>
+            <a:ext cx="2286000" cy="36576"/>
+          </a:xfrm>
+          <a:prstGeom prst="rect">
+            <a:avLst/>
+          </a:prstGeom>
+          <a:solidFill>
+            <a:srgbClr val="2A9D8F"/>
+          </a:solidFill>
+          <a:ln/>
+        </p:spPr>
+      </p:sp>
+      <p:sp>
+        <p:nvSpPr>
+          <p:cNvPr id="5" name="Text 3"/>
+          <p:cNvSpPr/>
+          <p:nvPr/>
+        </p:nvSpPr>
+        <p:spPr>
+          <a:xfrm>
+            <a:off x="548640" y="1188720"/>
+            <a:ext cx="10058400" cy="3474720"/>
           </a:xfrm>
           <a:prstGeom prst="rect">
             <a:avLst/>
@@ -2912,128 +3045,68 @@
           <a:bodyPr wrap="square" rtlCol="0" anchor="t"/>
           <a:lstStyle/>
           <a:p>
-            <a:pPr marL="342900" indent="-342900">
+            <a:pPr>
+              <a:lnSpc>
+                <a:spcPct val="150000"/>
+              </a:lnSpc>
               <a:spcAft>
-                <a:spcPts val="800"/>
+                <a:spcPts val="600"/>
               </a:spcAft>
-              <a:buSzPct val="100000"/>
-              <a:buChar char="•"/>
             </a:pPr>
             <a:r>
               <a:rPr lang="en-US" sz="1500" dirty="0">
                 <a:solidFill>
                   <a:srgbClr val="3D3A36"/>
                 </a:solidFill>
-                <a:latin typeface="Calibri" pitchFamily="34" charset="0"/>
-                <a:ea typeface="Calibri" pitchFamily="34" charset="-122"/>
-                <a:cs typeface="Calibri" pitchFamily="34" charset="-120"/>
+                <a:latin typeface="Arial" pitchFamily="34" charset="0"/>
+                <a:ea typeface="Arial" pitchFamily="34" charset="-122"/>
+                <a:cs typeface="Arial" pitchFamily="34" charset="-120"/>
               </a:rPr>
-              <a:t>SI units: length (m), mass (kg), time (s), temperature (°C), volume (cm³).</a:t>
+              <a:t>Independent: what YOU change. Dependent: what you MEASURE.</a:t>
             </a:r>
             <a:endParaRPr lang="en-US" sz="1500" dirty="0"/>
           </a:p>
           <a:p>
-            <a:pPr marL="342900" indent="-342900">
+            <a:pPr>
+              <a:lnSpc>
+                <a:spcPct val="150000"/>
+              </a:lnSpc>
               <a:spcAft>
-                <a:spcPts val="800"/>
+                <a:spcPts val="600"/>
               </a:spcAft>
-              <a:buSzPct val="100000"/>
-              <a:buChar char="•"/>
             </a:pPr>
             <a:r>
               <a:rPr lang="en-US" sz="1500" dirty="0">
                 <a:solidFill>
                   <a:srgbClr val="3D3A36"/>
                 </a:solidFill>
-                <a:latin typeface="Calibri" pitchFamily="34" charset="0"/>
-                <a:ea typeface="Calibri" pitchFamily="34" charset="-122"/>
-                <a:cs typeface="Calibri" pitchFamily="34" charset="-120"/>
+                <a:latin typeface="Arial" pitchFamily="34" charset="0"/>
+                <a:ea typeface="Arial" pitchFamily="34" charset="-122"/>
+                <a:cs typeface="Arial" pitchFamily="34" charset="-120"/>
               </a:rPr>
-              <a:t>Read a measuring cylinder at the MENISCUS at EYE LEVEL.</a:t>
+              <a:t>Controlled: everything you keep the SAME.</a:t>
             </a:r>
             <a:endParaRPr lang="en-US" sz="1500" dirty="0"/>
           </a:p>
           <a:p>
-            <a:pPr marL="342900" indent="-342900">
+            <a:pPr>
+              <a:lnSpc>
+                <a:spcPct val="150000"/>
+              </a:lnSpc>
               <a:spcAft>
-                <a:spcPts val="800"/>
+                <a:spcPts val="600"/>
               </a:spcAft>
-              <a:buSzPct val="100000"/>
-              <a:buChar char="•"/>
             </a:pPr>
             <a:r>
               <a:rPr lang="en-US" sz="1500" dirty="0">
                 <a:solidFill>
                   <a:srgbClr val="3D3A36"/>
                 </a:solidFill>
-                <a:latin typeface="Calibri" pitchFamily="34" charset="0"/>
-                <a:ea typeface="Calibri" pitchFamily="34" charset="-122"/>
-                <a:cs typeface="Calibri" pitchFamily="34" charset="-120"/>
+                <a:latin typeface="Arial" pitchFamily="34" charset="0"/>
+                <a:ea typeface="Arial" pitchFamily="34" charset="-122"/>
+                <a:cs typeface="Arial" pitchFamily="34" charset="-120"/>
               </a:rPr>
-              <a:t>Accuracy = close to true value. Precision = repeated results close together.</a:t>
-            </a:r>
-            <a:endParaRPr lang="en-US" sz="1500" dirty="0"/>
-          </a:p>
-          <a:p>
-            <a:pPr marL="342900" indent="-342900">
-              <a:spcAft>
-                <a:spcPts val="800"/>
-              </a:spcAft>
-              <a:buSzPct val="100000"/>
-              <a:buChar char="•"/>
-            </a:pPr>
-            <a:r>
-              <a:rPr lang="en-US" sz="1500" dirty="0">
-                <a:solidFill>
-                  <a:srgbClr val="3D3A36"/>
-                </a:solidFill>
-                <a:latin typeface="Calibri" pitchFamily="34" charset="0"/>
-                <a:ea typeface="Calibri" pitchFamily="34" charset="-122"/>
-                <a:cs typeface="Calibri" pitchFamily="34" charset="-120"/>
-              </a:rPr>
-              <a:t>Bar chart for CATEGORICAL data (bars don't touch).</a:t>
-            </a:r>
-            <a:endParaRPr lang="en-US" sz="1500" dirty="0"/>
-          </a:p>
-          <a:p>
-            <a:pPr marL="342900" indent="-342900">
-              <a:spcAft>
-                <a:spcPts val="800"/>
-              </a:spcAft>
-              <a:buSzPct val="100000"/>
-              <a:buChar char="•"/>
-            </a:pPr>
-            <a:r>
-              <a:rPr lang="en-US" sz="1500" dirty="0">
-                <a:solidFill>
-                  <a:srgbClr val="3D3A36"/>
-                </a:solidFill>
-                <a:latin typeface="Calibri" pitchFamily="34" charset="0"/>
-                <a:ea typeface="Calibri" pitchFamily="34" charset="-122"/>
-                <a:cs typeface="Calibri" pitchFamily="34" charset="-120"/>
-              </a:rPr>
-              <a:t>Line graph for CONTINUOUS data (points connected by lines).</a:t>
-            </a:r>
-            <a:endParaRPr lang="en-US" sz="1500" dirty="0"/>
-          </a:p>
-          <a:p>
-            <a:pPr marL="342900" indent="-342900">
-              <a:spcAft>
-                <a:spcPts val="800"/>
-              </a:spcAft>
-              <a:buSzPct val="100000"/>
-              <a:buChar char="•"/>
-            </a:pPr>
-            <a:r>
-              <a:rPr lang="en-US" sz="1500" dirty="0">
-                <a:solidFill>
-                  <a:srgbClr val="3D3A36"/>
-                </a:solidFill>
-                <a:latin typeface="Calibri" pitchFamily="34" charset="0"/>
-                <a:ea typeface="Calibri" pitchFamily="34" charset="-122"/>
-                <a:cs typeface="Calibri" pitchFamily="34" charset="-120"/>
-              </a:rPr>
-              <a:t>Always label axes with variable name AND unit.</a:t>
+              <a:t>Fair test: only ONE variable changes at a time.</a:t>
             </a:r>
             <a:endParaRPr lang="en-US" sz="1500" dirty="0"/>
           </a:p>
@@ -3050,6 +3123,159 @@
 <file path=ppt/slides/slide8.xml><?xml version="1.0" encoding="utf-8"?>
 <p:sld xmlns:a="http://schemas.openxmlformats.org/drawingml/2006/main" xmlns:r="http://schemas.openxmlformats.org/officeDocument/2006/relationships" xmlns:p="http://schemas.openxmlformats.org/presentationml/2006/main">
   <p:cSld name="Slide 8">
+    <p:bg>
+      <p:bgPr>
+        <a:solidFill>
+          <a:srgbClr val="111D35"/>
+        </a:solidFill>
+      </p:bgPr>
+    </p:bg>
+    <p:spTree>
+      <p:nvGrpSpPr>
+        <p:cNvPr id="1" name=""/>
+        <p:cNvGrpSpPr/>
+        <p:nvPr/>
+      </p:nvGrpSpPr>
+      <p:grpSpPr>
+        <a:xfrm>
+          <a:off x="0" y="0"/>
+          <a:ext cx="0" cy="0"/>
+          <a:chOff x="0" y="0"/>
+          <a:chExt cx="0" cy="0"/>
+        </a:xfrm>
+      </p:grpSpPr>
+      <p:sp>
+        <p:nvSpPr>
+          <p:cNvPr id="2" name="Text 0"/>
+          <p:cNvSpPr/>
+          <p:nvPr/>
+        </p:nvSpPr>
+        <p:spPr>
+          <a:xfrm>
+            <a:off x="731520" y="731520"/>
+            <a:ext cx="2286000" cy="1828800"/>
+          </a:xfrm>
+          <a:prstGeom prst="rect">
+            <a:avLst/>
+          </a:prstGeom>
+          <a:noFill/>
+          <a:ln/>
+        </p:spPr>
+        <p:txBody>
+          <a:bodyPr wrap="square" rtlCol="0" anchor="ctr"/>
+          <a:lstStyle/>
+          <a:p>
+            <a:pPr indent="0" marL="0">
+              <a:buNone/>
+            </a:pPr>
+            <a:r>
+              <a:rPr lang="en-US" sz="7200" b="1" dirty="0">
+                <a:solidFill>
+                  <a:srgbClr val="2A9D8F">
+                    <a:alpha val="80000"/>
+                  </a:srgbClr>
+                </a:solidFill>
+                <a:latin typeface="Georgia" pitchFamily="34" charset="0"/>
+                <a:ea typeface="Georgia" pitchFamily="34" charset="-122"/>
+                <a:cs typeface="Georgia" pitchFamily="34" charset="-120"/>
+              </a:rPr>
+              <a:t>04</a:t>
+            </a:r>
+            <a:endParaRPr lang="en-US" sz="7200" dirty="0"/>
+          </a:p>
+        </p:txBody>
+      </p:sp>
+      <p:sp>
+        <p:nvSpPr>
+          <p:cNvPr id="3" name="Text 1"/>
+          <p:cNvSpPr/>
+          <p:nvPr/>
+        </p:nvSpPr>
+        <p:spPr>
+          <a:xfrm>
+            <a:off x="731520" y="1828800"/>
+            <a:ext cx="9144000" cy="1097280"/>
+          </a:xfrm>
+          <a:prstGeom prst="rect">
+            <a:avLst/>
+          </a:prstGeom>
+          <a:noFill/>
+          <a:ln/>
+        </p:spPr>
+        <p:txBody>
+          <a:bodyPr wrap="square" rtlCol="0" anchor="ctr"/>
+          <a:lstStyle/>
+          <a:p>
+            <a:pPr indent="0" marL="0">
+              <a:buNone/>
+            </a:pPr>
+            <a:r>
+              <a:rPr lang="en-US" sz="3200" b="1" dirty="0">
+                <a:solidFill>
+                  <a:srgbClr val="FFFFFF"/>
+                </a:solidFill>
+                <a:latin typeface="Georgia" pitchFamily="34" charset="0"/>
+                <a:ea typeface="Georgia" pitchFamily="34" charset="-122"/>
+                <a:cs typeface="Georgia" pitchFamily="34" charset="-120"/>
+              </a:rPr>
+              <a:t>Measurement &amp; Graphs</a:t>
+            </a:r>
+            <a:endParaRPr lang="en-US" sz="3200" dirty="0"/>
+          </a:p>
+        </p:txBody>
+      </p:sp>
+      <p:sp>
+        <p:nvSpPr>
+          <p:cNvPr id="4" name="Text 2"/>
+          <p:cNvSpPr/>
+          <p:nvPr/>
+        </p:nvSpPr>
+        <p:spPr>
+          <a:xfrm>
+            <a:off x="731520" y="3017520"/>
+            <a:ext cx="7315200" cy="457200"/>
+          </a:xfrm>
+          <a:prstGeom prst="rect">
+            <a:avLst/>
+          </a:prstGeom>
+          <a:noFill/>
+          <a:ln/>
+        </p:spPr>
+        <p:txBody>
+          <a:bodyPr wrap="square" rtlCol="0" anchor="ctr"/>
+          <a:lstStyle/>
+          <a:p>
+            <a:pPr indent="0" marL="0">
+              <a:buNone/>
+            </a:pPr>
+            <a:r>
+              <a:rPr lang="en-US" sz="1400" dirty="0">
+                <a:solidFill>
+                  <a:srgbClr val="FFFFFF">
+                    <a:alpha val="60000"/>
+                  </a:srgbClr>
+                </a:solidFill>
+                <a:latin typeface="Arial" pitchFamily="34" charset="0"/>
+                <a:ea typeface="Arial" pitchFamily="34" charset="-122"/>
+                <a:cs typeface="Arial" pitchFamily="34" charset="-120"/>
+              </a:rPr>
+              <a:t>Units, accuracy, and data presentation</a:t>
+            </a:r>
+            <a:endParaRPr lang="en-US" sz="1400" dirty="0"/>
+          </a:p>
+        </p:txBody>
+      </p:sp>
+    </p:spTree>
+  </p:cSld>
+  <p:clrMapOvr>
+    <a:masterClrMapping/>
+  </p:clrMapOvr>
+</p:sld>
+</file>
+
+<file path=ppt/slides/slide9.xml><?xml version="1.0" encoding="utf-8"?>
+<p:sld xmlns:a="http://schemas.openxmlformats.org/drawingml/2006/main" xmlns:r="http://schemas.openxmlformats.org/officeDocument/2006/relationships" xmlns:p="http://schemas.openxmlformats.org/presentationml/2006/main">
+  <p:cSld name="Slide 9">
     <p:bg>
       <p:bgPr>
         <a:solidFill>
@@ -3080,47 +3306,7 @@
         <p:spPr>
           <a:xfrm>
             <a:off x="0" y="0"/>
-            <a:ext cx="9144000" cy="822960"/>
-          </a:xfrm>
-          <a:prstGeom prst="rect">
-            <a:avLst/>
-          </a:prstGeom>
-          <a:solidFill>
-            <a:srgbClr val="FFFFFF"/>
-          </a:solidFill>
-          <a:ln/>
-        </p:spPr>
-      </p:sp>
-      <p:sp>
-        <p:nvSpPr>
-          <p:cNvPr id="3" name="Shape 1"/>
-          <p:cNvSpPr/>
-          <p:nvPr/>
-        </p:nvSpPr>
-        <p:spPr>
-          <a:xfrm>
-            <a:off x="0" y="804672"/>
-            <a:ext cx="9144000" cy="27432"/>
-          </a:xfrm>
-          <a:prstGeom prst="rect">
-            <a:avLst/>
-          </a:prstGeom>
-          <a:solidFill>
-            <a:srgbClr val="E5E2DC"/>
-          </a:solidFill>
-          <a:ln/>
-        </p:spPr>
-      </p:sp>
-      <p:sp>
-        <p:nvSpPr>
-          <p:cNvPr id="4" name="Shape 2"/>
-          <p:cNvSpPr/>
-          <p:nvPr/>
-        </p:nvSpPr>
-        <p:spPr>
-          <a:xfrm>
-            <a:off x="548640" y="201168"/>
-            <a:ext cx="54864" cy="420624"/>
+            <a:ext cx="73152" cy="5148072"/>
           </a:xfrm>
           <a:prstGeom prst="rect">
             <a:avLst/>
@@ -3133,14 +3319,14 @@
       </p:sp>
       <p:sp>
         <p:nvSpPr>
-          <p:cNvPr id="5" name="Text 3"/>
+          <p:cNvPr id="3" name="Text 1"/>
           <p:cNvSpPr/>
           <p:nvPr/>
         </p:nvSpPr>
         <p:spPr>
           <a:xfrm>
-            <a:off x="777240" y="137160"/>
-            <a:ext cx="7772400" cy="548640"/>
+            <a:off x="548640" y="274320"/>
+            <a:ext cx="9144000" cy="640080"/>
           </a:xfrm>
           <a:prstGeom prst="rect">
             <a:avLst/>
@@ -3149,14 +3335,14 @@
           <a:ln/>
         </p:spPr>
         <p:txBody>
-          <a:bodyPr wrap="square" lIns="0" tIns="0" rIns="0" bIns="0" rtlCol="0" anchor="ctr"/>
+          <a:bodyPr wrap="square" rtlCol="0" anchor="ctr"/>
           <a:lstStyle/>
           <a:p>
             <a:pPr indent="0" marL="0">
               <a:buNone/>
             </a:pPr>
             <a:r>
-              <a:rPr lang="en-US" sz="2000" b="1" dirty="0">
+              <a:rPr lang="en-US" sz="2400" b="1" dirty="0">
                 <a:solidFill>
                   <a:srgbClr val="1B2A4A"/>
                 </a:solidFill>
@@ -3164,717 +3350,22 @@
                 <a:ea typeface="Georgia" pitchFamily="34" charset="-122"/>
                 <a:cs typeface="Georgia" pitchFamily="34" charset="-120"/>
               </a:rPr>
-              <a:t>Final Revision Checklist</a:t>
-            </a:r>
-            <a:endParaRPr lang="en-US" sz="2000" dirty="0"/>
-          </a:p>
-        </p:txBody>
-      </p:sp>
-      <p:sp>
-        <p:nvSpPr>
-          <p:cNvPr id="6" name="Shape 4"/>
+              <a:t>Measurement &amp; Graphs Recap</a:t>
+            </a:r>
+            <a:endParaRPr lang="en-US" sz="2400" dirty="0"/>
+          </a:p>
+        </p:txBody>
+      </p:sp>
+      <p:sp>
+        <p:nvSpPr>
+          <p:cNvPr id="4" name="Shape 2"/>
           <p:cNvSpPr/>
           <p:nvPr/>
         </p:nvSpPr>
         <p:spPr>
           <a:xfrm>
-            <a:off x="731520" y="1051560"/>
-            <a:ext cx="7680960" cy="438912"/>
-          </a:xfrm>
-          <a:prstGeom prst="rect">
-            <a:avLst/>
-          </a:prstGeom>
-          <a:solidFill>
-            <a:srgbClr val="FFFFFF"/>
-          </a:solidFill>
-          <a:ln/>
-        </p:spPr>
-      </p:sp>
-      <p:sp>
-        <p:nvSpPr>
-          <p:cNvPr id="7" name="Text 5"/>
-          <p:cNvSpPr/>
-          <p:nvPr/>
-        </p:nvSpPr>
-        <p:spPr>
-          <a:xfrm>
-            <a:off x="868680" y="1051560"/>
-            <a:ext cx="320040" cy="438912"/>
-          </a:xfrm>
-          <a:prstGeom prst="rect">
-            <a:avLst/>
-          </a:prstGeom>
-          <a:noFill/>
-          <a:ln/>
-        </p:spPr>
-        <p:txBody>
-          <a:bodyPr wrap="square" rtlCol="0" anchor="ctr"/>
-          <a:lstStyle/>
-          <a:p>
-            <a:pPr indent="0" marL="0">
-              <a:buNone/>
-            </a:pPr>
-            <a:r>
-              <a:rPr lang="en-US" sz="1400" dirty="0">
-                <a:solidFill>
-                  <a:srgbClr val="2A9D8F"/>
-                </a:solidFill>
-              </a:rPr>
-              <a:t>☐</a:t>
-            </a:r>
-            <a:endParaRPr lang="en-US" sz="1400" dirty="0"/>
-          </a:p>
-        </p:txBody>
-      </p:sp>
-      <p:sp>
-        <p:nvSpPr>
-          <p:cNvPr id="8" name="Text 6"/>
-          <p:cNvSpPr/>
-          <p:nvPr/>
-        </p:nvSpPr>
-        <p:spPr>
-          <a:xfrm>
-            <a:off x="1234440" y="1051560"/>
-            <a:ext cx="6949440" cy="438912"/>
-          </a:xfrm>
-          <a:prstGeom prst="rect">
-            <a:avLst/>
-          </a:prstGeom>
-          <a:noFill/>
-          <a:ln/>
-        </p:spPr>
-        <p:txBody>
-          <a:bodyPr wrap="square" rtlCol="0" anchor="ctr"/>
-          <a:lstStyle/>
-          <a:p>
-            <a:pPr indent="0" marL="0">
-              <a:buNone/>
-            </a:pPr>
-            <a:r>
-              <a:rPr lang="en-US" sz="1300" dirty="0">
-                <a:solidFill>
-                  <a:srgbClr val="3D3A36"/>
-                </a:solidFill>
-                <a:latin typeface="Calibri" pitchFamily="34" charset="0"/>
-                <a:ea typeface="Calibri" pitchFamily="34" charset="-122"/>
-                <a:cs typeface="Calibri" pitchFamily="34" charset="-120"/>
-              </a:rPr>
-              <a:t>Lab safety rules and hazard symbols</a:t>
-            </a:r>
-            <a:endParaRPr lang="en-US" sz="1300" dirty="0"/>
-          </a:p>
-        </p:txBody>
-      </p:sp>
-      <p:sp>
-        <p:nvSpPr>
-          <p:cNvPr id="9" name="Shape 7"/>
-          <p:cNvSpPr/>
-          <p:nvPr/>
-        </p:nvSpPr>
-        <p:spPr>
-          <a:xfrm>
-            <a:off x="731520" y="1554480"/>
-            <a:ext cx="7680960" cy="438912"/>
-          </a:xfrm>
-          <a:prstGeom prst="rect">
-            <a:avLst/>
-          </a:prstGeom>
-          <a:solidFill>
-            <a:srgbClr val="F8F6F3"/>
-          </a:solidFill>
-          <a:ln/>
-        </p:spPr>
-      </p:sp>
-      <p:sp>
-        <p:nvSpPr>
-          <p:cNvPr id="10" name="Text 8"/>
-          <p:cNvSpPr/>
-          <p:nvPr/>
-        </p:nvSpPr>
-        <p:spPr>
-          <a:xfrm>
-            <a:off x="868680" y="1554480"/>
-            <a:ext cx="320040" cy="438912"/>
-          </a:xfrm>
-          <a:prstGeom prst="rect">
-            <a:avLst/>
-          </a:prstGeom>
-          <a:noFill/>
-          <a:ln/>
-        </p:spPr>
-        <p:txBody>
-          <a:bodyPr wrap="square" rtlCol="0" anchor="ctr"/>
-          <a:lstStyle/>
-          <a:p>
-            <a:pPr indent="0" marL="0">
-              <a:buNone/>
-            </a:pPr>
-            <a:r>
-              <a:rPr lang="en-US" sz="1400" dirty="0">
-                <a:solidFill>
-                  <a:srgbClr val="2A9D8F"/>
-                </a:solidFill>
-              </a:rPr>
-              <a:t>☐</a:t>
-            </a:r>
-            <a:endParaRPr lang="en-US" sz="1400" dirty="0"/>
-          </a:p>
-        </p:txBody>
-      </p:sp>
-      <p:sp>
-        <p:nvSpPr>
-          <p:cNvPr id="11" name="Text 9"/>
-          <p:cNvSpPr/>
-          <p:nvPr/>
-        </p:nvSpPr>
-        <p:spPr>
-          <a:xfrm>
-            <a:off x="1234440" y="1554480"/>
-            <a:ext cx="6949440" cy="438912"/>
-          </a:xfrm>
-          <a:prstGeom prst="rect">
-            <a:avLst/>
-          </a:prstGeom>
-          <a:noFill/>
-          <a:ln/>
-        </p:spPr>
-        <p:txBody>
-          <a:bodyPr wrap="square" rtlCol="0" anchor="ctr"/>
-          <a:lstStyle/>
-          <a:p>
-            <a:pPr indent="0" marL="0">
-              <a:buNone/>
-            </a:pPr>
-            <a:r>
-              <a:rPr lang="en-US" sz="1300" dirty="0">
-                <a:solidFill>
-                  <a:srgbClr val="3D3A36"/>
-                </a:solidFill>
-                <a:latin typeface="Calibri" pitchFamily="34" charset="0"/>
-                <a:ea typeface="Calibri" pitchFamily="34" charset="-122"/>
-                <a:cs typeface="Calibri" pitchFamily="34" charset="-120"/>
-              </a:rPr>
-              <a:t>Steps of the scientific method</a:t>
-            </a:r>
-            <a:endParaRPr lang="en-US" sz="1300" dirty="0"/>
-          </a:p>
-        </p:txBody>
-      </p:sp>
-      <p:sp>
-        <p:nvSpPr>
-          <p:cNvPr id="12" name="Shape 10"/>
-          <p:cNvSpPr/>
-          <p:nvPr/>
-        </p:nvSpPr>
-        <p:spPr>
-          <a:xfrm>
-            <a:off x="731520" y="2057400"/>
-            <a:ext cx="7680960" cy="438912"/>
-          </a:xfrm>
-          <a:prstGeom prst="rect">
-            <a:avLst/>
-          </a:prstGeom>
-          <a:solidFill>
-            <a:srgbClr val="FFFFFF"/>
-          </a:solidFill>
-          <a:ln/>
-        </p:spPr>
-      </p:sp>
-      <p:sp>
-        <p:nvSpPr>
-          <p:cNvPr id="13" name="Text 11"/>
-          <p:cNvSpPr/>
-          <p:nvPr/>
-        </p:nvSpPr>
-        <p:spPr>
-          <a:xfrm>
-            <a:off x="868680" y="2057400"/>
-            <a:ext cx="320040" cy="438912"/>
-          </a:xfrm>
-          <a:prstGeom prst="rect">
-            <a:avLst/>
-          </a:prstGeom>
-          <a:noFill/>
-          <a:ln/>
-        </p:spPr>
-        <p:txBody>
-          <a:bodyPr wrap="square" rtlCol="0" anchor="ctr"/>
-          <a:lstStyle/>
-          <a:p>
-            <a:pPr indent="0" marL="0">
-              <a:buNone/>
-            </a:pPr>
-            <a:r>
-              <a:rPr lang="en-US" sz="1400" dirty="0">
-                <a:solidFill>
-                  <a:srgbClr val="2A9D8F"/>
-                </a:solidFill>
-              </a:rPr>
-              <a:t>☐</a:t>
-            </a:r>
-            <a:endParaRPr lang="en-US" sz="1400" dirty="0"/>
-          </a:p>
-        </p:txBody>
-      </p:sp>
-      <p:sp>
-        <p:nvSpPr>
-          <p:cNvPr id="14" name="Text 12"/>
-          <p:cNvSpPr/>
-          <p:nvPr/>
-        </p:nvSpPr>
-        <p:spPr>
-          <a:xfrm>
-            <a:off x="1234440" y="2057400"/>
-            <a:ext cx="6949440" cy="438912"/>
-          </a:xfrm>
-          <a:prstGeom prst="rect">
-            <a:avLst/>
-          </a:prstGeom>
-          <a:noFill/>
-          <a:ln/>
-        </p:spPr>
-        <p:txBody>
-          <a:bodyPr wrap="square" rtlCol="0" anchor="ctr"/>
-          <a:lstStyle/>
-          <a:p>
-            <a:pPr indent="0" marL="0">
-              <a:buNone/>
-            </a:pPr>
-            <a:r>
-              <a:rPr lang="en-US" sz="1300" dirty="0">
-                <a:solidFill>
-                  <a:srgbClr val="3D3A36"/>
-                </a:solidFill>
-                <a:latin typeface="Calibri" pitchFamily="34" charset="0"/>
-                <a:ea typeface="Calibri" pitchFamily="34" charset="-122"/>
-                <a:cs typeface="Calibri" pitchFamily="34" charset="-120"/>
-              </a:rPr>
-              <a:t>Three types of variables (IV, DV, CV)</a:t>
-            </a:r>
-            <a:endParaRPr lang="en-US" sz="1300" dirty="0"/>
-          </a:p>
-        </p:txBody>
-      </p:sp>
-      <p:sp>
-        <p:nvSpPr>
-          <p:cNvPr id="15" name="Shape 13"/>
-          <p:cNvSpPr/>
-          <p:nvPr/>
-        </p:nvSpPr>
-        <p:spPr>
-          <a:xfrm>
-            <a:off x="731520" y="2560320"/>
-            <a:ext cx="7680960" cy="438912"/>
-          </a:xfrm>
-          <a:prstGeom prst="rect">
-            <a:avLst/>
-          </a:prstGeom>
-          <a:solidFill>
-            <a:srgbClr val="F8F6F3"/>
-          </a:solidFill>
-          <a:ln/>
-        </p:spPr>
-      </p:sp>
-      <p:sp>
-        <p:nvSpPr>
-          <p:cNvPr id="16" name="Text 14"/>
-          <p:cNvSpPr/>
-          <p:nvPr/>
-        </p:nvSpPr>
-        <p:spPr>
-          <a:xfrm>
-            <a:off x="868680" y="2560320"/>
-            <a:ext cx="320040" cy="438912"/>
-          </a:xfrm>
-          <a:prstGeom prst="rect">
-            <a:avLst/>
-          </a:prstGeom>
-          <a:noFill/>
-          <a:ln/>
-        </p:spPr>
-        <p:txBody>
-          <a:bodyPr wrap="square" rtlCol="0" anchor="ctr"/>
-          <a:lstStyle/>
-          <a:p>
-            <a:pPr indent="0" marL="0">
-              <a:buNone/>
-            </a:pPr>
-            <a:r>
-              <a:rPr lang="en-US" sz="1400" dirty="0">
-                <a:solidFill>
-                  <a:srgbClr val="2A9D8F"/>
-                </a:solidFill>
-              </a:rPr>
-              <a:t>☐</a:t>
-            </a:r>
-            <a:endParaRPr lang="en-US" sz="1400" dirty="0"/>
-          </a:p>
-        </p:txBody>
-      </p:sp>
-      <p:sp>
-        <p:nvSpPr>
-          <p:cNvPr id="17" name="Text 15"/>
-          <p:cNvSpPr/>
-          <p:nvPr/>
-        </p:nvSpPr>
-        <p:spPr>
-          <a:xfrm>
-            <a:off x="1234440" y="2560320"/>
-            <a:ext cx="6949440" cy="438912"/>
-          </a:xfrm>
-          <a:prstGeom prst="rect">
-            <a:avLst/>
-          </a:prstGeom>
-          <a:noFill/>
-          <a:ln/>
-        </p:spPr>
-        <p:txBody>
-          <a:bodyPr wrap="square" rtlCol="0" anchor="ctr"/>
-          <a:lstStyle/>
-          <a:p>
-            <a:pPr indent="0" marL="0">
-              <a:buNone/>
-            </a:pPr>
-            <a:r>
-              <a:rPr lang="en-US" sz="1300" dirty="0">
-                <a:solidFill>
-                  <a:srgbClr val="3D3A36"/>
-                </a:solidFill>
-                <a:latin typeface="Calibri" pitchFamily="34" charset="0"/>
-                <a:ea typeface="Calibri" pitchFamily="34" charset="-122"/>
-                <a:cs typeface="Calibri" pitchFamily="34" charset="-120"/>
-              </a:rPr>
-              <a:t>Writing a testable hypothesis</a:t>
-            </a:r>
-            <a:endParaRPr lang="en-US" sz="1300" dirty="0"/>
-          </a:p>
-        </p:txBody>
-      </p:sp>
-      <p:sp>
-        <p:nvSpPr>
-          <p:cNvPr id="18" name="Shape 16"/>
-          <p:cNvSpPr/>
-          <p:nvPr/>
-        </p:nvSpPr>
-        <p:spPr>
-          <a:xfrm>
-            <a:off x="731520" y="3063240"/>
-            <a:ext cx="7680960" cy="438912"/>
-          </a:xfrm>
-          <a:prstGeom prst="rect">
-            <a:avLst/>
-          </a:prstGeom>
-          <a:solidFill>
-            <a:srgbClr val="FFFFFF"/>
-          </a:solidFill>
-          <a:ln/>
-        </p:spPr>
-      </p:sp>
-      <p:sp>
-        <p:nvSpPr>
-          <p:cNvPr id="19" name="Text 17"/>
-          <p:cNvSpPr/>
-          <p:nvPr/>
-        </p:nvSpPr>
-        <p:spPr>
-          <a:xfrm>
-            <a:off x="868680" y="3063240"/>
-            <a:ext cx="320040" cy="438912"/>
-          </a:xfrm>
-          <a:prstGeom prst="rect">
-            <a:avLst/>
-          </a:prstGeom>
-          <a:noFill/>
-          <a:ln/>
-        </p:spPr>
-        <p:txBody>
-          <a:bodyPr wrap="square" rtlCol="0" anchor="ctr"/>
-          <a:lstStyle/>
-          <a:p>
-            <a:pPr indent="0" marL="0">
-              <a:buNone/>
-            </a:pPr>
-            <a:r>
-              <a:rPr lang="en-US" sz="1400" dirty="0">
-                <a:solidFill>
-                  <a:srgbClr val="2A9D8F"/>
-                </a:solidFill>
-              </a:rPr>
-              <a:t>☐</a:t>
-            </a:r>
-            <a:endParaRPr lang="en-US" sz="1400" dirty="0"/>
-          </a:p>
-        </p:txBody>
-      </p:sp>
-      <p:sp>
-        <p:nvSpPr>
-          <p:cNvPr id="20" name="Text 18"/>
-          <p:cNvSpPr/>
-          <p:nvPr/>
-        </p:nvSpPr>
-        <p:spPr>
-          <a:xfrm>
-            <a:off x="1234440" y="3063240"/>
-            <a:ext cx="6949440" cy="438912"/>
-          </a:xfrm>
-          <a:prstGeom prst="rect">
-            <a:avLst/>
-          </a:prstGeom>
-          <a:noFill/>
-          <a:ln/>
-        </p:spPr>
-        <p:txBody>
-          <a:bodyPr wrap="square" rtlCol="0" anchor="ctr"/>
-          <a:lstStyle/>
-          <a:p>
-            <a:pPr indent="0" marL="0">
-              <a:buNone/>
-            </a:pPr>
-            <a:r>
-              <a:rPr lang="en-US" sz="1300" dirty="0">
-                <a:solidFill>
-                  <a:srgbClr val="3D3A36"/>
-                </a:solidFill>
-                <a:latin typeface="Calibri" pitchFamily="34" charset="0"/>
-                <a:ea typeface="Calibri" pitchFamily="34" charset="-122"/>
-                <a:cs typeface="Calibri" pitchFamily="34" charset="-120"/>
-              </a:rPr>
-              <a:t>SI units and measurement techniques</a:t>
-            </a:r>
-            <a:endParaRPr lang="en-US" sz="1300" dirty="0"/>
-          </a:p>
-        </p:txBody>
-      </p:sp>
-      <p:sp>
-        <p:nvSpPr>
-          <p:cNvPr id="21" name="Shape 19"/>
-          <p:cNvSpPr/>
-          <p:nvPr/>
-        </p:nvSpPr>
-        <p:spPr>
-          <a:xfrm>
-            <a:off x="731520" y="3566160"/>
-            <a:ext cx="7680960" cy="438912"/>
-          </a:xfrm>
-          <a:prstGeom prst="rect">
-            <a:avLst/>
-          </a:prstGeom>
-          <a:solidFill>
-            <a:srgbClr val="F8F6F3"/>
-          </a:solidFill>
-          <a:ln/>
-        </p:spPr>
-      </p:sp>
-      <p:sp>
-        <p:nvSpPr>
-          <p:cNvPr id="22" name="Text 20"/>
-          <p:cNvSpPr/>
-          <p:nvPr/>
-        </p:nvSpPr>
-        <p:spPr>
-          <a:xfrm>
-            <a:off x="868680" y="3566160"/>
-            <a:ext cx="320040" cy="438912"/>
-          </a:xfrm>
-          <a:prstGeom prst="rect">
-            <a:avLst/>
-          </a:prstGeom>
-          <a:noFill/>
-          <a:ln/>
-        </p:spPr>
-        <p:txBody>
-          <a:bodyPr wrap="square" rtlCol="0" anchor="ctr"/>
-          <a:lstStyle/>
-          <a:p>
-            <a:pPr indent="0" marL="0">
-              <a:buNone/>
-            </a:pPr>
-            <a:r>
-              <a:rPr lang="en-US" sz="1400" dirty="0">
-                <a:solidFill>
-                  <a:srgbClr val="2A9D8F"/>
-                </a:solidFill>
-              </a:rPr>
-              <a:t>☐</a:t>
-            </a:r>
-            <a:endParaRPr lang="en-US" sz="1400" dirty="0"/>
-          </a:p>
-        </p:txBody>
-      </p:sp>
-      <p:sp>
-        <p:nvSpPr>
-          <p:cNvPr id="23" name="Text 21"/>
-          <p:cNvSpPr/>
-          <p:nvPr/>
-        </p:nvSpPr>
-        <p:spPr>
-          <a:xfrm>
-            <a:off x="1234440" y="3566160"/>
-            <a:ext cx="6949440" cy="438912"/>
-          </a:xfrm>
-          <a:prstGeom prst="rect">
-            <a:avLst/>
-          </a:prstGeom>
-          <a:noFill/>
-          <a:ln/>
-        </p:spPr>
-        <p:txBody>
-          <a:bodyPr wrap="square" rtlCol="0" anchor="ctr"/>
-          <a:lstStyle/>
-          <a:p>
-            <a:pPr indent="0" marL="0">
-              <a:buNone/>
-            </a:pPr>
-            <a:r>
-              <a:rPr lang="en-US" sz="1300" dirty="0">
-                <a:solidFill>
-                  <a:srgbClr val="3D3A36"/>
-                </a:solidFill>
-                <a:latin typeface="Calibri" pitchFamily="34" charset="0"/>
-                <a:ea typeface="Calibri" pitchFamily="34" charset="-122"/>
-                <a:cs typeface="Calibri" pitchFamily="34" charset="-120"/>
-              </a:rPr>
-              <a:t>Choosing and drawing the correct graph type</a:t>
-            </a:r>
-            <a:endParaRPr lang="en-US" sz="1300" dirty="0"/>
-          </a:p>
-        </p:txBody>
-      </p:sp>
-      <p:sp>
-        <p:nvSpPr>
-          <p:cNvPr id="24" name="Shape 22"/>
-          <p:cNvSpPr/>
-          <p:nvPr/>
-        </p:nvSpPr>
-        <p:spPr>
-          <a:xfrm>
-            <a:off x="731520" y="4251960"/>
-            <a:ext cx="7680960" cy="594360"/>
-          </a:xfrm>
-          <a:prstGeom prst="rect">
-            <a:avLst/>
-          </a:prstGeom>
-          <a:solidFill>
-            <a:srgbClr val="E8F5F3"/>
-          </a:solidFill>
-          <a:ln/>
-          <a:effectLst>
-            <a:outerShdw sx="100000" sy="100000" kx="0" ky="0" algn="bl" rotWithShape="0" blurRad="50800" dist="25400" dir="8100000">
-              <a:srgbClr val="000000">
-                <a:alpha val="10000"/>
-              </a:srgbClr>
-            </a:outerShdw>
-          </a:effectLst>
-        </p:spPr>
-      </p:sp>
-      <p:sp>
-        <p:nvSpPr>
-          <p:cNvPr id="25" name="Text 23"/>
-          <p:cNvSpPr/>
-          <p:nvPr/>
-        </p:nvSpPr>
-        <p:spPr>
-          <a:xfrm>
-            <a:off x="914400" y="4251960"/>
-            <a:ext cx="7315200" cy="594360"/>
-          </a:xfrm>
-          <a:prstGeom prst="rect">
-            <a:avLst/>
-          </a:prstGeom>
-          <a:noFill/>
-          <a:ln/>
-        </p:spPr>
-        <p:txBody>
-          <a:bodyPr wrap="square" rtlCol="0" anchor="ctr"/>
-          <a:lstStyle/>
-          <a:p>
-            <a:pPr indent="0" marL="0">
-              <a:buNone/>
-            </a:pPr>
-            <a:r>
-              <a:rPr lang="en-US" sz="1200" b="1" dirty="0">
-                <a:solidFill>
-                  <a:srgbClr val="2A9D8F"/>
-                </a:solidFill>
-                <a:latin typeface="Calibri" pitchFamily="34" charset="0"/>
-                <a:ea typeface="Calibri" pitchFamily="34" charset="-122"/>
-                <a:cs typeface="Calibri" pitchFamily="34" charset="-120"/>
-              </a:rPr>
-              <a:t>Key Idea: </a:t>
-            </a:r>
-            <a:pPr indent="0" marL="0">
-              <a:buNone/>
-            </a:pPr>
-            <a:r>
-              <a:rPr lang="en-US" sz="1200" i="1" dirty="0">
-                <a:solidFill>
-                  <a:srgbClr val="3D3A36"/>
-                </a:solidFill>
-                <a:latin typeface="Calibri" pitchFamily="34" charset="0"/>
-                <a:ea typeface="Calibri" pitchFamily="34" charset="-122"/>
-                <a:cs typeface="Calibri" pitchFamily="34" charset="-120"/>
-              </a:rPr>
-              <a:t>Review these topics, then test yourself with the Self-Quiz on mrzocchi.com.</a:t>
-            </a:r>
-            <a:endParaRPr lang="en-US" sz="1200" dirty="0"/>
-          </a:p>
-        </p:txBody>
-      </p:sp>
-    </p:spTree>
-  </p:cSld>
-  <p:clrMapOvr>
-    <a:masterClrMapping/>
-  </p:clrMapOvr>
-</p:sld>
-</file>
-
-<file path=ppt/slides/slide9.xml><?xml version="1.0" encoding="utf-8"?>
-<p:sld xmlns:a="http://schemas.openxmlformats.org/drawingml/2006/main" xmlns:r="http://schemas.openxmlformats.org/officeDocument/2006/relationships" xmlns:p="http://schemas.openxmlformats.org/presentationml/2006/main">
-  <p:cSld name="Slide 9">
-    <p:spTree>
-      <p:nvGrpSpPr>
-        <p:cNvPr id="1" name=""/>
-        <p:cNvGrpSpPr/>
-        <p:nvPr/>
-      </p:nvGrpSpPr>
-      <p:grpSpPr>
-        <a:xfrm>
-          <a:off x="0" y="0"/>
-          <a:ext cx="0" cy="0"/>
-          <a:chOff x="0" y="0"/>
-          <a:chExt cx="0" cy="0"/>
-        </a:xfrm>
-      </p:grpSpPr>
-      <p:sp>
-        <p:nvSpPr>
-          <p:cNvPr id="2" name="Shape 0"/>
-          <p:cNvSpPr/>
-          <p:nvPr/>
-        </p:nvSpPr>
-        <p:spPr>
-          <a:xfrm>
-            <a:off x="0" y="0"/>
-            <a:ext cx="9144000" cy="5143500"/>
-          </a:xfrm>
-          <a:prstGeom prst="rect">
-            <a:avLst/>
-          </a:prstGeom>
-          <a:solidFill>
-            <a:srgbClr val="1B2A4A"/>
-          </a:solidFill>
-          <a:ln/>
-        </p:spPr>
-      </p:sp>
-      <p:sp>
-        <p:nvSpPr>
-          <p:cNvPr id="3" name="Shape 1"/>
-          <p:cNvSpPr/>
-          <p:nvPr/>
-        </p:nvSpPr>
-        <p:spPr>
-          <a:xfrm>
-            <a:off x="0" y="4777740"/>
-            <a:ext cx="9144000" cy="365760"/>
+            <a:off x="548640" y="960120"/>
+            <a:ext cx="2286000" cy="36576"/>
           </a:xfrm>
           <a:prstGeom prst="rect">
             <a:avLst/>
@@ -3887,36 +3378,14 @@
       </p:sp>
       <p:sp>
         <p:nvSpPr>
-          <p:cNvPr id="4" name="Shape 2"/>
-          <p:cNvSpPr/>
-          <p:nvPr/>
-        </p:nvSpPr>
-        <p:spPr>
-          <a:xfrm>
-            <a:off x="-914400" y="-914400"/>
-            <a:ext cx="3657600" cy="3657600"/>
-          </a:xfrm>
-          <a:prstGeom prst="ellipse">
-            <a:avLst/>
-          </a:prstGeom>
-          <a:solidFill>
-            <a:srgbClr val="2A9D8F">
-              <a:alpha val="10000"/>
-            </a:srgbClr>
-          </a:solidFill>
-          <a:ln/>
-        </p:spPr>
-      </p:sp>
-      <p:sp>
-        <p:nvSpPr>
           <p:cNvPr id="5" name="Text 3"/>
           <p:cNvSpPr/>
           <p:nvPr/>
         </p:nvSpPr>
         <p:spPr>
           <a:xfrm>
-            <a:off x="731520" y="1463040"/>
-            <a:ext cx="7680960" cy="822960"/>
+            <a:off x="548640" y="1188720"/>
+            <a:ext cx="10058400" cy="3474720"/>
           </a:xfrm>
           <a:prstGeom prst="rect">
             <a:avLst/>
@@ -3925,102 +3394,95 @@
           <a:ln/>
         </p:spPr>
         <p:txBody>
-          <a:bodyPr wrap="square" rtlCol="0" anchor="ctr"/>
-          <a:lstStyle/>
-          <a:p>
-            <a:pPr algn="ctr" indent="0" marL="0">
-              <a:buNone/>
+          <a:bodyPr wrap="square" rtlCol="0" anchor="t"/>
+          <a:lstStyle/>
+          <a:p>
+            <a:pPr>
+              <a:lnSpc>
+                <a:spcPct val="150000"/>
+              </a:lnSpc>
+              <a:spcAft>
+                <a:spcPts val="600"/>
+              </a:spcAft>
             </a:pPr>
             <a:r>
-              <a:rPr lang="en-US" sz="3400" b="1" dirty="0">
+              <a:rPr lang="en-US" sz="1500" dirty="0">
                 <a:solidFill>
-                  <a:srgbClr val="FFFFFF"/>
+                  <a:srgbClr val="3D3A36"/>
                 </a:solidFill>
-                <a:latin typeface="Georgia" pitchFamily="34" charset="0"/>
-                <a:ea typeface="Georgia" pitchFamily="34" charset="-122"/>
-                <a:cs typeface="Georgia" pitchFamily="34" charset="-120"/>
+                <a:latin typeface="Arial" pitchFamily="34" charset="0"/>
+                <a:ea typeface="Arial" pitchFamily="34" charset="-122"/>
+                <a:cs typeface="Arial" pitchFamily="34" charset="-120"/>
               </a:rPr>
-              <a:t>Review &amp; Practise</a:t>
-            </a:r>
-            <a:endParaRPr lang="en-US" sz="3400" dirty="0"/>
-          </a:p>
-        </p:txBody>
-      </p:sp>
-      <p:sp>
-        <p:nvSpPr>
-          <p:cNvPr id="6" name="Text 4"/>
-          <p:cNvSpPr/>
-          <p:nvPr/>
-        </p:nvSpPr>
-        <p:spPr>
-          <a:xfrm>
-            <a:off x="731520" y="2468880"/>
-            <a:ext cx="7680960" cy="457200"/>
-          </a:xfrm>
-          <a:prstGeom prst="rect">
-            <a:avLst/>
-          </a:prstGeom>
-          <a:noFill/>
-          <a:ln/>
-        </p:spPr>
-        <p:txBody>
-          <a:bodyPr wrap="square" rtlCol="0" anchor="ctr"/>
-          <a:lstStyle/>
-          <a:p>
-            <a:pPr algn="ctr" indent="0" marL="0">
-              <a:buNone/>
+              <a:t>SI units: m, g, mL, °C, s, N.</a:t>
+            </a:r>
+            <a:endParaRPr lang="en-US" sz="1500" dirty="0"/>
+          </a:p>
+          <a:p>
+            <a:pPr>
+              <a:lnSpc>
+                <a:spcPct val="150000"/>
+              </a:lnSpc>
+              <a:spcAft>
+                <a:spcPts val="600"/>
+              </a:spcAft>
             </a:pPr>
             <a:r>
-              <a:rPr lang="en-US" sz="1800" dirty="0">
+              <a:rPr lang="en-US" sz="1500" dirty="0">
                 <a:solidFill>
-                  <a:srgbClr val="2A9D8F"/>
+                  <a:srgbClr val="3D3A36"/>
                 </a:solidFill>
-                <a:latin typeface="Calibri" pitchFamily="34" charset="0"/>
-                <a:ea typeface="Calibri" pitchFamily="34" charset="-122"/>
-                <a:cs typeface="Calibri" pitchFamily="34" charset="-120"/>
+                <a:latin typeface="Arial" pitchFamily="34" charset="0"/>
+                <a:ea typeface="Arial" pitchFamily="34" charset="-122"/>
+                <a:cs typeface="Arial" pitchFamily="34" charset="-120"/>
               </a:rPr>
-              <a:t>mrzocchi.com</a:t>
-            </a:r>
-            <a:endParaRPr lang="en-US" sz="1800" dirty="0"/>
-          </a:p>
-        </p:txBody>
-      </p:sp>
-      <p:sp>
-        <p:nvSpPr>
-          <p:cNvPr id="7" name="Text 5"/>
-          <p:cNvSpPr/>
-          <p:nvPr/>
-        </p:nvSpPr>
-        <p:spPr>
-          <a:xfrm>
-            <a:off x="731520" y="3108960"/>
-            <a:ext cx="7680960" cy="457200"/>
-          </a:xfrm>
-          <a:prstGeom prst="rect">
-            <a:avLst/>
-          </a:prstGeom>
-          <a:noFill/>
-          <a:ln/>
-        </p:spPr>
-        <p:txBody>
-          <a:bodyPr wrap="square" rtlCol="0" anchor="ctr"/>
-          <a:lstStyle/>
-          <a:p>
-            <a:pPr algn="ctr" indent="0" marL="0">
-              <a:buNone/>
+              <a:t>Read meniscus at eye level. Take 3 readings, find the mean.</a:t>
+            </a:r>
+            <a:endParaRPr lang="en-US" sz="1500" dirty="0"/>
+          </a:p>
+          <a:p>
+            <a:pPr>
+              <a:lnSpc>
+                <a:spcPct val="150000"/>
+              </a:lnSpc>
+              <a:spcAft>
+                <a:spcPts val="600"/>
+              </a:spcAft>
             </a:pPr>
             <a:r>
-              <a:rPr lang="en-US" sz="1300" dirty="0">
+              <a:rPr lang="en-US" sz="1500" dirty="0">
                 <a:solidFill>
-                  <a:srgbClr val="9B9690"/>
+                  <a:srgbClr val="3D3A36"/>
                 </a:solidFill>
-                <a:latin typeface="Calibri" pitchFamily="34" charset="0"/>
-                <a:ea typeface="Calibri" pitchFamily="34" charset="-122"/>
-                <a:cs typeface="Calibri" pitchFamily="34" charset="-120"/>
+                <a:latin typeface="Arial" pitchFamily="34" charset="0"/>
+                <a:ea typeface="Arial" pitchFamily="34" charset="-122"/>
+                <a:cs typeface="Arial" pitchFamily="34" charset="-120"/>
               </a:rPr>
-              <a:t>Use the Self-Quiz, Review Games, and Practice Builder to test yourself.</a:t>
-            </a:r>
-            <a:endParaRPr lang="en-US" sz="1300" dirty="0"/>
+              <a:t>Bar chart = categories. Line graph = continuous data.</a:t>
+            </a:r>
+            <a:endParaRPr lang="en-US" sz="1500" dirty="0"/>
+          </a:p>
+          <a:p>
+            <a:pPr>
+              <a:lnSpc>
+                <a:spcPct val="150000"/>
+              </a:lnSpc>
+              <a:spcAft>
+                <a:spcPts val="600"/>
+              </a:spcAft>
+            </a:pPr>
+            <a:r>
+              <a:rPr lang="en-US" sz="1500" dirty="0">
+                <a:solidFill>
+                  <a:srgbClr val="3D3A36"/>
+                </a:solidFill>
+                <a:latin typeface="Arial" pitchFamily="34" charset="0"/>
+                <a:ea typeface="Arial" pitchFamily="34" charset="-122"/>
+                <a:cs typeface="Arial" pitchFamily="34" charset="-120"/>
+              </a:rPr>
+              <a:t>SALT rules: Scale, Axes, Labels, Title.</a:t>
+            </a:r>
+            <a:endParaRPr lang="en-US" sz="1500" dirty="0"/>
           </a:p>
         </p:txBody>
       </p:sp>
